--- a/documents/Danyal Shah Interim Presentation.pptx
+++ b/documents/Danyal Shah Interim Presentation.pptx
@@ -3703,7 +3703,7 @@
           <a:p>
             <a:r>
               <a:rPr lang="en-GB" dirty="0"/>
-              <a:t>What do I want?</a:t>
+              <a:t>How Does It Work?</a:t>
             </a:r>
           </a:p>
         </p:txBody>
@@ -3729,7 +3729,40 @@
           <a:bodyPr/>
           <a:lstStyle/>
           <a:p>
-            <a:endParaRPr lang="en-GB"/>
+            <a:r>
+              <a:rPr lang="en-GB" dirty="0"/>
+              <a:t>Student logs into their profile</a:t>
+            </a:r>
+          </a:p>
+          <a:p>
+            <a:r>
+              <a:rPr lang="en-GB" dirty="0"/>
+              <a:t>They can search for a subject to study</a:t>
+            </a:r>
+          </a:p>
+          <a:p>
+            <a:r>
+              <a:rPr lang="en-GB" dirty="0"/>
+              <a:t>Student chooses a topic to study, asked a series of questions</a:t>
+            </a:r>
+          </a:p>
+          <a:p>
+            <a:r>
+              <a:rPr lang="en-GB" dirty="0"/>
+              <a:t>Every incorrect attempt reduces available marks</a:t>
+            </a:r>
+          </a:p>
+          <a:p>
+            <a:r>
+              <a:rPr lang="en-GB" dirty="0"/>
+              <a:t>Marks earned are applied to student’s profile</a:t>
+            </a:r>
+          </a:p>
+          <a:p>
+            <a:r>
+              <a:rPr lang="en-GB" dirty="0"/>
+              <a:t>All marks will appear on a leaderboard.</a:t>
+            </a:r>
           </a:p>
         </p:txBody>
       </p:sp>
@@ -3786,7 +3819,7 @@
           <a:p>
             <a:r>
               <a:rPr lang="en-GB" dirty="0"/>
-              <a:t>What have I got?</a:t>
+              <a:t>Features</a:t>
             </a:r>
           </a:p>
         </p:txBody>
@@ -3809,10 +3842,90 @@
         </p:nvSpPr>
         <p:spPr/>
         <p:txBody>
-          <a:bodyPr/>
-          <a:lstStyle/>
-          <a:p>
-            <a:endParaRPr lang="en-GB"/>
+          <a:bodyPr>
+            <a:normAutofit fontScale="92500" lnSpcReduction="10000"/>
+          </a:bodyPr>
+          <a:lstStyle/>
+          <a:p>
+            <a:r>
+              <a:rPr lang="en-GB" dirty="0"/>
+              <a:t>Implemented</a:t>
+            </a:r>
+          </a:p>
+          <a:p>
+            <a:pPr lvl="1"/>
+            <a:r>
+              <a:rPr lang="en-GB" dirty="0"/>
+              <a:t>Account Creation &amp; Logging In</a:t>
+            </a:r>
+          </a:p>
+          <a:p>
+            <a:pPr lvl="1"/>
+            <a:r>
+              <a:rPr lang="en-GB" dirty="0"/>
+              <a:t>Student Dashboard Prototype</a:t>
+            </a:r>
+          </a:p>
+          <a:p>
+            <a:pPr lvl="1"/>
+            <a:r>
+              <a:rPr lang="en-GB" dirty="0"/>
+              <a:t>Subjects Selection with Topics</a:t>
+            </a:r>
+          </a:p>
+          <a:p>
+            <a:r>
+              <a:rPr lang="en-GB" dirty="0"/>
+              <a:t>Pending</a:t>
+            </a:r>
+          </a:p>
+          <a:p>
+            <a:pPr lvl="1"/>
+            <a:r>
+              <a:rPr lang="en-GB" dirty="0"/>
+              <a:t>Questions For Each Topic</a:t>
+            </a:r>
+          </a:p>
+          <a:p>
+            <a:pPr lvl="1"/>
+            <a:r>
+              <a:rPr lang="en-GB" dirty="0"/>
+              <a:t>Points System</a:t>
+            </a:r>
+          </a:p>
+          <a:p>
+            <a:pPr lvl="1"/>
+            <a:r>
+              <a:rPr lang="en-GB" dirty="0"/>
+              <a:t>Leaderboard</a:t>
+            </a:r>
+          </a:p>
+          <a:p>
+            <a:pPr lvl="1"/>
+            <a:r>
+              <a:rPr lang="en-GB" dirty="0"/>
+              <a:t>Admin Profiles</a:t>
+            </a:r>
+          </a:p>
+          <a:p>
+            <a:r>
+              <a:rPr lang="en-GB" dirty="0"/>
+              <a:t>Potentially</a:t>
+            </a:r>
+          </a:p>
+          <a:p>
+            <a:pPr lvl="1"/>
+            <a:r>
+              <a:rPr lang="en-GB" dirty="0"/>
+              <a:t>Tutor Profiles &amp; Classes</a:t>
+            </a:r>
+          </a:p>
+          <a:p>
+            <a:pPr lvl="1"/>
+            <a:r>
+              <a:rPr lang="en-GB" dirty="0"/>
+              <a:t>Contests System</a:t>
+            </a:r>
           </a:p>
         </p:txBody>
       </p:sp>
@@ -3869,7 +3982,7 @@
           <a:p>
             <a:r>
               <a:rPr lang="en-GB" dirty="0"/>
-              <a:t>What will I do?</a:t>
+              <a:t>Demonstration</a:t>
             </a:r>
           </a:p>
         </p:txBody>
@@ -3895,7 +4008,7 @@
           <a:bodyPr/>
           <a:lstStyle/>
           <a:p>
-            <a:endParaRPr lang="en-GB"/>
+            <a:endParaRPr lang="en-GB" dirty="0"/>
           </a:p>
         </p:txBody>
       </p:sp>

--- a/documents/Danyal Shah Interim Presentation.pptx
+++ b/documents/Danyal Shah Interim Presentation.pptx
@@ -9,9 +9,10 @@
     <p:sldId id="257" r:id="rId3"/>
     <p:sldId id="258" r:id="rId4"/>
     <p:sldId id="261" r:id="rId5"/>
-    <p:sldId id="259" r:id="rId6"/>
-    <p:sldId id="260" r:id="rId7"/>
-    <p:sldId id="262" r:id="rId8"/>
+    <p:sldId id="264" r:id="rId6"/>
+    <p:sldId id="259" r:id="rId7"/>
+    <p:sldId id="265" r:id="rId8"/>
+    <p:sldId id="262" r:id="rId9"/>
   </p:sldIdLst>
   <p:sldSz cx="12192000" cy="6858000"/>
   <p:notesSz cx="6858000" cy="9144000"/>
@@ -2604,6 +2605,1709 @@
 </file>
 
 <file path=ppt/diagrams/colors4.xml><?xml version="1.0" encoding="utf-8"?>
+<dgm:colorsDef xmlns:dgm="http://schemas.openxmlformats.org/drawingml/2006/diagram" xmlns:a="http://schemas.openxmlformats.org/drawingml/2006/main" uniqueId="urn:microsoft.com/office/officeart/2005/8/colors/colorful2">
+  <dgm:title val=""/>
+  <dgm:desc val=""/>
+  <dgm:catLst>
+    <dgm:cat type="colorful" pri="10200"/>
+  </dgm:catLst>
+  <dgm:styleLbl name="node0">
+    <dgm:fillClrLst meth="repeat">
+      <a:schemeClr val="accent1"/>
+    </dgm:fillClrLst>
+    <dgm:linClrLst meth="repeat">
+      <a:schemeClr val="lt1"/>
+    </dgm:linClrLst>
+    <dgm:effectClrLst/>
+    <dgm:txLinClrLst/>
+    <dgm:txFillClrLst/>
+    <dgm:txEffectClrLst/>
+  </dgm:styleLbl>
+  <dgm:styleLbl name="node1">
+    <dgm:fillClrLst>
+      <a:schemeClr val="accent2"/>
+      <a:schemeClr val="accent3"/>
+    </dgm:fillClrLst>
+    <dgm:linClrLst meth="repeat">
+      <a:schemeClr val="lt1"/>
+    </dgm:linClrLst>
+    <dgm:effectClrLst/>
+    <dgm:txLinClrLst/>
+    <dgm:txFillClrLst/>
+    <dgm:txEffectClrLst/>
+  </dgm:styleLbl>
+  <dgm:styleLbl name="alignNode1">
+    <dgm:fillClrLst>
+      <a:schemeClr val="accent2"/>
+      <a:schemeClr val="accent3"/>
+    </dgm:fillClrLst>
+    <dgm:linClrLst>
+      <a:schemeClr val="accent2"/>
+      <a:schemeClr val="accent3"/>
+    </dgm:linClrLst>
+    <dgm:effectClrLst/>
+    <dgm:txLinClrLst/>
+    <dgm:txFillClrLst/>
+    <dgm:txEffectClrLst/>
+  </dgm:styleLbl>
+  <dgm:styleLbl name="lnNode1">
+    <dgm:fillClrLst>
+      <a:schemeClr val="accent2"/>
+      <a:schemeClr val="accent3"/>
+    </dgm:fillClrLst>
+    <dgm:linClrLst meth="repeat">
+      <a:schemeClr val="lt1"/>
+    </dgm:linClrLst>
+    <dgm:effectClrLst/>
+    <dgm:txLinClrLst/>
+    <dgm:txFillClrLst/>
+    <dgm:txEffectClrLst/>
+  </dgm:styleLbl>
+  <dgm:styleLbl name="vennNode1">
+    <dgm:fillClrLst>
+      <a:schemeClr val="accent2">
+        <a:alpha val="50000"/>
+      </a:schemeClr>
+      <a:schemeClr val="accent3">
+        <a:alpha val="50000"/>
+      </a:schemeClr>
+    </dgm:fillClrLst>
+    <dgm:linClrLst meth="repeat">
+      <a:schemeClr val="lt1"/>
+    </dgm:linClrLst>
+    <dgm:effectClrLst/>
+    <dgm:txLinClrLst/>
+    <dgm:txFillClrLst/>
+    <dgm:txEffectClrLst/>
+  </dgm:styleLbl>
+  <dgm:styleLbl name="node2">
+    <dgm:fillClrLst>
+      <a:schemeClr val="accent3"/>
+    </dgm:fillClrLst>
+    <dgm:linClrLst meth="repeat">
+      <a:schemeClr val="lt1"/>
+    </dgm:linClrLst>
+    <dgm:effectClrLst/>
+    <dgm:txLinClrLst/>
+    <dgm:txFillClrLst/>
+    <dgm:txEffectClrLst/>
+  </dgm:styleLbl>
+  <dgm:styleLbl name="node3">
+    <dgm:fillClrLst>
+      <a:schemeClr val="accent4"/>
+    </dgm:fillClrLst>
+    <dgm:linClrLst meth="repeat">
+      <a:schemeClr val="lt1"/>
+    </dgm:linClrLst>
+    <dgm:effectClrLst/>
+    <dgm:txLinClrLst/>
+    <dgm:txFillClrLst/>
+    <dgm:txEffectClrLst/>
+  </dgm:styleLbl>
+  <dgm:styleLbl name="node4">
+    <dgm:fillClrLst>
+      <a:schemeClr val="accent5"/>
+    </dgm:fillClrLst>
+    <dgm:linClrLst meth="repeat">
+      <a:schemeClr val="lt1"/>
+    </dgm:linClrLst>
+    <dgm:effectClrLst/>
+    <dgm:txLinClrLst/>
+    <dgm:txFillClrLst/>
+    <dgm:txEffectClrLst/>
+  </dgm:styleLbl>
+  <dgm:styleLbl name="fgImgPlace1">
+    <dgm:fillClrLst>
+      <a:schemeClr val="accent2">
+        <a:tint val="50000"/>
+      </a:schemeClr>
+      <a:schemeClr val="accent3">
+        <a:tint val="50000"/>
+      </a:schemeClr>
+    </dgm:fillClrLst>
+    <dgm:linClrLst meth="repeat">
+      <a:schemeClr val="lt1"/>
+    </dgm:linClrLst>
+    <dgm:effectClrLst/>
+    <dgm:txLinClrLst/>
+    <dgm:txFillClrLst meth="repeat">
+      <a:schemeClr val="lt1"/>
+    </dgm:txFillClrLst>
+    <dgm:txEffectClrLst/>
+  </dgm:styleLbl>
+  <dgm:styleLbl name="alignImgPlace1">
+    <dgm:fillClrLst>
+      <a:schemeClr val="accent2">
+        <a:tint val="50000"/>
+      </a:schemeClr>
+      <a:schemeClr val="accent3">
+        <a:tint val="20000"/>
+      </a:schemeClr>
+    </dgm:fillClrLst>
+    <dgm:linClrLst meth="repeat">
+      <a:schemeClr val="lt1"/>
+    </dgm:linClrLst>
+    <dgm:effectClrLst/>
+    <dgm:txLinClrLst/>
+    <dgm:txFillClrLst meth="repeat">
+      <a:schemeClr val="lt1"/>
+    </dgm:txFillClrLst>
+    <dgm:txEffectClrLst/>
+  </dgm:styleLbl>
+  <dgm:styleLbl name="bgImgPlace1">
+    <dgm:fillClrLst>
+      <a:schemeClr val="accent2">
+        <a:tint val="50000"/>
+      </a:schemeClr>
+      <a:schemeClr val="accent3">
+        <a:tint val="20000"/>
+      </a:schemeClr>
+    </dgm:fillClrLst>
+    <dgm:linClrLst meth="repeat">
+      <a:schemeClr val="lt1"/>
+    </dgm:linClrLst>
+    <dgm:effectClrLst/>
+    <dgm:txLinClrLst/>
+    <dgm:txFillClrLst meth="repeat">
+      <a:schemeClr val="lt1"/>
+    </dgm:txFillClrLst>
+    <dgm:txEffectClrLst/>
+  </dgm:styleLbl>
+  <dgm:styleLbl name="sibTrans2D1">
+    <dgm:fillClrLst>
+      <a:schemeClr val="accent2"/>
+      <a:schemeClr val="accent3"/>
+    </dgm:fillClrLst>
+    <dgm:linClrLst meth="repeat">
+      <a:schemeClr val="lt1"/>
+    </dgm:linClrLst>
+    <dgm:effectClrLst/>
+    <dgm:txLinClrLst/>
+    <dgm:txFillClrLst/>
+    <dgm:txEffectClrLst/>
+  </dgm:styleLbl>
+  <dgm:styleLbl name="fgSibTrans2D1">
+    <dgm:fillClrLst>
+      <a:schemeClr val="accent2"/>
+      <a:schemeClr val="accent3"/>
+    </dgm:fillClrLst>
+    <dgm:linClrLst meth="repeat">
+      <a:schemeClr val="lt1"/>
+    </dgm:linClrLst>
+    <dgm:effectClrLst/>
+    <dgm:txLinClrLst/>
+    <dgm:txFillClrLst meth="repeat">
+      <a:schemeClr val="lt1"/>
+    </dgm:txFillClrLst>
+    <dgm:txEffectClrLst/>
+  </dgm:styleLbl>
+  <dgm:styleLbl name="bgSibTrans2D1">
+    <dgm:fillClrLst>
+      <a:schemeClr val="accent2"/>
+      <a:schemeClr val="accent3"/>
+    </dgm:fillClrLst>
+    <dgm:linClrLst meth="repeat">
+      <a:schemeClr val="lt1"/>
+    </dgm:linClrLst>
+    <dgm:effectClrLst/>
+    <dgm:txLinClrLst/>
+    <dgm:txFillClrLst meth="repeat">
+      <a:schemeClr val="lt1"/>
+    </dgm:txFillClrLst>
+    <dgm:txEffectClrLst/>
+  </dgm:styleLbl>
+  <dgm:styleLbl name="sibTrans1D1">
+    <dgm:fillClrLst/>
+    <dgm:linClrLst>
+      <a:schemeClr val="accent2"/>
+      <a:schemeClr val="accent3"/>
+    </dgm:linClrLst>
+    <dgm:effectClrLst/>
+    <dgm:txLinClrLst/>
+    <dgm:txFillClrLst meth="repeat">
+      <a:schemeClr val="tx1"/>
+    </dgm:txFillClrLst>
+    <dgm:txEffectClrLst/>
+  </dgm:styleLbl>
+  <dgm:styleLbl name="callout">
+    <dgm:fillClrLst meth="repeat">
+      <a:schemeClr val="accent2"/>
+    </dgm:fillClrLst>
+    <dgm:linClrLst meth="repeat">
+      <a:schemeClr val="accent2">
+        <a:tint val="50000"/>
+      </a:schemeClr>
+    </dgm:linClrLst>
+    <dgm:effectClrLst/>
+    <dgm:txLinClrLst/>
+    <dgm:txFillClrLst meth="repeat">
+      <a:schemeClr val="tx1"/>
+    </dgm:txFillClrLst>
+    <dgm:txEffectClrLst/>
+  </dgm:styleLbl>
+  <dgm:styleLbl name="asst0">
+    <dgm:fillClrLst meth="repeat">
+      <a:schemeClr val="accent2"/>
+    </dgm:fillClrLst>
+    <dgm:linClrLst meth="repeat">
+      <a:schemeClr val="lt1">
+        <a:shade val="80000"/>
+      </a:schemeClr>
+    </dgm:linClrLst>
+    <dgm:effectClrLst/>
+    <dgm:txLinClrLst/>
+    <dgm:txFillClrLst/>
+    <dgm:txEffectClrLst/>
+  </dgm:styleLbl>
+  <dgm:styleLbl name="asst1">
+    <dgm:fillClrLst meth="repeat">
+      <a:schemeClr val="accent3"/>
+    </dgm:fillClrLst>
+    <dgm:linClrLst meth="repeat">
+      <a:schemeClr val="lt1">
+        <a:shade val="80000"/>
+      </a:schemeClr>
+    </dgm:linClrLst>
+    <dgm:effectClrLst/>
+    <dgm:txLinClrLst/>
+    <dgm:txFillClrLst/>
+    <dgm:txEffectClrLst/>
+  </dgm:styleLbl>
+  <dgm:styleLbl name="asst2">
+    <dgm:fillClrLst>
+      <a:schemeClr val="accent4"/>
+    </dgm:fillClrLst>
+    <dgm:linClrLst meth="repeat">
+      <a:schemeClr val="lt1"/>
+    </dgm:linClrLst>
+    <dgm:effectClrLst/>
+    <dgm:txLinClrLst/>
+    <dgm:txFillClrLst/>
+    <dgm:txEffectClrLst/>
+  </dgm:styleLbl>
+  <dgm:styleLbl name="asst3">
+    <dgm:fillClrLst>
+      <a:schemeClr val="accent5"/>
+    </dgm:fillClrLst>
+    <dgm:linClrLst meth="repeat">
+      <a:schemeClr val="lt1"/>
+    </dgm:linClrLst>
+    <dgm:effectClrLst/>
+    <dgm:txLinClrLst/>
+    <dgm:txFillClrLst/>
+    <dgm:txEffectClrLst/>
+  </dgm:styleLbl>
+  <dgm:styleLbl name="asst4">
+    <dgm:fillClrLst>
+      <a:schemeClr val="accent6"/>
+    </dgm:fillClrLst>
+    <dgm:linClrLst meth="repeat">
+      <a:schemeClr val="lt1"/>
+    </dgm:linClrLst>
+    <dgm:effectClrLst/>
+    <dgm:txLinClrLst/>
+    <dgm:txFillClrLst/>
+    <dgm:txEffectClrLst/>
+  </dgm:styleLbl>
+  <dgm:styleLbl name="parChTrans2D1">
+    <dgm:fillClrLst meth="repeat">
+      <a:schemeClr val="accent2"/>
+    </dgm:fillClrLst>
+    <dgm:linClrLst meth="repeat">
+      <a:schemeClr val="lt1"/>
+    </dgm:linClrLst>
+    <dgm:effectClrLst/>
+    <dgm:txLinClrLst/>
+    <dgm:txFillClrLst meth="repeat">
+      <a:schemeClr val="lt1"/>
+    </dgm:txFillClrLst>
+    <dgm:txEffectClrLst/>
+  </dgm:styleLbl>
+  <dgm:styleLbl name="parChTrans2D2">
+    <dgm:fillClrLst meth="repeat">
+      <a:schemeClr val="accent3"/>
+    </dgm:fillClrLst>
+    <dgm:linClrLst meth="repeat">
+      <a:schemeClr val="lt1"/>
+    </dgm:linClrLst>
+    <dgm:effectClrLst/>
+    <dgm:txLinClrLst/>
+    <dgm:txFillClrLst/>
+    <dgm:txEffectClrLst/>
+  </dgm:styleLbl>
+  <dgm:styleLbl name="parChTrans2D3">
+    <dgm:fillClrLst meth="repeat">
+      <a:schemeClr val="accent4"/>
+    </dgm:fillClrLst>
+    <dgm:linClrLst meth="repeat">
+      <a:schemeClr val="lt1"/>
+    </dgm:linClrLst>
+    <dgm:effectClrLst/>
+    <dgm:txLinClrLst/>
+    <dgm:txFillClrLst/>
+    <dgm:txEffectClrLst/>
+  </dgm:styleLbl>
+  <dgm:styleLbl name="parChTrans2D4">
+    <dgm:fillClrLst meth="repeat">
+      <a:schemeClr val="accent5"/>
+    </dgm:fillClrLst>
+    <dgm:linClrLst meth="repeat">
+      <a:schemeClr val="lt1"/>
+    </dgm:linClrLst>
+    <dgm:effectClrLst/>
+    <dgm:txLinClrLst/>
+    <dgm:txFillClrLst meth="repeat">
+      <a:schemeClr val="lt1"/>
+    </dgm:txFillClrLst>
+    <dgm:txEffectClrLst/>
+  </dgm:styleLbl>
+  <dgm:styleLbl name="parChTrans1D1">
+    <dgm:fillClrLst meth="repeat">
+      <a:schemeClr val="accent2"/>
+    </dgm:fillClrLst>
+    <dgm:linClrLst meth="repeat">
+      <a:schemeClr val="accent2"/>
+    </dgm:linClrLst>
+    <dgm:effectClrLst/>
+    <dgm:txLinClrLst/>
+    <dgm:txFillClrLst meth="repeat">
+      <a:schemeClr val="tx1"/>
+    </dgm:txFillClrLst>
+    <dgm:txEffectClrLst/>
+  </dgm:styleLbl>
+  <dgm:styleLbl name="parChTrans1D2">
+    <dgm:fillClrLst meth="repeat">
+      <a:schemeClr val="accent2">
+        <a:tint val="90000"/>
+      </a:schemeClr>
+    </dgm:fillClrLst>
+    <dgm:linClrLst meth="repeat">
+      <a:schemeClr val="accent3"/>
+    </dgm:linClrLst>
+    <dgm:effectClrLst/>
+    <dgm:txLinClrLst/>
+    <dgm:txFillClrLst meth="repeat">
+      <a:schemeClr val="tx1"/>
+    </dgm:txFillClrLst>
+    <dgm:txEffectClrLst/>
+  </dgm:styleLbl>
+  <dgm:styleLbl name="parChTrans1D3">
+    <dgm:fillClrLst meth="repeat">
+      <a:schemeClr val="accent2">
+        <a:tint val="70000"/>
+      </a:schemeClr>
+    </dgm:fillClrLst>
+    <dgm:linClrLst meth="repeat">
+      <a:schemeClr val="accent4"/>
+    </dgm:linClrLst>
+    <dgm:effectClrLst/>
+    <dgm:txLinClrLst/>
+    <dgm:txFillClrLst meth="repeat">
+      <a:schemeClr val="tx1"/>
+    </dgm:txFillClrLst>
+    <dgm:txEffectClrLst/>
+  </dgm:styleLbl>
+  <dgm:styleLbl name="parChTrans1D4">
+    <dgm:fillClrLst meth="repeat">
+      <a:schemeClr val="accent2">
+        <a:tint val="50000"/>
+      </a:schemeClr>
+    </dgm:fillClrLst>
+    <dgm:linClrLst meth="repeat">
+      <a:schemeClr val="accent5"/>
+    </dgm:linClrLst>
+    <dgm:effectClrLst/>
+    <dgm:txLinClrLst/>
+    <dgm:txFillClrLst meth="repeat">
+      <a:schemeClr val="tx1"/>
+    </dgm:txFillClrLst>
+    <dgm:txEffectClrLst/>
+  </dgm:styleLbl>
+  <dgm:styleLbl name="fgAcc1">
+    <dgm:fillClrLst meth="repeat">
+      <a:schemeClr val="lt1">
+        <a:alpha val="90000"/>
+      </a:schemeClr>
+    </dgm:fillClrLst>
+    <dgm:linClrLst>
+      <a:schemeClr val="accent2"/>
+      <a:schemeClr val="accent3"/>
+    </dgm:linClrLst>
+    <dgm:effectClrLst/>
+    <dgm:txLinClrLst/>
+    <dgm:txFillClrLst meth="repeat">
+      <a:schemeClr val="dk1"/>
+    </dgm:txFillClrLst>
+    <dgm:txEffectClrLst/>
+  </dgm:styleLbl>
+  <dgm:styleLbl name="conFgAcc1">
+    <dgm:fillClrLst meth="repeat">
+      <a:schemeClr val="lt1">
+        <a:alpha val="90000"/>
+      </a:schemeClr>
+    </dgm:fillClrLst>
+    <dgm:linClrLst>
+      <a:schemeClr val="accent2"/>
+      <a:schemeClr val="accent3"/>
+    </dgm:linClrLst>
+    <dgm:effectClrLst/>
+    <dgm:txLinClrLst/>
+    <dgm:txFillClrLst meth="repeat">
+      <a:schemeClr val="dk1"/>
+    </dgm:txFillClrLst>
+    <dgm:txEffectClrLst/>
+  </dgm:styleLbl>
+  <dgm:styleLbl name="alignAcc1">
+    <dgm:fillClrLst meth="repeat">
+      <a:schemeClr val="lt1">
+        <a:alpha val="90000"/>
+      </a:schemeClr>
+    </dgm:fillClrLst>
+    <dgm:linClrLst>
+      <a:schemeClr val="accent2"/>
+      <a:schemeClr val="accent3"/>
+    </dgm:linClrLst>
+    <dgm:effectClrLst/>
+    <dgm:txLinClrLst/>
+    <dgm:txFillClrLst meth="repeat">
+      <a:schemeClr val="dk1"/>
+    </dgm:txFillClrLst>
+    <dgm:txEffectClrLst/>
+  </dgm:styleLbl>
+  <dgm:styleLbl name="trAlignAcc1">
+    <dgm:fillClrLst meth="repeat">
+      <a:schemeClr val="lt1">
+        <a:alpha val="40000"/>
+      </a:schemeClr>
+    </dgm:fillClrLst>
+    <dgm:linClrLst meth="repeat">
+      <a:schemeClr val="accent2"/>
+    </dgm:linClrLst>
+    <dgm:effectClrLst/>
+    <dgm:txLinClrLst/>
+    <dgm:txFillClrLst meth="repeat">
+      <a:schemeClr val="dk1"/>
+    </dgm:txFillClrLst>
+    <dgm:txEffectClrLst/>
+  </dgm:styleLbl>
+  <dgm:styleLbl name="bgAcc1">
+    <dgm:fillClrLst meth="repeat">
+      <a:schemeClr val="lt1">
+        <a:alpha val="90000"/>
+      </a:schemeClr>
+    </dgm:fillClrLst>
+    <dgm:linClrLst>
+      <a:schemeClr val="accent2"/>
+      <a:schemeClr val="accent3"/>
+    </dgm:linClrLst>
+    <dgm:effectClrLst/>
+    <dgm:txLinClrLst/>
+    <dgm:txFillClrLst meth="repeat">
+      <a:schemeClr val="dk1"/>
+    </dgm:txFillClrLst>
+    <dgm:txEffectClrLst/>
+  </dgm:styleLbl>
+  <dgm:styleLbl name="solidFgAcc1">
+    <dgm:fillClrLst meth="repeat">
+      <a:schemeClr val="lt1"/>
+    </dgm:fillClrLst>
+    <dgm:linClrLst>
+      <a:schemeClr val="accent2"/>
+      <a:schemeClr val="accent3"/>
+    </dgm:linClrLst>
+    <dgm:effectClrLst/>
+    <dgm:txLinClrLst/>
+    <dgm:txFillClrLst meth="repeat">
+      <a:schemeClr val="dk1"/>
+    </dgm:txFillClrLst>
+    <dgm:txEffectClrLst/>
+  </dgm:styleLbl>
+  <dgm:styleLbl name="solidAlignAcc1">
+    <dgm:fillClrLst meth="repeat">
+      <a:schemeClr val="lt1"/>
+    </dgm:fillClrLst>
+    <dgm:linClrLst>
+      <a:schemeClr val="accent2"/>
+      <a:schemeClr val="accent3"/>
+    </dgm:linClrLst>
+    <dgm:effectClrLst/>
+    <dgm:txLinClrLst/>
+    <dgm:txFillClrLst meth="repeat">
+      <a:schemeClr val="dk1"/>
+    </dgm:txFillClrLst>
+    <dgm:txEffectClrLst/>
+  </dgm:styleLbl>
+  <dgm:styleLbl name="solidBgAcc1">
+    <dgm:fillClrLst meth="repeat">
+      <a:schemeClr val="lt1"/>
+    </dgm:fillClrLst>
+    <dgm:linClrLst>
+      <a:schemeClr val="accent2"/>
+      <a:schemeClr val="accent3"/>
+    </dgm:linClrLst>
+    <dgm:effectClrLst/>
+    <dgm:txLinClrLst/>
+    <dgm:txFillClrLst meth="repeat">
+      <a:schemeClr val="dk1"/>
+    </dgm:txFillClrLst>
+    <dgm:txEffectClrLst/>
+  </dgm:styleLbl>
+  <dgm:styleLbl name="fgAccFollowNode1">
+    <dgm:fillClrLst>
+      <a:schemeClr val="accent2">
+        <a:tint val="40000"/>
+        <a:alpha val="90000"/>
+      </a:schemeClr>
+      <a:schemeClr val="accent3">
+        <a:tint val="40000"/>
+        <a:alpha val="90000"/>
+      </a:schemeClr>
+    </dgm:fillClrLst>
+    <dgm:linClrLst>
+      <a:schemeClr val="accent2">
+        <a:tint val="40000"/>
+        <a:alpha val="90000"/>
+      </a:schemeClr>
+      <a:schemeClr val="accent3">
+        <a:tint val="40000"/>
+        <a:alpha val="90000"/>
+      </a:schemeClr>
+    </dgm:linClrLst>
+    <dgm:effectClrLst/>
+    <dgm:txLinClrLst/>
+    <dgm:txFillClrLst meth="repeat">
+      <a:schemeClr val="dk1"/>
+    </dgm:txFillClrLst>
+    <dgm:txEffectClrLst/>
+  </dgm:styleLbl>
+  <dgm:styleLbl name="alignAccFollowNode1">
+    <dgm:fillClrLst>
+      <a:schemeClr val="accent2">
+        <a:tint val="40000"/>
+        <a:alpha val="90000"/>
+      </a:schemeClr>
+      <a:schemeClr val="accent3">
+        <a:tint val="40000"/>
+        <a:alpha val="90000"/>
+      </a:schemeClr>
+    </dgm:fillClrLst>
+    <dgm:linClrLst>
+      <a:schemeClr val="accent2">
+        <a:tint val="40000"/>
+        <a:alpha val="90000"/>
+      </a:schemeClr>
+      <a:schemeClr val="accent3">
+        <a:tint val="40000"/>
+        <a:alpha val="90000"/>
+      </a:schemeClr>
+    </dgm:linClrLst>
+    <dgm:effectClrLst/>
+    <dgm:txLinClrLst/>
+    <dgm:txFillClrLst meth="repeat">
+      <a:schemeClr val="dk1"/>
+    </dgm:txFillClrLst>
+    <dgm:txEffectClrLst/>
+  </dgm:styleLbl>
+  <dgm:styleLbl name="bgAccFollowNode1">
+    <dgm:fillClrLst>
+      <a:schemeClr val="accent2">
+        <a:tint val="40000"/>
+        <a:alpha val="90000"/>
+      </a:schemeClr>
+      <a:schemeClr val="accent3">
+        <a:tint val="40000"/>
+        <a:alpha val="90000"/>
+      </a:schemeClr>
+    </dgm:fillClrLst>
+    <dgm:linClrLst>
+      <a:schemeClr val="accent2">
+        <a:tint val="40000"/>
+        <a:alpha val="90000"/>
+      </a:schemeClr>
+      <a:schemeClr val="accent3">
+        <a:tint val="40000"/>
+        <a:alpha val="90000"/>
+      </a:schemeClr>
+    </dgm:linClrLst>
+    <dgm:effectClrLst/>
+    <dgm:txLinClrLst/>
+    <dgm:txFillClrLst meth="repeat">
+      <a:schemeClr val="dk1"/>
+    </dgm:txFillClrLst>
+    <dgm:txEffectClrLst/>
+  </dgm:styleLbl>
+  <dgm:styleLbl name="fgAcc0">
+    <dgm:fillClrLst meth="repeat">
+      <a:schemeClr val="lt1">
+        <a:alpha val="90000"/>
+      </a:schemeClr>
+    </dgm:fillClrLst>
+    <dgm:linClrLst>
+      <a:schemeClr val="accent1"/>
+    </dgm:linClrLst>
+    <dgm:effectClrLst/>
+    <dgm:txLinClrLst/>
+    <dgm:txFillClrLst meth="repeat">
+      <a:schemeClr val="dk1"/>
+    </dgm:txFillClrLst>
+    <dgm:txEffectClrLst/>
+  </dgm:styleLbl>
+  <dgm:styleLbl name="fgAcc2">
+    <dgm:fillClrLst meth="repeat">
+      <a:schemeClr val="lt1">
+        <a:alpha val="90000"/>
+      </a:schemeClr>
+    </dgm:fillClrLst>
+    <dgm:linClrLst>
+      <a:schemeClr val="accent3"/>
+    </dgm:linClrLst>
+    <dgm:effectClrLst/>
+    <dgm:txLinClrLst/>
+    <dgm:txFillClrLst meth="repeat">
+      <a:schemeClr val="dk1"/>
+    </dgm:txFillClrLst>
+    <dgm:txEffectClrLst/>
+  </dgm:styleLbl>
+  <dgm:styleLbl name="fgAcc3">
+    <dgm:fillClrLst meth="repeat">
+      <a:schemeClr val="lt1">
+        <a:alpha val="90000"/>
+      </a:schemeClr>
+    </dgm:fillClrLst>
+    <dgm:linClrLst>
+      <a:schemeClr val="accent4"/>
+    </dgm:linClrLst>
+    <dgm:effectClrLst/>
+    <dgm:txLinClrLst/>
+    <dgm:txFillClrLst meth="repeat">
+      <a:schemeClr val="dk1"/>
+    </dgm:txFillClrLst>
+    <dgm:txEffectClrLst/>
+  </dgm:styleLbl>
+  <dgm:styleLbl name="fgAcc4">
+    <dgm:fillClrLst meth="repeat">
+      <a:schemeClr val="lt1">
+        <a:alpha val="90000"/>
+      </a:schemeClr>
+    </dgm:fillClrLst>
+    <dgm:linClrLst>
+      <a:schemeClr val="accent5"/>
+    </dgm:linClrLst>
+    <dgm:effectClrLst/>
+    <dgm:txLinClrLst/>
+    <dgm:txFillClrLst meth="repeat">
+      <a:schemeClr val="dk1"/>
+    </dgm:txFillClrLst>
+    <dgm:txEffectClrLst/>
+  </dgm:styleLbl>
+  <dgm:styleLbl name="bgShp">
+    <dgm:fillClrLst meth="repeat">
+      <a:schemeClr val="accent2">
+        <a:tint val="40000"/>
+      </a:schemeClr>
+    </dgm:fillClrLst>
+    <dgm:linClrLst meth="repeat">
+      <a:schemeClr val="dk1"/>
+    </dgm:linClrLst>
+    <dgm:effectClrLst/>
+    <dgm:txLinClrLst/>
+    <dgm:txFillClrLst meth="repeat">
+      <a:schemeClr val="dk1"/>
+    </dgm:txFillClrLst>
+    <dgm:txEffectClrLst/>
+  </dgm:styleLbl>
+  <dgm:styleLbl name="dkBgShp">
+    <dgm:fillClrLst meth="repeat">
+      <a:schemeClr val="accent2">
+        <a:shade val="90000"/>
+      </a:schemeClr>
+    </dgm:fillClrLst>
+    <dgm:linClrLst meth="repeat">
+      <a:schemeClr val="dk1"/>
+    </dgm:linClrLst>
+    <dgm:effectClrLst/>
+    <dgm:txLinClrLst/>
+    <dgm:txFillClrLst meth="repeat">
+      <a:schemeClr val="lt1"/>
+    </dgm:txFillClrLst>
+    <dgm:txEffectClrLst/>
+  </dgm:styleLbl>
+  <dgm:styleLbl name="trBgShp">
+    <dgm:fillClrLst meth="repeat">
+      <a:schemeClr val="accent2">
+        <a:tint val="50000"/>
+        <a:alpha val="40000"/>
+      </a:schemeClr>
+    </dgm:fillClrLst>
+    <dgm:linClrLst meth="repeat">
+      <a:schemeClr val="accent2"/>
+    </dgm:linClrLst>
+    <dgm:effectClrLst/>
+    <dgm:txLinClrLst/>
+    <dgm:txFillClrLst meth="repeat">
+      <a:schemeClr val="lt1"/>
+    </dgm:txFillClrLst>
+    <dgm:txEffectClrLst/>
+  </dgm:styleLbl>
+  <dgm:styleLbl name="fgShp">
+    <dgm:fillClrLst meth="repeat">
+      <a:schemeClr val="accent2">
+        <a:tint val="40000"/>
+      </a:schemeClr>
+    </dgm:fillClrLst>
+    <dgm:linClrLst meth="repeat">
+      <a:schemeClr val="lt1"/>
+    </dgm:linClrLst>
+    <dgm:effectClrLst/>
+    <dgm:txLinClrLst/>
+    <dgm:txFillClrLst meth="repeat">
+      <a:schemeClr val="dk1"/>
+    </dgm:txFillClrLst>
+    <dgm:txEffectClrLst/>
+  </dgm:styleLbl>
+  <dgm:styleLbl name="revTx">
+    <dgm:fillClrLst meth="repeat">
+      <a:schemeClr val="lt1">
+        <a:alpha val="0"/>
+      </a:schemeClr>
+    </dgm:fillClrLst>
+    <dgm:linClrLst meth="repeat">
+      <a:schemeClr val="dk1">
+        <a:alpha val="0"/>
+      </a:schemeClr>
+    </dgm:linClrLst>
+    <dgm:effectClrLst/>
+    <dgm:txLinClrLst/>
+    <dgm:txFillClrLst meth="repeat">
+      <a:schemeClr val="tx1"/>
+    </dgm:txFillClrLst>
+    <dgm:txEffectClrLst/>
+  </dgm:styleLbl>
+</dgm:colorsDef>
+</file>
+
+<file path=ppt/diagrams/colors5.xml><?xml version="1.0" encoding="utf-8"?>
+<dgm:colorsDef xmlns:dgm="http://schemas.openxmlformats.org/drawingml/2006/diagram" xmlns:a="http://schemas.openxmlformats.org/drawingml/2006/main" uniqueId="urn:microsoft.com/office/officeart/2018/5/colors/Iconchunking_neutralbg_colorful1">
+  <dgm:title val=""/>
+  <dgm:desc val=""/>
+  <dgm:catLst>
+    <dgm:cat type="colorful" pri="10100"/>
+  </dgm:catLst>
+  <dgm:styleLbl name="node0">
+    <dgm:fillClrLst meth="repeat">
+      <a:schemeClr val="accent1"/>
+    </dgm:fillClrLst>
+    <dgm:linClrLst meth="repeat">
+      <a:schemeClr val="lt1"/>
+    </dgm:linClrLst>
+    <dgm:effectClrLst/>
+    <dgm:txLinClrLst/>
+    <dgm:txFillClrLst/>
+    <dgm:txEffectClrLst/>
+  </dgm:styleLbl>
+  <dgm:styleLbl name="node1">
+    <dgm:fillClrLst meth="repeat">
+      <a:schemeClr val="accent2"/>
+      <a:schemeClr val="accent3"/>
+      <a:schemeClr val="accent4"/>
+      <a:schemeClr val="accent5"/>
+      <a:schemeClr val="accent6"/>
+    </dgm:fillClrLst>
+    <dgm:linClrLst meth="repeat">
+      <a:schemeClr val="lt1">
+        <a:alpha val="0"/>
+      </a:schemeClr>
+    </dgm:linClrLst>
+    <dgm:effectClrLst/>
+    <dgm:txLinClrLst/>
+    <dgm:txFillClrLst/>
+    <dgm:txEffectClrLst/>
+  </dgm:styleLbl>
+  <dgm:styleLbl name="alignNode1">
+    <dgm:fillClrLst meth="repeat">
+      <a:schemeClr val="accent2"/>
+      <a:schemeClr val="accent3"/>
+      <a:schemeClr val="accent4"/>
+      <a:schemeClr val="accent5"/>
+      <a:schemeClr val="accent6"/>
+    </dgm:fillClrLst>
+    <dgm:linClrLst meth="repeat">
+      <a:schemeClr val="accent2"/>
+      <a:schemeClr val="accent3"/>
+      <a:schemeClr val="accent4"/>
+      <a:schemeClr val="accent5"/>
+      <a:schemeClr val="accent6"/>
+    </dgm:linClrLst>
+    <dgm:effectClrLst/>
+    <dgm:txLinClrLst/>
+    <dgm:txFillClrLst/>
+    <dgm:txEffectClrLst/>
+  </dgm:styleLbl>
+  <dgm:styleLbl name="lnNode1">
+    <dgm:fillClrLst meth="repeat">
+      <a:schemeClr val="accent2"/>
+      <a:schemeClr val="accent3"/>
+      <a:schemeClr val="accent4"/>
+      <a:schemeClr val="accent5"/>
+      <a:schemeClr val="accent6"/>
+    </dgm:fillClrLst>
+    <dgm:linClrLst meth="repeat">
+      <a:schemeClr val="lt1"/>
+    </dgm:linClrLst>
+    <dgm:effectClrLst/>
+    <dgm:txLinClrLst/>
+    <dgm:txFillClrLst/>
+    <dgm:txEffectClrLst/>
+  </dgm:styleLbl>
+  <dgm:styleLbl name="vennNode1">
+    <dgm:fillClrLst meth="repeat">
+      <a:schemeClr val="accent2">
+        <a:alpha val="50000"/>
+      </a:schemeClr>
+      <a:schemeClr val="accent3">
+        <a:alpha val="50000"/>
+      </a:schemeClr>
+      <a:schemeClr val="accent4">
+        <a:alpha val="50000"/>
+      </a:schemeClr>
+      <a:schemeClr val="accent5">
+        <a:alpha val="50000"/>
+      </a:schemeClr>
+      <a:schemeClr val="accent6">
+        <a:alpha val="50000"/>
+      </a:schemeClr>
+    </dgm:fillClrLst>
+    <dgm:linClrLst meth="repeat">
+      <a:schemeClr val="lt1"/>
+    </dgm:linClrLst>
+    <dgm:effectClrLst/>
+    <dgm:txLinClrLst/>
+    <dgm:txFillClrLst/>
+    <dgm:txEffectClrLst/>
+  </dgm:styleLbl>
+  <dgm:styleLbl name="node2">
+    <dgm:fillClrLst>
+      <a:schemeClr val="accent2"/>
+    </dgm:fillClrLst>
+    <dgm:linClrLst meth="repeat">
+      <a:schemeClr val="lt1"/>
+    </dgm:linClrLst>
+    <dgm:effectClrLst/>
+    <dgm:txLinClrLst/>
+    <dgm:txFillClrLst/>
+    <dgm:txEffectClrLst/>
+  </dgm:styleLbl>
+  <dgm:styleLbl name="node3">
+    <dgm:fillClrLst>
+      <a:schemeClr val="accent3"/>
+    </dgm:fillClrLst>
+    <dgm:linClrLst meth="repeat">
+      <a:schemeClr val="lt1"/>
+    </dgm:linClrLst>
+    <dgm:effectClrLst/>
+    <dgm:txLinClrLst/>
+    <dgm:txFillClrLst/>
+    <dgm:txEffectClrLst/>
+  </dgm:styleLbl>
+  <dgm:styleLbl name="node4">
+    <dgm:fillClrLst>
+      <a:schemeClr val="accent4"/>
+    </dgm:fillClrLst>
+    <dgm:linClrLst meth="repeat">
+      <a:schemeClr val="lt1"/>
+    </dgm:linClrLst>
+    <dgm:effectClrLst/>
+    <dgm:txLinClrLst/>
+    <dgm:txFillClrLst/>
+    <dgm:txEffectClrLst/>
+  </dgm:styleLbl>
+  <dgm:styleLbl name="fgImgPlace1">
+    <dgm:fillClrLst meth="repeat">
+      <a:schemeClr val="accent2">
+        <a:tint val="50000"/>
+      </a:schemeClr>
+      <a:schemeClr val="accent3">
+        <a:tint val="50000"/>
+      </a:schemeClr>
+      <a:schemeClr val="accent4">
+        <a:tint val="50000"/>
+      </a:schemeClr>
+      <a:schemeClr val="accent5">
+        <a:tint val="50000"/>
+      </a:schemeClr>
+      <a:schemeClr val="accent6">
+        <a:tint val="50000"/>
+      </a:schemeClr>
+    </dgm:fillClrLst>
+    <dgm:linClrLst meth="repeat">
+      <a:schemeClr val="lt1"/>
+    </dgm:linClrLst>
+    <dgm:effectClrLst/>
+    <dgm:txLinClrLst/>
+    <dgm:txFillClrLst meth="repeat">
+      <a:schemeClr val="lt1"/>
+    </dgm:txFillClrLst>
+    <dgm:txEffectClrLst/>
+  </dgm:styleLbl>
+  <dgm:styleLbl name="alignImgPlace1">
+    <dgm:fillClrLst>
+      <a:schemeClr val="accent1">
+        <a:tint val="50000"/>
+      </a:schemeClr>
+      <a:schemeClr val="accent2">
+        <a:tint val="20000"/>
+      </a:schemeClr>
+    </dgm:fillClrLst>
+    <dgm:linClrLst meth="repeat">
+      <a:schemeClr val="lt1"/>
+    </dgm:linClrLst>
+    <dgm:effectClrLst/>
+    <dgm:txLinClrLst/>
+    <dgm:txFillClrLst meth="repeat">
+      <a:schemeClr val="lt1"/>
+    </dgm:txFillClrLst>
+    <dgm:txEffectClrLst/>
+  </dgm:styleLbl>
+  <dgm:styleLbl name="bgImgPlace1">
+    <dgm:fillClrLst>
+      <a:schemeClr val="accent1">
+        <a:tint val="50000"/>
+      </a:schemeClr>
+      <a:schemeClr val="accent2">
+        <a:tint val="20000"/>
+      </a:schemeClr>
+    </dgm:fillClrLst>
+    <dgm:linClrLst meth="repeat">
+      <a:schemeClr val="lt1"/>
+    </dgm:linClrLst>
+    <dgm:effectClrLst/>
+    <dgm:txLinClrLst/>
+    <dgm:txFillClrLst meth="repeat">
+      <a:schemeClr val="lt1"/>
+    </dgm:txFillClrLst>
+    <dgm:txEffectClrLst/>
+  </dgm:styleLbl>
+  <dgm:styleLbl name="sibTrans2D1">
+    <dgm:fillClrLst meth="repeat">
+      <a:schemeClr val="accent2"/>
+      <a:schemeClr val="accent3"/>
+      <a:schemeClr val="accent4"/>
+      <a:schemeClr val="accent5"/>
+      <a:schemeClr val="accent6"/>
+    </dgm:fillClrLst>
+    <dgm:linClrLst meth="cycle">
+      <a:schemeClr val="lt1"/>
+    </dgm:linClrLst>
+    <dgm:effectClrLst/>
+    <dgm:txLinClrLst/>
+    <dgm:txFillClrLst/>
+    <dgm:txEffectClrLst/>
+  </dgm:styleLbl>
+  <dgm:styleLbl name="fgSibTrans2D1">
+    <dgm:fillClrLst meth="repeat">
+      <a:schemeClr val="accent2"/>
+      <a:schemeClr val="accent3"/>
+      <a:schemeClr val="accent4"/>
+      <a:schemeClr val="accent5"/>
+      <a:schemeClr val="accent6"/>
+    </dgm:fillClrLst>
+    <dgm:linClrLst meth="cycle">
+      <a:schemeClr val="lt1"/>
+    </dgm:linClrLst>
+    <dgm:effectClrLst/>
+    <dgm:txLinClrLst/>
+    <dgm:txFillClrLst meth="repeat">
+      <a:schemeClr val="lt1"/>
+    </dgm:txFillClrLst>
+    <dgm:txEffectClrLst/>
+  </dgm:styleLbl>
+  <dgm:styleLbl name="bgSibTrans2D1">
+    <dgm:fillClrLst meth="repeat">
+      <a:schemeClr val="accent2"/>
+      <a:schemeClr val="accent3"/>
+      <a:schemeClr val="accent4"/>
+      <a:schemeClr val="accent5"/>
+      <a:schemeClr val="accent6"/>
+    </dgm:fillClrLst>
+    <dgm:linClrLst meth="cycle">
+      <a:schemeClr val="lt1"/>
+    </dgm:linClrLst>
+    <dgm:effectClrLst/>
+    <dgm:txLinClrLst/>
+    <dgm:txFillClrLst meth="repeat">
+      <a:schemeClr val="lt1"/>
+    </dgm:txFillClrLst>
+    <dgm:txEffectClrLst/>
+  </dgm:styleLbl>
+  <dgm:styleLbl name="sibTrans1D1">
+    <dgm:fillClrLst meth="repeat">
+      <a:schemeClr val="accent2"/>
+      <a:schemeClr val="accent3"/>
+      <a:schemeClr val="accent4"/>
+      <a:schemeClr val="accent5"/>
+      <a:schemeClr val="accent6"/>
+    </dgm:fillClrLst>
+    <dgm:linClrLst meth="repeat">
+      <a:schemeClr val="accent2"/>
+      <a:schemeClr val="accent3"/>
+      <a:schemeClr val="accent4"/>
+      <a:schemeClr val="accent5"/>
+      <a:schemeClr val="accent6"/>
+    </dgm:linClrLst>
+    <dgm:effectClrLst/>
+    <dgm:txLinClrLst/>
+    <dgm:txFillClrLst meth="repeat">
+      <a:schemeClr val="tx1"/>
+    </dgm:txFillClrLst>
+    <dgm:txEffectClrLst/>
+  </dgm:styleLbl>
+  <dgm:styleLbl name="callout">
+    <dgm:fillClrLst meth="repeat">
+      <a:schemeClr val="accent2"/>
+    </dgm:fillClrLst>
+    <dgm:linClrLst meth="repeat">
+      <a:schemeClr val="accent2">
+        <a:tint val="50000"/>
+      </a:schemeClr>
+    </dgm:linClrLst>
+    <dgm:effectClrLst/>
+    <dgm:txLinClrLst/>
+    <dgm:txFillClrLst meth="repeat">
+      <a:schemeClr val="tx1"/>
+    </dgm:txFillClrLst>
+    <dgm:txEffectClrLst/>
+  </dgm:styleLbl>
+  <dgm:styleLbl name="asst0">
+    <dgm:fillClrLst meth="repeat">
+      <a:schemeClr val="accent1"/>
+    </dgm:fillClrLst>
+    <dgm:linClrLst meth="repeat">
+      <a:schemeClr val="lt1"/>
+    </dgm:linClrLst>
+    <dgm:effectClrLst/>
+    <dgm:txLinClrLst/>
+    <dgm:txFillClrLst/>
+    <dgm:txEffectClrLst/>
+  </dgm:styleLbl>
+  <dgm:styleLbl name="asst1">
+    <dgm:fillClrLst meth="repeat">
+      <a:schemeClr val="accent2"/>
+    </dgm:fillClrLst>
+    <dgm:linClrLst meth="repeat">
+      <a:schemeClr val="lt1"/>
+    </dgm:linClrLst>
+    <dgm:effectClrLst/>
+    <dgm:txLinClrLst/>
+    <dgm:txFillClrLst/>
+    <dgm:txEffectClrLst/>
+  </dgm:styleLbl>
+  <dgm:styleLbl name="asst2">
+    <dgm:fillClrLst>
+      <a:schemeClr val="accent3"/>
+    </dgm:fillClrLst>
+    <dgm:linClrLst meth="repeat">
+      <a:schemeClr val="lt1"/>
+    </dgm:linClrLst>
+    <dgm:effectClrLst/>
+    <dgm:txLinClrLst/>
+    <dgm:txFillClrLst/>
+    <dgm:txEffectClrLst/>
+  </dgm:styleLbl>
+  <dgm:styleLbl name="asst3">
+    <dgm:fillClrLst>
+      <a:schemeClr val="accent4"/>
+    </dgm:fillClrLst>
+    <dgm:linClrLst meth="repeat">
+      <a:schemeClr val="lt1"/>
+    </dgm:linClrLst>
+    <dgm:effectClrLst/>
+    <dgm:txLinClrLst/>
+    <dgm:txFillClrLst/>
+    <dgm:txEffectClrLst/>
+  </dgm:styleLbl>
+  <dgm:styleLbl name="asst4">
+    <dgm:fillClrLst>
+      <a:schemeClr val="accent5"/>
+    </dgm:fillClrLst>
+    <dgm:linClrLst meth="repeat">
+      <a:schemeClr val="lt1"/>
+    </dgm:linClrLst>
+    <dgm:effectClrLst/>
+    <dgm:txLinClrLst/>
+    <dgm:txFillClrLst/>
+    <dgm:txEffectClrLst/>
+  </dgm:styleLbl>
+  <dgm:styleLbl name="parChTrans2D1">
+    <dgm:fillClrLst meth="repeat">
+      <a:schemeClr val="accent2"/>
+    </dgm:fillClrLst>
+    <dgm:linClrLst meth="repeat">
+      <a:schemeClr val="lt1"/>
+    </dgm:linClrLst>
+    <dgm:effectClrLst/>
+    <dgm:txLinClrLst/>
+    <dgm:txFillClrLst meth="repeat">
+      <a:schemeClr val="lt1"/>
+    </dgm:txFillClrLst>
+    <dgm:txEffectClrLst/>
+  </dgm:styleLbl>
+  <dgm:styleLbl name="parChTrans2D2">
+    <dgm:fillClrLst meth="repeat">
+      <a:schemeClr val="accent3"/>
+    </dgm:fillClrLst>
+    <dgm:linClrLst meth="repeat">
+      <a:schemeClr val="lt1"/>
+    </dgm:linClrLst>
+    <dgm:effectClrLst/>
+    <dgm:txLinClrLst/>
+    <dgm:txFillClrLst/>
+    <dgm:txEffectClrLst/>
+  </dgm:styleLbl>
+  <dgm:styleLbl name="parChTrans2D3">
+    <dgm:fillClrLst meth="repeat">
+      <a:schemeClr val="accent4"/>
+    </dgm:fillClrLst>
+    <dgm:linClrLst meth="repeat">
+      <a:schemeClr val="lt1"/>
+    </dgm:linClrLst>
+    <dgm:effectClrLst/>
+    <dgm:txLinClrLst/>
+    <dgm:txFillClrLst/>
+    <dgm:txEffectClrLst/>
+  </dgm:styleLbl>
+  <dgm:styleLbl name="parChTrans2D4">
+    <dgm:fillClrLst meth="repeat">
+      <a:schemeClr val="accent5"/>
+    </dgm:fillClrLst>
+    <dgm:linClrLst meth="repeat">
+      <a:schemeClr val="lt1"/>
+    </dgm:linClrLst>
+    <dgm:effectClrLst/>
+    <dgm:txLinClrLst/>
+    <dgm:txFillClrLst meth="repeat">
+      <a:schemeClr val="lt1"/>
+    </dgm:txFillClrLst>
+    <dgm:txEffectClrLst/>
+  </dgm:styleLbl>
+  <dgm:styleLbl name="parChTrans1D1">
+    <dgm:fillClrLst meth="repeat">
+      <a:schemeClr val="accent2"/>
+    </dgm:fillClrLst>
+    <dgm:linClrLst meth="repeat">
+      <a:schemeClr val="accent1"/>
+    </dgm:linClrLst>
+    <dgm:effectClrLst/>
+    <dgm:txLinClrLst/>
+    <dgm:txFillClrLst meth="repeat">
+      <a:schemeClr val="tx1"/>
+    </dgm:txFillClrLst>
+    <dgm:txEffectClrLst/>
+  </dgm:styleLbl>
+  <dgm:styleLbl name="parChTrans1D2">
+    <dgm:fillClrLst meth="repeat">
+      <a:schemeClr val="accent3">
+        <a:tint val="90000"/>
+      </a:schemeClr>
+    </dgm:fillClrLst>
+    <dgm:linClrLst meth="repeat">
+      <a:schemeClr val="accent2"/>
+    </dgm:linClrLst>
+    <dgm:effectClrLst/>
+    <dgm:txLinClrLst/>
+    <dgm:txFillClrLst meth="repeat">
+      <a:schemeClr val="tx1"/>
+    </dgm:txFillClrLst>
+    <dgm:txEffectClrLst/>
+  </dgm:styleLbl>
+  <dgm:styleLbl name="parChTrans1D3">
+    <dgm:fillClrLst meth="repeat">
+      <a:schemeClr val="accent4">
+        <a:tint val="70000"/>
+      </a:schemeClr>
+    </dgm:fillClrLst>
+    <dgm:linClrLst meth="repeat">
+      <a:schemeClr val="accent3"/>
+    </dgm:linClrLst>
+    <dgm:effectClrLst/>
+    <dgm:txLinClrLst/>
+    <dgm:txFillClrLst meth="repeat">
+      <a:schemeClr val="tx1"/>
+    </dgm:txFillClrLst>
+    <dgm:txEffectClrLst/>
+  </dgm:styleLbl>
+  <dgm:styleLbl name="parChTrans1D4">
+    <dgm:fillClrLst meth="repeat">
+      <a:schemeClr val="accent5">
+        <a:tint val="50000"/>
+      </a:schemeClr>
+    </dgm:fillClrLst>
+    <dgm:linClrLst meth="repeat">
+      <a:schemeClr val="accent4"/>
+    </dgm:linClrLst>
+    <dgm:effectClrLst/>
+    <dgm:txLinClrLst/>
+    <dgm:txFillClrLst meth="repeat">
+      <a:schemeClr val="tx1"/>
+    </dgm:txFillClrLst>
+    <dgm:txEffectClrLst/>
+  </dgm:styleLbl>
+  <dgm:styleLbl name="fgAcc1">
+    <dgm:fillClrLst meth="repeat">
+      <a:schemeClr val="lt1">
+        <a:alpha val="90000"/>
+      </a:schemeClr>
+    </dgm:fillClrLst>
+    <dgm:linClrLst meth="repeat">
+      <a:schemeClr val="accent2"/>
+      <a:schemeClr val="accent3"/>
+      <a:schemeClr val="accent4"/>
+      <a:schemeClr val="accent5"/>
+      <a:schemeClr val="accent6"/>
+    </dgm:linClrLst>
+    <dgm:effectClrLst/>
+    <dgm:txLinClrLst/>
+    <dgm:txFillClrLst meth="repeat">
+      <a:schemeClr val="dk1"/>
+    </dgm:txFillClrLst>
+    <dgm:txEffectClrLst/>
+  </dgm:styleLbl>
+  <dgm:styleLbl name="conFgAcc1">
+    <dgm:fillClrLst meth="repeat">
+      <a:schemeClr val="lt1">
+        <a:alpha val="90000"/>
+      </a:schemeClr>
+    </dgm:fillClrLst>
+    <dgm:linClrLst meth="repeat">
+      <a:schemeClr val="accent2"/>
+      <a:schemeClr val="accent3"/>
+      <a:schemeClr val="accent4"/>
+      <a:schemeClr val="accent5"/>
+      <a:schemeClr val="accent6"/>
+    </dgm:linClrLst>
+    <dgm:effectClrLst/>
+    <dgm:txLinClrLst/>
+    <dgm:txFillClrLst meth="repeat">
+      <a:schemeClr val="dk1"/>
+    </dgm:txFillClrLst>
+    <dgm:txEffectClrLst/>
+  </dgm:styleLbl>
+  <dgm:styleLbl name="alignAcc1">
+    <dgm:fillClrLst meth="repeat">
+      <a:schemeClr val="lt1">
+        <a:alpha val="90000"/>
+      </a:schemeClr>
+    </dgm:fillClrLst>
+    <dgm:linClrLst meth="repeat">
+      <a:schemeClr val="accent2"/>
+      <a:schemeClr val="accent3"/>
+      <a:schemeClr val="accent4"/>
+      <a:schemeClr val="accent5"/>
+      <a:schemeClr val="accent6"/>
+    </dgm:linClrLst>
+    <dgm:effectClrLst/>
+    <dgm:txLinClrLst/>
+    <dgm:txFillClrLst meth="repeat">
+      <a:schemeClr val="dk1"/>
+    </dgm:txFillClrLst>
+    <dgm:txEffectClrLst/>
+  </dgm:styleLbl>
+  <dgm:styleLbl name="trAlignAcc1">
+    <dgm:fillClrLst meth="repeat">
+      <a:schemeClr val="lt1">
+        <a:alpha val="40000"/>
+      </a:schemeClr>
+    </dgm:fillClrLst>
+    <dgm:linClrLst meth="repeat">
+      <a:schemeClr val="accent1"/>
+    </dgm:linClrLst>
+    <dgm:effectClrLst/>
+    <dgm:txLinClrLst/>
+    <dgm:txFillClrLst meth="repeat">
+      <a:schemeClr val="dk1"/>
+    </dgm:txFillClrLst>
+    <dgm:txEffectClrLst/>
+  </dgm:styleLbl>
+  <dgm:styleLbl name="bgAcc1">
+    <dgm:fillClrLst meth="repeat">
+      <a:schemeClr val="lt1">
+        <a:alpha val="90000"/>
+      </a:schemeClr>
+    </dgm:fillClrLst>
+    <dgm:linClrLst meth="repeat">
+      <a:schemeClr val="accent2"/>
+      <a:schemeClr val="accent3"/>
+      <a:schemeClr val="accent4"/>
+      <a:schemeClr val="accent5"/>
+      <a:schemeClr val="accent6"/>
+    </dgm:linClrLst>
+    <dgm:effectClrLst/>
+    <dgm:txLinClrLst/>
+    <dgm:txFillClrLst meth="repeat">
+      <a:schemeClr val="dk1"/>
+    </dgm:txFillClrLst>
+    <dgm:txEffectClrLst/>
+  </dgm:styleLbl>
+  <dgm:styleLbl name="solidFgAcc1">
+    <dgm:fillClrLst meth="repeat">
+      <a:schemeClr val="lt1"/>
+    </dgm:fillClrLst>
+    <dgm:linClrLst meth="repeat">
+      <a:schemeClr val="accent2"/>
+      <a:schemeClr val="accent3"/>
+      <a:schemeClr val="accent4"/>
+      <a:schemeClr val="accent5"/>
+      <a:schemeClr val="accent6"/>
+    </dgm:linClrLst>
+    <dgm:effectClrLst/>
+    <dgm:txLinClrLst/>
+    <dgm:txFillClrLst meth="repeat">
+      <a:schemeClr val="dk1"/>
+    </dgm:txFillClrLst>
+    <dgm:txEffectClrLst/>
+  </dgm:styleLbl>
+  <dgm:styleLbl name="solidAlignAcc1">
+    <dgm:fillClrLst meth="repeat">
+      <a:schemeClr val="lt1"/>
+    </dgm:fillClrLst>
+    <dgm:linClrLst meth="repeat">
+      <a:schemeClr val="accent2"/>
+      <a:schemeClr val="accent3"/>
+      <a:schemeClr val="accent4"/>
+      <a:schemeClr val="accent5"/>
+      <a:schemeClr val="accent6"/>
+    </dgm:linClrLst>
+    <dgm:effectClrLst/>
+    <dgm:txLinClrLst/>
+    <dgm:txFillClrLst meth="repeat">
+      <a:schemeClr val="dk1"/>
+    </dgm:txFillClrLst>
+    <dgm:txEffectClrLst/>
+  </dgm:styleLbl>
+  <dgm:styleLbl name="solidBgAcc1">
+    <dgm:fillClrLst meth="repeat">
+      <a:schemeClr val="lt1"/>
+    </dgm:fillClrLst>
+    <dgm:linClrLst meth="repeat">
+      <a:schemeClr val="accent2"/>
+      <a:schemeClr val="accent3"/>
+      <a:schemeClr val="accent4"/>
+      <a:schemeClr val="accent5"/>
+      <a:schemeClr val="accent6"/>
+    </dgm:linClrLst>
+    <dgm:effectClrLst/>
+    <dgm:txLinClrLst/>
+    <dgm:txFillClrLst meth="repeat">
+      <a:schemeClr val="dk1"/>
+    </dgm:txFillClrLst>
+    <dgm:txEffectClrLst/>
+  </dgm:styleLbl>
+  <dgm:styleLbl name="fgAccFollowNode1">
+    <dgm:fillClrLst meth="repeat">
+      <a:schemeClr val="accent2">
+        <a:tint val="40000"/>
+        <a:alpha val="90000"/>
+      </a:schemeClr>
+      <a:schemeClr val="accent3">
+        <a:tint val="40000"/>
+        <a:alpha val="90000"/>
+      </a:schemeClr>
+      <a:schemeClr val="accent4">
+        <a:tint val="40000"/>
+        <a:alpha val="90000"/>
+      </a:schemeClr>
+      <a:schemeClr val="accent5">
+        <a:tint val="40000"/>
+        <a:alpha val="90000"/>
+      </a:schemeClr>
+      <a:schemeClr val="accent6">
+        <a:tint val="40000"/>
+        <a:alpha val="90000"/>
+      </a:schemeClr>
+    </dgm:fillClrLst>
+    <dgm:linClrLst meth="repeat">
+      <a:schemeClr val="accent2">
+        <a:tint val="40000"/>
+        <a:alpha val="90000"/>
+      </a:schemeClr>
+      <a:schemeClr val="accent3">
+        <a:tint val="40000"/>
+        <a:alpha val="90000"/>
+      </a:schemeClr>
+      <a:schemeClr val="accent4">
+        <a:tint val="40000"/>
+        <a:alpha val="90000"/>
+      </a:schemeClr>
+      <a:schemeClr val="accent5">
+        <a:tint val="40000"/>
+        <a:alpha val="90000"/>
+      </a:schemeClr>
+      <a:schemeClr val="accent6">
+        <a:tint val="40000"/>
+        <a:alpha val="90000"/>
+      </a:schemeClr>
+    </dgm:linClrLst>
+    <dgm:effectClrLst/>
+    <dgm:txLinClrLst/>
+    <dgm:txFillClrLst meth="repeat">
+      <a:schemeClr val="dk1"/>
+    </dgm:txFillClrLst>
+    <dgm:txEffectClrLst/>
+  </dgm:styleLbl>
+  <dgm:styleLbl name="alignAccFollowNode1">
+    <dgm:fillClrLst meth="repeat">
+      <a:schemeClr val="accent2">
+        <a:tint val="40000"/>
+        <a:alpha val="90000"/>
+      </a:schemeClr>
+      <a:schemeClr val="accent3">
+        <a:tint val="40000"/>
+        <a:alpha val="90000"/>
+      </a:schemeClr>
+      <a:schemeClr val="accent4">
+        <a:tint val="40000"/>
+        <a:alpha val="90000"/>
+      </a:schemeClr>
+      <a:schemeClr val="accent5">
+        <a:tint val="40000"/>
+        <a:alpha val="90000"/>
+      </a:schemeClr>
+      <a:schemeClr val="accent6">
+        <a:tint val="40000"/>
+        <a:alpha val="90000"/>
+      </a:schemeClr>
+    </dgm:fillClrLst>
+    <dgm:linClrLst meth="repeat">
+      <a:schemeClr val="accent2">
+        <a:tint val="40000"/>
+        <a:alpha val="90000"/>
+      </a:schemeClr>
+      <a:schemeClr val="accent3">
+        <a:tint val="40000"/>
+        <a:alpha val="90000"/>
+      </a:schemeClr>
+      <a:schemeClr val="accent4">
+        <a:tint val="40000"/>
+        <a:alpha val="90000"/>
+      </a:schemeClr>
+      <a:schemeClr val="accent5">
+        <a:tint val="40000"/>
+        <a:alpha val="90000"/>
+      </a:schemeClr>
+      <a:schemeClr val="accent6">
+        <a:tint val="40000"/>
+        <a:alpha val="90000"/>
+      </a:schemeClr>
+    </dgm:linClrLst>
+    <dgm:effectClrLst/>
+    <dgm:txLinClrLst/>
+    <dgm:txFillClrLst meth="repeat">
+      <a:schemeClr val="dk1"/>
+    </dgm:txFillClrLst>
+    <dgm:txEffectClrLst/>
+  </dgm:styleLbl>
+  <dgm:styleLbl name="bgAccFollowNode1">
+    <dgm:fillClrLst meth="repeat">
+      <a:schemeClr val="accent2">
+        <a:tint val="40000"/>
+        <a:alpha val="90000"/>
+      </a:schemeClr>
+      <a:schemeClr val="accent3">
+        <a:tint val="40000"/>
+        <a:alpha val="90000"/>
+      </a:schemeClr>
+      <a:schemeClr val="accent4">
+        <a:tint val="40000"/>
+        <a:alpha val="90000"/>
+      </a:schemeClr>
+      <a:schemeClr val="accent5">
+        <a:tint val="40000"/>
+        <a:alpha val="90000"/>
+      </a:schemeClr>
+      <a:schemeClr val="accent6">
+        <a:tint val="40000"/>
+        <a:alpha val="90000"/>
+      </a:schemeClr>
+    </dgm:fillClrLst>
+    <dgm:linClrLst meth="repeat">
+      <a:schemeClr val="accent2">
+        <a:tint val="40000"/>
+        <a:alpha val="90000"/>
+      </a:schemeClr>
+      <a:schemeClr val="accent3">
+        <a:tint val="40000"/>
+        <a:alpha val="90000"/>
+      </a:schemeClr>
+      <a:schemeClr val="accent4">
+        <a:tint val="40000"/>
+        <a:alpha val="90000"/>
+      </a:schemeClr>
+      <a:schemeClr val="accent5">
+        <a:tint val="40000"/>
+        <a:alpha val="90000"/>
+      </a:schemeClr>
+      <a:schemeClr val="accent6">
+        <a:tint val="40000"/>
+        <a:alpha val="90000"/>
+      </a:schemeClr>
+    </dgm:linClrLst>
+    <dgm:effectClrLst/>
+    <dgm:txLinClrLst/>
+    <dgm:txFillClrLst meth="repeat">
+      <a:schemeClr val="dk1"/>
+    </dgm:txFillClrLst>
+    <dgm:txEffectClrLst/>
+  </dgm:styleLbl>
+  <dgm:styleLbl name="fgAcc0">
+    <dgm:fillClrLst meth="repeat">
+      <a:schemeClr val="lt1">
+        <a:alpha val="90000"/>
+      </a:schemeClr>
+    </dgm:fillClrLst>
+    <dgm:linClrLst>
+      <a:schemeClr val="accent1"/>
+    </dgm:linClrLst>
+    <dgm:effectClrLst/>
+    <dgm:txLinClrLst/>
+    <dgm:txFillClrLst meth="repeat">
+      <a:schemeClr val="dk1"/>
+    </dgm:txFillClrLst>
+    <dgm:txEffectClrLst/>
+  </dgm:styleLbl>
+  <dgm:styleLbl name="fgAcc2">
+    <dgm:fillClrLst meth="repeat">
+      <a:schemeClr val="lt1">
+        <a:alpha val="90000"/>
+      </a:schemeClr>
+    </dgm:fillClrLst>
+    <dgm:linClrLst>
+      <a:schemeClr val="accent2"/>
+    </dgm:linClrLst>
+    <dgm:effectClrLst/>
+    <dgm:txLinClrLst/>
+    <dgm:txFillClrLst meth="repeat">
+      <a:schemeClr val="dk1"/>
+    </dgm:txFillClrLst>
+    <dgm:txEffectClrLst/>
+  </dgm:styleLbl>
+  <dgm:styleLbl name="fgAcc3">
+    <dgm:fillClrLst meth="repeat">
+      <a:schemeClr val="lt1">
+        <a:alpha val="90000"/>
+      </a:schemeClr>
+    </dgm:fillClrLst>
+    <dgm:linClrLst>
+      <a:schemeClr val="accent3"/>
+    </dgm:linClrLst>
+    <dgm:effectClrLst/>
+    <dgm:txLinClrLst/>
+    <dgm:txFillClrLst meth="repeat">
+      <a:schemeClr val="dk1"/>
+    </dgm:txFillClrLst>
+    <dgm:txEffectClrLst/>
+  </dgm:styleLbl>
+  <dgm:styleLbl name="fgAcc4">
+    <dgm:fillClrLst meth="repeat">
+      <a:schemeClr val="lt1">
+        <a:alpha val="90000"/>
+      </a:schemeClr>
+    </dgm:fillClrLst>
+    <dgm:linClrLst>
+      <a:schemeClr val="accent4"/>
+    </dgm:linClrLst>
+    <dgm:effectClrLst/>
+    <dgm:txLinClrLst/>
+    <dgm:txFillClrLst meth="repeat">
+      <a:schemeClr val="dk1"/>
+    </dgm:txFillClrLst>
+    <dgm:txEffectClrLst/>
+  </dgm:styleLbl>
+  <dgm:styleLbl name="bgShp">
+    <dgm:fillClrLst meth="repeat">
+      <a:schemeClr val="bg1">
+        <a:lumMod val="95000"/>
+      </a:schemeClr>
+    </dgm:fillClrLst>
+    <dgm:linClrLst meth="repeat">
+      <a:schemeClr val="dk1"/>
+    </dgm:linClrLst>
+    <dgm:effectClrLst/>
+    <dgm:txLinClrLst/>
+    <dgm:txFillClrLst meth="repeat">
+      <a:schemeClr val="dk1"/>
+    </dgm:txFillClrLst>
+    <dgm:txEffectClrLst/>
+  </dgm:styleLbl>
+  <dgm:styleLbl name="dkBgShp">
+    <dgm:fillClrLst meth="repeat">
+      <a:schemeClr val="accent2">
+        <a:shade val="90000"/>
+      </a:schemeClr>
+    </dgm:fillClrLst>
+    <dgm:linClrLst meth="repeat">
+      <a:schemeClr val="dk1"/>
+    </dgm:linClrLst>
+    <dgm:effectClrLst/>
+    <dgm:txLinClrLst/>
+    <dgm:txFillClrLst meth="repeat">
+      <a:schemeClr val="lt1"/>
+    </dgm:txFillClrLst>
+    <dgm:txEffectClrLst/>
+  </dgm:styleLbl>
+  <dgm:styleLbl name="trBgShp">
+    <dgm:fillClrLst meth="repeat">
+      <a:schemeClr val="accent1">
+        <a:tint val="50000"/>
+        <a:alpha val="40000"/>
+      </a:schemeClr>
+    </dgm:fillClrLst>
+    <dgm:linClrLst meth="repeat">
+      <a:schemeClr val="accent2"/>
+    </dgm:linClrLst>
+    <dgm:effectClrLst/>
+    <dgm:txLinClrLst/>
+    <dgm:txFillClrLst meth="repeat">
+      <a:schemeClr val="lt1"/>
+    </dgm:txFillClrLst>
+    <dgm:txEffectClrLst/>
+  </dgm:styleLbl>
+  <dgm:styleLbl name="fgShp">
+    <dgm:fillClrLst meth="repeat">
+      <a:schemeClr val="accent2">
+        <a:tint val="40000"/>
+      </a:schemeClr>
+    </dgm:fillClrLst>
+    <dgm:linClrLst meth="repeat">
+      <a:schemeClr val="lt1"/>
+    </dgm:linClrLst>
+    <dgm:effectClrLst/>
+    <dgm:txLinClrLst/>
+    <dgm:txFillClrLst meth="repeat">
+      <a:schemeClr val="dk1"/>
+    </dgm:txFillClrLst>
+    <dgm:txEffectClrLst/>
+  </dgm:styleLbl>
+  <dgm:styleLbl name="revTx">
+    <dgm:fillClrLst meth="repeat">
+      <a:schemeClr val="lt1">
+        <a:alpha val="0"/>
+      </a:schemeClr>
+    </dgm:fillClrLst>
+    <dgm:linClrLst meth="repeat">
+      <a:schemeClr val="dk1">
+        <a:alpha val="0"/>
+      </a:schemeClr>
+    </dgm:linClrLst>
+    <dgm:effectClrLst/>
+    <dgm:txLinClrLst/>
+    <dgm:txFillClrLst meth="repeat">
+      <a:schemeClr val="tx1"/>
+    </dgm:txFillClrLst>
+    <dgm:txEffectClrLst/>
+  </dgm:styleLbl>
+</dgm:colorsDef>
+</file>
+
+<file path=ppt/diagrams/colors6.xml><?xml version="1.0" encoding="utf-8"?>
 <dgm:colorsDef xmlns:dgm="http://schemas.openxmlformats.org/drawingml/2006/diagram" xmlns:a="http://schemas.openxmlformats.org/drawingml/2006/main" uniqueId="urn:microsoft.com/office/officeart/2018/5/colors/Iconchunking_neutralbg_colorful1">
   <dgm:title val=""/>
   <dgm:desc val=""/>
@@ -4743,6 +6447,285 @@
 <file path=ppt/diagrams/data4.xml><?xml version="1.0" encoding="utf-8"?>
 <dgm:dataModel xmlns:dgm="http://schemas.openxmlformats.org/drawingml/2006/diagram" xmlns:a="http://schemas.openxmlformats.org/drawingml/2006/main">
   <dgm:ptLst>
+    <dgm:pt modelId="{9A154FCC-F7BC-433E-8286-9C8779422EFF}" type="doc">
+      <dgm:prSet loTypeId="urn:microsoft.com/office/officeart/2005/8/layout/vProcess5" loCatId="process" qsTypeId="urn:microsoft.com/office/officeart/2005/8/quickstyle/simple1" qsCatId="simple" csTypeId="urn:microsoft.com/office/officeart/2005/8/colors/colorful2" csCatId="colorful"/>
+      <dgm:spPr/>
+      <dgm:t>
+        <a:bodyPr/>
+        <a:lstStyle/>
+        <a:p>
+          <a:endParaRPr lang="en-US"/>
+        </a:p>
+      </dgm:t>
+    </dgm:pt>
+    <dgm:pt modelId="{64D92B8F-041D-47A3-A61B-DE159B9769F7}">
+      <dgm:prSet/>
+      <dgm:spPr/>
+      <dgm:t>
+        <a:bodyPr/>
+        <a:lstStyle/>
+        <a:p>
+          <a:r>
+            <a:rPr lang="en-GB"/>
+            <a:t>From experience, most students love to be competitive</a:t>
+          </a:r>
+          <a:endParaRPr lang="en-US"/>
+        </a:p>
+      </dgm:t>
+    </dgm:pt>
+    <dgm:pt modelId="{FB2A5306-93E1-47EB-8618-09F64C926F1C}" type="parTrans" cxnId="{1B05A994-C212-4319-9CF3-57F465FDD6C1}">
+      <dgm:prSet/>
+      <dgm:spPr/>
+      <dgm:t>
+        <a:bodyPr/>
+        <a:lstStyle/>
+        <a:p>
+          <a:endParaRPr lang="en-US"/>
+        </a:p>
+      </dgm:t>
+    </dgm:pt>
+    <dgm:pt modelId="{F3E081EA-C7C6-4C02-8A94-B40621CFF94F}" type="sibTrans" cxnId="{1B05A994-C212-4319-9CF3-57F465FDD6C1}">
+      <dgm:prSet/>
+      <dgm:spPr/>
+      <dgm:t>
+        <a:bodyPr/>
+        <a:lstStyle/>
+        <a:p>
+          <a:endParaRPr lang="en-US"/>
+        </a:p>
+      </dgm:t>
+    </dgm:pt>
+    <dgm:pt modelId="{F64F6D7A-C916-4F82-8D3E-F4570BEF3224}">
+      <dgm:prSet/>
+      <dgm:spPr/>
+      <dgm:t>
+        <a:bodyPr/>
+        <a:lstStyle/>
+        <a:p>
+          <a:r>
+            <a:rPr lang="en-GB"/>
+            <a:t>Especially where prizes are involved!</a:t>
+          </a:r>
+          <a:endParaRPr lang="en-US"/>
+        </a:p>
+      </dgm:t>
+    </dgm:pt>
+    <dgm:pt modelId="{CDD4E0F5-CCFE-4640-B897-8FD94C9BEE97}" type="parTrans" cxnId="{C3D80247-C3E6-45C7-A0CB-51A4AEDB0524}">
+      <dgm:prSet/>
+      <dgm:spPr/>
+      <dgm:t>
+        <a:bodyPr/>
+        <a:lstStyle/>
+        <a:p>
+          <a:endParaRPr lang="en-US"/>
+        </a:p>
+      </dgm:t>
+    </dgm:pt>
+    <dgm:pt modelId="{D8B361BF-99DD-408A-BD49-AEAD524FF887}" type="sibTrans" cxnId="{C3D80247-C3E6-45C7-A0CB-51A4AEDB0524}">
+      <dgm:prSet/>
+      <dgm:spPr/>
+      <dgm:t>
+        <a:bodyPr/>
+        <a:lstStyle/>
+        <a:p>
+          <a:endParaRPr lang="en-US"/>
+        </a:p>
+      </dgm:t>
+    </dgm:pt>
+    <dgm:pt modelId="{6792DDA2-E2A4-4659-95B3-4C520AF96DD9}">
+      <dgm:prSet/>
+      <dgm:spPr/>
+      <dgm:t>
+        <a:bodyPr/>
+        <a:lstStyle/>
+        <a:p>
+          <a:r>
+            <a:rPr lang="en-GB" dirty="0"/>
+            <a:t>Knowing they lose marks for each wrong attempt, students would want to achieve maximum marks on the first attempt.</a:t>
+          </a:r>
+          <a:endParaRPr lang="en-US" dirty="0"/>
+        </a:p>
+      </dgm:t>
+    </dgm:pt>
+    <dgm:pt modelId="{9B6885AF-D371-49E2-9675-00863F251804}" type="parTrans" cxnId="{639BAF6C-4948-4C03-B856-3C14F6013EAD}">
+      <dgm:prSet/>
+      <dgm:spPr/>
+      <dgm:t>
+        <a:bodyPr/>
+        <a:lstStyle/>
+        <a:p>
+          <a:endParaRPr lang="en-US"/>
+        </a:p>
+      </dgm:t>
+    </dgm:pt>
+    <dgm:pt modelId="{56256B3A-7AC1-485A-B763-FB6C0F03A8D9}" type="sibTrans" cxnId="{639BAF6C-4948-4C03-B856-3C14F6013EAD}">
+      <dgm:prSet/>
+      <dgm:spPr/>
+      <dgm:t>
+        <a:bodyPr/>
+        <a:lstStyle/>
+        <a:p>
+          <a:endParaRPr lang="en-US"/>
+        </a:p>
+      </dgm:t>
+    </dgm:pt>
+    <dgm:pt modelId="{DFCBD210-78FF-46C9-8FD4-2882BC2CB2AB}">
+      <dgm:prSet/>
+      <dgm:spPr/>
+      <dgm:t>
+        <a:bodyPr/>
+        <a:lstStyle/>
+        <a:p>
+          <a:r>
+            <a:rPr lang="en-GB"/>
+            <a:t>More marks = Higher Ranking</a:t>
+          </a:r>
+          <a:endParaRPr lang="en-US"/>
+        </a:p>
+      </dgm:t>
+    </dgm:pt>
+    <dgm:pt modelId="{987D6880-CE59-4C0F-9833-F9B14A530ECB}" type="parTrans" cxnId="{5F7122D2-1BA3-4E2B-B17D-A063FBC3B91A}">
+      <dgm:prSet/>
+      <dgm:spPr/>
+      <dgm:t>
+        <a:bodyPr/>
+        <a:lstStyle/>
+        <a:p>
+          <a:endParaRPr lang="en-US"/>
+        </a:p>
+      </dgm:t>
+    </dgm:pt>
+    <dgm:pt modelId="{C0CD4DB3-F4BC-4EC0-A49A-877821195F5E}" type="sibTrans" cxnId="{5F7122D2-1BA3-4E2B-B17D-A063FBC3B91A}">
+      <dgm:prSet/>
+      <dgm:spPr/>
+      <dgm:t>
+        <a:bodyPr/>
+        <a:lstStyle/>
+        <a:p>
+          <a:endParaRPr lang="en-US"/>
+        </a:p>
+      </dgm:t>
+    </dgm:pt>
+    <dgm:pt modelId="{E969AF97-1DDD-4FE0-AF24-7A113D3D67EF}" type="pres">
+      <dgm:prSet presAssocID="{9A154FCC-F7BC-433E-8286-9C8779422EFF}" presName="outerComposite" presStyleCnt="0">
+        <dgm:presLayoutVars>
+          <dgm:chMax val="5"/>
+          <dgm:dir/>
+          <dgm:resizeHandles val="exact"/>
+        </dgm:presLayoutVars>
+      </dgm:prSet>
+      <dgm:spPr/>
+    </dgm:pt>
+    <dgm:pt modelId="{FEDDB030-D7EA-494E-982A-EE008BE0FED1}" type="pres">
+      <dgm:prSet presAssocID="{9A154FCC-F7BC-433E-8286-9C8779422EFF}" presName="dummyMaxCanvas" presStyleCnt="0">
+        <dgm:presLayoutVars/>
+      </dgm:prSet>
+      <dgm:spPr/>
+    </dgm:pt>
+    <dgm:pt modelId="{26AF844E-CAFF-4913-BD11-636489651B91}" type="pres">
+      <dgm:prSet presAssocID="{9A154FCC-F7BC-433E-8286-9C8779422EFF}" presName="ThreeNodes_1" presStyleLbl="node1" presStyleIdx="0" presStyleCnt="3">
+        <dgm:presLayoutVars>
+          <dgm:bulletEnabled val="1"/>
+        </dgm:presLayoutVars>
+      </dgm:prSet>
+      <dgm:spPr/>
+    </dgm:pt>
+    <dgm:pt modelId="{2E70A53F-8E51-4521-BDC9-463C9E8BC83E}" type="pres">
+      <dgm:prSet presAssocID="{9A154FCC-F7BC-433E-8286-9C8779422EFF}" presName="ThreeNodes_2" presStyleLbl="node1" presStyleIdx="1" presStyleCnt="3">
+        <dgm:presLayoutVars>
+          <dgm:bulletEnabled val="1"/>
+        </dgm:presLayoutVars>
+      </dgm:prSet>
+      <dgm:spPr/>
+    </dgm:pt>
+    <dgm:pt modelId="{1BCC9E10-8145-493F-9ECE-55E4447FA84E}" type="pres">
+      <dgm:prSet presAssocID="{9A154FCC-F7BC-433E-8286-9C8779422EFF}" presName="ThreeNodes_3" presStyleLbl="node1" presStyleIdx="2" presStyleCnt="3">
+        <dgm:presLayoutVars>
+          <dgm:bulletEnabled val="1"/>
+        </dgm:presLayoutVars>
+      </dgm:prSet>
+      <dgm:spPr/>
+    </dgm:pt>
+    <dgm:pt modelId="{272E2289-B570-4380-969C-20F884F6C461}" type="pres">
+      <dgm:prSet presAssocID="{9A154FCC-F7BC-433E-8286-9C8779422EFF}" presName="ThreeConn_1-2" presStyleLbl="fgAccFollowNode1" presStyleIdx="0" presStyleCnt="2">
+        <dgm:presLayoutVars>
+          <dgm:bulletEnabled val="1"/>
+        </dgm:presLayoutVars>
+      </dgm:prSet>
+      <dgm:spPr/>
+    </dgm:pt>
+    <dgm:pt modelId="{ABB29D5E-F11F-484E-8ED5-19D5EC278A22}" type="pres">
+      <dgm:prSet presAssocID="{9A154FCC-F7BC-433E-8286-9C8779422EFF}" presName="ThreeConn_2-3" presStyleLbl="fgAccFollowNode1" presStyleIdx="1" presStyleCnt="2">
+        <dgm:presLayoutVars>
+          <dgm:bulletEnabled val="1"/>
+        </dgm:presLayoutVars>
+      </dgm:prSet>
+      <dgm:spPr/>
+    </dgm:pt>
+    <dgm:pt modelId="{A1BBEEE1-8D1C-47BA-9FF2-87B286640B18}" type="pres">
+      <dgm:prSet presAssocID="{9A154FCC-F7BC-433E-8286-9C8779422EFF}" presName="ThreeNodes_1_text" presStyleLbl="node1" presStyleIdx="2" presStyleCnt="3">
+        <dgm:presLayoutVars>
+          <dgm:bulletEnabled val="1"/>
+        </dgm:presLayoutVars>
+      </dgm:prSet>
+      <dgm:spPr/>
+    </dgm:pt>
+    <dgm:pt modelId="{9F2CC115-60A6-4BD5-B4FE-F592B25BFB80}" type="pres">
+      <dgm:prSet presAssocID="{9A154FCC-F7BC-433E-8286-9C8779422EFF}" presName="ThreeNodes_2_text" presStyleLbl="node1" presStyleIdx="2" presStyleCnt="3">
+        <dgm:presLayoutVars>
+          <dgm:bulletEnabled val="1"/>
+        </dgm:presLayoutVars>
+      </dgm:prSet>
+      <dgm:spPr/>
+    </dgm:pt>
+    <dgm:pt modelId="{47C24E24-01BC-4691-8006-04ABBB8D4DDE}" type="pres">
+      <dgm:prSet presAssocID="{9A154FCC-F7BC-433E-8286-9C8779422EFF}" presName="ThreeNodes_3_text" presStyleLbl="node1" presStyleIdx="2" presStyleCnt="3">
+        <dgm:presLayoutVars>
+          <dgm:bulletEnabled val="1"/>
+        </dgm:presLayoutVars>
+      </dgm:prSet>
+      <dgm:spPr/>
+    </dgm:pt>
+  </dgm:ptLst>
+  <dgm:cxnLst>
+    <dgm:cxn modelId="{48107701-DAC9-4A3F-8902-99CE2B1ED2E9}" type="presOf" srcId="{DFCBD210-78FF-46C9-8FD4-2882BC2CB2AB}" destId="{47C24E24-01BC-4691-8006-04ABBB8D4DDE}" srcOrd="1" destOrd="0" presId="urn:microsoft.com/office/officeart/2005/8/layout/vProcess5"/>
+    <dgm:cxn modelId="{DD3BC507-4C8C-488D-B8BC-D159BD99D9A5}" type="presOf" srcId="{64D92B8F-041D-47A3-A61B-DE159B9769F7}" destId="{A1BBEEE1-8D1C-47BA-9FF2-87B286640B18}" srcOrd="1" destOrd="0" presId="urn:microsoft.com/office/officeart/2005/8/layout/vProcess5"/>
+    <dgm:cxn modelId="{49C75311-60F4-445F-AF94-93D58D9C59F9}" type="presOf" srcId="{9A154FCC-F7BC-433E-8286-9C8779422EFF}" destId="{E969AF97-1DDD-4FE0-AF24-7A113D3D67EF}" srcOrd="0" destOrd="0" presId="urn:microsoft.com/office/officeart/2005/8/layout/vProcess5"/>
+    <dgm:cxn modelId="{E17E4523-7ED4-40FD-8373-805ACD5E82F0}" type="presOf" srcId="{F64F6D7A-C916-4F82-8D3E-F4570BEF3224}" destId="{A1BBEEE1-8D1C-47BA-9FF2-87B286640B18}" srcOrd="1" destOrd="1" presId="urn:microsoft.com/office/officeart/2005/8/layout/vProcess5"/>
+    <dgm:cxn modelId="{8504202D-2A80-415F-A73B-29744499DA09}" type="presOf" srcId="{64D92B8F-041D-47A3-A61B-DE159B9769F7}" destId="{26AF844E-CAFF-4913-BD11-636489651B91}" srcOrd="0" destOrd="0" presId="urn:microsoft.com/office/officeart/2005/8/layout/vProcess5"/>
+    <dgm:cxn modelId="{B1D9935E-C6A7-4D9D-8902-7D834F265DE5}" type="presOf" srcId="{6792DDA2-E2A4-4659-95B3-4C520AF96DD9}" destId="{2E70A53F-8E51-4521-BDC9-463C9E8BC83E}" srcOrd="0" destOrd="0" presId="urn:microsoft.com/office/officeart/2005/8/layout/vProcess5"/>
+    <dgm:cxn modelId="{C3D80247-C3E6-45C7-A0CB-51A4AEDB0524}" srcId="{64D92B8F-041D-47A3-A61B-DE159B9769F7}" destId="{F64F6D7A-C916-4F82-8D3E-F4570BEF3224}" srcOrd="0" destOrd="0" parTransId="{CDD4E0F5-CCFE-4640-B897-8FD94C9BEE97}" sibTransId="{D8B361BF-99DD-408A-BD49-AEAD524FF887}"/>
+    <dgm:cxn modelId="{639BAF6C-4948-4C03-B856-3C14F6013EAD}" srcId="{9A154FCC-F7BC-433E-8286-9C8779422EFF}" destId="{6792DDA2-E2A4-4659-95B3-4C520AF96DD9}" srcOrd="1" destOrd="0" parTransId="{9B6885AF-D371-49E2-9675-00863F251804}" sibTransId="{56256B3A-7AC1-485A-B763-FB6C0F03A8D9}"/>
+    <dgm:cxn modelId="{2E123B6D-0B95-487D-A99A-39C7773B85F2}" type="presOf" srcId="{6792DDA2-E2A4-4659-95B3-4C520AF96DD9}" destId="{9F2CC115-60A6-4BD5-B4FE-F592B25BFB80}" srcOrd="1" destOrd="0" presId="urn:microsoft.com/office/officeart/2005/8/layout/vProcess5"/>
+    <dgm:cxn modelId="{8B7E1B8A-7064-414B-8C97-ED47C9FCD15A}" type="presOf" srcId="{F3E081EA-C7C6-4C02-8A94-B40621CFF94F}" destId="{272E2289-B570-4380-969C-20F884F6C461}" srcOrd="0" destOrd="0" presId="urn:microsoft.com/office/officeart/2005/8/layout/vProcess5"/>
+    <dgm:cxn modelId="{C0D5748D-6BBA-4F20-B9D6-C4932048318E}" type="presOf" srcId="{DFCBD210-78FF-46C9-8FD4-2882BC2CB2AB}" destId="{1BCC9E10-8145-493F-9ECE-55E4447FA84E}" srcOrd="0" destOrd="0" presId="urn:microsoft.com/office/officeart/2005/8/layout/vProcess5"/>
+    <dgm:cxn modelId="{89D16A8F-2B79-42AF-8CA8-BFEA240A47D6}" type="presOf" srcId="{56256B3A-7AC1-485A-B763-FB6C0F03A8D9}" destId="{ABB29D5E-F11F-484E-8ED5-19D5EC278A22}" srcOrd="0" destOrd="0" presId="urn:microsoft.com/office/officeart/2005/8/layout/vProcess5"/>
+    <dgm:cxn modelId="{1B05A994-C212-4319-9CF3-57F465FDD6C1}" srcId="{9A154FCC-F7BC-433E-8286-9C8779422EFF}" destId="{64D92B8F-041D-47A3-A61B-DE159B9769F7}" srcOrd="0" destOrd="0" parTransId="{FB2A5306-93E1-47EB-8618-09F64C926F1C}" sibTransId="{F3E081EA-C7C6-4C02-8A94-B40621CFF94F}"/>
+    <dgm:cxn modelId="{5F7122D2-1BA3-4E2B-B17D-A063FBC3B91A}" srcId="{9A154FCC-F7BC-433E-8286-9C8779422EFF}" destId="{DFCBD210-78FF-46C9-8FD4-2882BC2CB2AB}" srcOrd="2" destOrd="0" parTransId="{987D6880-CE59-4C0F-9833-F9B14A530ECB}" sibTransId="{C0CD4DB3-F4BC-4EC0-A49A-877821195F5E}"/>
+    <dgm:cxn modelId="{BEDAC8D8-0317-41FB-B9C1-BC49C1177A39}" type="presOf" srcId="{F64F6D7A-C916-4F82-8D3E-F4570BEF3224}" destId="{26AF844E-CAFF-4913-BD11-636489651B91}" srcOrd="0" destOrd="1" presId="urn:microsoft.com/office/officeart/2005/8/layout/vProcess5"/>
+    <dgm:cxn modelId="{1EF2B334-7596-47F5-82D8-B373842D2C0C}" type="presParOf" srcId="{E969AF97-1DDD-4FE0-AF24-7A113D3D67EF}" destId="{FEDDB030-D7EA-494E-982A-EE008BE0FED1}" srcOrd="0" destOrd="0" presId="urn:microsoft.com/office/officeart/2005/8/layout/vProcess5"/>
+    <dgm:cxn modelId="{139EA5E1-FDB6-4593-B4B7-5D675521AA9D}" type="presParOf" srcId="{E969AF97-1DDD-4FE0-AF24-7A113D3D67EF}" destId="{26AF844E-CAFF-4913-BD11-636489651B91}" srcOrd="1" destOrd="0" presId="urn:microsoft.com/office/officeart/2005/8/layout/vProcess5"/>
+    <dgm:cxn modelId="{7B1C84AA-F5C7-4B3E-B20C-CBA29C3B5994}" type="presParOf" srcId="{E969AF97-1DDD-4FE0-AF24-7A113D3D67EF}" destId="{2E70A53F-8E51-4521-BDC9-463C9E8BC83E}" srcOrd="2" destOrd="0" presId="urn:microsoft.com/office/officeart/2005/8/layout/vProcess5"/>
+    <dgm:cxn modelId="{2F519B1C-8A23-48AE-BCB8-07D84A342BA4}" type="presParOf" srcId="{E969AF97-1DDD-4FE0-AF24-7A113D3D67EF}" destId="{1BCC9E10-8145-493F-9ECE-55E4447FA84E}" srcOrd="3" destOrd="0" presId="urn:microsoft.com/office/officeart/2005/8/layout/vProcess5"/>
+    <dgm:cxn modelId="{4127464A-9135-4A8A-B1D7-96AC16610198}" type="presParOf" srcId="{E969AF97-1DDD-4FE0-AF24-7A113D3D67EF}" destId="{272E2289-B570-4380-969C-20F884F6C461}" srcOrd="4" destOrd="0" presId="urn:microsoft.com/office/officeart/2005/8/layout/vProcess5"/>
+    <dgm:cxn modelId="{CAF5B72C-909C-4573-B1BC-9C527BF3E828}" type="presParOf" srcId="{E969AF97-1DDD-4FE0-AF24-7A113D3D67EF}" destId="{ABB29D5E-F11F-484E-8ED5-19D5EC278A22}" srcOrd="5" destOrd="0" presId="urn:microsoft.com/office/officeart/2005/8/layout/vProcess5"/>
+    <dgm:cxn modelId="{1AA60907-BDDB-43D6-99E4-017FD1D413CE}" type="presParOf" srcId="{E969AF97-1DDD-4FE0-AF24-7A113D3D67EF}" destId="{A1BBEEE1-8D1C-47BA-9FF2-87B286640B18}" srcOrd="6" destOrd="0" presId="urn:microsoft.com/office/officeart/2005/8/layout/vProcess5"/>
+    <dgm:cxn modelId="{9895C7F2-BD59-46F1-A0A2-1D4BABD0F6E5}" type="presParOf" srcId="{E969AF97-1DDD-4FE0-AF24-7A113D3D67EF}" destId="{9F2CC115-60A6-4BD5-B4FE-F592B25BFB80}" srcOrd="7" destOrd="0" presId="urn:microsoft.com/office/officeart/2005/8/layout/vProcess5"/>
+    <dgm:cxn modelId="{E434A764-BD0E-4C83-97CD-D4BD7CA33769}" type="presParOf" srcId="{E969AF97-1DDD-4FE0-AF24-7A113D3D67EF}" destId="{47C24E24-01BC-4691-8006-04ABBB8D4DDE}" srcOrd="8" destOrd="0" presId="urn:microsoft.com/office/officeart/2005/8/layout/vProcess5"/>
+  </dgm:cxnLst>
+  <dgm:bg/>
+  <dgm:whole/>
+  <dgm:extLst>
+    <a:ext uri="http://schemas.microsoft.com/office/drawing/2008/diagram">
+      <dsp:dataModelExt xmlns:dsp="http://schemas.microsoft.com/office/drawing/2008/diagram" relId="rId6" minVer="http://schemas.openxmlformats.org/drawingml/2006/diagram"/>
+    </a:ext>
+  </dgm:extLst>
+</dgm:dataModel>
+</file>
+
+<file path=ppt/diagrams/data5.xml><?xml version="1.0" encoding="utf-8"?>
+<dgm:dataModel xmlns:dgm="http://schemas.openxmlformats.org/drawingml/2006/diagram" xmlns:a="http://schemas.openxmlformats.org/drawingml/2006/main">
+  <dgm:ptLst>
     <dgm:pt modelId="{6A17CC41-FC32-4CB5-BB93-0BB5DA613293}" type="doc">
       <dgm:prSet loTypeId="urn:microsoft.com/office/officeart/2018/5/layout/CenteredIconLabelDescriptionList" loCatId="icon" qsTypeId="urn:microsoft.com/office/officeart/2005/8/quickstyle/simple1" qsCatId="simple" csTypeId="urn:microsoft.com/office/officeart/2018/5/colors/Iconchunking_neutralbg_colorful1" csCatId="colorful" phldr="1"/>
       <dgm:spPr/>
@@ -4916,10 +6899,10 @@
             <a:defRPr b="1"/>
           </a:pPr>
           <a:r>
-            <a:rPr lang="en-GB"/>
+            <a:rPr lang="en-GB" dirty="0"/>
             <a:t>Pending</a:t>
           </a:r>
-          <a:endParaRPr lang="en-US"/>
+          <a:endParaRPr lang="en-US" dirty="0"/>
         </a:p>
       </dgm:t>
     </dgm:pt>
@@ -5104,10 +7087,10 @@
             <a:defRPr b="1"/>
           </a:pPr>
           <a:r>
-            <a:rPr lang="en-GB"/>
+            <a:rPr lang="en-GB" dirty="0"/>
             <a:t>Potentially</a:t>
           </a:r>
-          <a:endParaRPr lang="en-US"/>
+          <a:endParaRPr lang="en-US" dirty="0"/>
         </a:p>
       </dgm:t>
     </dgm:pt>
@@ -5436,6 +7419,489 @@
     <dgm:cxn modelId="{69BB72A5-F38B-48E2-A351-ACDD44A9C3FC}" type="presParOf" srcId="{E3CF9F39-0292-4726-816B-D56C780C9799}" destId="{A8C3D147-6D2C-49E9-9933-512D7985414B}" srcOrd="2" destOrd="0" presId="urn:microsoft.com/office/officeart/2018/5/layout/CenteredIconLabelDescriptionList"/>
     <dgm:cxn modelId="{B32E2769-D23C-45BE-8C8B-2B45351918AB}" type="presParOf" srcId="{E3CF9F39-0292-4726-816B-D56C780C9799}" destId="{56CCB34D-F65F-4A33-830E-E07014E48917}" srcOrd="3" destOrd="0" presId="urn:microsoft.com/office/officeart/2018/5/layout/CenteredIconLabelDescriptionList"/>
     <dgm:cxn modelId="{4BAB93CC-67B2-40BA-8339-1A9F124050B6}" type="presParOf" srcId="{E3CF9F39-0292-4726-816B-D56C780C9799}" destId="{D8CCE8C3-8690-462D-91FB-D1C3B677BA16}" srcOrd="4" destOrd="0" presId="urn:microsoft.com/office/officeart/2018/5/layout/CenteredIconLabelDescriptionList"/>
+  </dgm:cxnLst>
+  <dgm:bg/>
+  <dgm:whole/>
+  <dgm:extLst>
+    <a:ext uri="http://schemas.microsoft.com/office/drawing/2008/diagram">
+      <dsp:dataModelExt xmlns:dsp="http://schemas.microsoft.com/office/drawing/2008/diagram" relId="rId6" minVer="http://schemas.openxmlformats.org/drawingml/2006/diagram"/>
+    </a:ext>
+  </dgm:extLst>
+</dgm:dataModel>
+</file>
+
+<file path=ppt/diagrams/data6.xml><?xml version="1.0" encoding="utf-8"?>
+<dgm:dataModel xmlns:dgm="http://schemas.openxmlformats.org/drawingml/2006/diagram" xmlns:a="http://schemas.openxmlformats.org/drawingml/2006/main">
+  <dgm:ptLst>
+    <dgm:pt modelId="{B6D9DC89-D26D-4CA8-B2A6-4E27FFD4C5FA}" type="doc">
+      <dgm:prSet loTypeId="urn:microsoft.com/office/officeart/2018/2/layout/IconVerticalSolidList" loCatId="icon" qsTypeId="urn:microsoft.com/office/officeart/2005/8/quickstyle/simple1" qsCatId="simple" csTypeId="urn:microsoft.com/office/officeart/2018/5/colors/Iconchunking_neutralbg_colorful1" csCatId="colorful" phldr="1"/>
+      <dgm:spPr/>
+      <dgm:t>
+        <a:bodyPr/>
+        <a:lstStyle/>
+        <a:p>
+          <a:endParaRPr lang="en-US"/>
+        </a:p>
+      </dgm:t>
+    </dgm:pt>
+    <dgm:pt modelId="{B3DB8607-ABCF-4825-A47D-982CD2949B3E}">
+      <dgm:prSet/>
+      <dgm:spPr/>
+      <dgm:t>
+        <a:bodyPr/>
+        <a:lstStyle/>
+        <a:p>
+          <a:pPr>
+            <a:lnSpc>
+              <a:spcPct val="100000"/>
+            </a:lnSpc>
+          </a:pPr>
+          <a:r>
+            <a:rPr lang="en-GB"/>
+            <a:t>Purpose: Make studying engaging and competitive for students</a:t>
+          </a:r>
+          <a:endParaRPr lang="en-US"/>
+        </a:p>
+      </dgm:t>
+    </dgm:pt>
+    <dgm:pt modelId="{6A7824CC-FC34-4169-B176-2E49687D522D}" type="parTrans" cxnId="{3114258E-108D-4303-8D35-6EB0E23C2CB2}">
+      <dgm:prSet/>
+      <dgm:spPr/>
+      <dgm:t>
+        <a:bodyPr/>
+        <a:lstStyle/>
+        <a:p>
+          <a:endParaRPr lang="en-US"/>
+        </a:p>
+      </dgm:t>
+    </dgm:pt>
+    <dgm:pt modelId="{9821002D-83CA-4163-8F84-EE3A91B1ACE5}" type="sibTrans" cxnId="{3114258E-108D-4303-8D35-6EB0E23C2CB2}">
+      <dgm:prSet/>
+      <dgm:spPr/>
+      <dgm:t>
+        <a:bodyPr/>
+        <a:lstStyle/>
+        <a:p>
+          <a:endParaRPr lang="en-US"/>
+        </a:p>
+      </dgm:t>
+    </dgm:pt>
+    <dgm:pt modelId="{3648B2E1-CF88-4C6A-A366-2DF9D3DA2EFF}">
+      <dgm:prSet/>
+      <dgm:spPr/>
+      <dgm:t>
+        <a:bodyPr/>
+        <a:lstStyle/>
+        <a:p>
+          <a:pPr>
+            <a:lnSpc>
+              <a:spcPct val="100000"/>
+            </a:lnSpc>
+          </a:pPr>
+          <a:r>
+            <a:rPr lang="en-GB"/>
+            <a:t>Status: Accounts, Subjects &amp; Topics Implemented</a:t>
+          </a:r>
+          <a:endParaRPr lang="en-US"/>
+        </a:p>
+      </dgm:t>
+    </dgm:pt>
+    <dgm:pt modelId="{33F80ECE-6F61-43E5-B087-BF387CD35B54}" type="parTrans" cxnId="{D21C4A9B-0D1D-4564-9343-188B91BE45CD}">
+      <dgm:prSet/>
+      <dgm:spPr/>
+      <dgm:t>
+        <a:bodyPr/>
+        <a:lstStyle/>
+        <a:p>
+          <a:endParaRPr lang="en-US"/>
+        </a:p>
+      </dgm:t>
+    </dgm:pt>
+    <dgm:pt modelId="{8C47CF89-845A-4D45-9741-2A9422AA19BA}" type="sibTrans" cxnId="{D21C4A9B-0D1D-4564-9343-188B91BE45CD}">
+      <dgm:prSet/>
+      <dgm:spPr/>
+      <dgm:t>
+        <a:bodyPr/>
+        <a:lstStyle/>
+        <a:p>
+          <a:endParaRPr lang="en-US"/>
+        </a:p>
+      </dgm:t>
+    </dgm:pt>
+    <dgm:pt modelId="{4468204B-FD83-4471-B85F-419C6CEF5286}">
+      <dgm:prSet/>
+      <dgm:spPr/>
+      <dgm:t>
+        <a:bodyPr/>
+        <a:lstStyle/>
+        <a:p>
+          <a:pPr>
+            <a:lnSpc>
+              <a:spcPct val="100000"/>
+            </a:lnSpc>
+          </a:pPr>
+          <a:r>
+            <a:rPr lang="en-GB"/>
+            <a:t>Next: Questions, Marks &amp; Admin Profiles</a:t>
+          </a:r>
+          <a:endParaRPr lang="en-US"/>
+        </a:p>
+      </dgm:t>
+    </dgm:pt>
+    <dgm:pt modelId="{72D94F9E-C60A-4503-B7E1-31094D72F9CA}" type="parTrans" cxnId="{CA05DED6-90B0-4F4E-AE8F-9AC3695DBD88}">
+      <dgm:prSet/>
+      <dgm:spPr/>
+      <dgm:t>
+        <a:bodyPr/>
+        <a:lstStyle/>
+        <a:p>
+          <a:endParaRPr lang="en-US"/>
+        </a:p>
+      </dgm:t>
+    </dgm:pt>
+    <dgm:pt modelId="{FEEB19D0-C275-4AD1-9B0D-A74259E16389}" type="sibTrans" cxnId="{CA05DED6-90B0-4F4E-AE8F-9AC3695DBD88}">
+      <dgm:prSet/>
+      <dgm:spPr/>
+      <dgm:t>
+        <a:bodyPr/>
+        <a:lstStyle/>
+        <a:p>
+          <a:endParaRPr lang="en-US"/>
+        </a:p>
+      </dgm:t>
+    </dgm:pt>
+    <dgm:pt modelId="{EBFE4457-9E81-4BFD-9FD0-3EC406CA1BCB}">
+      <dgm:prSet/>
+      <dgm:spPr/>
+      <dgm:t>
+        <a:bodyPr/>
+        <a:lstStyle/>
+        <a:p>
+          <a:pPr>
+            <a:lnSpc>
+              <a:spcPct val="100000"/>
+            </a:lnSpc>
+          </a:pPr>
+          <a:r>
+            <a:rPr lang="en-GB"/>
+            <a:t>Goal: Give students an incentive to revise in a way that’s fun for them</a:t>
+          </a:r>
+          <a:endParaRPr lang="en-US"/>
+        </a:p>
+      </dgm:t>
+    </dgm:pt>
+    <dgm:pt modelId="{954110EB-BBCD-475F-8388-B458720533C5}" type="parTrans" cxnId="{0810B9BF-BFE9-4764-84DB-FEA75C251D1F}">
+      <dgm:prSet/>
+      <dgm:spPr/>
+      <dgm:t>
+        <a:bodyPr/>
+        <a:lstStyle/>
+        <a:p>
+          <a:endParaRPr lang="en-US"/>
+        </a:p>
+      </dgm:t>
+    </dgm:pt>
+    <dgm:pt modelId="{0FCC7F39-9B1D-4361-A130-448C31B3F037}" type="sibTrans" cxnId="{0810B9BF-BFE9-4764-84DB-FEA75C251D1F}">
+      <dgm:prSet/>
+      <dgm:spPr/>
+      <dgm:t>
+        <a:bodyPr/>
+        <a:lstStyle/>
+        <a:p>
+          <a:endParaRPr lang="en-US"/>
+        </a:p>
+      </dgm:t>
+    </dgm:pt>
+    <dgm:pt modelId="{057F40D9-96A1-4813-9BD1-4CA6F4E2296B}">
+      <dgm:prSet/>
+      <dgm:spPr/>
+      <dgm:t>
+        <a:bodyPr/>
+        <a:lstStyle/>
+        <a:p>
+          <a:pPr>
+            <a:lnSpc>
+              <a:spcPct val="100000"/>
+            </a:lnSpc>
+          </a:pPr>
+          <a:r>
+            <a:rPr lang="en-GB"/>
+            <a:t>And have them come back again in the future to continue revision.</a:t>
+          </a:r>
+          <a:endParaRPr lang="en-US"/>
+        </a:p>
+      </dgm:t>
+    </dgm:pt>
+    <dgm:pt modelId="{05475BD4-C506-4590-AC98-269B891B914C}" type="parTrans" cxnId="{3ADC3C81-E188-47B0-8D96-9DF5FA8AD463}">
+      <dgm:prSet/>
+      <dgm:spPr/>
+      <dgm:t>
+        <a:bodyPr/>
+        <a:lstStyle/>
+        <a:p>
+          <a:endParaRPr lang="en-US"/>
+        </a:p>
+      </dgm:t>
+    </dgm:pt>
+    <dgm:pt modelId="{62547D05-CA33-49FF-B05F-311522361472}" type="sibTrans" cxnId="{3ADC3C81-E188-47B0-8D96-9DF5FA8AD463}">
+      <dgm:prSet/>
+      <dgm:spPr/>
+      <dgm:t>
+        <a:bodyPr/>
+        <a:lstStyle/>
+        <a:p>
+          <a:endParaRPr lang="en-US"/>
+        </a:p>
+      </dgm:t>
+    </dgm:pt>
+    <dgm:pt modelId="{E09A831E-FAA5-4870-A2E9-790B383E6B4C}" type="pres">
+      <dgm:prSet presAssocID="{B6D9DC89-D26D-4CA8-B2A6-4E27FFD4C5FA}" presName="root" presStyleCnt="0">
+        <dgm:presLayoutVars>
+          <dgm:dir/>
+          <dgm:resizeHandles val="exact"/>
+        </dgm:presLayoutVars>
+      </dgm:prSet>
+      <dgm:spPr/>
+    </dgm:pt>
+    <dgm:pt modelId="{2F9B1E5D-5206-40BF-AAC1-BD24C921880E}" type="pres">
+      <dgm:prSet presAssocID="{B3DB8607-ABCF-4825-A47D-982CD2949B3E}" presName="compNode" presStyleCnt="0"/>
+      <dgm:spPr/>
+    </dgm:pt>
+    <dgm:pt modelId="{12406314-6A1C-4592-BBE6-9B5EF13B9836}" type="pres">
+      <dgm:prSet presAssocID="{B3DB8607-ABCF-4825-A47D-982CD2949B3E}" presName="bgRect" presStyleLbl="bgShp" presStyleIdx="0" presStyleCnt="4"/>
+      <dgm:spPr/>
+    </dgm:pt>
+    <dgm:pt modelId="{FB9FD4CB-1F0A-4017-B7D5-D9CA30839E33}" type="pres">
+      <dgm:prSet presAssocID="{B3DB8607-ABCF-4825-A47D-982CD2949B3E}" presName="iconRect" presStyleLbl="node1" presStyleIdx="0" presStyleCnt="4"/>
+      <dgm:spPr>
+        <a:blipFill>
+          <a:blip xmlns:r="http://schemas.openxmlformats.org/officeDocument/2006/relationships" r:embed="rId1">
+            <a:extLst>
+              <a:ext uri="{28A0092B-C50C-407E-A947-70E740481C1C}">
+                <a14:useLocalDpi xmlns:a14="http://schemas.microsoft.com/office/drawing/2010/main" val="0"/>
+              </a:ext>
+              <a:ext uri="{96DAC541-7B7A-43D3-8B79-37D633B846F1}">
+                <asvg:svgBlip xmlns:asvg="http://schemas.microsoft.com/office/drawing/2016/SVG/main" r:embed="rId2"/>
+              </a:ext>
+            </a:extLst>
+          </a:blip>
+          <a:stretch>
+            <a:fillRect/>
+          </a:stretch>
+        </a:blipFill>
+      </dgm:spPr>
+      <dgm:extLst>
+        <a:ext uri="{E40237B7-FDA0-4F09-8148-C483321AD2D9}">
+          <dgm14:cNvPr xmlns:dgm14="http://schemas.microsoft.com/office/drawing/2010/diagram" id="0" name="" descr="Bullseye"/>
+        </a:ext>
+      </dgm:extLst>
+    </dgm:pt>
+    <dgm:pt modelId="{BBDBD3D0-96BF-4302-820B-16955F631631}" type="pres">
+      <dgm:prSet presAssocID="{B3DB8607-ABCF-4825-A47D-982CD2949B3E}" presName="spaceRect" presStyleCnt="0"/>
+      <dgm:spPr/>
+    </dgm:pt>
+    <dgm:pt modelId="{3B41C4B9-F2FC-4206-BEA8-4B0F4217567F}" type="pres">
+      <dgm:prSet presAssocID="{B3DB8607-ABCF-4825-A47D-982CD2949B3E}" presName="parTx" presStyleLbl="revTx" presStyleIdx="0" presStyleCnt="5">
+        <dgm:presLayoutVars>
+          <dgm:chMax val="0"/>
+          <dgm:chPref val="0"/>
+        </dgm:presLayoutVars>
+      </dgm:prSet>
+      <dgm:spPr/>
+    </dgm:pt>
+    <dgm:pt modelId="{3D48525D-83D0-4720-AAB9-374FB5B241AA}" type="pres">
+      <dgm:prSet presAssocID="{9821002D-83CA-4163-8F84-EE3A91B1ACE5}" presName="sibTrans" presStyleCnt="0"/>
+      <dgm:spPr/>
+    </dgm:pt>
+    <dgm:pt modelId="{6C7AAEE1-8E16-49BC-96E1-85A89846EC1F}" type="pres">
+      <dgm:prSet presAssocID="{3648B2E1-CF88-4C6A-A366-2DF9D3DA2EFF}" presName="compNode" presStyleCnt="0"/>
+      <dgm:spPr/>
+    </dgm:pt>
+    <dgm:pt modelId="{151DD790-E2C5-4679-AD57-1240164C7A5F}" type="pres">
+      <dgm:prSet presAssocID="{3648B2E1-CF88-4C6A-A366-2DF9D3DA2EFF}" presName="bgRect" presStyleLbl="bgShp" presStyleIdx="1" presStyleCnt="4"/>
+      <dgm:spPr/>
+    </dgm:pt>
+    <dgm:pt modelId="{3764279C-AC4C-480B-BC84-0536A52F688F}" type="pres">
+      <dgm:prSet presAssocID="{3648B2E1-CF88-4C6A-A366-2DF9D3DA2EFF}" presName="iconRect" presStyleLbl="node1" presStyleIdx="1" presStyleCnt="4"/>
+      <dgm:spPr>
+        <a:blipFill>
+          <a:blip xmlns:r="http://schemas.openxmlformats.org/officeDocument/2006/relationships" r:embed="rId3">
+            <a:extLst>
+              <a:ext uri="{28A0092B-C50C-407E-A947-70E740481C1C}">
+                <a14:useLocalDpi xmlns:a14="http://schemas.microsoft.com/office/drawing/2010/main" val="0"/>
+              </a:ext>
+              <a:ext uri="{96DAC541-7B7A-43D3-8B79-37D633B846F1}">
+                <asvg:svgBlip xmlns:asvg="http://schemas.microsoft.com/office/drawing/2016/SVG/main" r:embed="rId4"/>
+              </a:ext>
+            </a:extLst>
+          </a:blip>
+          <a:stretch>
+            <a:fillRect/>
+          </a:stretch>
+        </a:blipFill>
+      </dgm:spPr>
+      <dgm:extLst>
+        <a:ext uri="{E40237B7-FDA0-4F09-8148-C483321AD2D9}">
+          <dgm14:cNvPr xmlns:dgm14="http://schemas.microsoft.com/office/drawing/2010/diagram" id="0" name="" descr="Star"/>
+        </a:ext>
+      </dgm:extLst>
+    </dgm:pt>
+    <dgm:pt modelId="{ED00C7F2-E225-4228-8A50-8E35F82C319C}" type="pres">
+      <dgm:prSet presAssocID="{3648B2E1-CF88-4C6A-A366-2DF9D3DA2EFF}" presName="spaceRect" presStyleCnt="0"/>
+      <dgm:spPr/>
+    </dgm:pt>
+    <dgm:pt modelId="{86E17443-258F-45B9-9900-76F7AC7E4000}" type="pres">
+      <dgm:prSet presAssocID="{3648B2E1-CF88-4C6A-A366-2DF9D3DA2EFF}" presName="parTx" presStyleLbl="revTx" presStyleIdx="1" presStyleCnt="5">
+        <dgm:presLayoutVars>
+          <dgm:chMax val="0"/>
+          <dgm:chPref val="0"/>
+        </dgm:presLayoutVars>
+      </dgm:prSet>
+      <dgm:spPr/>
+    </dgm:pt>
+    <dgm:pt modelId="{E842F65B-159A-4426-A69E-DF70044B1176}" type="pres">
+      <dgm:prSet presAssocID="{8C47CF89-845A-4D45-9741-2A9422AA19BA}" presName="sibTrans" presStyleCnt="0"/>
+      <dgm:spPr/>
+    </dgm:pt>
+    <dgm:pt modelId="{99D6A1E6-73AA-49BC-A6FD-37D3B5B1EFDD}" type="pres">
+      <dgm:prSet presAssocID="{4468204B-FD83-4471-B85F-419C6CEF5286}" presName="compNode" presStyleCnt="0"/>
+      <dgm:spPr/>
+    </dgm:pt>
+    <dgm:pt modelId="{3D6E5037-21E4-4930-8F4F-5184C03CC160}" type="pres">
+      <dgm:prSet presAssocID="{4468204B-FD83-4471-B85F-419C6CEF5286}" presName="bgRect" presStyleLbl="bgShp" presStyleIdx="2" presStyleCnt="4"/>
+      <dgm:spPr/>
+    </dgm:pt>
+    <dgm:pt modelId="{D0E34142-7CF5-4082-ADD1-CA6AAA75BA0F}" type="pres">
+      <dgm:prSet presAssocID="{4468204B-FD83-4471-B85F-419C6CEF5286}" presName="iconRect" presStyleLbl="node1" presStyleIdx="2" presStyleCnt="4"/>
+      <dgm:spPr>
+        <a:blipFill>
+          <a:blip xmlns:r="http://schemas.openxmlformats.org/officeDocument/2006/relationships" r:embed="rId5">
+            <a:extLst>
+              <a:ext uri="{28A0092B-C50C-407E-A947-70E740481C1C}">
+                <a14:useLocalDpi xmlns:a14="http://schemas.microsoft.com/office/drawing/2010/main" val="0"/>
+              </a:ext>
+              <a:ext uri="{96DAC541-7B7A-43D3-8B79-37D633B846F1}">
+                <asvg:svgBlip xmlns:asvg="http://schemas.microsoft.com/office/drawing/2016/SVG/main" r:embed="rId6"/>
+              </a:ext>
+            </a:extLst>
+          </a:blip>
+          <a:stretch>
+            <a:fillRect/>
+          </a:stretch>
+        </a:blipFill>
+      </dgm:spPr>
+      <dgm:extLst>
+        <a:ext uri="{E40237B7-FDA0-4F09-8148-C483321AD2D9}">
+          <dgm14:cNvPr xmlns:dgm14="http://schemas.microsoft.com/office/drawing/2010/diagram" id="0" name="" descr="User"/>
+        </a:ext>
+      </dgm:extLst>
+    </dgm:pt>
+    <dgm:pt modelId="{B6BF552C-41D3-4066-9B52-27E65364CEB0}" type="pres">
+      <dgm:prSet presAssocID="{4468204B-FD83-4471-B85F-419C6CEF5286}" presName="spaceRect" presStyleCnt="0"/>
+      <dgm:spPr/>
+    </dgm:pt>
+    <dgm:pt modelId="{A0330144-F7A4-42AC-85C6-65945FC6705B}" type="pres">
+      <dgm:prSet presAssocID="{4468204B-FD83-4471-B85F-419C6CEF5286}" presName="parTx" presStyleLbl="revTx" presStyleIdx="2" presStyleCnt="5">
+        <dgm:presLayoutVars>
+          <dgm:chMax val="0"/>
+          <dgm:chPref val="0"/>
+        </dgm:presLayoutVars>
+      </dgm:prSet>
+      <dgm:spPr/>
+    </dgm:pt>
+    <dgm:pt modelId="{D4850935-D801-4C80-A0BC-10089B5E7745}" type="pres">
+      <dgm:prSet presAssocID="{FEEB19D0-C275-4AD1-9B0D-A74259E16389}" presName="sibTrans" presStyleCnt="0"/>
+      <dgm:spPr/>
+    </dgm:pt>
+    <dgm:pt modelId="{398194D6-C4BC-44F6-9ABC-28E7C66ABDD1}" type="pres">
+      <dgm:prSet presAssocID="{EBFE4457-9E81-4BFD-9FD0-3EC406CA1BCB}" presName="compNode" presStyleCnt="0"/>
+      <dgm:spPr/>
+    </dgm:pt>
+    <dgm:pt modelId="{AF2AFC48-64B0-4723-8344-95255A30FE6C}" type="pres">
+      <dgm:prSet presAssocID="{EBFE4457-9E81-4BFD-9FD0-3EC406CA1BCB}" presName="bgRect" presStyleLbl="bgShp" presStyleIdx="3" presStyleCnt="4"/>
+      <dgm:spPr/>
+    </dgm:pt>
+    <dgm:pt modelId="{F88D0E89-F727-4F8D-A744-896D43D9C784}" type="pres">
+      <dgm:prSet presAssocID="{EBFE4457-9E81-4BFD-9FD0-3EC406CA1BCB}" presName="iconRect" presStyleLbl="node1" presStyleIdx="3" presStyleCnt="4"/>
+      <dgm:spPr>
+        <a:blipFill>
+          <a:blip xmlns:r="http://schemas.openxmlformats.org/officeDocument/2006/relationships" r:embed="rId7">
+            <a:extLst>
+              <a:ext uri="{28A0092B-C50C-407E-A947-70E740481C1C}">
+                <a14:useLocalDpi xmlns:a14="http://schemas.microsoft.com/office/drawing/2010/main" val="0"/>
+              </a:ext>
+              <a:ext uri="{96DAC541-7B7A-43D3-8B79-37D633B846F1}">
+                <asvg:svgBlip xmlns:asvg="http://schemas.microsoft.com/office/drawing/2016/SVG/main" r:embed="rId8"/>
+              </a:ext>
+            </a:extLst>
+          </a:blip>
+          <a:stretch>
+            <a:fillRect/>
+          </a:stretch>
+        </a:blipFill>
+      </dgm:spPr>
+      <dgm:extLst>
+        <a:ext uri="{E40237B7-FDA0-4F09-8148-C483321AD2D9}">
+          <dgm14:cNvPr xmlns:dgm14="http://schemas.microsoft.com/office/drawing/2010/diagram" id="0" name="" descr="Classroom"/>
+        </a:ext>
+      </dgm:extLst>
+    </dgm:pt>
+    <dgm:pt modelId="{31A66650-B461-4B2A-A0FB-7624FD502B3C}" type="pres">
+      <dgm:prSet presAssocID="{EBFE4457-9E81-4BFD-9FD0-3EC406CA1BCB}" presName="spaceRect" presStyleCnt="0"/>
+      <dgm:spPr/>
+    </dgm:pt>
+    <dgm:pt modelId="{D5BDD981-48AD-4005-81A9-AA85B86104A5}" type="pres">
+      <dgm:prSet presAssocID="{EBFE4457-9E81-4BFD-9FD0-3EC406CA1BCB}" presName="parTx" presStyleLbl="revTx" presStyleIdx="3" presStyleCnt="5">
+        <dgm:presLayoutVars>
+          <dgm:chMax val="0"/>
+          <dgm:chPref val="0"/>
+        </dgm:presLayoutVars>
+      </dgm:prSet>
+      <dgm:spPr/>
+    </dgm:pt>
+    <dgm:pt modelId="{658125E1-134A-443A-8DDD-02C955062748}" type="pres">
+      <dgm:prSet presAssocID="{EBFE4457-9E81-4BFD-9FD0-3EC406CA1BCB}" presName="desTx" presStyleLbl="revTx" presStyleIdx="4" presStyleCnt="5">
+        <dgm:presLayoutVars/>
+      </dgm:prSet>
+      <dgm:spPr/>
+    </dgm:pt>
+  </dgm:ptLst>
+  <dgm:cxnLst>
+    <dgm:cxn modelId="{53CFA318-AC9A-4E2A-9A15-E944B401C26A}" type="presOf" srcId="{B6D9DC89-D26D-4CA8-B2A6-4E27FFD4C5FA}" destId="{E09A831E-FAA5-4870-A2E9-790B383E6B4C}" srcOrd="0" destOrd="0" presId="urn:microsoft.com/office/officeart/2018/2/layout/IconVerticalSolidList"/>
+    <dgm:cxn modelId="{5B714745-7DA2-478B-8254-7C2FCCF42F59}" type="presOf" srcId="{B3DB8607-ABCF-4825-A47D-982CD2949B3E}" destId="{3B41C4B9-F2FC-4206-BEA8-4B0F4217567F}" srcOrd="0" destOrd="0" presId="urn:microsoft.com/office/officeart/2018/2/layout/IconVerticalSolidList"/>
+    <dgm:cxn modelId="{C139AB74-A13D-4B87-AA94-DE495E55E4FE}" type="presOf" srcId="{057F40D9-96A1-4813-9BD1-4CA6F4E2296B}" destId="{658125E1-134A-443A-8DDD-02C955062748}" srcOrd="0" destOrd="0" presId="urn:microsoft.com/office/officeart/2018/2/layout/IconVerticalSolidList"/>
+    <dgm:cxn modelId="{3ADC3C81-E188-47B0-8D96-9DF5FA8AD463}" srcId="{EBFE4457-9E81-4BFD-9FD0-3EC406CA1BCB}" destId="{057F40D9-96A1-4813-9BD1-4CA6F4E2296B}" srcOrd="0" destOrd="0" parTransId="{05475BD4-C506-4590-AC98-269B891B914C}" sibTransId="{62547D05-CA33-49FF-B05F-311522361472}"/>
+    <dgm:cxn modelId="{3114258E-108D-4303-8D35-6EB0E23C2CB2}" srcId="{B6D9DC89-D26D-4CA8-B2A6-4E27FFD4C5FA}" destId="{B3DB8607-ABCF-4825-A47D-982CD2949B3E}" srcOrd="0" destOrd="0" parTransId="{6A7824CC-FC34-4169-B176-2E49687D522D}" sibTransId="{9821002D-83CA-4163-8F84-EE3A91B1ACE5}"/>
+    <dgm:cxn modelId="{D21C4A9B-0D1D-4564-9343-188B91BE45CD}" srcId="{B6D9DC89-D26D-4CA8-B2A6-4E27FFD4C5FA}" destId="{3648B2E1-CF88-4C6A-A366-2DF9D3DA2EFF}" srcOrd="1" destOrd="0" parTransId="{33F80ECE-6F61-43E5-B087-BF387CD35B54}" sibTransId="{8C47CF89-845A-4D45-9741-2A9422AA19BA}"/>
+    <dgm:cxn modelId="{F2826CB2-627B-44F2-A48C-19DD5E7D56AC}" type="presOf" srcId="{4468204B-FD83-4471-B85F-419C6CEF5286}" destId="{A0330144-F7A4-42AC-85C6-65945FC6705B}" srcOrd="0" destOrd="0" presId="urn:microsoft.com/office/officeart/2018/2/layout/IconVerticalSolidList"/>
+    <dgm:cxn modelId="{0810B9BF-BFE9-4764-84DB-FEA75C251D1F}" srcId="{B6D9DC89-D26D-4CA8-B2A6-4E27FFD4C5FA}" destId="{EBFE4457-9E81-4BFD-9FD0-3EC406CA1BCB}" srcOrd="3" destOrd="0" parTransId="{954110EB-BBCD-475F-8388-B458720533C5}" sibTransId="{0FCC7F39-9B1D-4361-A130-448C31B3F037}"/>
+    <dgm:cxn modelId="{F265DFC1-2621-4973-90A2-C24D13198EC8}" type="presOf" srcId="{3648B2E1-CF88-4C6A-A366-2DF9D3DA2EFF}" destId="{86E17443-258F-45B9-9900-76F7AC7E4000}" srcOrd="0" destOrd="0" presId="urn:microsoft.com/office/officeart/2018/2/layout/IconVerticalSolidList"/>
+    <dgm:cxn modelId="{CA05DED6-90B0-4F4E-AE8F-9AC3695DBD88}" srcId="{B6D9DC89-D26D-4CA8-B2A6-4E27FFD4C5FA}" destId="{4468204B-FD83-4471-B85F-419C6CEF5286}" srcOrd="2" destOrd="0" parTransId="{72D94F9E-C60A-4503-B7E1-31094D72F9CA}" sibTransId="{FEEB19D0-C275-4AD1-9B0D-A74259E16389}"/>
+    <dgm:cxn modelId="{698CC5F4-7C98-41E4-8B01-ECC5335DA4B7}" type="presOf" srcId="{EBFE4457-9E81-4BFD-9FD0-3EC406CA1BCB}" destId="{D5BDD981-48AD-4005-81A9-AA85B86104A5}" srcOrd="0" destOrd="0" presId="urn:microsoft.com/office/officeart/2018/2/layout/IconVerticalSolidList"/>
+    <dgm:cxn modelId="{96628C72-616D-4FA2-B42D-0683B65A64CE}" type="presParOf" srcId="{E09A831E-FAA5-4870-A2E9-790B383E6B4C}" destId="{2F9B1E5D-5206-40BF-AAC1-BD24C921880E}" srcOrd="0" destOrd="0" presId="urn:microsoft.com/office/officeart/2018/2/layout/IconVerticalSolidList"/>
+    <dgm:cxn modelId="{29628C40-0A8A-493A-B72D-ECCDAA500C4D}" type="presParOf" srcId="{2F9B1E5D-5206-40BF-AAC1-BD24C921880E}" destId="{12406314-6A1C-4592-BBE6-9B5EF13B9836}" srcOrd="0" destOrd="0" presId="urn:microsoft.com/office/officeart/2018/2/layout/IconVerticalSolidList"/>
+    <dgm:cxn modelId="{5C027686-7374-46DC-8E48-58CCE46CFB46}" type="presParOf" srcId="{2F9B1E5D-5206-40BF-AAC1-BD24C921880E}" destId="{FB9FD4CB-1F0A-4017-B7D5-D9CA30839E33}" srcOrd="1" destOrd="0" presId="urn:microsoft.com/office/officeart/2018/2/layout/IconVerticalSolidList"/>
+    <dgm:cxn modelId="{D41FF2AE-3F0F-4C19-BE8D-44E6B912ED11}" type="presParOf" srcId="{2F9B1E5D-5206-40BF-AAC1-BD24C921880E}" destId="{BBDBD3D0-96BF-4302-820B-16955F631631}" srcOrd="2" destOrd="0" presId="urn:microsoft.com/office/officeart/2018/2/layout/IconVerticalSolidList"/>
+    <dgm:cxn modelId="{3FEB1970-A94B-47EB-996F-0CD14AB44CF6}" type="presParOf" srcId="{2F9B1E5D-5206-40BF-AAC1-BD24C921880E}" destId="{3B41C4B9-F2FC-4206-BEA8-4B0F4217567F}" srcOrd="3" destOrd="0" presId="urn:microsoft.com/office/officeart/2018/2/layout/IconVerticalSolidList"/>
+    <dgm:cxn modelId="{7D0D5144-0875-401E-BFD1-ADF54A5EEDF1}" type="presParOf" srcId="{E09A831E-FAA5-4870-A2E9-790B383E6B4C}" destId="{3D48525D-83D0-4720-AAB9-374FB5B241AA}" srcOrd="1" destOrd="0" presId="urn:microsoft.com/office/officeart/2018/2/layout/IconVerticalSolidList"/>
+    <dgm:cxn modelId="{E79F0385-26C6-4BAB-BBBF-50292D6AEF3E}" type="presParOf" srcId="{E09A831E-FAA5-4870-A2E9-790B383E6B4C}" destId="{6C7AAEE1-8E16-49BC-96E1-85A89846EC1F}" srcOrd="2" destOrd="0" presId="urn:microsoft.com/office/officeart/2018/2/layout/IconVerticalSolidList"/>
+    <dgm:cxn modelId="{437ABD74-DEA1-45BA-AF9A-DF318B3DE8D9}" type="presParOf" srcId="{6C7AAEE1-8E16-49BC-96E1-85A89846EC1F}" destId="{151DD790-E2C5-4679-AD57-1240164C7A5F}" srcOrd="0" destOrd="0" presId="urn:microsoft.com/office/officeart/2018/2/layout/IconVerticalSolidList"/>
+    <dgm:cxn modelId="{33503179-8810-4B3B-9E17-FEF3D935ACAD}" type="presParOf" srcId="{6C7AAEE1-8E16-49BC-96E1-85A89846EC1F}" destId="{3764279C-AC4C-480B-BC84-0536A52F688F}" srcOrd="1" destOrd="0" presId="urn:microsoft.com/office/officeart/2018/2/layout/IconVerticalSolidList"/>
+    <dgm:cxn modelId="{E88630A6-8FC4-4F2A-B516-8FBA1C1BB629}" type="presParOf" srcId="{6C7AAEE1-8E16-49BC-96E1-85A89846EC1F}" destId="{ED00C7F2-E225-4228-8A50-8E35F82C319C}" srcOrd="2" destOrd="0" presId="urn:microsoft.com/office/officeart/2018/2/layout/IconVerticalSolidList"/>
+    <dgm:cxn modelId="{E47EB180-F43C-4DAD-8940-0A7C76B7BF12}" type="presParOf" srcId="{6C7AAEE1-8E16-49BC-96E1-85A89846EC1F}" destId="{86E17443-258F-45B9-9900-76F7AC7E4000}" srcOrd="3" destOrd="0" presId="urn:microsoft.com/office/officeart/2018/2/layout/IconVerticalSolidList"/>
+    <dgm:cxn modelId="{7B0560ED-3F3A-40E6-B152-4F0B6909A7AE}" type="presParOf" srcId="{E09A831E-FAA5-4870-A2E9-790B383E6B4C}" destId="{E842F65B-159A-4426-A69E-DF70044B1176}" srcOrd="3" destOrd="0" presId="urn:microsoft.com/office/officeart/2018/2/layout/IconVerticalSolidList"/>
+    <dgm:cxn modelId="{FD9884A5-00DC-4D44-BBFB-828EE5F5EDA1}" type="presParOf" srcId="{E09A831E-FAA5-4870-A2E9-790B383E6B4C}" destId="{99D6A1E6-73AA-49BC-A6FD-37D3B5B1EFDD}" srcOrd="4" destOrd="0" presId="urn:microsoft.com/office/officeart/2018/2/layout/IconVerticalSolidList"/>
+    <dgm:cxn modelId="{DFF89DF8-95D2-4135-B3D0-EF685F5DEC04}" type="presParOf" srcId="{99D6A1E6-73AA-49BC-A6FD-37D3B5B1EFDD}" destId="{3D6E5037-21E4-4930-8F4F-5184C03CC160}" srcOrd="0" destOrd="0" presId="urn:microsoft.com/office/officeart/2018/2/layout/IconVerticalSolidList"/>
+    <dgm:cxn modelId="{66282953-490E-499E-889C-A11C65183131}" type="presParOf" srcId="{99D6A1E6-73AA-49BC-A6FD-37D3B5B1EFDD}" destId="{D0E34142-7CF5-4082-ADD1-CA6AAA75BA0F}" srcOrd="1" destOrd="0" presId="urn:microsoft.com/office/officeart/2018/2/layout/IconVerticalSolidList"/>
+    <dgm:cxn modelId="{7649A022-C73A-4F9F-989E-AA74F6EDBCCD}" type="presParOf" srcId="{99D6A1E6-73AA-49BC-A6FD-37D3B5B1EFDD}" destId="{B6BF552C-41D3-4066-9B52-27E65364CEB0}" srcOrd="2" destOrd="0" presId="urn:microsoft.com/office/officeart/2018/2/layout/IconVerticalSolidList"/>
+    <dgm:cxn modelId="{913A350E-1A0A-4623-AB97-612937A30599}" type="presParOf" srcId="{99D6A1E6-73AA-49BC-A6FD-37D3B5B1EFDD}" destId="{A0330144-F7A4-42AC-85C6-65945FC6705B}" srcOrd="3" destOrd="0" presId="urn:microsoft.com/office/officeart/2018/2/layout/IconVerticalSolidList"/>
+    <dgm:cxn modelId="{BD036119-74BE-475A-B2ED-30F33568C28F}" type="presParOf" srcId="{E09A831E-FAA5-4870-A2E9-790B383E6B4C}" destId="{D4850935-D801-4C80-A0BC-10089B5E7745}" srcOrd="5" destOrd="0" presId="urn:microsoft.com/office/officeart/2018/2/layout/IconVerticalSolidList"/>
+    <dgm:cxn modelId="{B686D34F-2213-42FD-8CB8-0E4C2EF3A08F}" type="presParOf" srcId="{E09A831E-FAA5-4870-A2E9-790B383E6B4C}" destId="{398194D6-C4BC-44F6-9ABC-28E7C66ABDD1}" srcOrd="6" destOrd="0" presId="urn:microsoft.com/office/officeart/2018/2/layout/IconVerticalSolidList"/>
+    <dgm:cxn modelId="{EE5EA109-1DCB-45FC-BDA3-89C4ECE0F147}" type="presParOf" srcId="{398194D6-C4BC-44F6-9ABC-28E7C66ABDD1}" destId="{AF2AFC48-64B0-4723-8344-95255A30FE6C}" srcOrd="0" destOrd="0" presId="urn:microsoft.com/office/officeart/2018/2/layout/IconVerticalSolidList"/>
+    <dgm:cxn modelId="{984E175E-F899-4EE1-AD61-8C126382FC0A}" type="presParOf" srcId="{398194D6-C4BC-44F6-9ABC-28E7C66ABDD1}" destId="{F88D0E89-F727-4F8D-A744-896D43D9C784}" srcOrd="1" destOrd="0" presId="urn:microsoft.com/office/officeart/2018/2/layout/IconVerticalSolidList"/>
+    <dgm:cxn modelId="{DEA019FA-86B9-4AA8-AAB8-B0C164C3B9D9}" type="presParOf" srcId="{398194D6-C4BC-44F6-9ABC-28E7C66ABDD1}" destId="{31A66650-B461-4B2A-A0FB-7624FD502B3C}" srcOrd="2" destOrd="0" presId="urn:microsoft.com/office/officeart/2018/2/layout/IconVerticalSolidList"/>
+    <dgm:cxn modelId="{720E126A-352C-4782-BE9B-9C4C1151554C}" type="presParOf" srcId="{398194D6-C4BC-44F6-9ABC-28E7C66ABDD1}" destId="{D5BDD981-48AD-4005-81A9-AA85B86104A5}" srcOrd="3" destOrd="0" presId="urn:microsoft.com/office/officeart/2018/2/layout/IconVerticalSolidList"/>
+    <dgm:cxn modelId="{77D80819-B783-4690-9C0E-1AC1D457B175}" type="presParOf" srcId="{398194D6-C4BC-44F6-9ABC-28E7C66ABDD1}" destId="{658125E1-134A-443A-8DDD-02C955062748}" srcOrd="4" destOrd="0" presId="urn:microsoft.com/office/officeart/2018/2/layout/IconVerticalSolidList"/>
   </dgm:cxnLst>
   <dgm:bg/>
   <dgm:whole/>
@@ -7615,6 +10081,440 @@
       <dsp:cNvGrpSpPr/>
     </dsp:nvGrpSpPr>
     <dsp:grpSpPr/>
+    <dsp:sp modelId="{26AF844E-CAFF-4913-BD11-636489651B91}">
+      <dsp:nvSpPr>
+        <dsp:cNvPr id="0" name=""/>
+        <dsp:cNvSpPr/>
+      </dsp:nvSpPr>
+      <dsp:spPr>
+        <a:xfrm>
+          <a:off x="0" y="0"/>
+          <a:ext cx="9288654" cy="1257841"/>
+        </a:xfrm>
+        <a:prstGeom prst="roundRect">
+          <a:avLst>
+            <a:gd name="adj" fmla="val 10000"/>
+          </a:avLst>
+        </a:prstGeom>
+        <a:solidFill>
+          <a:schemeClr val="accent2">
+            <a:hueOff val="0"/>
+            <a:satOff val="0"/>
+            <a:lumOff val="0"/>
+            <a:alphaOff val="0"/>
+          </a:schemeClr>
+        </a:solidFill>
+        <a:ln w="19050" cap="flat" cmpd="sng" algn="ctr">
+          <a:solidFill>
+            <a:schemeClr val="lt1">
+              <a:hueOff val="0"/>
+              <a:satOff val="0"/>
+              <a:lumOff val="0"/>
+              <a:alphaOff val="0"/>
+            </a:schemeClr>
+          </a:solidFill>
+          <a:prstDash val="solid"/>
+          <a:miter lim="800000"/>
+        </a:ln>
+        <a:effectLst/>
+      </dsp:spPr>
+      <dsp:style>
+        <a:lnRef idx="2">
+          <a:scrgbClr r="0" g="0" b="0"/>
+        </a:lnRef>
+        <a:fillRef idx="1">
+          <a:scrgbClr r="0" g="0" b="0"/>
+        </a:fillRef>
+        <a:effectRef idx="0">
+          <a:scrgbClr r="0" g="0" b="0"/>
+        </a:effectRef>
+        <a:fontRef idx="minor">
+          <a:schemeClr val="lt1"/>
+        </a:fontRef>
+      </dsp:style>
+      <dsp:txBody>
+        <a:bodyPr spcFirstLastPara="0" vert="horz" wrap="square" lIns="87630" tIns="87630" rIns="87630" bIns="87630" numCol="1" spcCol="1270" anchor="ctr" anchorCtr="0">
+          <a:noAutofit/>
+        </a:bodyPr>
+        <a:lstStyle/>
+        <a:p>
+          <a:pPr marL="0" lvl="0" indent="0" algn="l" defTabSz="1022350">
+            <a:lnSpc>
+              <a:spcPct val="90000"/>
+            </a:lnSpc>
+            <a:spcBef>
+              <a:spcPct val="0"/>
+            </a:spcBef>
+            <a:spcAft>
+              <a:spcPct val="35000"/>
+            </a:spcAft>
+            <a:buNone/>
+          </a:pPr>
+          <a:r>
+            <a:rPr lang="en-GB" sz="2300" kern="1200"/>
+            <a:t>From experience, most students love to be competitive</a:t>
+          </a:r>
+          <a:endParaRPr lang="en-US" sz="2300" kern="1200"/>
+        </a:p>
+        <a:p>
+          <a:pPr marL="171450" lvl="1" indent="-171450" algn="l" defTabSz="800100">
+            <a:lnSpc>
+              <a:spcPct val="90000"/>
+            </a:lnSpc>
+            <a:spcBef>
+              <a:spcPct val="0"/>
+            </a:spcBef>
+            <a:spcAft>
+              <a:spcPct val="15000"/>
+            </a:spcAft>
+            <a:buChar char="•"/>
+          </a:pPr>
+          <a:r>
+            <a:rPr lang="en-GB" sz="1800" kern="1200"/>
+            <a:t>Especially where prizes are involved!</a:t>
+          </a:r>
+          <a:endParaRPr lang="en-US" sz="1800" kern="1200"/>
+        </a:p>
+      </dsp:txBody>
+      <dsp:txXfrm>
+        <a:off x="36841" y="36841"/>
+        <a:ext cx="7931345" cy="1184159"/>
+      </dsp:txXfrm>
+    </dsp:sp>
+    <dsp:sp modelId="{2E70A53F-8E51-4521-BDC9-463C9E8BC83E}">
+      <dsp:nvSpPr>
+        <dsp:cNvPr id="0" name=""/>
+        <dsp:cNvSpPr/>
+      </dsp:nvSpPr>
+      <dsp:spPr>
+        <a:xfrm>
+          <a:off x="819587" y="1467481"/>
+          <a:ext cx="9288654" cy="1257841"/>
+        </a:xfrm>
+        <a:prstGeom prst="roundRect">
+          <a:avLst>
+            <a:gd name="adj" fmla="val 10000"/>
+          </a:avLst>
+        </a:prstGeom>
+        <a:solidFill>
+          <a:schemeClr val="accent2">
+            <a:hueOff val="3221807"/>
+            <a:satOff val="-9246"/>
+            <a:lumOff val="-14805"/>
+            <a:alphaOff val="0"/>
+          </a:schemeClr>
+        </a:solidFill>
+        <a:ln w="19050" cap="flat" cmpd="sng" algn="ctr">
+          <a:solidFill>
+            <a:schemeClr val="lt1">
+              <a:hueOff val="0"/>
+              <a:satOff val="0"/>
+              <a:lumOff val="0"/>
+              <a:alphaOff val="0"/>
+            </a:schemeClr>
+          </a:solidFill>
+          <a:prstDash val="solid"/>
+          <a:miter lim="800000"/>
+        </a:ln>
+        <a:effectLst/>
+      </dsp:spPr>
+      <dsp:style>
+        <a:lnRef idx="2">
+          <a:scrgbClr r="0" g="0" b="0"/>
+        </a:lnRef>
+        <a:fillRef idx="1">
+          <a:scrgbClr r="0" g="0" b="0"/>
+        </a:fillRef>
+        <a:effectRef idx="0">
+          <a:scrgbClr r="0" g="0" b="0"/>
+        </a:effectRef>
+        <a:fontRef idx="minor">
+          <a:schemeClr val="lt1"/>
+        </a:fontRef>
+      </dsp:style>
+      <dsp:txBody>
+        <a:bodyPr spcFirstLastPara="0" vert="horz" wrap="square" lIns="87630" tIns="87630" rIns="87630" bIns="87630" numCol="1" spcCol="1270" anchor="ctr" anchorCtr="0">
+          <a:noAutofit/>
+        </a:bodyPr>
+        <a:lstStyle/>
+        <a:p>
+          <a:pPr marL="0" lvl="0" indent="0" algn="l" defTabSz="1022350">
+            <a:lnSpc>
+              <a:spcPct val="90000"/>
+            </a:lnSpc>
+            <a:spcBef>
+              <a:spcPct val="0"/>
+            </a:spcBef>
+            <a:spcAft>
+              <a:spcPct val="35000"/>
+            </a:spcAft>
+            <a:buNone/>
+          </a:pPr>
+          <a:r>
+            <a:rPr lang="en-GB" sz="2300" kern="1200" dirty="0"/>
+            <a:t>Knowing they lose marks for each wrong attempt, students would want to achieve maximum marks on the first attempt.</a:t>
+          </a:r>
+          <a:endParaRPr lang="en-US" sz="2300" kern="1200" dirty="0"/>
+        </a:p>
+      </dsp:txBody>
+      <dsp:txXfrm>
+        <a:off x="856428" y="1504322"/>
+        <a:ext cx="7577788" cy="1184159"/>
+      </dsp:txXfrm>
+    </dsp:sp>
+    <dsp:sp modelId="{1BCC9E10-8145-493F-9ECE-55E4447FA84E}">
+      <dsp:nvSpPr>
+        <dsp:cNvPr id="0" name=""/>
+        <dsp:cNvSpPr/>
+      </dsp:nvSpPr>
+      <dsp:spPr>
+        <a:xfrm>
+          <a:off x="1639174" y="2934963"/>
+          <a:ext cx="9288654" cy="1257841"/>
+        </a:xfrm>
+        <a:prstGeom prst="roundRect">
+          <a:avLst>
+            <a:gd name="adj" fmla="val 10000"/>
+          </a:avLst>
+        </a:prstGeom>
+        <a:solidFill>
+          <a:schemeClr val="accent2">
+            <a:hueOff val="6443614"/>
+            <a:satOff val="-18493"/>
+            <a:lumOff val="-29609"/>
+            <a:alphaOff val="0"/>
+          </a:schemeClr>
+        </a:solidFill>
+        <a:ln w="19050" cap="flat" cmpd="sng" algn="ctr">
+          <a:solidFill>
+            <a:schemeClr val="lt1">
+              <a:hueOff val="0"/>
+              <a:satOff val="0"/>
+              <a:lumOff val="0"/>
+              <a:alphaOff val="0"/>
+            </a:schemeClr>
+          </a:solidFill>
+          <a:prstDash val="solid"/>
+          <a:miter lim="800000"/>
+        </a:ln>
+        <a:effectLst/>
+      </dsp:spPr>
+      <dsp:style>
+        <a:lnRef idx="2">
+          <a:scrgbClr r="0" g="0" b="0"/>
+        </a:lnRef>
+        <a:fillRef idx="1">
+          <a:scrgbClr r="0" g="0" b="0"/>
+        </a:fillRef>
+        <a:effectRef idx="0">
+          <a:scrgbClr r="0" g="0" b="0"/>
+        </a:effectRef>
+        <a:fontRef idx="minor">
+          <a:schemeClr val="lt1"/>
+        </a:fontRef>
+      </dsp:style>
+      <dsp:txBody>
+        <a:bodyPr spcFirstLastPara="0" vert="horz" wrap="square" lIns="87630" tIns="87630" rIns="87630" bIns="87630" numCol="1" spcCol="1270" anchor="ctr" anchorCtr="0">
+          <a:noAutofit/>
+        </a:bodyPr>
+        <a:lstStyle/>
+        <a:p>
+          <a:pPr marL="0" lvl="0" indent="0" algn="l" defTabSz="1022350">
+            <a:lnSpc>
+              <a:spcPct val="90000"/>
+            </a:lnSpc>
+            <a:spcBef>
+              <a:spcPct val="0"/>
+            </a:spcBef>
+            <a:spcAft>
+              <a:spcPct val="35000"/>
+            </a:spcAft>
+            <a:buNone/>
+          </a:pPr>
+          <a:r>
+            <a:rPr lang="en-GB" sz="2300" kern="1200"/>
+            <a:t>More marks = Higher Ranking</a:t>
+          </a:r>
+          <a:endParaRPr lang="en-US" sz="2300" kern="1200"/>
+        </a:p>
+      </dsp:txBody>
+      <dsp:txXfrm>
+        <a:off x="1676015" y="2971804"/>
+        <a:ext cx="7577788" cy="1184159"/>
+      </dsp:txXfrm>
+    </dsp:sp>
+    <dsp:sp modelId="{272E2289-B570-4380-969C-20F884F6C461}">
+      <dsp:nvSpPr>
+        <dsp:cNvPr id="0" name=""/>
+        <dsp:cNvSpPr/>
+      </dsp:nvSpPr>
+      <dsp:spPr>
+        <a:xfrm>
+          <a:off x="8471057" y="953863"/>
+          <a:ext cx="817596" cy="817596"/>
+        </a:xfrm>
+        <a:prstGeom prst="downArrow">
+          <a:avLst>
+            <a:gd name="adj1" fmla="val 55000"/>
+            <a:gd name="adj2" fmla="val 45000"/>
+          </a:avLst>
+        </a:prstGeom>
+        <a:solidFill>
+          <a:schemeClr val="accent2">
+            <a:tint val="40000"/>
+            <a:alpha val="90000"/>
+            <a:hueOff val="0"/>
+            <a:satOff val="0"/>
+            <a:lumOff val="0"/>
+            <a:alphaOff val="0"/>
+          </a:schemeClr>
+        </a:solidFill>
+        <a:ln w="19050" cap="flat" cmpd="sng" algn="ctr">
+          <a:solidFill>
+            <a:schemeClr val="accent2">
+              <a:tint val="40000"/>
+              <a:alpha val="90000"/>
+              <a:hueOff val="0"/>
+              <a:satOff val="0"/>
+              <a:lumOff val="0"/>
+              <a:alphaOff val="0"/>
+            </a:schemeClr>
+          </a:solidFill>
+          <a:prstDash val="solid"/>
+          <a:miter lim="800000"/>
+        </a:ln>
+        <a:effectLst/>
+      </dsp:spPr>
+      <dsp:style>
+        <a:lnRef idx="2">
+          <a:scrgbClr r="0" g="0" b="0"/>
+        </a:lnRef>
+        <a:fillRef idx="1">
+          <a:scrgbClr r="0" g="0" b="0"/>
+        </a:fillRef>
+        <a:effectRef idx="0">
+          <a:scrgbClr r="0" g="0" b="0"/>
+        </a:effectRef>
+        <a:fontRef idx="minor"/>
+      </dsp:style>
+      <dsp:txBody>
+        <a:bodyPr spcFirstLastPara="0" vert="horz" wrap="square" lIns="45720" tIns="45720" rIns="45720" bIns="45720" numCol="1" spcCol="1270" anchor="ctr" anchorCtr="0">
+          <a:noAutofit/>
+        </a:bodyPr>
+        <a:lstStyle/>
+        <a:p>
+          <a:pPr marL="0" lvl="0" indent="0" algn="ctr" defTabSz="1600200">
+            <a:lnSpc>
+              <a:spcPct val="90000"/>
+            </a:lnSpc>
+            <a:spcBef>
+              <a:spcPct val="0"/>
+            </a:spcBef>
+            <a:spcAft>
+              <a:spcPct val="35000"/>
+            </a:spcAft>
+            <a:buNone/>
+          </a:pPr>
+          <a:endParaRPr lang="en-US" sz="3600" kern="1200"/>
+        </a:p>
+      </dsp:txBody>
+      <dsp:txXfrm>
+        <a:off x="8655016" y="953863"/>
+        <a:ext cx="449678" cy="615241"/>
+      </dsp:txXfrm>
+    </dsp:sp>
+    <dsp:sp modelId="{ABB29D5E-F11F-484E-8ED5-19D5EC278A22}">
+      <dsp:nvSpPr>
+        <dsp:cNvPr id="0" name=""/>
+        <dsp:cNvSpPr/>
+      </dsp:nvSpPr>
+      <dsp:spPr>
+        <a:xfrm>
+          <a:off x="9290644" y="2412959"/>
+          <a:ext cx="817596" cy="817596"/>
+        </a:xfrm>
+        <a:prstGeom prst="downArrow">
+          <a:avLst>
+            <a:gd name="adj1" fmla="val 55000"/>
+            <a:gd name="adj2" fmla="val 45000"/>
+          </a:avLst>
+        </a:prstGeom>
+        <a:solidFill>
+          <a:schemeClr val="accent2">
+            <a:tint val="40000"/>
+            <a:alpha val="90000"/>
+            <a:hueOff val="6734718"/>
+            <a:satOff val="-62232"/>
+            <a:lumOff val="-7015"/>
+            <a:alphaOff val="0"/>
+          </a:schemeClr>
+        </a:solidFill>
+        <a:ln w="19050" cap="flat" cmpd="sng" algn="ctr">
+          <a:solidFill>
+            <a:schemeClr val="accent2">
+              <a:tint val="40000"/>
+              <a:alpha val="90000"/>
+              <a:hueOff val="6734718"/>
+              <a:satOff val="-62232"/>
+              <a:lumOff val="-7015"/>
+              <a:alphaOff val="0"/>
+            </a:schemeClr>
+          </a:solidFill>
+          <a:prstDash val="solid"/>
+          <a:miter lim="800000"/>
+        </a:ln>
+        <a:effectLst/>
+      </dsp:spPr>
+      <dsp:style>
+        <a:lnRef idx="2">
+          <a:scrgbClr r="0" g="0" b="0"/>
+        </a:lnRef>
+        <a:fillRef idx="1">
+          <a:scrgbClr r="0" g="0" b="0"/>
+        </a:fillRef>
+        <a:effectRef idx="0">
+          <a:scrgbClr r="0" g="0" b="0"/>
+        </a:effectRef>
+        <a:fontRef idx="minor"/>
+      </dsp:style>
+      <dsp:txBody>
+        <a:bodyPr spcFirstLastPara="0" vert="horz" wrap="square" lIns="45720" tIns="45720" rIns="45720" bIns="45720" numCol="1" spcCol="1270" anchor="ctr" anchorCtr="0">
+          <a:noAutofit/>
+        </a:bodyPr>
+        <a:lstStyle/>
+        <a:p>
+          <a:pPr marL="0" lvl="0" indent="0" algn="ctr" defTabSz="1600200">
+            <a:lnSpc>
+              <a:spcPct val="90000"/>
+            </a:lnSpc>
+            <a:spcBef>
+              <a:spcPct val="0"/>
+            </a:spcBef>
+            <a:spcAft>
+              <a:spcPct val="35000"/>
+            </a:spcAft>
+            <a:buNone/>
+          </a:pPr>
+          <a:endParaRPr lang="en-US" sz="3600" kern="1200"/>
+        </a:p>
+      </dsp:txBody>
+      <dsp:txXfrm>
+        <a:off x="9474603" y="2412959"/>
+        <a:ext cx="449678" cy="615241"/>
+      </dsp:txXfrm>
+    </dsp:sp>
+  </dsp:spTree>
+</dsp:drawing>
+</file>
+
+<file path=ppt/diagrams/drawing5.xml><?xml version="1.0" encoding="utf-8"?>
+<dsp:drawing xmlns:dgm="http://schemas.openxmlformats.org/drawingml/2006/diagram" xmlns:dsp="http://schemas.microsoft.com/office/drawing/2008/diagram" xmlns:a="http://schemas.openxmlformats.org/drawingml/2006/main">
+  <dsp:spTree>
+    <dsp:nvGrpSpPr>
+      <dsp:cNvPr id="0" name=""/>
+      <dsp:cNvGrpSpPr/>
+    </dsp:nvGrpSpPr>
+    <dsp:grpSpPr/>
     <dsp:sp modelId="{AFF60285-135C-40E8-9181-2069D937C815}">
       <dsp:nvSpPr>
         <dsp:cNvPr id="0" name=""/>
@@ -7927,10 +10827,10 @@
             <a:defRPr b="1"/>
           </a:pPr>
           <a:r>
-            <a:rPr lang="en-GB" sz="3400" kern="1200"/>
+            <a:rPr lang="en-GB" sz="3400" kern="1200" dirty="0"/>
             <a:t>Pending</a:t>
           </a:r>
-          <a:endParaRPr lang="en-US" sz="3400" kern="1200"/>
+          <a:endParaRPr lang="en-US" sz="3400" kern="1200" dirty="0"/>
         </a:p>
       </dsp:txBody>
       <dsp:txXfrm>
@@ -8157,10 +11057,10 @@
             <a:defRPr b="1"/>
           </a:pPr>
           <a:r>
-            <a:rPr lang="en-GB" sz="3400" kern="1200"/>
+            <a:rPr lang="en-GB" sz="3400" kern="1200" dirty="0"/>
             <a:t>Potentially</a:t>
           </a:r>
-          <a:endParaRPr lang="en-US" sz="3400" kern="1200"/>
+          <a:endParaRPr lang="en-US" sz="3400" kern="1200" dirty="0"/>
         </a:p>
       </dsp:txBody>
       <dsp:txXfrm>
@@ -8246,6 +11146,723 @@
       <dsp:txXfrm>
         <a:off x="7665152" y="2389881"/>
         <a:ext cx="3261093" cy="1236347"/>
+      </dsp:txXfrm>
+    </dsp:sp>
+  </dsp:spTree>
+</dsp:drawing>
+</file>
+
+<file path=ppt/diagrams/drawing6.xml><?xml version="1.0" encoding="utf-8"?>
+<dsp:drawing xmlns:dgm="http://schemas.openxmlformats.org/drawingml/2006/diagram" xmlns:dsp="http://schemas.microsoft.com/office/drawing/2008/diagram" xmlns:a="http://schemas.openxmlformats.org/drawingml/2006/main">
+  <dsp:spTree>
+    <dsp:nvGrpSpPr>
+      <dsp:cNvPr id="0" name=""/>
+      <dsp:cNvGrpSpPr/>
+    </dsp:nvGrpSpPr>
+    <dsp:grpSpPr/>
+    <dsp:sp modelId="{12406314-6A1C-4592-BBE6-9B5EF13B9836}">
+      <dsp:nvSpPr>
+        <dsp:cNvPr id="0" name=""/>
+        <dsp:cNvSpPr/>
+      </dsp:nvSpPr>
+      <dsp:spPr>
+        <a:xfrm>
+          <a:off x="0" y="1740"/>
+          <a:ext cx="10927829" cy="881963"/>
+        </a:xfrm>
+        <a:prstGeom prst="roundRect">
+          <a:avLst>
+            <a:gd name="adj" fmla="val 10000"/>
+          </a:avLst>
+        </a:prstGeom>
+        <a:solidFill>
+          <a:schemeClr val="bg1">
+            <a:lumMod val="95000"/>
+            <a:hueOff val="0"/>
+            <a:satOff val="0"/>
+            <a:lumOff val="0"/>
+            <a:alphaOff val="0"/>
+          </a:schemeClr>
+        </a:solidFill>
+        <a:ln>
+          <a:noFill/>
+        </a:ln>
+        <a:effectLst/>
+      </dsp:spPr>
+      <dsp:style>
+        <a:lnRef idx="0">
+          <a:scrgbClr r="0" g="0" b="0"/>
+        </a:lnRef>
+        <a:fillRef idx="1">
+          <a:scrgbClr r="0" g="0" b="0"/>
+        </a:fillRef>
+        <a:effectRef idx="0">
+          <a:scrgbClr r="0" g="0" b="0"/>
+        </a:effectRef>
+        <a:fontRef idx="minor"/>
+      </dsp:style>
+    </dsp:sp>
+    <dsp:sp modelId="{FB9FD4CB-1F0A-4017-B7D5-D9CA30839E33}">
+      <dsp:nvSpPr>
+        <dsp:cNvPr id="0" name=""/>
+        <dsp:cNvSpPr/>
+      </dsp:nvSpPr>
+      <dsp:spPr>
+        <a:xfrm>
+          <a:off x="266793" y="200181"/>
+          <a:ext cx="485079" cy="485079"/>
+        </a:xfrm>
+        <a:prstGeom prst="rect">
+          <a:avLst/>
+        </a:prstGeom>
+        <a:blipFill>
+          <a:blip xmlns:r="http://schemas.openxmlformats.org/officeDocument/2006/relationships" r:embed="rId1">
+            <a:extLst>
+              <a:ext uri="{28A0092B-C50C-407E-A947-70E740481C1C}">
+                <a14:useLocalDpi xmlns:a14="http://schemas.microsoft.com/office/drawing/2010/main" val="0"/>
+              </a:ext>
+              <a:ext uri="{96DAC541-7B7A-43D3-8B79-37D633B846F1}">
+                <asvg:svgBlip xmlns:asvg="http://schemas.microsoft.com/office/drawing/2016/SVG/main" r:embed="rId2"/>
+              </a:ext>
+            </a:extLst>
+          </a:blip>
+          <a:stretch>
+            <a:fillRect/>
+          </a:stretch>
+        </a:blipFill>
+        <a:ln w="19050" cap="flat" cmpd="sng" algn="ctr">
+          <a:solidFill>
+            <a:schemeClr val="lt1">
+              <a:alpha val="0"/>
+              <a:hueOff val="0"/>
+              <a:satOff val="0"/>
+              <a:lumOff val="0"/>
+              <a:alphaOff val="0"/>
+            </a:schemeClr>
+          </a:solidFill>
+          <a:prstDash val="solid"/>
+          <a:miter lim="800000"/>
+        </a:ln>
+        <a:effectLst/>
+      </dsp:spPr>
+      <dsp:style>
+        <a:lnRef idx="2">
+          <a:scrgbClr r="0" g="0" b="0"/>
+        </a:lnRef>
+        <a:fillRef idx="1">
+          <a:scrgbClr r="0" g="0" b="0"/>
+        </a:fillRef>
+        <a:effectRef idx="0">
+          <a:scrgbClr r="0" g="0" b="0"/>
+        </a:effectRef>
+        <a:fontRef idx="minor">
+          <a:schemeClr val="lt1"/>
+        </a:fontRef>
+      </dsp:style>
+    </dsp:sp>
+    <dsp:sp modelId="{3B41C4B9-F2FC-4206-BEA8-4B0F4217567F}">
+      <dsp:nvSpPr>
+        <dsp:cNvPr id="0" name=""/>
+        <dsp:cNvSpPr/>
+      </dsp:nvSpPr>
+      <dsp:spPr>
+        <a:xfrm>
+          <a:off x="1018667" y="1740"/>
+          <a:ext cx="9909161" cy="881963"/>
+        </a:xfrm>
+        <a:prstGeom prst="rect">
+          <a:avLst/>
+        </a:prstGeom>
+        <a:noFill/>
+        <a:ln>
+          <a:noFill/>
+        </a:ln>
+        <a:effectLst/>
+      </dsp:spPr>
+      <dsp:style>
+        <a:lnRef idx="0">
+          <a:scrgbClr r="0" g="0" b="0"/>
+        </a:lnRef>
+        <a:fillRef idx="0">
+          <a:scrgbClr r="0" g="0" b="0"/>
+        </a:fillRef>
+        <a:effectRef idx="0">
+          <a:scrgbClr r="0" g="0" b="0"/>
+        </a:effectRef>
+        <a:fontRef idx="minor"/>
+      </dsp:style>
+      <dsp:txBody>
+        <a:bodyPr spcFirstLastPara="0" vert="horz" wrap="square" lIns="93341" tIns="93341" rIns="93341" bIns="93341" numCol="1" spcCol="1270" anchor="ctr" anchorCtr="0">
+          <a:noAutofit/>
+        </a:bodyPr>
+        <a:lstStyle/>
+        <a:p>
+          <a:pPr marL="0" lvl="0" indent="0" algn="l" defTabSz="977900">
+            <a:lnSpc>
+              <a:spcPct val="100000"/>
+            </a:lnSpc>
+            <a:spcBef>
+              <a:spcPct val="0"/>
+            </a:spcBef>
+            <a:spcAft>
+              <a:spcPct val="35000"/>
+            </a:spcAft>
+            <a:buNone/>
+          </a:pPr>
+          <a:r>
+            <a:rPr lang="en-GB" sz="2200" kern="1200"/>
+            <a:t>Purpose: Make studying engaging and competitive for students</a:t>
+          </a:r>
+          <a:endParaRPr lang="en-US" sz="2200" kern="1200"/>
+        </a:p>
+      </dsp:txBody>
+      <dsp:txXfrm>
+        <a:off x="1018667" y="1740"/>
+        <a:ext cx="9909161" cy="881963"/>
+      </dsp:txXfrm>
+    </dsp:sp>
+    <dsp:sp modelId="{151DD790-E2C5-4679-AD57-1240164C7A5F}">
+      <dsp:nvSpPr>
+        <dsp:cNvPr id="0" name=""/>
+        <dsp:cNvSpPr/>
+      </dsp:nvSpPr>
+      <dsp:spPr>
+        <a:xfrm>
+          <a:off x="0" y="1104194"/>
+          <a:ext cx="10927829" cy="881963"/>
+        </a:xfrm>
+        <a:prstGeom prst="roundRect">
+          <a:avLst>
+            <a:gd name="adj" fmla="val 10000"/>
+          </a:avLst>
+        </a:prstGeom>
+        <a:solidFill>
+          <a:schemeClr val="bg1">
+            <a:lumMod val="95000"/>
+            <a:hueOff val="0"/>
+            <a:satOff val="0"/>
+            <a:lumOff val="0"/>
+            <a:alphaOff val="0"/>
+          </a:schemeClr>
+        </a:solidFill>
+        <a:ln>
+          <a:noFill/>
+        </a:ln>
+        <a:effectLst/>
+      </dsp:spPr>
+      <dsp:style>
+        <a:lnRef idx="0">
+          <a:scrgbClr r="0" g="0" b="0"/>
+        </a:lnRef>
+        <a:fillRef idx="1">
+          <a:scrgbClr r="0" g="0" b="0"/>
+        </a:fillRef>
+        <a:effectRef idx="0">
+          <a:scrgbClr r="0" g="0" b="0"/>
+        </a:effectRef>
+        <a:fontRef idx="minor"/>
+      </dsp:style>
+    </dsp:sp>
+    <dsp:sp modelId="{3764279C-AC4C-480B-BC84-0536A52F688F}">
+      <dsp:nvSpPr>
+        <dsp:cNvPr id="0" name=""/>
+        <dsp:cNvSpPr/>
+      </dsp:nvSpPr>
+      <dsp:spPr>
+        <a:xfrm>
+          <a:off x="266793" y="1302635"/>
+          <a:ext cx="485079" cy="485079"/>
+        </a:xfrm>
+        <a:prstGeom prst="rect">
+          <a:avLst/>
+        </a:prstGeom>
+        <a:blipFill>
+          <a:blip xmlns:r="http://schemas.openxmlformats.org/officeDocument/2006/relationships" r:embed="rId3">
+            <a:extLst>
+              <a:ext uri="{28A0092B-C50C-407E-A947-70E740481C1C}">
+                <a14:useLocalDpi xmlns:a14="http://schemas.microsoft.com/office/drawing/2010/main" val="0"/>
+              </a:ext>
+              <a:ext uri="{96DAC541-7B7A-43D3-8B79-37D633B846F1}">
+                <asvg:svgBlip xmlns:asvg="http://schemas.microsoft.com/office/drawing/2016/SVG/main" r:embed="rId4"/>
+              </a:ext>
+            </a:extLst>
+          </a:blip>
+          <a:stretch>
+            <a:fillRect/>
+          </a:stretch>
+        </a:blipFill>
+        <a:ln w="19050" cap="flat" cmpd="sng" algn="ctr">
+          <a:solidFill>
+            <a:schemeClr val="lt1">
+              <a:alpha val="0"/>
+              <a:hueOff val="0"/>
+              <a:satOff val="0"/>
+              <a:lumOff val="0"/>
+              <a:alphaOff val="0"/>
+            </a:schemeClr>
+          </a:solidFill>
+          <a:prstDash val="solid"/>
+          <a:miter lim="800000"/>
+        </a:ln>
+        <a:effectLst/>
+      </dsp:spPr>
+      <dsp:style>
+        <a:lnRef idx="2">
+          <a:scrgbClr r="0" g="0" b="0"/>
+        </a:lnRef>
+        <a:fillRef idx="1">
+          <a:scrgbClr r="0" g="0" b="0"/>
+        </a:fillRef>
+        <a:effectRef idx="0">
+          <a:scrgbClr r="0" g="0" b="0"/>
+        </a:effectRef>
+        <a:fontRef idx="minor">
+          <a:schemeClr val="lt1"/>
+        </a:fontRef>
+      </dsp:style>
+    </dsp:sp>
+    <dsp:sp modelId="{86E17443-258F-45B9-9900-76F7AC7E4000}">
+      <dsp:nvSpPr>
+        <dsp:cNvPr id="0" name=""/>
+        <dsp:cNvSpPr/>
+      </dsp:nvSpPr>
+      <dsp:spPr>
+        <a:xfrm>
+          <a:off x="1018667" y="1104194"/>
+          <a:ext cx="9909161" cy="881963"/>
+        </a:xfrm>
+        <a:prstGeom prst="rect">
+          <a:avLst/>
+        </a:prstGeom>
+        <a:noFill/>
+        <a:ln>
+          <a:noFill/>
+        </a:ln>
+        <a:effectLst/>
+      </dsp:spPr>
+      <dsp:style>
+        <a:lnRef idx="0">
+          <a:scrgbClr r="0" g="0" b="0"/>
+        </a:lnRef>
+        <a:fillRef idx="0">
+          <a:scrgbClr r="0" g="0" b="0"/>
+        </a:fillRef>
+        <a:effectRef idx="0">
+          <a:scrgbClr r="0" g="0" b="0"/>
+        </a:effectRef>
+        <a:fontRef idx="minor"/>
+      </dsp:style>
+      <dsp:txBody>
+        <a:bodyPr spcFirstLastPara="0" vert="horz" wrap="square" lIns="93341" tIns="93341" rIns="93341" bIns="93341" numCol="1" spcCol="1270" anchor="ctr" anchorCtr="0">
+          <a:noAutofit/>
+        </a:bodyPr>
+        <a:lstStyle/>
+        <a:p>
+          <a:pPr marL="0" lvl="0" indent="0" algn="l" defTabSz="977900">
+            <a:lnSpc>
+              <a:spcPct val="100000"/>
+            </a:lnSpc>
+            <a:spcBef>
+              <a:spcPct val="0"/>
+            </a:spcBef>
+            <a:spcAft>
+              <a:spcPct val="35000"/>
+            </a:spcAft>
+            <a:buNone/>
+          </a:pPr>
+          <a:r>
+            <a:rPr lang="en-GB" sz="2200" kern="1200"/>
+            <a:t>Status: Accounts, Subjects &amp; Topics Implemented</a:t>
+          </a:r>
+          <a:endParaRPr lang="en-US" sz="2200" kern="1200"/>
+        </a:p>
+      </dsp:txBody>
+      <dsp:txXfrm>
+        <a:off x="1018667" y="1104194"/>
+        <a:ext cx="9909161" cy="881963"/>
+      </dsp:txXfrm>
+    </dsp:sp>
+    <dsp:sp modelId="{3D6E5037-21E4-4930-8F4F-5184C03CC160}">
+      <dsp:nvSpPr>
+        <dsp:cNvPr id="0" name=""/>
+        <dsp:cNvSpPr/>
+      </dsp:nvSpPr>
+      <dsp:spPr>
+        <a:xfrm>
+          <a:off x="0" y="2206647"/>
+          <a:ext cx="10927829" cy="881963"/>
+        </a:xfrm>
+        <a:prstGeom prst="roundRect">
+          <a:avLst>
+            <a:gd name="adj" fmla="val 10000"/>
+          </a:avLst>
+        </a:prstGeom>
+        <a:solidFill>
+          <a:schemeClr val="bg1">
+            <a:lumMod val="95000"/>
+            <a:hueOff val="0"/>
+            <a:satOff val="0"/>
+            <a:lumOff val="0"/>
+            <a:alphaOff val="0"/>
+          </a:schemeClr>
+        </a:solidFill>
+        <a:ln>
+          <a:noFill/>
+        </a:ln>
+        <a:effectLst/>
+      </dsp:spPr>
+      <dsp:style>
+        <a:lnRef idx="0">
+          <a:scrgbClr r="0" g="0" b="0"/>
+        </a:lnRef>
+        <a:fillRef idx="1">
+          <a:scrgbClr r="0" g="0" b="0"/>
+        </a:fillRef>
+        <a:effectRef idx="0">
+          <a:scrgbClr r="0" g="0" b="0"/>
+        </a:effectRef>
+        <a:fontRef idx="minor"/>
+      </dsp:style>
+    </dsp:sp>
+    <dsp:sp modelId="{D0E34142-7CF5-4082-ADD1-CA6AAA75BA0F}">
+      <dsp:nvSpPr>
+        <dsp:cNvPr id="0" name=""/>
+        <dsp:cNvSpPr/>
+      </dsp:nvSpPr>
+      <dsp:spPr>
+        <a:xfrm>
+          <a:off x="266793" y="2405089"/>
+          <a:ext cx="485079" cy="485079"/>
+        </a:xfrm>
+        <a:prstGeom prst="rect">
+          <a:avLst/>
+        </a:prstGeom>
+        <a:blipFill>
+          <a:blip xmlns:r="http://schemas.openxmlformats.org/officeDocument/2006/relationships" r:embed="rId5">
+            <a:extLst>
+              <a:ext uri="{28A0092B-C50C-407E-A947-70E740481C1C}">
+                <a14:useLocalDpi xmlns:a14="http://schemas.microsoft.com/office/drawing/2010/main" val="0"/>
+              </a:ext>
+              <a:ext uri="{96DAC541-7B7A-43D3-8B79-37D633B846F1}">
+                <asvg:svgBlip xmlns:asvg="http://schemas.microsoft.com/office/drawing/2016/SVG/main" r:embed="rId6"/>
+              </a:ext>
+            </a:extLst>
+          </a:blip>
+          <a:stretch>
+            <a:fillRect/>
+          </a:stretch>
+        </a:blipFill>
+        <a:ln w="19050" cap="flat" cmpd="sng" algn="ctr">
+          <a:solidFill>
+            <a:schemeClr val="lt1">
+              <a:alpha val="0"/>
+              <a:hueOff val="0"/>
+              <a:satOff val="0"/>
+              <a:lumOff val="0"/>
+              <a:alphaOff val="0"/>
+            </a:schemeClr>
+          </a:solidFill>
+          <a:prstDash val="solid"/>
+          <a:miter lim="800000"/>
+        </a:ln>
+        <a:effectLst/>
+      </dsp:spPr>
+      <dsp:style>
+        <a:lnRef idx="2">
+          <a:scrgbClr r="0" g="0" b="0"/>
+        </a:lnRef>
+        <a:fillRef idx="1">
+          <a:scrgbClr r="0" g="0" b="0"/>
+        </a:fillRef>
+        <a:effectRef idx="0">
+          <a:scrgbClr r="0" g="0" b="0"/>
+        </a:effectRef>
+        <a:fontRef idx="minor">
+          <a:schemeClr val="lt1"/>
+        </a:fontRef>
+      </dsp:style>
+    </dsp:sp>
+    <dsp:sp modelId="{A0330144-F7A4-42AC-85C6-65945FC6705B}">
+      <dsp:nvSpPr>
+        <dsp:cNvPr id="0" name=""/>
+        <dsp:cNvSpPr/>
+      </dsp:nvSpPr>
+      <dsp:spPr>
+        <a:xfrm>
+          <a:off x="1018667" y="2206647"/>
+          <a:ext cx="9909161" cy="881963"/>
+        </a:xfrm>
+        <a:prstGeom prst="rect">
+          <a:avLst/>
+        </a:prstGeom>
+        <a:noFill/>
+        <a:ln>
+          <a:noFill/>
+        </a:ln>
+        <a:effectLst/>
+      </dsp:spPr>
+      <dsp:style>
+        <a:lnRef idx="0">
+          <a:scrgbClr r="0" g="0" b="0"/>
+        </a:lnRef>
+        <a:fillRef idx="0">
+          <a:scrgbClr r="0" g="0" b="0"/>
+        </a:fillRef>
+        <a:effectRef idx="0">
+          <a:scrgbClr r="0" g="0" b="0"/>
+        </a:effectRef>
+        <a:fontRef idx="minor"/>
+      </dsp:style>
+      <dsp:txBody>
+        <a:bodyPr spcFirstLastPara="0" vert="horz" wrap="square" lIns="93341" tIns="93341" rIns="93341" bIns="93341" numCol="1" spcCol="1270" anchor="ctr" anchorCtr="0">
+          <a:noAutofit/>
+        </a:bodyPr>
+        <a:lstStyle/>
+        <a:p>
+          <a:pPr marL="0" lvl="0" indent="0" algn="l" defTabSz="977900">
+            <a:lnSpc>
+              <a:spcPct val="100000"/>
+            </a:lnSpc>
+            <a:spcBef>
+              <a:spcPct val="0"/>
+            </a:spcBef>
+            <a:spcAft>
+              <a:spcPct val="35000"/>
+            </a:spcAft>
+            <a:buNone/>
+          </a:pPr>
+          <a:r>
+            <a:rPr lang="en-GB" sz="2200" kern="1200"/>
+            <a:t>Next: Questions, Marks &amp; Admin Profiles</a:t>
+          </a:r>
+          <a:endParaRPr lang="en-US" sz="2200" kern="1200"/>
+        </a:p>
+      </dsp:txBody>
+      <dsp:txXfrm>
+        <a:off x="1018667" y="2206647"/>
+        <a:ext cx="9909161" cy="881963"/>
+      </dsp:txXfrm>
+    </dsp:sp>
+    <dsp:sp modelId="{AF2AFC48-64B0-4723-8344-95255A30FE6C}">
+      <dsp:nvSpPr>
+        <dsp:cNvPr id="0" name=""/>
+        <dsp:cNvSpPr/>
+      </dsp:nvSpPr>
+      <dsp:spPr>
+        <a:xfrm>
+          <a:off x="0" y="3309101"/>
+          <a:ext cx="10927829" cy="881963"/>
+        </a:xfrm>
+        <a:prstGeom prst="roundRect">
+          <a:avLst>
+            <a:gd name="adj" fmla="val 10000"/>
+          </a:avLst>
+        </a:prstGeom>
+        <a:solidFill>
+          <a:schemeClr val="bg1">
+            <a:lumMod val="95000"/>
+            <a:hueOff val="0"/>
+            <a:satOff val="0"/>
+            <a:lumOff val="0"/>
+            <a:alphaOff val="0"/>
+          </a:schemeClr>
+        </a:solidFill>
+        <a:ln>
+          <a:noFill/>
+        </a:ln>
+        <a:effectLst/>
+      </dsp:spPr>
+      <dsp:style>
+        <a:lnRef idx="0">
+          <a:scrgbClr r="0" g="0" b="0"/>
+        </a:lnRef>
+        <a:fillRef idx="1">
+          <a:scrgbClr r="0" g="0" b="0"/>
+        </a:fillRef>
+        <a:effectRef idx="0">
+          <a:scrgbClr r="0" g="0" b="0"/>
+        </a:effectRef>
+        <a:fontRef idx="minor"/>
+      </dsp:style>
+    </dsp:sp>
+    <dsp:sp modelId="{F88D0E89-F727-4F8D-A744-896D43D9C784}">
+      <dsp:nvSpPr>
+        <dsp:cNvPr id="0" name=""/>
+        <dsp:cNvSpPr/>
+      </dsp:nvSpPr>
+      <dsp:spPr>
+        <a:xfrm>
+          <a:off x="266793" y="3507543"/>
+          <a:ext cx="485079" cy="485079"/>
+        </a:xfrm>
+        <a:prstGeom prst="rect">
+          <a:avLst/>
+        </a:prstGeom>
+        <a:blipFill>
+          <a:blip xmlns:r="http://schemas.openxmlformats.org/officeDocument/2006/relationships" r:embed="rId7">
+            <a:extLst>
+              <a:ext uri="{28A0092B-C50C-407E-A947-70E740481C1C}">
+                <a14:useLocalDpi xmlns:a14="http://schemas.microsoft.com/office/drawing/2010/main" val="0"/>
+              </a:ext>
+              <a:ext uri="{96DAC541-7B7A-43D3-8B79-37D633B846F1}">
+                <asvg:svgBlip xmlns:asvg="http://schemas.microsoft.com/office/drawing/2016/SVG/main" r:embed="rId8"/>
+              </a:ext>
+            </a:extLst>
+          </a:blip>
+          <a:stretch>
+            <a:fillRect/>
+          </a:stretch>
+        </a:blipFill>
+        <a:ln w="19050" cap="flat" cmpd="sng" algn="ctr">
+          <a:solidFill>
+            <a:schemeClr val="lt1">
+              <a:alpha val="0"/>
+              <a:hueOff val="0"/>
+              <a:satOff val="0"/>
+              <a:lumOff val="0"/>
+              <a:alphaOff val="0"/>
+            </a:schemeClr>
+          </a:solidFill>
+          <a:prstDash val="solid"/>
+          <a:miter lim="800000"/>
+        </a:ln>
+        <a:effectLst/>
+      </dsp:spPr>
+      <dsp:style>
+        <a:lnRef idx="2">
+          <a:scrgbClr r="0" g="0" b="0"/>
+        </a:lnRef>
+        <a:fillRef idx="1">
+          <a:scrgbClr r="0" g="0" b="0"/>
+        </a:fillRef>
+        <a:effectRef idx="0">
+          <a:scrgbClr r="0" g="0" b="0"/>
+        </a:effectRef>
+        <a:fontRef idx="minor">
+          <a:schemeClr val="lt1"/>
+        </a:fontRef>
+      </dsp:style>
+    </dsp:sp>
+    <dsp:sp modelId="{D5BDD981-48AD-4005-81A9-AA85B86104A5}">
+      <dsp:nvSpPr>
+        <dsp:cNvPr id="0" name=""/>
+        <dsp:cNvSpPr/>
+      </dsp:nvSpPr>
+      <dsp:spPr>
+        <a:xfrm>
+          <a:off x="1018667" y="3309101"/>
+          <a:ext cx="4917523" cy="881963"/>
+        </a:xfrm>
+        <a:prstGeom prst="rect">
+          <a:avLst/>
+        </a:prstGeom>
+        <a:noFill/>
+        <a:ln>
+          <a:noFill/>
+        </a:ln>
+        <a:effectLst/>
+      </dsp:spPr>
+      <dsp:style>
+        <a:lnRef idx="0">
+          <a:scrgbClr r="0" g="0" b="0"/>
+        </a:lnRef>
+        <a:fillRef idx="0">
+          <a:scrgbClr r="0" g="0" b="0"/>
+        </a:fillRef>
+        <a:effectRef idx="0">
+          <a:scrgbClr r="0" g="0" b="0"/>
+        </a:effectRef>
+        <a:fontRef idx="minor"/>
+      </dsp:style>
+      <dsp:txBody>
+        <a:bodyPr spcFirstLastPara="0" vert="horz" wrap="square" lIns="93341" tIns="93341" rIns="93341" bIns="93341" numCol="1" spcCol="1270" anchor="ctr" anchorCtr="0">
+          <a:noAutofit/>
+        </a:bodyPr>
+        <a:lstStyle/>
+        <a:p>
+          <a:pPr marL="0" lvl="0" indent="0" algn="l" defTabSz="977900">
+            <a:lnSpc>
+              <a:spcPct val="100000"/>
+            </a:lnSpc>
+            <a:spcBef>
+              <a:spcPct val="0"/>
+            </a:spcBef>
+            <a:spcAft>
+              <a:spcPct val="35000"/>
+            </a:spcAft>
+            <a:buNone/>
+          </a:pPr>
+          <a:r>
+            <a:rPr lang="en-GB" sz="2200" kern="1200"/>
+            <a:t>Goal: Give students an incentive to revise in a way that’s fun for them</a:t>
+          </a:r>
+          <a:endParaRPr lang="en-US" sz="2200" kern="1200"/>
+        </a:p>
+      </dsp:txBody>
+      <dsp:txXfrm>
+        <a:off x="1018667" y="3309101"/>
+        <a:ext cx="4917523" cy="881963"/>
+      </dsp:txXfrm>
+    </dsp:sp>
+    <dsp:sp modelId="{658125E1-134A-443A-8DDD-02C955062748}">
+      <dsp:nvSpPr>
+        <dsp:cNvPr id="0" name=""/>
+        <dsp:cNvSpPr/>
+      </dsp:nvSpPr>
+      <dsp:spPr>
+        <a:xfrm>
+          <a:off x="5936190" y="3309101"/>
+          <a:ext cx="4991638" cy="881963"/>
+        </a:xfrm>
+        <a:prstGeom prst="rect">
+          <a:avLst/>
+        </a:prstGeom>
+        <a:noFill/>
+        <a:ln>
+          <a:noFill/>
+        </a:ln>
+        <a:effectLst/>
+      </dsp:spPr>
+      <dsp:style>
+        <a:lnRef idx="0">
+          <a:scrgbClr r="0" g="0" b="0"/>
+        </a:lnRef>
+        <a:fillRef idx="0">
+          <a:scrgbClr r="0" g="0" b="0"/>
+        </a:fillRef>
+        <a:effectRef idx="0">
+          <a:scrgbClr r="0" g="0" b="0"/>
+        </a:effectRef>
+        <a:fontRef idx="minor"/>
+      </dsp:style>
+      <dsp:txBody>
+        <a:bodyPr spcFirstLastPara="0" vert="horz" wrap="square" lIns="93341" tIns="93341" rIns="93341" bIns="93341" numCol="1" spcCol="1270" anchor="ctr" anchorCtr="0">
+          <a:noAutofit/>
+        </a:bodyPr>
+        <a:lstStyle/>
+        <a:p>
+          <a:pPr marL="0" lvl="0" indent="0" algn="l" defTabSz="800100">
+            <a:lnSpc>
+              <a:spcPct val="100000"/>
+            </a:lnSpc>
+            <a:spcBef>
+              <a:spcPct val="0"/>
+            </a:spcBef>
+            <a:spcAft>
+              <a:spcPct val="35000"/>
+            </a:spcAft>
+            <a:buNone/>
+          </a:pPr>
+          <a:r>
+            <a:rPr lang="en-GB" sz="1800" kern="1200"/>
+            <a:t>And have them come back again in the future to continue revision.</a:t>
+          </a:r>
+          <a:endParaRPr lang="en-US" sz="1800" kern="1200"/>
+        </a:p>
+      </dsp:txBody>
+      <dsp:txXfrm>
+        <a:off x="5936190" y="3309101"/>
+        <a:ext cx="4991638" cy="881963"/>
       </dsp:txXfrm>
     </dsp:sp>
   </dsp:spTree>
@@ -8923,6 +12540,1232 @@
 </file>
 
 <file path=ppt/diagrams/layout4.xml><?xml version="1.0" encoding="utf-8"?>
+<dgm:layoutDef xmlns:dgm="http://schemas.openxmlformats.org/drawingml/2006/diagram" xmlns:a="http://schemas.openxmlformats.org/drawingml/2006/main" uniqueId="urn:microsoft.com/office/officeart/2005/8/layout/vProcess5">
+  <dgm:title val=""/>
+  <dgm:desc val=""/>
+  <dgm:catLst>
+    <dgm:cat type="process" pri="14000"/>
+  </dgm:catLst>
+  <dgm:sampData>
+    <dgm:dataModel>
+      <dgm:ptLst>
+        <dgm:pt modelId="0" type="doc"/>
+        <dgm:pt modelId="1">
+          <dgm:prSet phldr="1"/>
+        </dgm:pt>
+        <dgm:pt modelId="2">
+          <dgm:prSet phldr="1"/>
+        </dgm:pt>
+        <dgm:pt modelId="3">
+          <dgm:prSet phldr="1"/>
+        </dgm:pt>
+      </dgm:ptLst>
+      <dgm:cxnLst>
+        <dgm:cxn modelId="5" srcId="0" destId="1" srcOrd="0" destOrd="0"/>
+        <dgm:cxn modelId="6" srcId="0" destId="2" srcOrd="1" destOrd="0"/>
+        <dgm:cxn modelId="7" srcId="0" destId="3" srcOrd="2" destOrd="0"/>
+      </dgm:cxnLst>
+      <dgm:bg/>
+      <dgm:whole/>
+    </dgm:dataModel>
+  </dgm:sampData>
+  <dgm:styleData>
+    <dgm:dataModel>
+      <dgm:ptLst>
+        <dgm:pt modelId="0" type="doc"/>
+        <dgm:pt modelId="1"/>
+        <dgm:pt modelId="2"/>
+      </dgm:ptLst>
+      <dgm:cxnLst>
+        <dgm:cxn modelId="3" srcId="0" destId="1" srcOrd="0" destOrd="0"/>
+        <dgm:cxn modelId="4" srcId="0" destId="2" srcOrd="1" destOrd="0"/>
+      </dgm:cxnLst>
+      <dgm:bg/>
+      <dgm:whole/>
+    </dgm:dataModel>
+  </dgm:styleData>
+  <dgm:clrData>
+    <dgm:dataModel>
+      <dgm:ptLst>
+        <dgm:pt modelId="0" type="doc"/>
+        <dgm:pt modelId="1"/>
+        <dgm:pt modelId="2"/>
+        <dgm:pt modelId="3"/>
+        <dgm:pt modelId="4"/>
+      </dgm:ptLst>
+      <dgm:cxnLst>
+        <dgm:cxn modelId="6" srcId="0" destId="1" srcOrd="0" destOrd="0"/>
+        <dgm:cxn modelId="7" srcId="0" destId="2" srcOrd="1" destOrd="0"/>
+        <dgm:cxn modelId="8" srcId="0" destId="3" srcOrd="2" destOrd="0"/>
+        <dgm:cxn modelId="9" srcId="0" destId="4" srcOrd="3" destOrd="0"/>
+      </dgm:cxnLst>
+      <dgm:bg/>
+      <dgm:whole/>
+    </dgm:dataModel>
+  </dgm:clrData>
+  <dgm:layoutNode name="outerComposite">
+    <dgm:varLst>
+      <dgm:chMax val="5"/>
+      <dgm:dir/>
+      <dgm:resizeHandles val="exact"/>
+    </dgm:varLst>
+    <dgm:alg type="composite"/>
+    <dgm:shape xmlns:r="http://schemas.openxmlformats.org/officeDocument/2006/relationships" r:blip="">
+      <dgm:adjLst/>
+    </dgm:shape>
+    <dgm:presOf/>
+    <dgm:choose name="Name0">
+      <dgm:if name="Name1" func="var" arg="dir" op="equ" val="norm">
+        <dgm:constrLst>
+          <dgm:constr type="primFontSz" for="ch" ptType="node" op="equ" val="65"/>
+          <dgm:constr type="w" for="ch" forName="dummyMaxCanvas" refType="w"/>
+          <dgm:constr type="h" for="ch" forName="dummyMaxCanvas" refType="h"/>
+          <dgm:constr type="w" for="ch" forName="OneNode_1" refType="w"/>
+          <dgm:constr type="h" for="ch" forName="OneNode_1" refType="h" fact="0.5"/>
+          <dgm:constr type="ctrY" for="ch" forName="OneNode_1" refType="h" fact="0.5"/>
+          <dgm:constr type="w" for="ch" forName="TwoNodes_1" refType="w" fact="0.85"/>
+          <dgm:constr type="h" for="ch" forName="TwoNodes_1" refType="h" fact="0.45"/>
+          <dgm:constr type="t" for="ch" forName="TwoNodes_1"/>
+          <dgm:constr type="l" for="ch" forName="TwoNodes_1"/>
+          <dgm:constr type="w" for="ch" forName="TwoNodes_2" refType="w" fact="0.85"/>
+          <dgm:constr type="h" for="ch" forName="TwoNodes_2" refType="h" fact="0.45"/>
+          <dgm:constr type="b" for="ch" forName="TwoNodes_2" refType="h"/>
+          <dgm:constr type="r" for="ch" forName="TwoNodes_2" refType="w"/>
+          <dgm:constr type="w" for="ch" forName="TwoConn_1-2" refType="h" refFor="ch" refForName="TwoNodes_1" fact="0.65"/>
+          <dgm:constr type="h" for="ch" forName="TwoConn_1-2" refType="h" refFor="ch" refForName="TwoNodes_1" fact="0.65"/>
+          <dgm:constr type="ctrY" for="ch" forName="TwoConn_1-2" refType="h" fact="0.5"/>
+          <dgm:constr type="r" for="ch" forName="TwoConn_1-2" refType="r" refFor="ch" refForName="TwoNodes_1"/>
+          <dgm:constr type="r" for="ch" forName="TwoNodes_1_text" refType="l" refFor="ch" refForName="TwoConn_1-2"/>
+          <dgm:constr type="rOff" for="ch" forName="TwoNodes_1_text" refType="w" refFor="ch" refForName="TwoConn_1-2" fact="-0.5"/>
+          <dgm:constr type="t" for="ch" forName="TwoNodes_1_text" refType="t" refFor="ch" refForName="TwoNodes_1"/>
+          <dgm:constr type="b" for="ch" forName="TwoNodes_1_text" refType="b" refFor="ch" refForName="TwoNodes_1"/>
+          <dgm:constr type="l" for="ch" forName="TwoNodes_1_text" refType="l" refFor="ch" refForName="TwoNodes_1"/>
+          <dgm:constr type="r" for="ch" forName="TwoNodes_2_text" refType="l" refFor="ch" refForName="TwoConn_1-2"/>
+          <dgm:constr type="t" for="ch" forName="TwoNodes_2_text" refType="t" refFor="ch" refForName="TwoNodes_2"/>
+          <dgm:constr type="b" for="ch" forName="TwoNodes_2_text" refType="b" refFor="ch" refForName="TwoNodes_2"/>
+          <dgm:constr type="l" for="ch" forName="TwoNodes_2_text" refType="l" refFor="ch" refForName="TwoNodes_2"/>
+          <dgm:constr type="w" for="ch" forName="ThreeNodes_1" refType="w" fact="0.85"/>
+          <dgm:constr type="h" for="ch" forName="ThreeNodes_1" refType="h" fact="0.3"/>
+          <dgm:constr type="t" for="ch" forName="ThreeNodes_1"/>
+          <dgm:constr type="l" for="ch" forName="ThreeNodes_1"/>
+          <dgm:constr type="w" for="ch" forName="ThreeNodes_2" refType="w" fact="0.85"/>
+          <dgm:constr type="h" for="ch" forName="ThreeNodes_2" refType="h" fact="0.3"/>
+          <dgm:constr type="ctrY" for="ch" forName="ThreeNodes_2" refType="h" fact="0.5"/>
+          <dgm:constr type="ctrX" for="ch" forName="ThreeNodes_2" refType="w" fact="0.5"/>
+          <dgm:constr type="w" for="ch" forName="ThreeNodes_3" refType="w" fact="0.85"/>
+          <dgm:constr type="h" for="ch" forName="ThreeNodes_3" refType="h" fact="0.3"/>
+          <dgm:constr type="b" for="ch" forName="ThreeNodes_3" refType="h"/>
+          <dgm:constr type="r" for="ch" forName="ThreeNodes_3" refType="w"/>
+          <dgm:constr type="w" for="ch" forName="ThreeConn_1-2" refType="h" refFor="ch" refForName="ThreeNodes_1" fact="0.65"/>
+          <dgm:constr type="h" for="ch" forName="ThreeConn_1-2" refType="h" refFor="ch" refForName="ThreeNodes_1" fact="0.65"/>
+          <dgm:constr type="ctrY" for="ch" forName="ThreeConn_1-2" refType="h" fact="0.325"/>
+          <dgm:constr type="r" for="ch" forName="ThreeConn_1-2" refType="r" refFor="ch" refForName="ThreeNodes_1"/>
+          <dgm:constr type="w" for="ch" forName="ThreeConn_2-3" refType="h" refFor="ch" refForName="ThreeNodes_2" fact="0.65"/>
+          <dgm:constr type="h" for="ch" forName="ThreeConn_2-3" refType="h" refFor="ch" refForName="ThreeNodes_2" fact="0.65"/>
+          <dgm:constr type="ctrY" for="ch" forName="ThreeConn_2-3" refType="h" fact="0.673"/>
+          <dgm:constr type="r" for="ch" forName="ThreeConn_2-3" refType="r" refFor="ch" refForName="ThreeNodes_2"/>
+          <dgm:constr type="r" for="ch" forName="ThreeNodes_1_text" refType="l" refFor="ch" refForName="ThreeConn_1-2"/>
+          <dgm:constr type="rOff" for="ch" forName="ThreeNodes_1_text" refType="w" refFor="ch" refForName="ThreeConn_1-2" fact="-0.57"/>
+          <dgm:constr type="t" for="ch" forName="ThreeNodes_1_text" refType="t" refFor="ch" refForName="ThreeNodes_1"/>
+          <dgm:constr type="b" for="ch" forName="ThreeNodes_1_text" refType="b" refFor="ch" refForName="ThreeNodes_1"/>
+          <dgm:constr type="l" for="ch" forName="ThreeNodes_1_text" refType="l" refFor="ch" refForName="ThreeNodes_1"/>
+          <dgm:constr type="r" for="ch" forName="ThreeNodes_2_text" refType="l" refFor="ch" refForName="ThreeConn_1-2"/>
+          <dgm:constr type="t" for="ch" forName="ThreeNodes_2_text" refType="t" refFor="ch" refForName="ThreeNodes_2"/>
+          <dgm:constr type="b" for="ch" forName="ThreeNodes_2_text" refType="b" refFor="ch" refForName="ThreeNodes_2"/>
+          <dgm:constr type="l" for="ch" forName="ThreeNodes_2_text" refType="l" refFor="ch" refForName="ThreeNodes_2"/>
+          <dgm:constr type="r" for="ch" forName="ThreeNodes_3_text" refType="l" refFor="ch" refForName="ThreeConn_2-3"/>
+          <dgm:constr type="t" for="ch" forName="ThreeNodes_3_text" refType="t" refFor="ch" refForName="ThreeNodes_3"/>
+          <dgm:constr type="b" for="ch" forName="ThreeNodes_3_text" refType="b" refFor="ch" refForName="ThreeNodes_3"/>
+          <dgm:constr type="l" for="ch" forName="ThreeNodes_3_text" refType="l" refFor="ch" refForName="ThreeNodes_3"/>
+          <dgm:constr type="w" for="ch" forName="FourNodes_1" refType="w" fact="0.8"/>
+          <dgm:constr type="h" for="ch" forName="FourNodes_1" refType="h" fact="0.22"/>
+          <dgm:constr type="t" for="ch" forName="FourNodes_1"/>
+          <dgm:constr type="l" for="ch" forName="FourNodes_1"/>
+          <dgm:constr type="w" for="ch" forName="FourNodes_2" refType="w" fact="0.8"/>
+          <dgm:constr type="h" for="ch" forName="FourNodes_2" refType="h" fact="0.22"/>
+          <dgm:constr type="ctrY" for="ch" forName="FourNodes_2" refType="h" fact="0.37"/>
+          <dgm:constr type="ctrX" for="ch" forName="FourNodes_2" refType="w" fact="0.467"/>
+          <dgm:constr type="w" for="ch" forName="FourNodes_3" refType="w" fact="0.8"/>
+          <dgm:constr type="h" for="ch" forName="FourNodes_3" refType="h" fact="0.22"/>
+          <dgm:constr type="ctrY" for="ch" forName="FourNodes_3" refType="h" fact="0.63"/>
+          <dgm:constr type="ctrX" for="ch" forName="FourNodes_3" refType="w" fact="0.533"/>
+          <dgm:constr type="w" for="ch" forName="FourNodes_4" refType="w" fact="0.8"/>
+          <dgm:constr type="h" for="ch" forName="FourNodes_4" refType="h" fact="0.22"/>
+          <dgm:constr type="b" for="ch" forName="FourNodes_4" refType="h"/>
+          <dgm:constr type="r" for="ch" forName="FourNodes_4" refType="w"/>
+          <dgm:constr type="w" for="ch" forName="FourConn_1-2" refType="h" refFor="ch" refForName="FourNodes_1" fact="0.65"/>
+          <dgm:constr type="h" for="ch" forName="FourConn_1-2" refType="h" refFor="ch" refForName="FourNodes_1" fact="0.65"/>
+          <dgm:constr type="ctrY" for="ch" forName="FourConn_1-2" refType="h" fact="0.24"/>
+          <dgm:constr type="r" for="ch" forName="FourConn_1-2" refType="r" refFor="ch" refForName="FourNodes_1"/>
+          <dgm:constr type="w" for="ch" forName="FourConn_2-3" refType="h" refFor="ch" refForName="FourNodes_2" fact="0.65"/>
+          <dgm:constr type="h" for="ch" forName="FourConn_2-3" refType="h" refFor="ch" refForName="FourNodes_2" fact="0.65"/>
+          <dgm:constr type="ctrY" for="ch" forName="FourConn_2-3" refType="h" fact="0.5"/>
+          <dgm:constr type="r" for="ch" forName="FourConn_2-3" refType="r" refFor="ch" refForName="FourNodes_2"/>
+          <dgm:constr type="w" for="ch" forName="FourConn_3-4" refType="h" refFor="ch" refForName="FourNodes_3" fact="0.65"/>
+          <dgm:constr type="h" for="ch" forName="FourConn_3-4" refType="h" refFor="ch" refForName="FourNodes_3" fact="0.65"/>
+          <dgm:constr type="ctrY" for="ch" forName="FourConn_3-4" refType="h" fact="0.76"/>
+          <dgm:constr type="r" for="ch" forName="FourConn_3-4" refType="r" refFor="ch" refForName="FourNodes_3"/>
+          <dgm:constr type="r" for="ch" forName="FourNodes_1_text" refType="l" refFor="ch" refForName="FourConn_1-2"/>
+          <dgm:constr type="rOff" for="ch" forName="FourNodes_1_text" refType="w" refFor="ch" refForName="FourConn_1-2" fact="-0.7"/>
+          <dgm:constr type="t" for="ch" forName="FourNodes_1_text" refType="t" refFor="ch" refForName="FourNodes_1"/>
+          <dgm:constr type="b" for="ch" forName="FourNodes_1_text" refType="b" refFor="ch" refForName="FourNodes_1"/>
+          <dgm:constr type="l" for="ch" forName="FourNodes_1_text" refType="l" refFor="ch" refForName="FourNodes_1"/>
+          <dgm:constr type="r" for="ch" forName="FourNodes_2_text" refType="l" refFor="ch" refForName="FourConn_1-2"/>
+          <dgm:constr type="t" for="ch" forName="FourNodes_2_text" refType="t" refFor="ch" refForName="FourNodes_2"/>
+          <dgm:constr type="b" for="ch" forName="FourNodes_2_text" refType="b" refFor="ch" refForName="FourNodes_2"/>
+          <dgm:constr type="l" for="ch" forName="FourNodes_2_text" refType="l" refFor="ch" refForName="FourNodes_2"/>
+          <dgm:constr type="r" for="ch" forName="FourNodes_3_text" refType="l" refFor="ch" refForName="FourConn_2-3"/>
+          <dgm:constr type="t" for="ch" forName="FourNodes_3_text" refType="t" refFor="ch" refForName="FourNodes_3"/>
+          <dgm:constr type="b" for="ch" forName="FourNodes_3_text" refType="b" refFor="ch" refForName="FourNodes_3"/>
+          <dgm:constr type="l" for="ch" forName="FourNodes_3_text" refType="l" refFor="ch" refForName="FourNodes_3"/>
+          <dgm:constr type="r" for="ch" forName="FourNodes_4_text" refType="l" refFor="ch" refForName="FourConn_3-4"/>
+          <dgm:constr type="t" for="ch" forName="FourNodes_4_text" refType="t" refFor="ch" refForName="FourNodes_4"/>
+          <dgm:constr type="b" for="ch" forName="FourNodes_4_text" refType="b" refFor="ch" refForName="FourNodes_4"/>
+          <dgm:constr type="l" for="ch" forName="FourNodes_4_text" refType="l" refFor="ch" refForName="FourNodes_4"/>
+          <dgm:constr type="w" for="ch" forName="FiveNodes_1" refType="w" fact="0.77"/>
+          <dgm:constr type="h" for="ch" forName="FiveNodes_1" refType="h" fact="0.18"/>
+          <dgm:constr type="t" for="ch" forName="FiveNodes_1"/>
+          <dgm:constr type="l" for="ch" forName="FiveNodes_1"/>
+          <dgm:constr type="w" for="ch" forName="FiveNodes_2" refType="w" fact="0.77"/>
+          <dgm:constr type="h" for="ch" forName="FiveNodes_2" refType="h" fact="0.18"/>
+          <dgm:constr type="ctrY" for="ch" forName="FiveNodes_2" refType="h" fact="0.295"/>
+          <dgm:constr type="ctrX" for="ch" forName="FiveNodes_2" refType="w" fact="0.4425"/>
+          <dgm:constr type="w" for="ch" forName="FiveNodes_3" refType="w" fact="0.77"/>
+          <dgm:constr type="h" for="ch" forName="FiveNodes_3" refType="h" fact="0.18"/>
+          <dgm:constr type="ctrY" for="ch" forName="FiveNodes_3" refType="h" fact="0.5"/>
+          <dgm:constr type="ctrX" for="ch" forName="FiveNodes_3" refType="w" fact="0.5"/>
+          <dgm:constr type="w" for="ch" forName="FiveNodes_4" refType="w" fact="0.77"/>
+          <dgm:constr type="h" for="ch" forName="FiveNodes_4" refType="h" fact="0.18"/>
+          <dgm:constr type="ctrY" for="ch" forName="FiveNodes_4" refType="h" fact="0.705"/>
+          <dgm:constr type="ctrX" for="ch" forName="FiveNodes_4" refType="w" fact="0.5575"/>
+          <dgm:constr type="w" for="ch" forName="FiveNodes_5" refType="w" fact="0.77"/>
+          <dgm:constr type="h" for="ch" forName="FiveNodes_5" refType="h" fact="0.18"/>
+          <dgm:constr type="b" for="ch" forName="FiveNodes_5" refType="h"/>
+          <dgm:constr type="r" for="ch" forName="FiveNodes_5" refType="w"/>
+          <dgm:constr type="w" for="ch" forName="FiveConn_1-2" refType="h" refFor="ch" refForName="FiveNodes_1" fact="0.65"/>
+          <dgm:constr type="h" for="ch" forName="FiveConn_1-2" refType="h" refFor="ch" refForName="FiveNodes_1" fact="0.65"/>
+          <dgm:constr type="ctrY" for="ch" forName="FiveConn_1-2" refType="h" fact="0.19"/>
+          <dgm:constr type="r" for="ch" forName="FiveConn_1-2" refType="r" refFor="ch" refForName="FiveNodes_1"/>
+          <dgm:constr type="w" for="ch" forName="FiveConn_2-3" refType="h" refFor="ch" refForName="FiveNodes_2" fact="0.65"/>
+          <dgm:constr type="h" for="ch" forName="FiveConn_2-3" refType="h" refFor="ch" refForName="FiveNodes_2" fact="0.65"/>
+          <dgm:constr type="ctrY" for="ch" forName="FiveConn_2-3" refType="h" fact="0.395"/>
+          <dgm:constr type="r" for="ch" forName="FiveConn_2-3" refType="r" refFor="ch" refForName="FiveNodes_2"/>
+          <dgm:constr type="w" for="ch" forName="FiveConn_3-4" refType="h" refFor="ch" refForName="FiveNodes_3" fact="0.65"/>
+          <dgm:constr type="h" for="ch" forName="FiveConn_3-4" refType="h" refFor="ch" refForName="FiveNodes_3" fact="0.65"/>
+          <dgm:constr type="ctrY" for="ch" forName="FiveConn_3-4" refType="h" fact="0.597"/>
+          <dgm:constr type="r" for="ch" forName="FiveConn_3-4" refType="r" refFor="ch" refForName="FiveNodes_3"/>
+          <dgm:constr type="w" for="ch" forName="FiveConn_4-5" refType="h" refFor="ch" refForName="FiveNodes_4" fact="0.65"/>
+          <dgm:constr type="h" for="ch" forName="FiveConn_4-5" refType="h" refFor="ch" refForName="FiveNodes_4" fact="0.65"/>
+          <dgm:constr type="ctrY" for="ch" forName="FiveConn_4-5" refType="h" fact="0.804"/>
+          <dgm:constr type="r" for="ch" forName="FiveConn_4-5" refType="r" refFor="ch" refForName="FiveNodes_4"/>
+          <dgm:constr type="r" for="ch" forName="FiveNodes_1_text" refType="l" refFor="ch" refForName="FiveConn_1-2"/>
+          <dgm:constr type="rOff" for="ch" forName="FiveNodes_1_text" refType="w" refFor="ch" refForName="FiveConn_1-2" fact="-0.75"/>
+          <dgm:constr type="t" for="ch" forName="FiveNodes_1_text" refType="t" refFor="ch" refForName="FiveNodes_1"/>
+          <dgm:constr type="b" for="ch" forName="FiveNodes_1_text" refType="b" refFor="ch" refForName="FiveNodes_1"/>
+          <dgm:constr type="l" for="ch" forName="FiveNodes_1_text" refType="l" refFor="ch" refForName="FiveNodes_1"/>
+          <dgm:constr type="r" for="ch" forName="FiveNodes_2_text" refType="l" refFor="ch" refForName="FiveConn_1-2"/>
+          <dgm:constr type="t" for="ch" forName="FiveNodes_2_text" refType="t" refFor="ch" refForName="FiveNodes_2"/>
+          <dgm:constr type="b" for="ch" forName="FiveNodes_2_text" refType="b" refFor="ch" refForName="FiveNodes_2"/>
+          <dgm:constr type="l" for="ch" forName="FiveNodes_2_text" refType="l" refFor="ch" refForName="FiveNodes_2"/>
+          <dgm:constr type="r" for="ch" forName="FiveNodes_3_text" refType="l" refFor="ch" refForName="FiveConn_2-3"/>
+          <dgm:constr type="t" for="ch" forName="FiveNodes_3_text" refType="t" refFor="ch" refForName="FiveNodes_3"/>
+          <dgm:constr type="b" for="ch" forName="FiveNodes_3_text" refType="b" refFor="ch" refForName="FiveNodes_3"/>
+          <dgm:constr type="l" for="ch" forName="FiveNodes_3_text" refType="l" refFor="ch" refForName="FiveNodes_3"/>
+          <dgm:constr type="r" for="ch" forName="FiveNodes_4_text" refType="l" refFor="ch" refForName="FiveConn_3-4"/>
+          <dgm:constr type="t" for="ch" forName="FiveNodes_4_text" refType="t" refFor="ch" refForName="FiveNodes_4"/>
+          <dgm:constr type="b" for="ch" forName="FiveNodes_4_text" refType="b" refFor="ch" refForName="FiveNodes_4"/>
+          <dgm:constr type="l" for="ch" forName="FiveNodes_4_text" refType="l" refFor="ch" refForName="FiveNodes_4"/>
+          <dgm:constr type="r" for="ch" forName="FiveNodes_5_text" refType="l" refFor="ch" refForName="FiveConn_4-5"/>
+          <dgm:constr type="t" for="ch" forName="FiveNodes_5_text" refType="t" refFor="ch" refForName="FiveNodes_5"/>
+          <dgm:constr type="b" for="ch" forName="FiveNodes_5_text" refType="b" refFor="ch" refForName="FiveNodes_5"/>
+          <dgm:constr type="l" for="ch" forName="FiveNodes_5_text" refType="l" refFor="ch" refForName="FiveNodes_5"/>
+        </dgm:constrLst>
+      </dgm:if>
+      <dgm:else name="Name2">
+        <dgm:constrLst>
+          <dgm:constr type="primFontSz" for="ch" ptType="node" op="equ" val="65"/>
+          <dgm:constr type="w" for="ch" forName="dummyMaxCanvas" refType="w"/>
+          <dgm:constr type="h" for="ch" forName="dummyMaxCanvas" refType="h"/>
+          <dgm:constr type="w" for="ch" forName="OneNode_1" refType="w"/>
+          <dgm:constr type="h" for="ch" forName="OneNode_1" refType="h" fact="0.5"/>
+          <dgm:constr type="ctrY" for="ch" forName="OneNode_1" refType="h" fact="0.5"/>
+          <dgm:constr type="w" for="ch" forName="TwoNodes_1" refType="w" fact="0.85"/>
+          <dgm:constr type="h" for="ch" forName="TwoNodes_1" refType="h" fact="0.45"/>
+          <dgm:constr type="t" for="ch" forName="TwoNodes_1"/>
+          <dgm:constr type="r" for="ch" forName="TwoNodes_1" refType="w"/>
+          <dgm:constr type="w" for="ch" forName="TwoNodes_2" refType="w" fact="0.85"/>
+          <dgm:constr type="h" for="ch" forName="TwoNodes_2" refType="h" fact="0.45"/>
+          <dgm:constr type="b" for="ch" forName="TwoNodes_2" refType="h"/>
+          <dgm:constr type="l" for="ch" forName="TwoNodes_2"/>
+          <dgm:constr type="w" for="ch" forName="TwoConn_1-2" refType="h" refFor="ch" refForName="TwoNodes_1" fact="0.65"/>
+          <dgm:constr type="h" for="ch" forName="TwoConn_1-2" refType="h" refFor="ch" refForName="TwoNodes_1" fact="0.65"/>
+          <dgm:constr type="ctrY" for="ch" forName="TwoConn_1-2" refType="h" fact="0.5"/>
+          <dgm:constr type="l" for="ch" forName="TwoConn_1-2" refType="l" refFor="ch" refForName="TwoNodes_1"/>
+          <dgm:constr type="l" for="ch" forName="TwoNodes_1_text" refType="r" refFor="ch" refForName="TwoConn_1-2"/>
+          <dgm:constr type="lOff" for="ch" forName="TwoNodes_1_text" refType="w" refFor="ch" refForName="TwoConn_1-2" fact="0.5"/>
+          <dgm:constr type="t" for="ch" forName="TwoNodes_1_text" refType="t" refFor="ch" refForName="TwoNodes_1"/>
+          <dgm:constr type="b" for="ch" forName="TwoNodes_1_text" refType="b" refFor="ch" refForName="TwoNodes_1"/>
+          <dgm:constr type="r" for="ch" forName="TwoNodes_1_text" refType="r" refFor="ch" refForName="TwoNodes_1"/>
+          <dgm:constr type="l" for="ch" forName="TwoNodes_2_text" refType="r" refFor="ch" refForName="TwoConn_1-2"/>
+          <dgm:constr type="t" for="ch" forName="TwoNodes_2_text" refType="t" refFor="ch" refForName="TwoNodes_2"/>
+          <dgm:constr type="b" for="ch" forName="TwoNodes_2_text" refType="b" refFor="ch" refForName="TwoNodes_2"/>
+          <dgm:constr type="r" for="ch" forName="TwoNodes_2_text" refType="r" refFor="ch" refForName="TwoNodes_2"/>
+          <dgm:constr type="w" for="ch" forName="ThreeNodes_1" refType="w" fact="0.85"/>
+          <dgm:constr type="h" for="ch" forName="ThreeNodes_1" refType="h" fact="0.3"/>
+          <dgm:constr type="t" for="ch" forName="ThreeNodes_1"/>
+          <dgm:constr type="r" for="ch" forName="ThreeNodes_1" refType="w"/>
+          <dgm:constr type="w" for="ch" forName="ThreeNodes_2" refType="w" fact="0.85"/>
+          <dgm:constr type="h" for="ch" forName="ThreeNodes_2" refType="h" fact="0.3"/>
+          <dgm:constr type="ctrY" for="ch" forName="ThreeNodes_2" refType="h" fact="0.5"/>
+          <dgm:constr type="ctrX" for="ch" forName="ThreeNodes_2" refType="w" fact="0.5"/>
+          <dgm:constr type="w" for="ch" forName="ThreeNodes_3" refType="w" fact="0.85"/>
+          <dgm:constr type="h" for="ch" forName="ThreeNodes_3" refType="h" fact="0.3"/>
+          <dgm:constr type="b" for="ch" forName="ThreeNodes_3" refType="h"/>
+          <dgm:constr type="l" for="ch" forName="ThreeNodes_3"/>
+          <dgm:constr type="w" for="ch" forName="ThreeConn_1-2" refType="h" refFor="ch" refForName="ThreeNodes_1" fact="0.65"/>
+          <dgm:constr type="h" for="ch" forName="ThreeConn_1-2" refType="h" refFor="ch" refForName="ThreeNodes_1" fact="0.65"/>
+          <dgm:constr type="ctrY" for="ch" forName="ThreeConn_1-2" refType="h" fact="0.325"/>
+          <dgm:constr type="l" for="ch" forName="ThreeConn_1-2" refType="l" refFor="ch" refForName="ThreeNodes_1"/>
+          <dgm:constr type="w" for="ch" forName="ThreeConn_2-3" refType="h" refFor="ch" refForName="ThreeNodes_2" fact="0.65"/>
+          <dgm:constr type="h" for="ch" forName="ThreeConn_2-3" refType="h" refFor="ch" refForName="ThreeNodes_2" fact="0.65"/>
+          <dgm:constr type="ctrY" for="ch" forName="ThreeConn_2-3" refType="h" fact="0.673"/>
+          <dgm:constr type="l" for="ch" forName="ThreeConn_2-3" refType="l" refFor="ch" refForName="ThreeNodes_2"/>
+          <dgm:constr type="l" for="ch" forName="ThreeNodes_1_text" refType="r" refFor="ch" refForName="ThreeConn_1-2"/>
+          <dgm:constr type="lOff" for="ch" forName="ThreeNodes_1_text" refType="w" refFor="ch" refForName="ThreeConn_1-2" fact="0.55"/>
+          <dgm:constr type="t" for="ch" forName="ThreeNodes_1_text" refType="t" refFor="ch" refForName="ThreeNodes_1"/>
+          <dgm:constr type="b" for="ch" forName="ThreeNodes_1_text" refType="b" refFor="ch" refForName="ThreeNodes_1"/>
+          <dgm:constr type="r" for="ch" forName="ThreeNodes_1_text" refType="r" refFor="ch" refForName="ThreeNodes_1"/>
+          <dgm:constr type="l" for="ch" forName="ThreeNodes_2_text" refType="r" refFor="ch" refForName="ThreeConn_1-2"/>
+          <dgm:constr type="t" for="ch" forName="ThreeNodes_2_text" refType="t" refFor="ch" refForName="ThreeNodes_2"/>
+          <dgm:constr type="b" for="ch" forName="ThreeNodes_2_text" refType="b" refFor="ch" refForName="ThreeNodes_2"/>
+          <dgm:constr type="r" for="ch" forName="ThreeNodes_2_text" refType="r" refFor="ch" refForName="ThreeNodes_2"/>
+          <dgm:constr type="l" for="ch" forName="ThreeNodes_3_text" refType="r" refFor="ch" refForName="ThreeConn_2-3"/>
+          <dgm:constr type="t" for="ch" forName="ThreeNodes_3_text" refType="t" refFor="ch" refForName="ThreeNodes_3"/>
+          <dgm:constr type="b" for="ch" forName="ThreeNodes_3_text" refType="b" refFor="ch" refForName="ThreeNodes_3"/>
+          <dgm:constr type="r" for="ch" forName="ThreeNodes_3_text" refType="r" refFor="ch" refForName="ThreeNodes_3"/>
+          <dgm:constr type="w" for="ch" forName="FourNodes_1" refType="w" fact="0.8"/>
+          <dgm:constr type="h" for="ch" forName="FourNodes_1" refType="h" fact="0.22"/>
+          <dgm:constr type="t" for="ch" forName="FourNodes_1"/>
+          <dgm:constr type="r" for="ch" forName="FourNodes_1" refType="w"/>
+          <dgm:constr type="w" for="ch" forName="FourNodes_2" refType="w" fact="0.8"/>
+          <dgm:constr type="h" for="ch" forName="FourNodes_2" refType="h" fact="0.22"/>
+          <dgm:constr type="ctrY" for="ch" forName="FourNodes_2" refType="h" fact="0.37"/>
+          <dgm:constr type="ctrX" for="ch" forName="FourNodes_2" refType="w" fact="0.533"/>
+          <dgm:constr type="w" for="ch" forName="FourNodes_3" refType="w" fact="0.8"/>
+          <dgm:constr type="h" for="ch" forName="FourNodes_3" refType="h" fact="0.22"/>
+          <dgm:constr type="ctrY" for="ch" forName="FourNodes_3" refType="h" fact="0.63"/>
+          <dgm:constr type="ctrX" for="ch" forName="FourNodes_3" refType="w" fact="0.467"/>
+          <dgm:constr type="w" for="ch" forName="FourNodes_4" refType="w" fact="0.8"/>
+          <dgm:constr type="h" for="ch" forName="FourNodes_4" refType="h" fact="0.22"/>
+          <dgm:constr type="b" for="ch" forName="FourNodes_4" refType="h"/>
+          <dgm:constr type="l" for="ch" forName="FourNodes_4"/>
+          <dgm:constr type="w" for="ch" forName="FourConn_1-2" refType="h" refFor="ch" refForName="FourNodes_1" fact="0.65"/>
+          <dgm:constr type="h" for="ch" forName="FourConn_1-2" refType="h" refFor="ch" refForName="FourNodes_1" fact="0.65"/>
+          <dgm:constr type="ctrY" for="ch" forName="FourConn_1-2" refType="h" fact="0.24"/>
+          <dgm:constr type="l" for="ch" forName="FourConn_1-2" refType="l" refFor="ch" refForName="FourNodes_1"/>
+          <dgm:constr type="w" for="ch" forName="FourConn_2-3" refType="h" refFor="ch" refForName="FourNodes_2" fact="0.65"/>
+          <dgm:constr type="h" for="ch" forName="FourConn_2-3" refType="h" refFor="ch" refForName="FourNodes_2" fact="0.65"/>
+          <dgm:constr type="ctrY" for="ch" forName="FourConn_2-3" refType="h" fact="0.5"/>
+          <dgm:constr type="l" for="ch" forName="FourConn_2-3" refType="l" refFor="ch" refForName="FourNodes_2"/>
+          <dgm:constr type="w" for="ch" forName="FourConn_3-4" refType="h" refFor="ch" refForName="FourNodes_3" fact="0.65"/>
+          <dgm:constr type="h" for="ch" forName="FourConn_3-4" refType="h" refFor="ch" refForName="FourNodes_3" fact="0.65"/>
+          <dgm:constr type="ctrY" for="ch" forName="FourConn_3-4" refType="h" fact="0.76"/>
+          <dgm:constr type="l" for="ch" forName="FourConn_3-4" refType="l" refFor="ch" refForName="FourNodes_3"/>
+          <dgm:constr type="l" for="ch" forName="FourNodes_1_text" refType="r" refFor="ch" refForName="FourConn_1-2"/>
+          <dgm:constr type="lOff" for="ch" forName="FourNodes_1_text" refType="w" refFor="ch" refForName="FourConn_1-2" fact="0.69"/>
+          <dgm:constr type="t" for="ch" forName="FourNodes_1_text" refType="t" refFor="ch" refForName="FourNodes_1"/>
+          <dgm:constr type="b" for="ch" forName="FourNodes_1_text" refType="b" refFor="ch" refForName="FourNodes_1"/>
+          <dgm:constr type="r" for="ch" forName="FourNodes_1_text" refType="r" refFor="ch" refForName="FourNodes_1"/>
+          <dgm:constr type="l" for="ch" forName="FourNodes_2_text" refType="r" refFor="ch" refForName="FourConn_1-2"/>
+          <dgm:constr type="t" for="ch" forName="FourNodes_2_text" refType="t" refFor="ch" refForName="FourNodes_2"/>
+          <dgm:constr type="b" for="ch" forName="FourNodes_2_text" refType="b" refFor="ch" refForName="FourNodes_2"/>
+          <dgm:constr type="r" for="ch" forName="FourNodes_2_text" refType="r" refFor="ch" refForName="FourNodes_2"/>
+          <dgm:constr type="l" for="ch" forName="FourNodes_3_text" refType="r" refFor="ch" refForName="FourConn_2-3"/>
+          <dgm:constr type="t" for="ch" forName="FourNodes_3_text" refType="t" refFor="ch" refForName="FourNodes_3"/>
+          <dgm:constr type="b" for="ch" forName="FourNodes_3_text" refType="b" refFor="ch" refForName="FourNodes_3"/>
+          <dgm:constr type="r" for="ch" forName="FourNodes_3_text" refType="r" refFor="ch" refForName="FourNodes_3"/>
+          <dgm:constr type="l" for="ch" forName="FourNodes_4_text" refType="r" refFor="ch" refForName="FourConn_3-4"/>
+          <dgm:constr type="t" for="ch" forName="FourNodes_4_text" refType="t" refFor="ch" refForName="FourNodes_4"/>
+          <dgm:constr type="b" for="ch" forName="FourNodes_4_text" refType="b" refFor="ch" refForName="FourNodes_4"/>
+          <dgm:constr type="r" for="ch" forName="FourNodes_4_text" refType="r" refFor="ch" refForName="FourNodes_4"/>
+          <dgm:constr type="w" for="ch" forName="FiveNodes_1" refType="w" fact="0.77"/>
+          <dgm:constr type="h" for="ch" forName="FiveNodes_1" refType="h" fact="0.18"/>
+          <dgm:constr type="t" for="ch" forName="FiveNodes_1"/>
+          <dgm:constr type="r" for="ch" forName="FiveNodes_1" refType="w"/>
+          <dgm:constr type="w" for="ch" forName="FiveNodes_2" refType="w" fact="0.77"/>
+          <dgm:constr type="h" for="ch" forName="FiveNodes_2" refType="h" fact="0.18"/>
+          <dgm:constr type="ctrY" for="ch" forName="FiveNodes_2" refType="h" fact="0.295"/>
+          <dgm:constr type="ctrX" for="ch" forName="FiveNodes_2" refType="w" fact="0.5575"/>
+          <dgm:constr type="w" for="ch" forName="FiveNodes_3" refType="w" fact="0.77"/>
+          <dgm:constr type="h" for="ch" forName="FiveNodes_3" refType="h" fact="0.18"/>
+          <dgm:constr type="ctrY" for="ch" forName="FiveNodes_3" refType="h" fact="0.5"/>
+          <dgm:constr type="ctrX" for="ch" forName="FiveNodes_3" refType="w" fact="0.5"/>
+          <dgm:constr type="w" for="ch" forName="FiveNodes_4" refType="w" fact="0.77"/>
+          <dgm:constr type="h" for="ch" forName="FiveNodes_4" refType="h" fact="0.18"/>
+          <dgm:constr type="ctrY" for="ch" forName="FiveNodes_4" refType="h" fact="0.705"/>
+          <dgm:constr type="ctrX" for="ch" forName="FiveNodes_4" refType="w" fact="0.4425"/>
+          <dgm:constr type="w" for="ch" forName="FiveNodes_5" refType="w" fact="0.77"/>
+          <dgm:constr type="h" for="ch" forName="FiveNodes_5" refType="h" fact="0.18"/>
+          <dgm:constr type="b" for="ch" forName="FiveNodes_5" refType="h"/>
+          <dgm:constr type="l" for="ch" forName="FiveNodes_5"/>
+          <dgm:constr type="w" for="ch" forName="FiveConn_1-2" refType="h" refFor="ch" refForName="FiveNodes_1" fact="0.65"/>
+          <dgm:constr type="h" for="ch" forName="FiveConn_1-2" refType="h" refFor="ch" refForName="FiveNodes_1" fact="0.65"/>
+          <dgm:constr type="ctrY" for="ch" forName="FiveConn_1-2" refType="h" fact="0.19"/>
+          <dgm:constr type="l" for="ch" forName="FiveConn_1-2" refType="l" refFor="ch" refForName="FiveNodes_1"/>
+          <dgm:constr type="w" for="ch" forName="FiveConn_2-3" refType="h" refFor="ch" refForName="FiveNodes_2" fact="0.65"/>
+          <dgm:constr type="h" for="ch" forName="FiveConn_2-3" refType="h" refFor="ch" refForName="FiveNodes_2" fact="0.65"/>
+          <dgm:constr type="ctrY" for="ch" forName="FiveConn_2-3" refType="h" fact="0.395"/>
+          <dgm:constr type="l" for="ch" forName="FiveConn_2-3" refType="l" refFor="ch" refForName="FiveNodes_2"/>
+          <dgm:constr type="w" for="ch" forName="FiveConn_3-4" refType="h" refFor="ch" refForName="FiveNodes_3" fact="0.65"/>
+          <dgm:constr type="h" for="ch" forName="FiveConn_3-4" refType="h" refFor="ch" refForName="FiveNodes_3" fact="0.65"/>
+          <dgm:constr type="ctrY" for="ch" forName="FiveConn_3-4" refType="h" fact="0.597"/>
+          <dgm:constr type="l" for="ch" forName="FiveConn_3-4" refType="l" refFor="ch" refForName="FiveNodes_3"/>
+          <dgm:constr type="w" for="ch" forName="FiveConn_4-5" refType="h" refFor="ch" refForName="FiveNodes_4" fact="0.65"/>
+          <dgm:constr type="h" for="ch" forName="FiveConn_4-5" refType="h" refFor="ch" refForName="FiveNodes_4" fact="0.65"/>
+          <dgm:constr type="ctrY" for="ch" forName="FiveConn_4-5" refType="h" fact="0.804"/>
+          <dgm:constr type="l" for="ch" forName="FiveConn_4-5" refType="l" refFor="ch" refForName="FiveNodes_4"/>
+          <dgm:constr type="l" for="ch" forName="FiveNodes_1_text" refType="r" refFor="ch" refForName="FiveConn_1-2"/>
+          <dgm:constr type="lOff" for="ch" forName="FiveNodes_1_text" refType="w" refFor="ch" refForName="FiveConn_1-2" fact="0.73"/>
+          <dgm:constr type="t" for="ch" forName="FiveNodes_1_text" refType="t" refFor="ch" refForName="FiveNodes_1"/>
+          <dgm:constr type="b" for="ch" forName="FiveNodes_1_text" refType="b" refFor="ch" refForName="FiveNodes_1"/>
+          <dgm:constr type="r" for="ch" forName="FiveNodes_1_text" refType="r" refFor="ch" refForName="FiveNodes_1"/>
+          <dgm:constr type="l" for="ch" forName="FiveNodes_2_text" refType="r" refFor="ch" refForName="FiveConn_1-2"/>
+          <dgm:constr type="t" for="ch" forName="FiveNodes_2_text" refType="t" refFor="ch" refForName="FiveNodes_2"/>
+          <dgm:constr type="b" for="ch" forName="FiveNodes_2_text" refType="b" refFor="ch" refForName="FiveNodes_2"/>
+          <dgm:constr type="r" for="ch" forName="FiveNodes_2_text" refType="r" refFor="ch" refForName="FiveNodes_2"/>
+          <dgm:constr type="l" for="ch" forName="FiveNodes_3_text" refType="r" refFor="ch" refForName="FiveConn_2-3"/>
+          <dgm:constr type="t" for="ch" forName="FiveNodes_3_text" refType="t" refFor="ch" refForName="FiveNodes_3"/>
+          <dgm:constr type="b" for="ch" forName="FiveNodes_3_text" refType="b" refFor="ch" refForName="FiveNodes_3"/>
+          <dgm:constr type="r" for="ch" forName="FiveNodes_3_text" refType="r" refFor="ch" refForName="FiveNodes_3"/>
+          <dgm:constr type="l" for="ch" forName="FiveNodes_4_text" refType="r" refFor="ch" refForName="FiveConn_3-4"/>
+          <dgm:constr type="t" for="ch" forName="FiveNodes_4_text" refType="t" refFor="ch" refForName="FiveNodes_4"/>
+          <dgm:constr type="b" for="ch" forName="FiveNodes_4_text" refType="b" refFor="ch" refForName="FiveNodes_4"/>
+          <dgm:constr type="r" for="ch" forName="FiveNodes_4_text" refType="r" refFor="ch" refForName="FiveNodes_4"/>
+          <dgm:constr type="l" for="ch" forName="FiveNodes_5_text" refType="r" refFor="ch" refForName="FiveConn_4-5"/>
+          <dgm:constr type="t" for="ch" forName="FiveNodes_5_text" refType="t" refFor="ch" refForName="FiveNodes_5"/>
+          <dgm:constr type="b" for="ch" forName="FiveNodes_5_text" refType="b" refFor="ch" refForName="FiveNodes_5"/>
+          <dgm:constr type="r" for="ch" forName="FiveNodes_5_text" refType="r" refFor="ch" refForName="FiveNodes_5"/>
+        </dgm:constrLst>
+      </dgm:else>
+    </dgm:choose>
+    <dgm:ruleLst/>
+    <dgm:layoutNode name="dummyMaxCanvas">
+      <dgm:varLst/>
+      <dgm:alg type="sp"/>
+      <dgm:shape xmlns:r="http://schemas.openxmlformats.org/officeDocument/2006/relationships" r:blip="">
+        <dgm:adjLst/>
+      </dgm:shape>
+      <dgm:presOf/>
+      <dgm:constrLst/>
+      <dgm:ruleLst/>
+    </dgm:layoutNode>
+    <dgm:choose name="Name3">
+      <dgm:if name="Name4" axis="ch" ptType="node" func="cnt" op="equ" val="1">
+        <dgm:layoutNode name="OneNode_1">
+          <dgm:varLst>
+            <dgm:bulletEnabled val="1"/>
+          </dgm:varLst>
+          <dgm:alg type="tx"/>
+          <dgm:shape xmlns:r="http://schemas.openxmlformats.org/officeDocument/2006/relationships" type="roundRect" r:blip="">
+            <dgm:adjLst>
+              <dgm:adj idx="1" val="0.1"/>
+            </dgm:adjLst>
+          </dgm:shape>
+          <dgm:presOf axis="ch desOrSelf" ptType="node node" st="1 1" cnt="1 0"/>
+          <dgm:constrLst>
+            <dgm:constr type="lMarg" refType="primFontSz" fact="0.3"/>
+            <dgm:constr type="rMarg" refType="primFontSz" fact="0.3"/>
+            <dgm:constr type="tMarg" refType="primFontSz" fact="0.3"/>
+            <dgm:constr type="bMarg" refType="primFontSz" fact="0.3"/>
+          </dgm:constrLst>
+          <dgm:ruleLst>
+            <dgm:rule type="primFontSz" val="5" fact="NaN" max="NaN"/>
+          </dgm:ruleLst>
+        </dgm:layoutNode>
+      </dgm:if>
+      <dgm:else name="Name5">
+        <dgm:choose name="Name6">
+          <dgm:if name="Name7" axis="ch" ptType="node" func="cnt" op="equ" val="2">
+            <dgm:layoutNode name="TwoNodes_1">
+              <dgm:varLst>
+                <dgm:bulletEnabled val="1"/>
+              </dgm:varLst>
+              <dgm:alg type="sp"/>
+              <dgm:shape xmlns:r="http://schemas.openxmlformats.org/officeDocument/2006/relationships" type="roundRect" r:blip="">
+                <dgm:adjLst>
+                  <dgm:adj idx="1" val="0.1"/>
+                </dgm:adjLst>
+              </dgm:shape>
+              <dgm:presOf axis="ch desOrSelf" ptType="node node" st="1 1" cnt="1 0"/>
+              <dgm:constrLst/>
+              <dgm:ruleLst/>
+            </dgm:layoutNode>
+            <dgm:layoutNode name="TwoNodes_2">
+              <dgm:varLst>
+                <dgm:bulletEnabled val="1"/>
+              </dgm:varLst>
+              <dgm:alg type="sp"/>
+              <dgm:shape xmlns:r="http://schemas.openxmlformats.org/officeDocument/2006/relationships" type="roundRect" r:blip="">
+                <dgm:adjLst>
+                  <dgm:adj idx="1" val="0.1"/>
+                </dgm:adjLst>
+              </dgm:shape>
+              <dgm:presOf axis="ch desOrSelf" ptType="node node" st="2 1" cnt="1 0"/>
+              <dgm:constrLst/>
+              <dgm:ruleLst/>
+            </dgm:layoutNode>
+            <dgm:layoutNode name="TwoConn_1-2" styleLbl="fgAccFollowNode1">
+              <dgm:varLst>
+                <dgm:bulletEnabled val="1"/>
+              </dgm:varLst>
+              <dgm:alg type="tx"/>
+              <dgm:shape xmlns:r="http://schemas.openxmlformats.org/officeDocument/2006/relationships" type="downArrow" r:blip="">
+                <dgm:adjLst>
+                  <dgm:adj idx="1" val="0.55"/>
+                  <dgm:adj idx="2" val="0.45"/>
+                </dgm:adjLst>
+              </dgm:shape>
+              <dgm:presOf axis="ch" ptType="sibTrans" cnt="1"/>
+              <dgm:constrLst>
+                <dgm:constr type="lMarg" refType="primFontSz" fact="0.1"/>
+                <dgm:constr type="rMarg" refType="primFontSz" fact="0.1"/>
+                <dgm:constr type="tMarg" refType="primFontSz" fact="0.1"/>
+                <dgm:constr type="bMarg" refType="primFontSz" fact="0.1"/>
+              </dgm:constrLst>
+              <dgm:ruleLst>
+                <dgm:rule type="primFontSz" val="5" fact="NaN" max="NaN"/>
+              </dgm:ruleLst>
+            </dgm:layoutNode>
+            <dgm:layoutNode name="TwoNodes_1_text">
+              <dgm:varLst>
+                <dgm:bulletEnabled val="1"/>
+              </dgm:varLst>
+              <dgm:alg type="tx">
+                <dgm:param type="parTxLTRAlign" val="l"/>
+                <dgm:param type="txAnchorVertCh" val="mid"/>
+              </dgm:alg>
+              <dgm:shape xmlns:r="http://schemas.openxmlformats.org/officeDocument/2006/relationships" type="roundRect" r:blip="" hideGeom="1">
+                <dgm:adjLst>
+                  <dgm:adj idx="1" val="0.1"/>
+                </dgm:adjLst>
+              </dgm:shape>
+              <dgm:presOf axis="ch desOrSelf" ptType="node node" st="1 1" cnt="1 0"/>
+              <dgm:constrLst>
+                <dgm:constr type="lMarg" refType="primFontSz" fact="0.3"/>
+                <dgm:constr type="rMarg" refType="primFontSz" fact="0.3"/>
+                <dgm:constr type="tMarg" refType="primFontSz" fact="0.3"/>
+                <dgm:constr type="bMarg" refType="primFontSz" fact="0.3"/>
+              </dgm:constrLst>
+              <dgm:ruleLst>
+                <dgm:rule type="primFontSz" val="5" fact="NaN" max="NaN"/>
+              </dgm:ruleLst>
+            </dgm:layoutNode>
+            <dgm:layoutNode name="TwoNodes_2_text">
+              <dgm:varLst>
+                <dgm:bulletEnabled val="1"/>
+              </dgm:varLst>
+              <dgm:alg type="tx">
+                <dgm:param type="parTxLTRAlign" val="l"/>
+                <dgm:param type="txAnchorVertCh" val="mid"/>
+              </dgm:alg>
+              <dgm:shape xmlns:r="http://schemas.openxmlformats.org/officeDocument/2006/relationships" type="roundRect" r:blip="" hideGeom="1">
+                <dgm:adjLst>
+                  <dgm:adj idx="1" val="0.1"/>
+                </dgm:adjLst>
+              </dgm:shape>
+              <dgm:presOf axis="ch desOrSelf" ptType="node node" st="2 1" cnt="1 0"/>
+              <dgm:constrLst>
+                <dgm:constr type="lMarg" refType="primFontSz" fact="0.3"/>
+                <dgm:constr type="rMarg" refType="primFontSz" fact="0.3"/>
+                <dgm:constr type="tMarg" refType="primFontSz" fact="0.3"/>
+                <dgm:constr type="bMarg" refType="primFontSz" fact="0.3"/>
+              </dgm:constrLst>
+              <dgm:ruleLst>
+                <dgm:rule type="primFontSz" val="5" fact="NaN" max="NaN"/>
+              </dgm:ruleLst>
+            </dgm:layoutNode>
+          </dgm:if>
+          <dgm:else name="Name8">
+            <dgm:choose name="Name9">
+              <dgm:if name="Name10" axis="ch" ptType="node" func="cnt" op="equ" val="3">
+                <dgm:layoutNode name="ThreeNodes_1">
+                  <dgm:varLst>
+                    <dgm:bulletEnabled val="1"/>
+                  </dgm:varLst>
+                  <dgm:alg type="sp"/>
+                  <dgm:shape xmlns:r="http://schemas.openxmlformats.org/officeDocument/2006/relationships" type="roundRect" r:blip="">
+                    <dgm:adjLst>
+                      <dgm:adj idx="1" val="0.1"/>
+                    </dgm:adjLst>
+                  </dgm:shape>
+                  <dgm:presOf axis="ch desOrSelf" ptType="node node" st="1 1" cnt="1 0"/>
+                  <dgm:constrLst/>
+                  <dgm:ruleLst/>
+                </dgm:layoutNode>
+                <dgm:layoutNode name="ThreeNodes_2">
+                  <dgm:varLst>
+                    <dgm:bulletEnabled val="1"/>
+                  </dgm:varLst>
+                  <dgm:alg type="sp"/>
+                  <dgm:shape xmlns:r="http://schemas.openxmlformats.org/officeDocument/2006/relationships" type="roundRect" r:blip="">
+                    <dgm:adjLst>
+                      <dgm:adj idx="1" val="0.1"/>
+                    </dgm:adjLst>
+                  </dgm:shape>
+                  <dgm:presOf axis="ch desOrSelf" ptType="node node" st="2 1" cnt="1 0"/>
+                  <dgm:constrLst/>
+                  <dgm:ruleLst/>
+                </dgm:layoutNode>
+                <dgm:layoutNode name="ThreeNodes_3">
+                  <dgm:varLst>
+                    <dgm:bulletEnabled val="1"/>
+                  </dgm:varLst>
+                  <dgm:alg type="sp"/>
+                  <dgm:shape xmlns:r="http://schemas.openxmlformats.org/officeDocument/2006/relationships" type="roundRect" r:blip="">
+                    <dgm:adjLst>
+                      <dgm:adj idx="1" val="0.1"/>
+                    </dgm:adjLst>
+                  </dgm:shape>
+                  <dgm:presOf axis="ch desOrSelf" ptType="node node" st="3 1" cnt="1 0"/>
+                  <dgm:constrLst/>
+                  <dgm:ruleLst/>
+                </dgm:layoutNode>
+                <dgm:layoutNode name="ThreeConn_1-2" styleLbl="fgAccFollowNode1">
+                  <dgm:varLst>
+                    <dgm:bulletEnabled val="1"/>
+                  </dgm:varLst>
+                  <dgm:alg type="tx"/>
+                  <dgm:shape xmlns:r="http://schemas.openxmlformats.org/officeDocument/2006/relationships" type="downArrow" r:blip="">
+                    <dgm:adjLst>
+                      <dgm:adj idx="1" val="0.55"/>
+                      <dgm:adj idx="2" val="0.45"/>
+                    </dgm:adjLst>
+                  </dgm:shape>
+                  <dgm:presOf axis="ch" ptType="sibTrans" cnt="1"/>
+                  <dgm:constrLst>
+                    <dgm:constr type="lMarg" refType="primFontSz" fact="0.1"/>
+                    <dgm:constr type="rMarg" refType="primFontSz" fact="0.1"/>
+                    <dgm:constr type="tMarg" refType="primFontSz" fact="0.1"/>
+                    <dgm:constr type="bMarg" refType="primFontSz" fact="0.1"/>
+                  </dgm:constrLst>
+                  <dgm:ruleLst>
+                    <dgm:rule type="primFontSz" val="5" fact="NaN" max="NaN"/>
+                  </dgm:ruleLst>
+                </dgm:layoutNode>
+                <dgm:layoutNode name="ThreeConn_2-3" styleLbl="fgAccFollowNode1">
+                  <dgm:varLst>
+                    <dgm:bulletEnabled val="1"/>
+                  </dgm:varLst>
+                  <dgm:alg type="tx"/>
+                  <dgm:shape xmlns:r="http://schemas.openxmlformats.org/officeDocument/2006/relationships" type="downArrow" r:blip="">
+                    <dgm:adjLst>
+                      <dgm:adj idx="1" val="0.55"/>
+                      <dgm:adj idx="2" val="0.45"/>
+                    </dgm:adjLst>
+                  </dgm:shape>
+                  <dgm:presOf axis="ch" ptType="sibTrans" st="2" cnt="1"/>
+                  <dgm:constrLst>
+                    <dgm:constr type="lMarg" refType="primFontSz" fact="0.1"/>
+                    <dgm:constr type="rMarg" refType="primFontSz" fact="0.1"/>
+                    <dgm:constr type="tMarg" refType="primFontSz" fact="0.1"/>
+                    <dgm:constr type="bMarg" refType="primFontSz" fact="0.1"/>
+                  </dgm:constrLst>
+                  <dgm:ruleLst>
+                    <dgm:rule type="primFontSz" val="5" fact="NaN" max="NaN"/>
+                  </dgm:ruleLst>
+                </dgm:layoutNode>
+                <dgm:layoutNode name="ThreeNodes_1_text">
+                  <dgm:varLst>
+                    <dgm:bulletEnabled val="1"/>
+                  </dgm:varLst>
+                  <dgm:alg type="tx">
+                    <dgm:param type="parTxLTRAlign" val="l"/>
+                    <dgm:param type="txAnchorVertCh" val="mid"/>
+                  </dgm:alg>
+                  <dgm:shape xmlns:r="http://schemas.openxmlformats.org/officeDocument/2006/relationships" type="roundRect" r:blip="" hideGeom="1">
+                    <dgm:adjLst>
+                      <dgm:adj idx="1" val="0.1"/>
+                    </dgm:adjLst>
+                  </dgm:shape>
+                  <dgm:presOf axis="ch desOrSelf" ptType="node node" st="1 1" cnt="1 0"/>
+                  <dgm:constrLst>
+                    <dgm:constr type="lMarg" refType="primFontSz" fact="0.3"/>
+                    <dgm:constr type="rMarg" refType="primFontSz" fact="0.3"/>
+                    <dgm:constr type="tMarg" refType="primFontSz" fact="0.3"/>
+                    <dgm:constr type="bMarg" refType="primFontSz" fact="0.3"/>
+                  </dgm:constrLst>
+                  <dgm:ruleLst>
+                    <dgm:rule type="primFontSz" val="5" fact="NaN" max="NaN"/>
+                  </dgm:ruleLst>
+                </dgm:layoutNode>
+                <dgm:layoutNode name="ThreeNodes_2_text">
+                  <dgm:varLst>
+                    <dgm:bulletEnabled val="1"/>
+                  </dgm:varLst>
+                  <dgm:alg type="tx">
+                    <dgm:param type="parTxLTRAlign" val="l"/>
+                    <dgm:param type="txAnchorVertCh" val="mid"/>
+                  </dgm:alg>
+                  <dgm:shape xmlns:r="http://schemas.openxmlformats.org/officeDocument/2006/relationships" type="roundRect" r:blip="" hideGeom="1">
+                    <dgm:adjLst>
+                      <dgm:adj idx="1" val="0.1"/>
+                    </dgm:adjLst>
+                  </dgm:shape>
+                  <dgm:presOf axis="ch desOrSelf" ptType="node node" st="2 1" cnt="1 0"/>
+                  <dgm:constrLst>
+                    <dgm:constr type="lMarg" refType="primFontSz" fact="0.3"/>
+                    <dgm:constr type="rMarg" refType="primFontSz" fact="0.3"/>
+                    <dgm:constr type="tMarg" refType="primFontSz" fact="0.3"/>
+                    <dgm:constr type="bMarg" refType="primFontSz" fact="0.3"/>
+                  </dgm:constrLst>
+                  <dgm:ruleLst>
+                    <dgm:rule type="primFontSz" val="5" fact="NaN" max="NaN"/>
+                  </dgm:ruleLst>
+                </dgm:layoutNode>
+                <dgm:layoutNode name="ThreeNodes_3_text">
+                  <dgm:varLst>
+                    <dgm:bulletEnabled val="1"/>
+                  </dgm:varLst>
+                  <dgm:alg type="tx">
+                    <dgm:param type="parTxLTRAlign" val="l"/>
+                    <dgm:param type="txAnchorVertCh" val="mid"/>
+                  </dgm:alg>
+                  <dgm:shape xmlns:r="http://schemas.openxmlformats.org/officeDocument/2006/relationships" type="roundRect" r:blip="" hideGeom="1">
+                    <dgm:adjLst>
+                      <dgm:adj idx="1" val="0.1"/>
+                    </dgm:adjLst>
+                  </dgm:shape>
+                  <dgm:presOf axis="ch desOrSelf" ptType="node node" st="3 1" cnt="1 0"/>
+                  <dgm:constrLst>
+                    <dgm:constr type="lMarg" refType="primFontSz" fact="0.3"/>
+                    <dgm:constr type="rMarg" refType="primFontSz" fact="0.3"/>
+                    <dgm:constr type="tMarg" refType="primFontSz" fact="0.3"/>
+                    <dgm:constr type="bMarg" refType="primFontSz" fact="0.3"/>
+                  </dgm:constrLst>
+                  <dgm:ruleLst>
+                    <dgm:rule type="primFontSz" val="5" fact="NaN" max="NaN"/>
+                  </dgm:ruleLst>
+                </dgm:layoutNode>
+              </dgm:if>
+              <dgm:else name="Name11">
+                <dgm:choose name="Name12">
+                  <dgm:if name="Name13" axis="ch" ptType="node" func="cnt" op="equ" val="4">
+                    <dgm:layoutNode name="FourNodes_1">
+                      <dgm:varLst>
+                        <dgm:bulletEnabled val="1"/>
+                      </dgm:varLst>
+                      <dgm:alg type="sp"/>
+                      <dgm:shape xmlns:r="http://schemas.openxmlformats.org/officeDocument/2006/relationships" type="roundRect" r:blip="">
+                        <dgm:adjLst>
+                          <dgm:adj idx="1" val="0.1"/>
+                        </dgm:adjLst>
+                      </dgm:shape>
+                      <dgm:presOf axis="ch desOrSelf" ptType="node node" st="1 1" cnt="1 0"/>
+                      <dgm:constrLst/>
+                      <dgm:ruleLst/>
+                    </dgm:layoutNode>
+                    <dgm:layoutNode name="FourNodes_2">
+                      <dgm:varLst>
+                        <dgm:bulletEnabled val="1"/>
+                      </dgm:varLst>
+                      <dgm:alg type="sp"/>
+                      <dgm:shape xmlns:r="http://schemas.openxmlformats.org/officeDocument/2006/relationships" type="roundRect" r:blip="">
+                        <dgm:adjLst>
+                          <dgm:adj idx="1" val="0.1"/>
+                        </dgm:adjLst>
+                      </dgm:shape>
+                      <dgm:presOf axis="ch desOrSelf" ptType="node node" st="2 1" cnt="1 0"/>
+                      <dgm:constrLst/>
+                      <dgm:ruleLst/>
+                    </dgm:layoutNode>
+                    <dgm:layoutNode name="FourNodes_3">
+                      <dgm:varLst>
+                        <dgm:bulletEnabled val="1"/>
+                      </dgm:varLst>
+                      <dgm:alg type="sp"/>
+                      <dgm:shape xmlns:r="http://schemas.openxmlformats.org/officeDocument/2006/relationships" type="roundRect" r:blip="">
+                        <dgm:adjLst>
+                          <dgm:adj idx="1" val="0.1"/>
+                        </dgm:adjLst>
+                      </dgm:shape>
+                      <dgm:presOf axis="ch desOrSelf" ptType="node node" st="3 1" cnt="1 0"/>
+                      <dgm:constrLst/>
+                      <dgm:ruleLst/>
+                    </dgm:layoutNode>
+                    <dgm:layoutNode name="FourNodes_4">
+                      <dgm:varLst>
+                        <dgm:bulletEnabled val="1"/>
+                      </dgm:varLst>
+                      <dgm:alg type="sp"/>
+                      <dgm:shape xmlns:r="http://schemas.openxmlformats.org/officeDocument/2006/relationships" type="roundRect" r:blip="">
+                        <dgm:adjLst>
+                          <dgm:adj idx="1" val="0.1"/>
+                        </dgm:adjLst>
+                      </dgm:shape>
+                      <dgm:presOf axis="ch desOrSelf" ptType="node node" st="4 1" cnt="1 0"/>
+                      <dgm:constrLst/>
+                      <dgm:ruleLst/>
+                    </dgm:layoutNode>
+                    <dgm:layoutNode name="FourConn_1-2" styleLbl="fgAccFollowNode1">
+                      <dgm:varLst>
+                        <dgm:bulletEnabled val="1"/>
+                      </dgm:varLst>
+                      <dgm:alg type="tx"/>
+                      <dgm:shape xmlns:r="http://schemas.openxmlformats.org/officeDocument/2006/relationships" type="downArrow" r:blip="">
+                        <dgm:adjLst>
+                          <dgm:adj idx="1" val="0.55"/>
+                          <dgm:adj idx="2" val="0.45"/>
+                        </dgm:adjLst>
+                      </dgm:shape>
+                      <dgm:presOf axis="ch" ptType="sibTrans" cnt="1"/>
+                      <dgm:constrLst>
+                        <dgm:constr type="lMarg" refType="primFontSz" fact="0.1"/>
+                        <dgm:constr type="rMarg" refType="primFontSz" fact="0.1"/>
+                        <dgm:constr type="tMarg" refType="primFontSz" fact="0.1"/>
+                        <dgm:constr type="bMarg" refType="primFontSz" fact="0.1"/>
+                      </dgm:constrLst>
+                      <dgm:ruleLst>
+                        <dgm:rule type="primFontSz" val="5" fact="NaN" max="NaN"/>
+                      </dgm:ruleLst>
+                    </dgm:layoutNode>
+                    <dgm:layoutNode name="FourConn_2-3" styleLbl="fgAccFollowNode1">
+                      <dgm:varLst>
+                        <dgm:bulletEnabled val="1"/>
+                      </dgm:varLst>
+                      <dgm:alg type="tx"/>
+                      <dgm:shape xmlns:r="http://schemas.openxmlformats.org/officeDocument/2006/relationships" type="downArrow" r:blip="">
+                        <dgm:adjLst>
+                          <dgm:adj idx="1" val="0.55"/>
+                          <dgm:adj idx="2" val="0.45"/>
+                        </dgm:adjLst>
+                      </dgm:shape>
+                      <dgm:presOf axis="ch" ptType="sibTrans" st="2" cnt="1"/>
+                      <dgm:constrLst>
+                        <dgm:constr type="lMarg" refType="primFontSz" fact="0.1"/>
+                        <dgm:constr type="rMarg" refType="primFontSz" fact="0.1"/>
+                        <dgm:constr type="tMarg" refType="primFontSz" fact="0.1"/>
+                        <dgm:constr type="bMarg" refType="primFontSz" fact="0.1"/>
+                      </dgm:constrLst>
+                      <dgm:ruleLst>
+                        <dgm:rule type="primFontSz" val="5" fact="NaN" max="NaN"/>
+                      </dgm:ruleLst>
+                    </dgm:layoutNode>
+                    <dgm:layoutNode name="FourConn_3-4" styleLbl="fgAccFollowNode1">
+                      <dgm:varLst>
+                        <dgm:bulletEnabled val="1"/>
+                      </dgm:varLst>
+                      <dgm:alg type="tx"/>
+                      <dgm:shape xmlns:r="http://schemas.openxmlformats.org/officeDocument/2006/relationships" type="downArrow" r:blip="">
+                        <dgm:adjLst>
+                          <dgm:adj idx="1" val="0.55"/>
+                          <dgm:adj idx="2" val="0.45"/>
+                        </dgm:adjLst>
+                      </dgm:shape>
+                      <dgm:presOf axis="ch" ptType="sibTrans" st="3" cnt="1"/>
+                      <dgm:constrLst>
+                        <dgm:constr type="lMarg" refType="primFontSz" fact="0.1"/>
+                        <dgm:constr type="rMarg" refType="primFontSz" fact="0.1"/>
+                        <dgm:constr type="tMarg" refType="primFontSz" fact="0.1"/>
+                        <dgm:constr type="bMarg" refType="primFontSz" fact="0.1"/>
+                      </dgm:constrLst>
+                      <dgm:ruleLst>
+                        <dgm:rule type="primFontSz" val="5" fact="NaN" max="NaN"/>
+                      </dgm:ruleLst>
+                    </dgm:layoutNode>
+                    <dgm:layoutNode name="FourNodes_1_text">
+                      <dgm:varLst>
+                        <dgm:bulletEnabled val="1"/>
+                      </dgm:varLst>
+                      <dgm:alg type="tx">
+                        <dgm:param type="parTxLTRAlign" val="l"/>
+                        <dgm:param type="txAnchorVertCh" val="mid"/>
+                      </dgm:alg>
+                      <dgm:shape xmlns:r="http://schemas.openxmlformats.org/officeDocument/2006/relationships" type="roundRect" r:blip="" hideGeom="1">
+                        <dgm:adjLst>
+                          <dgm:adj idx="1" val="0.1"/>
+                        </dgm:adjLst>
+                      </dgm:shape>
+                      <dgm:presOf axis="ch desOrSelf" ptType="node node" st="1 1" cnt="1 0"/>
+                      <dgm:constrLst>
+                        <dgm:constr type="lMarg" refType="primFontSz" fact="0.3"/>
+                        <dgm:constr type="rMarg" refType="primFontSz" fact="0.3"/>
+                        <dgm:constr type="tMarg" refType="primFontSz" fact="0.3"/>
+                        <dgm:constr type="bMarg" refType="primFontSz" fact="0.3"/>
+                      </dgm:constrLst>
+                      <dgm:ruleLst>
+                        <dgm:rule type="primFontSz" val="5" fact="NaN" max="NaN"/>
+                      </dgm:ruleLst>
+                    </dgm:layoutNode>
+                    <dgm:layoutNode name="FourNodes_2_text">
+                      <dgm:varLst>
+                        <dgm:bulletEnabled val="1"/>
+                      </dgm:varLst>
+                      <dgm:alg type="tx">
+                        <dgm:param type="parTxLTRAlign" val="l"/>
+                        <dgm:param type="txAnchorVertCh" val="mid"/>
+                      </dgm:alg>
+                      <dgm:shape xmlns:r="http://schemas.openxmlformats.org/officeDocument/2006/relationships" type="roundRect" r:blip="" hideGeom="1">
+                        <dgm:adjLst>
+                          <dgm:adj idx="1" val="0.1"/>
+                        </dgm:adjLst>
+                      </dgm:shape>
+                      <dgm:presOf axis="ch desOrSelf" ptType="node node" st="2 1" cnt="1 0"/>
+                      <dgm:constrLst>
+                        <dgm:constr type="lMarg" refType="primFontSz" fact="0.3"/>
+                        <dgm:constr type="rMarg" refType="primFontSz" fact="0.3"/>
+                        <dgm:constr type="tMarg" refType="primFontSz" fact="0.3"/>
+                        <dgm:constr type="bMarg" refType="primFontSz" fact="0.3"/>
+                      </dgm:constrLst>
+                      <dgm:ruleLst>
+                        <dgm:rule type="primFontSz" val="5" fact="NaN" max="NaN"/>
+                      </dgm:ruleLst>
+                    </dgm:layoutNode>
+                    <dgm:layoutNode name="FourNodes_3_text">
+                      <dgm:varLst>
+                        <dgm:bulletEnabled val="1"/>
+                      </dgm:varLst>
+                      <dgm:alg type="tx">
+                        <dgm:param type="parTxLTRAlign" val="l"/>
+                        <dgm:param type="txAnchorVertCh" val="mid"/>
+                      </dgm:alg>
+                      <dgm:shape xmlns:r="http://schemas.openxmlformats.org/officeDocument/2006/relationships" type="roundRect" r:blip="" hideGeom="1">
+                        <dgm:adjLst>
+                          <dgm:adj idx="1" val="0.1"/>
+                        </dgm:adjLst>
+                      </dgm:shape>
+                      <dgm:presOf axis="ch desOrSelf" ptType="node node" st="3 1" cnt="1 0"/>
+                      <dgm:constrLst>
+                        <dgm:constr type="lMarg" refType="primFontSz" fact="0.3"/>
+                        <dgm:constr type="rMarg" refType="primFontSz" fact="0.3"/>
+                        <dgm:constr type="tMarg" refType="primFontSz" fact="0.3"/>
+                        <dgm:constr type="bMarg" refType="primFontSz" fact="0.3"/>
+                      </dgm:constrLst>
+                      <dgm:ruleLst>
+                        <dgm:rule type="primFontSz" val="5" fact="NaN" max="NaN"/>
+                      </dgm:ruleLst>
+                    </dgm:layoutNode>
+                    <dgm:layoutNode name="FourNodes_4_text">
+                      <dgm:varLst>
+                        <dgm:bulletEnabled val="1"/>
+                      </dgm:varLst>
+                      <dgm:alg type="tx">
+                        <dgm:param type="parTxLTRAlign" val="l"/>
+                        <dgm:param type="txAnchorVertCh" val="mid"/>
+                      </dgm:alg>
+                      <dgm:shape xmlns:r="http://schemas.openxmlformats.org/officeDocument/2006/relationships" type="roundRect" r:blip="" hideGeom="1">
+                        <dgm:adjLst>
+                          <dgm:adj idx="1" val="0.1"/>
+                        </dgm:adjLst>
+                      </dgm:shape>
+                      <dgm:presOf axis="ch desOrSelf" ptType="node node" st="4 1" cnt="1 0"/>
+                      <dgm:constrLst>
+                        <dgm:constr type="lMarg" refType="primFontSz" fact="0.3"/>
+                        <dgm:constr type="rMarg" refType="primFontSz" fact="0.3"/>
+                        <dgm:constr type="tMarg" refType="primFontSz" fact="0.3"/>
+                        <dgm:constr type="bMarg" refType="primFontSz" fact="0.3"/>
+                      </dgm:constrLst>
+                      <dgm:ruleLst>
+                        <dgm:rule type="primFontSz" val="5" fact="NaN" max="NaN"/>
+                      </dgm:ruleLst>
+                    </dgm:layoutNode>
+                  </dgm:if>
+                  <dgm:else name="Name14">
+                    <dgm:choose name="Name15">
+                      <dgm:if name="Name16" axis="ch" ptType="node" func="cnt" op="gte" val="5">
+                        <dgm:layoutNode name="FiveNodes_1">
+                          <dgm:varLst>
+                            <dgm:bulletEnabled val="1"/>
+                          </dgm:varLst>
+                          <dgm:alg type="sp"/>
+                          <dgm:shape xmlns:r="http://schemas.openxmlformats.org/officeDocument/2006/relationships" type="roundRect" r:blip="">
+                            <dgm:adjLst>
+                              <dgm:adj idx="1" val="0.1"/>
+                            </dgm:adjLst>
+                          </dgm:shape>
+                          <dgm:presOf axis="ch desOrSelf" ptType="node node" st="1 1" cnt="1 0"/>
+                          <dgm:constrLst/>
+                          <dgm:ruleLst/>
+                        </dgm:layoutNode>
+                        <dgm:layoutNode name="FiveNodes_2">
+                          <dgm:varLst>
+                            <dgm:bulletEnabled val="1"/>
+                          </dgm:varLst>
+                          <dgm:alg type="sp"/>
+                          <dgm:shape xmlns:r="http://schemas.openxmlformats.org/officeDocument/2006/relationships" type="roundRect" r:blip="">
+                            <dgm:adjLst>
+                              <dgm:adj idx="1" val="0.1"/>
+                            </dgm:adjLst>
+                          </dgm:shape>
+                          <dgm:presOf axis="ch desOrSelf" ptType="node node" st="2 1" cnt="1 0"/>
+                          <dgm:constrLst/>
+                          <dgm:ruleLst/>
+                        </dgm:layoutNode>
+                        <dgm:layoutNode name="FiveNodes_3">
+                          <dgm:varLst>
+                            <dgm:bulletEnabled val="1"/>
+                          </dgm:varLst>
+                          <dgm:alg type="sp"/>
+                          <dgm:shape xmlns:r="http://schemas.openxmlformats.org/officeDocument/2006/relationships" type="roundRect" r:blip="">
+                            <dgm:adjLst>
+                              <dgm:adj idx="1" val="0.1"/>
+                            </dgm:adjLst>
+                          </dgm:shape>
+                          <dgm:presOf axis="ch desOrSelf" ptType="node node" st="3 1" cnt="1 0"/>
+                          <dgm:constrLst/>
+                          <dgm:ruleLst/>
+                        </dgm:layoutNode>
+                        <dgm:layoutNode name="FiveNodes_4">
+                          <dgm:varLst>
+                            <dgm:bulletEnabled val="1"/>
+                          </dgm:varLst>
+                          <dgm:alg type="sp"/>
+                          <dgm:shape xmlns:r="http://schemas.openxmlformats.org/officeDocument/2006/relationships" type="roundRect" r:blip="">
+                            <dgm:adjLst>
+                              <dgm:adj idx="1" val="0.1"/>
+                            </dgm:adjLst>
+                          </dgm:shape>
+                          <dgm:presOf axis="ch desOrSelf" ptType="node node" st="4 1" cnt="1 0"/>
+                          <dgm:constrLst/>
+                          <dgm:ruleLst/>
+                        </dgm:layoutNode>
+                        <dgm:layoutNode name="FiveNodes_5">
+                          <dgm:varLst>
+                            <dgm:bulletEnabled val="1"/>
+                          </dgm:varLst>
+                          <dgm:alg type="sp"/>
+                          <dgm:shape xmlns:r="http://schemas.openxmlformats.org/officeDocument/2006/relationships" type="roundRect" r:blip="">
+                            <dgm:adjLst>
+                              <dgm:adj idx="1" val="0.1"/>
+                            </dgm:adjLst>
+                          </dgm:shape>
+                          <dgm:presOf axis="ch desOrSelf" ptType="node node" st="5 1" cnt="1 0"/>
+                          <dgm:constrLst/>
+                          <dgm:ruleLst/>
+                        </dgm:layoutNode>
+                        <dgm:layoutNode name="FiveConn_1-2" styleLbl="fgAccFollowNode1">
+                          <dgm:varLst>
+                            <dgm:bulletEnabled val="1"/>
+                          </dgm:varLst>
+                          <dgm:alg type="tx"/>
+                          <dgm:shape xmlns:r="http://schemas.openxmlformats.org/officeDocument/2006/relationships" type="downArrow" r:blip="">
+                            <dgm:adjLst>
+                              <dgm:adj idx="1" val="0.55"/>
+                              <dgm:adj idx="2" val="0.45"/>
+                            </dgm:adjLst>
+                          </dgm:shape>
+                          <dgm:presOf axis="ch" ptType="sibTrans" cnt="1"/>
+                          <dgm:constrLst>
+                            <dgm:constr type="lMarg" refType="primFontSz" fact="0.1"/>
+                            <dgm:constr type="rMarg" refType="primFontSz" fact="0.1"/>
+                            <dgm:constr type="tMarg" refType="primFontSz" fact="0.1"/>
+                            <dgm:constr type="bMarg" refType="primFontSz" fact="0.1"/>
+                          </dgm:constrLst>
+                          <dgm:ruleLst>
+                            <dgm:rule type="primFontSz" val="5" fact="NaN" max="NaN"/>
+                          </dgm:ruleLst>
+                        </dgm:layoutNode>
+                        <dgm:layoutNode name="FiveConn_2-3" styleLbl="fgAccFollowNode1">
+                          <dgm:varLst>
+                            <dgm:bulletEnabled val="1"/>
+                          </dgm:varLst>
+                          <dgm:alg type="tx"/>
+                          <dgm:shape xmlns:r="http://schemas.openxmlformats.org/officeDocument/2006/relationships" type="downArrow" r:blip="">
+                            <dgm:adjLst>
+                              <dgm:adj idx="1" val="0.55"/>
+                              <dgm:adj idx="2" val="0.45"/>
+                            </dgm:adjLst>
+                          </dgm:shape>
+                          <dgm:presOf axis="ch" ptType="sibTrans" st="2" cnt="1"/>
+                          <dgm:constrLst>
+                            <dgm:constr type="lMarg" refType="primFontSz" fact="0.1"/>
+                            <dgm:constr type="rMarg" refType="primFontSz" fact="0.1"/>
+                            <dgm:constr type="tMarg" refType="primFontSz" fact="0.1"/>
+                            <dgm:constr type="bMarg" refType="primFontSz" fact="0.1"/>
+                          </dgm:constrLst>
+                          <dgm:ruleLst>
+                            <dgm:rule type="primFontSz" val="5" fact="NaN" max="NaN"/>
+                          </dgm:ruleLst>
+                        </dgm:layoutNode>
+                        <dgm:layoutNode name="FiveConn_3-4" styleLbl="fgAccFollowNode1">
+                          <dgm:varLst>
+                            <dgm:bulletEnabled val="1"/>
+                          </dgm:varLst>
+                          <dgm:alg type="tx"/>
+                          <dgm:shape xmlns:r="http://schemas.openxmlformats.org/officeDocument/2006/relationships" type="downArrow" r:blip="">
+                            <dgm:adjLst>
+                              <dgm:adj idx="1" val="0.55"/>
+                              <dgm:adj idx="2" val="0.45"/>
+                            </dgm:adjLst>
+                          </dgm:shape>
+                          <dgm:presOf axis="ch" ptType="sibTrans" st="3" cnt="1"/>
+                          <dgm:constrLst>
+                            <dgm:constr type="lMarg" refType="primFontSz" fact="0.1"/>
+                            <dgm:constr type="rMarg" refType="primFontSz" fact="0.1"/>
+                            <dgm:constr type="tMarg" refType="primFontSz" fact="0.1"/>
+                            <dgm:constr type="bMarg" refType="primFontSz" fact="0.1"/>
+                          </dgm:constrLst>
+                          <dgm:ruleLst>
+                            <dgm:rule type="primFontSz" val="5" fact="NaN" max="NaN"/>
+                          </dgm:ruleLst>
+                        </dgm:layoutNode>
+                        <dgm:layoutNode name="FiveConn_4-5" styleLbl="fgAccFollowNode1">
+                          <dgm:varLst>
+                            <dgm:bulletEnabled val="1"/>
+                          </dgm:varLst>
+                          <dgm:alg type="tx"/>
+                          <dgm:shape xmlns:r="http://schemas.openxmlformats.org/officeDocument/2006/relationships" type="downArrow" r:blip="">
+                            <dgm:adjLst>
+                              <dgm:adj idx="1" val="0.55"/>
+                              <dgm:adj idx="2" val="0.45"/>
+                            </dgm:adjLst>
+                          </dgm:shape>
+                          <dgm:presOf axis="ch" ptType="sibTrans" st="4" cnt="1"/>
+                          <dgm:constrLst>
+                            <dgm:constr type="lMarg" refType="primFontSz" fact="0.1"/>
+                            <dgm:constr type="rMarg" refType="primFontSz" fact="0.1"/>
+                            <dgm:constr type="tMarg" refType="primFontSz" fact="0.1"/>
+                            <dgm:constr type="bMarg" refType="primFontSz" fact="0.1"/>
+                          </dgm:constrLst>
+                          <dgm:ruleLst>
+                            <dgm:rule type="primFontSz" val="5" fact="NaN" max="NaN"/>
+                          </dgm:ruleLst>
+                        </dgm:layoutNode>
+                        <dgm:layoutNode name="FiveNodes_1_text">
+                          <dgm:varLst>
+                            <dgm:bulletEnabled val="1"/>
+                          </dgm:varLst>
+                          <dgm:alg type="tx">
+                            <dgm:param type="parTxLTRAlign" val="l"/>
+                            <dgm:param type="txAnchorVertCh" val="mid"/>
+                          </dgm:alg>
+                          <dgm:shape xmlns:r="http://schemas.openxmlformats.org/officeDocument/2006/relationships" type="roundRect" r:blip="" hideGeom="1">
+                            <dgm:adjLst>
+                              <dgm:adj idx="1" val="0.1"/>
+                            </dgm:adjLst>
+                          </dgm:shape>
+                          <dgm:presOf axis="ch desOrSelf" ptType="node node" st="1 1" cnt="1 0"/>
+                          <dgm:constrLst>
+                            <dgm:constr type="lMarg" refType="primFontSz" fact="0.3"/>
+                            <dgm:constr type="rMarg" refType="primFontSz" fact="0.3"/>
+                            <dgm:constr type="tMarg" refType="primFontSz" fact="0.3"/>
+                            <dgm:constr type="bMarg" refType="primFontSz" fact="0.3"/>
+                          </dgm:constrLst>
+                          <dgm:ruleLst>
+                            <dgm:rule type="primFontSz" val="5" fact="NaN" max="NaN"/>
+                          </dgm:ruleLst>
+                        </dgm:layoutNode>
+                        <dgm:layoutNode name="FiveNodes_2_text">
+                          <dgm:varLst>
+                            <dgm:bulletEnabled val="1"/>
+                          </dgm:varLst>
+                          <dgm:alg type="tx">
+                            <dgm:param type="parTxLTRAlign" val="l"/>
+                            <dgm:param type="txAnchorVertCh" val="mid"/>
+                          </dgm:alg>
+                          <dgm:shape xmlns:r="http://schemas.openxmlformats.org/officeDocument/2006/relationships" type="roundRect" r:blip="" hideGeom="1">
+                            <dgm:adjLst>
+                              <dgm:adj idx="1" val="0.1"/>
+                            </dgm:adjLst>
+                          </dgm:shape>
+                          <dgm:presOf axis="ch desOrSelf" ptType="node node" st="2 1" cnt="1 0"/>
+                          <dgm:constrLst>
+                            <dgm:constr type="lMarg" refType="primFontSz" fact="0.3"/>
+                            <dgm:constr type="rMarg" refType="primFontSz" fact="0.3"/>
+                            <dgm:constr type="tMarg" refType="primFontSz" fact="0.3"/>
+                            <dgm:constr type="bMarg" refType="primFontSz" fact="0.3"/>
+                          </dgm:constrLst>
+                          <dgm:ruleLst>
+                            <dgm:rule type="primFontSz" val="5" fact="NaN" max="NaN"/>
+                          </dgm:ruleLst>
+                        </dgm:layoutNode>
+                        <dgm:layoutNode name="FiveNodes_3_text">
+                          <dgm:varLst>
+                            <dgm:bulletEnabled val="1"/>
+                          </dgm:varLst>
+                          <dgm:alg type="tx">
+                            <dgm:param type="parTxLTRAlign" val="l"/>
+                            <dgm:param type="txAnchorVertCh" val="mid"/>
+                          </dgm:alg>
+                          <dgm:shape xmlns:r="http://schemas.openxmlformats.org/officeDocument/2006/relationships" type="roundRect" r:blip="" hideGeom="1">
+                            <dgm:adjLst>
+                              <dgm:adj idx="1" val="0.1"/>
+                            </dgm:adjLst>
+                          </dgm:shape>
+                          <dgm:presOf axis="ch desOrSelf" ptType="node node" st="3 1" cnt="1 0"/>
+                          <dgm:constrLst>
+                            <dgm:constr type="lMarg" refType="primFontSz" fact="0.3"/>
+                            <dgm:constr type="rMarg" refType="primFontSz" fact="0.3"/>
+                            <dgm:constr type="tMarg" refType="primFontSz" fact="0.3"/>
+                            <dgm:constr type="bMarg" refType="primFontSz" fact="0.3"/>
+                          </dgm:constrLst>
+                          <dgm:ruleLst>
+                            <dgm:rule type="primFontSz" val="5" fact="NaN" max="NaN"/>
+                          </dgm:ruleLst>
+                        </dgm:layoutNode>
+                        <dgm:layoutNode name="FiveNodes_4_text">
+                          <dgm:varLst>
+                            <dgm:bulletEnabled val="1"/>
+                          </dgm:varLst>
+                          <dgm:alg type="tx">
+                            <dgm:param type="parTxLTRAlign" val="l"/>
+                            <dgm:param type="txAnchorVertCh" val="mid"/>
+                          </dgm:alg>
+                          <dgm:shape xmlns:r="http://schemas.openxmlformats.org/officeDocument/2006/relationships" type="roundRect" r:blip="" hideGeom="1">
+                            <dgm:adjLst>
+                              <dgm:adj idx="1" val="0.1"/>
+                            </dgm:adjLst>
+                          </dgm:shape>
+                          <dgm:presOf axis="ch desOrSelf" ptType="node node" st="4 1" cnt="1 0"/>
+                          <dgm:constrLst>
+                            <dgm:constr type="lMarg" refType="primFontSz" fact="0.3"/>
+                            <dgm:constr type="rMarg" refType="primFontSz" fact="0.3"/>
+                            <dgm:constr type="tMarg" refType="primFontSz" fact="0.3"/>
+                            <dgm:constr type="bMarg" refType="primFontSz" fact="0.3"/>
+                          </dgm:constrLst>
+                          <dgm:ruleLst>
+                            <dgm:rule type="primFontSz" val="5" fact="NaN" max="NaN"/>
+                          </dgm:ruleLst>
+                        </dgm:layoutNode>
+                        <dgm:layoutNode name="FiveNodes_5_text">
+                          <dgm:varLst>
+                            <dgm:bulletEnabled val="1"/>
+                          </dgm:varLst>
+                          <dgm:alg type="tx">
+                            <dgm:param type="parTxLTRAlign" val="l"/>
+                            <dgm:param type="txAnchorVertCh" val="mid"/>
+                          </dgm:alg>
+                          <dgm:shape xmlns:r="http://schemas.openxmlformats.org/officeDocument/2006/relationships" type="roundRect" r:blip="" hideGeom="1">
+                            <dgm:adjLst>
+                              <dgm:adj idx="1" val="0.1"/>
+                            </dgm:adjLst>
+                          </dgm:shape>
+                          <dgm:presOf axis="ch desOrSelf" ptType="node node" st="5 1" cnt="1 0"/>
+                          <dgm:constrLst>
+                            <dgm:constr type="lMarg" refType="primFontSz" fact="0.3"/>
+                            <dgm:constr type="rMarg" refType="primFontSz" fact="0.3"/>
+                            <dgm:constr type="tMarg" refType="primFontSz" fact="0.3"/>
+                            <dgm:constr type="bMarg" refType="primFontSz" fact="0.3"/>
+                          </dgm:constrLst>
+                          <dgm:ruleLst>
+                            <dgm:rule type="primFontSz" val="5" fact="NaN" max="NaN"/>
+                          </dgm:ruleLst>
+                        </dgm:layoutNode>
+                      </dgm:if>
+                      <dgm:else name="Name17"/>
+                    </dgm:choose>
+                  </dgm:else>
+                </dgm:choose>
+              </dgm:else>
+            </dgm:choose>
+          </dgm:else>
+        </dgm:choose>
+      </dgm:else>
+    </dgm:choose>
+  </dgm:layoutNode>
+</dgm:layoutDef>
+</file>
+
+<file path=ppt/diagrams/layout5.xml><?xml version="1.0" encoding="utf-8"?>
 <dgm:layoutDef xmlns:dgm="http://schemas.openxmlformats.org/drawingml/2006/diagram" xmlns:a="http://schemas.openxmlformats.org/drawingml/2006/main" uniqueId="urn:microsoft.com/office/officeart/2018/5/layout/CenteredIconLabelDescriptionList">
   <dgm:title val="Centered Icon Label Description List"/>
   <dgm:desc val="Use to show non-sequential or grouped chunks of information. The placeholder holds an icon or small picture, and corresponding text boxes show Level 1 and Level 2 text respectively. Works well for minimal Level 1 text accompanied by lengthier Level two text."/>
@@ -9123,6 +13966,300 @@
 </dgm:layoutDef>
 </file>
 
+<file path=ppt/diagrams/layout6.xml><?xml version="1.0" encoding="utf-8"?>
+<dgm:layoutDef xmlns:dgm="http://schemas.openxmlformats.org/drawingml/2006/diagram" xmlns:a="http://schemas.openxmlformats.org/drawingml/2006/main" uniqueId="urn:microsoft.com/office/officeart/2018/2/layout/IconVerticalSolidList">
+  <dgm:title val="Icon Vertical Solid List"/>
+  <dgm:desc val="Use to show a series of visuals from top to bottom with Level 1 or Level 1 and Level 2 text grouped in a shape. Works best with icons or small pictures with lengthier descriptions."/>
+  <dgm:catLst>
+    <dgm:cat type="icon" pri="500"/>
+  </dgm:catLst>
+  <dgm:sampData useDef="1">
+    <dgm:dataModel>
+      <dgm:ptLst/>
+      <dgm:bg/>
+      <dgm:whole/>
+    </dgm:dataModel>
+  </dgm:sampData>
+  <dgm:styleData useDef="1">
+    <dgm:dataModel>
+      <dgm:ptLst/>
+      <dgm:bg/>
+      <dgm:whole/>
+    </dgm:dataModel>
+  </dgm:styleData>
+  <dgm:clrData useDef="1">
+    <dgm:dataModel>
+      <dgm:ptLst/>
+      <dgm:bg/>
+      <dgm:whole/>
+    </dgm:dataModel>
+  </dgm:clrData>
+  <dgm:layoutNode name="root">
+    <dgm:varLst>
+      <dgm:dir/>
+      <dgm:resizeHandles val="exact"/>
+    </dgm:varLst>
+    <dgm:choose name="Name0">
+      <dgm:if name="Name1" axis="self" func="var" arg="dir" op="equ" val="norm">
+        <dgm:alg type="lin">
+          <dgm:param type="linDir" val="fromT"/>
+          <dgm:param type="nodeHorzAlign" val="l"/>
+        </dgm:alg>
+      </dgm:if>
+      <dgm:else name="Name2">
+        <dgm:alg type="lin">
+          <dgm:param type="linDir" val="fromT"/>
+          <dgm:param type="nodeHorzAlign" val="r"/>
+        </dgm:alg>
+      </dgm:else>
+    </dgm:choose>
+    <dgm:shape xmlns:r="http://schemas.openxmlformats.org/officeDocument/2006/relationships" r:blip="">
+      <dgm:adjLst/>
+    </dgm:shape>
+    <dgm:presOf/>
+    <dgm:choose name="Name3">
+      <dgm:if name="Name4" axis="ch" ptType="node" func="cnt" op="lte" val="3">
+        <dgm:constrLst>
+          <dgm:constr type="h" for="ch" forName="compNode" refType="h" fact="0.3"/>
+          <dgm:constr type="w" for="ch" forName="compNode" refType="w"/>
+          <dgm:constr type="h" for="ch" forName="sibTrans" refType="h" refFor="ch" refForName="compNode" fact="0.25"/>
+          <dgm:constr type="primFontSz" for="des" forName="parTx" val="25"/>
+          <dgm:constr type="primFontSz" for="des" forName="desTx" refType="primFontSz" refFor="des" refForName="parTx" op="lte" fact="0.75"/>
+          <dgm:constr type="h" for="des" forName="compNode" op="equ"/>
+          <dgm:constr type="h" for="des" forName="bgRect" op="equ"/>
+          <dgm:constr type="h" for="des" forName="iconRect" op="equ"/>
+          <dgm:constr type="w" for="des" forName="iconRect" op="equ"/>
+          <dgm:constr type="h" for="des" forName="spaceRect" op="equ"/>
+          <dgm:constr type="h" for="des" forName="parTx" op="equ"/>
+          <dgm:constr type="h" for="des" forName="desTx" op="equ"/>
+        </dgm:constrLst>
+      </dgm:if>
+      <dgm:if name="Name5" axis="ch" ptType="node" func="cnt" op="lte" val="4">
+        <dgm:constrLst>
+          <dgm:constr type="h" for="ch" forName="compNode" refType="h" fact="0.3"/>
+          <dgm:constr type="w" for="ch" forName="compNode" refType="w"/>
+          <dgm:constr type="h" for="ch" forName="sibTrans" refType="h" refFor="ch" refForName="compNode" fact="0.25"/>
+          <dgm:constr type="primFontSz" for="des" forName="parTx" val="22"/>
+          <dgm:constr type="primFontSz" for="des" forName="desTx" refType="primFontSz" refFor="des" refForName="parTx" op="lte" fact="0.75"/>
+          <dgm:constr type="h" for="des" forName="compNode" op="equ"/>
+          <dgm:constr type="h" for="des" forName="bgRect" op="equ"/>
+          <dgm:constr type="h" for="des" forName="iconRect" op="equ"/>
+          <dgm:constr type="w" for="des" forName="iconRect" op="equ"/>
+          <dgm:constr type="h" for="des" forName="spaceRect" op="equ"/>
+          <dgm:constr type="h" for="des" forName="parTx" op="equ"/>
+          <dgm:constr type="h" for="des" forName="desTx" op="equ"/>
+        </dgm:constrLst>
+      </dgm:if>
+      <dgm:if name="Name6" axis="ch" ptType="node" func="cnt" op="lte" val="6">
+        <dgm:constrLst>
+          <dgm:constr type="h" for="ch" forName="compNode" refType="h" fact="0.3"/>
+          <dgm:constr type="w" for="ch" forName="compNode" refType="w"/>
+          <dgm:constr type="h" for="ch" forName="sibTrans" refType="h" refFor="ch" refForName="compNode" fact="0.25"/>
+          <dgm:constr type="primFontSz" for="des" forName="parTx" val="19"/>
+          <dgm:constr type="primFontSz" for="des" forName="desTx" refType="primFontSz" refFor="des" refForName="parTx" op="lte" fact="0.75"/>
+          <dgm:constr type="h" for="des" forName="compNode" op="equ"/>
+          <dgm:constr type="h" for="des" forName="bgRect" op="equ"/>
+          <dgm:constr type="h" for="des" forName="iconRect" op="equ"/>
+          <dgm:constr type="w" for="des" forName="iconRect" op="equ"/>
+          <dgm:constr type="h" for="des" forName="spaceRect" op="equ"/>
+          <dgm:constr type="h" for="des" forName="parTx" op="equ"/>
+          <dgm:constr type="h" for="des" forName="desTx" op="equ"/>
+        </dgm:constrLst>
+      </dgm:if>
+      <dgm:else name="Name7">
+        <dgm:constrLst>
+          <dgm:constr type="h" for="ch" forName="compNode" refType="h" fact="0.3"/>
+          <dgm:constr type="w" for="ch" forName="compNode" refType="w"/>
+          <dgm:constr type="h" for="ch" forName="sibTrans" refType="h" refFor="ch" refForName="compNode" fact="0.25"/>
+          <dgm:constr type="primFontSz" for="des" forName="parTx" val="16"/>
+          <dgm:constr type="primFontSz" for="des" forName="desTx" refType="primFontSz" refFor="des" refForName="parTx" op="lte" fact="0.75"/>
+          <dgm:constr type="h" for="des" forName="compNode" op="equ"/>
+          <dgm:constr type="h" for="des" forName="bgRect" op="equ"/>
+          <dgm:constr type="h" for="des" forName="iconRect" op="equ"/>
+          <dgm:constr type="w" for="des" forName="iconRect" op="equ"/>
+          <dgm:constr type="h" for="des" forName="spaceRect" op="equ"/>
+          <dgm:constr type="h" for="des" forName="parTx" op="equ"/>
+          <dgm:constr type="h" for="des" forName="desTx" op="equ"/>
+        </dgm:constrLst>
+      </dgm:else>
+    </dgm:choose>
+    <dgm:ruleLst>
+      <dgm:rule type="h" for="ch" forName="compNode" val="0" fact="NaN" max="NaN"/>
+    </dgm:ruleLst>
+    <dgm:forEach name="Name8" axis="ch" ptType="node">
+      <dgm:layoutNode name="compNode">
+        <dgm:alg type="composite"/>
+        <dgm:shape xmlns:r="http://schemas.openxmlformats.org/officeDocument/2006/relationships" r:blip="">
+          <dgm:adjLst/>
+        </dgm:shape>
+        <dgm:presOf axis="self"/>
+        <dgm:choose name="Name9">
+          <dgm:if name="Name10" axis="ch" ptType="node" func="cnt" op="gte" val="1">
+            <dgm:constrLst>
+              <dgm:constr type="w" for="ch" forName="bgRect" refType="w"/>
+              <dgm:constr type="h" for="ch" forName="bgRect" refType="h"/>
+              <dgm:constr type="l" for="ch" forName="bgRect"/>
+              <dgm:constr type="t" for="ch" forName="bgRect"/>
+              <dgm:constr type="h" for="ch" forName="iconRect" refType="h" fact="0.55"/>
+              <dgm:constr type="w" for="ch" forName="iconRect" refType="h" refFor="ch" refForName="iconRect"/>
+              <dgm:constr type="l" for="ch" forName="iconRect" refType="h" refFor="ch" refForName="iconRect" fact="0.55"/>
+              <dgm:constr type="ctrY" for="ch" forName="iconRect" refType="ctrY" refFor="ch" refForName="bgRect"/>
+              <dgm:constr type="w" for="ch" forName="spaceRect" refType="l" refFor="ch" refForName="iconRect"/>
+              <dgm:constr type="h" for="ch" forName="spaceRect" refType="h"/>
+              <dgm:constr type="l" for="ch" forName="spaceRect" refType="r" refFor="ch" refForName="iconRect"/>
+              <dgm:constr type="t" for="ch" forName="spaceRect"/>
+              <dgm:constr type="w" for="ch" forName="parTx" refType="w" fact="0.45"/>
+              <dgm:constr type="h" for="ch" forName="parTx" refType="h"/>
+              <dgm:constr type="l" for="ch" forName="parTx" refType="r" refFor="ch" refForName="spaceRect"/>
+              <dgm:constr type="t" for="ch" forName="parTx"/>
+              <dgm:constr type="h" for="ch" forName="desTx" refType="h"/>
+              <dgm:constr type="l" for="ch" forName="desTx" refType="r" refFor="ch" refForName="parTx"/>
+              <dgm:constr type="t" for="ch" forName="desTx"/>
+            </dgm:constrLst>
+          </dgm:if>
+          <dgm:else name="Name11">
+            <dgm:constrLst>
+              <dgm:constr type="w" for="ch" forName="bgRect" refType="w"/>
+              <dgm:constr type="h" for="ch" forName="bgRect" refType="h"/>
+              <dgm:constr type="l" for="ch" forName="bgRect"/>
+              <dgm:constr type="t" for="ch" forName="bgRect"/>
+              <dgm:constr type="h" for="ch" forName="iconRect" refType="h" fact="0.55"/>
+              <dgm:constr type="w" for="ch" forName="iconRect" refType="h" refFor="ch" refForName="iconRect"/>
+              <dgm:constr type="l" for="ch" forName="iconRect" refType="h" refFor="ch" refForName="iconRect" fact="0.55"/>
+              <dgm:constr type="ctrY" for="ch" forName="iconRect" refType="ctrY" refFor="ch" refForName="bgRect"/>
+              <dgm:constr type="w" for="ch" forName="spaceRect" refType="l" refFor="ch" refForName="iconRect"/>
+              <dgm:constr type="h" for="ch" forName="spaceRect" refType="h"/>
+              <dgm:constr type="l" for="ch" forName="spaceRect" refType="r" refFor="ch" refForName="iconRect"/>
+              <dgm:constr type="t" for="ch" forName="spaceRect"/>
+              <dgm:constr type="h" for="ch" forName="parTx" refType="h"/>
+              <dgm:constr type="l" for="ch" forName="parTx" refType="r" refFor="ch" refForName="spaceRect"/>
+              <dgm:constr type="t" for="ch" forName="parTx"/>
+            </dgm:constrLst>
+          </dgm:else>
+        </dgm:choose>
+        <dgm:ruleLst>
+          <dgm:rule type="h" val="INF" fact="NaN" max="NaN"/>
+        </dgm:ruleLst>
+        <dgm:layoutNode name="bgRect" styleLbl="bgShp">
+          <dgm:alg type="sp"/>
+          <dgm:shape xmlns:r="http://schemas.openxmlformats.org/officeDocument/2006/relationships" type="roundRect" r:blip="">
+            <dgm:adjLst>
+              <dgm:adj idx="1" val="0.1"/>
+            </dgm:adjLst>
+          </dgm:shape>
+          <dgm:presOf/>
+          <dgm:constrLst/>
+          <dgm:ruleLst/>
+        </dgm:layoutNode>
+        <dgm:layoutNode name="iconRect" styleLbl="node1">
+          <dgm:alg type="sp"/>
+          <dgm:shape xmlns:r="http://schemas.openxmlformats.org/officeDocument/2006/relationships" type="rect" r:blip="" blipPhldr="1">
+            <dgm:adjLst/>
+          </dgm:shape>
+          <dgm:presOf/>
+          <dgm:constrLst/>
+          <dgm:ruleLst/>
+        </dgm:layoutNode>
+        <dgm:layoutNode name="spaceRect">
+          <dgm:alg type="sp"/>
+          <dgm:shape xmlns:r="http://schemas.openxmlformats.org/officeDocument/2006/relationships" r:blip="">
+            <dgm:adjLst/>
+          </dgm:shape>
+          <dgm:presOf/>
+          <dgm:constrLst/>
+          <dgm:ruleLst/>
+        </dgm:layoutNode>
+        <dgm:layoutNode name="parTx" styleLbl="revTx">
+          <dgm:varLst>
+            <dgm:chMax val="0"/>
+            <dgm:chPref val="0"/>
+          </dgm:varLst>
+          <dgm:alg type="tx">
+            <dgm:param type="txAnchorVert" val="mid"/>
+            <dgm:param type="parTxLTRAlign" val="l"/>
+            <dgm:param type="shpTxLTRAlignCh" val="l"/>
+            <dgm:param type="parTxRTLAlign" val="r"/>
+            <dgm:param type="shpTxRTLAlignCh" val="r"/>
+          </dgm:alg>
+          <dgm:shape xmlns:r="http://schemas.openxmlformats.org/officeDocument/2006/relationships" type="rect" r:blip="">
+            <dgm:adjLst/>
+          </dgm:shape>
+          <dgm:presOf axis="self" ptType="node"/>
+          <dgm:constrLst>
+            <dgm:constr type="lMarg" refType="h" fact="0.3"/>
+            <dgm:constr type="rMarg" refType="h" fact="0.3"/>
+            <dgm:constr type="tMarg" refType="h" fact="0.3"/>
+            <dgm:constr type="bMarg" refType="h" fact="0.3"/>
+          </dgm:constrLst>
+          <dgm:ruleLst>
+            <dgm:rule type="primFontSz" val="14" fact="NaN" max="NaN"/>
+            <dgm:rule type="h" val="INF" fact="NaN" max="NaN"/>
+          </dgm:ruleLst>
+        </dgm:layoutNode>
+        <dgm:choose name="Name12">
+          <dgm:if name="Name13" axis="ch" ptType="node" func="cnt" op="gte" val="1">
+            <dgm:layoutNode name="desTx" styleLbl="revTx">
+              <dgm:varLst/>
+              <dgm:alg type="tx">
+                <dgm:param type="txAnchorVertCh" val="mid"/>
+                <dgm:param type="parTxLTRAlign" val="l"/>
+                <dgm:param type="shpTxLTRAlignCh" val="l"/>
+                <dgm:param type="parTxRTLAlign" val="r"/>
+                <dgm:param type="shpTxRTLAlignCh" val="r"/>
+                <dgm:param type="stBulletLvl" val="0"/>
+              </dgm:alg>
+              <dgm:shape xmlns:r="http://schemas.openxmlformats.org/officeDocument/2006/relationships" type="rect" r:blip="">
+                <dgm:adjLst/>
+              </dgm:shape>
+              <dgm:presOf axis="des" ptType="node"/>
+              <dgm:constrLst>
+                <dgm:constr type="primFontSz" val="18"/>
+                <dgm:constr type="secFontSz" refType="primFontSz"/>
+                <dgm:constr type="lMarg" refType="h" fact="0.3"/>
+                <dgm:constr type="rMarg" refType="h" fact="0.3"/>
+                <dgm:constr type="tMarg" refType="h" fact="0.3"/>
+                <dgm:constr type="bMarg" refType="h" fact="0.3"/>
+              </dgm:constrLst>
+              <dgm:ruleLst>
+                <dgm:rule type="primFontSz" val="11" fact="NaN" max="NaN"/>
+              </dgm:ruleLst>
+            </dgm:layoutNode>
+          </dgm:if>
+          <dgm:else name="Name14"/>
+        </dgm:choose>
+      </dgm:layoutNode>
+      <dgm:forEach name="Name15" axis="followSib" ptType="sibTrans" cnt="1">
+        <dgm:layoutNode name="sibTrans">
+          <dgm:alg type="sp"/>
+          <dgm:shape xmlns:r="http://schemas.openxmlformats.org/officeDocument/2006/relationships" r:blip="">
+            <dgm:adjLst/>
+          </dgm:shape>
+          <dgm:presOf axis="self"/>
+          <dgm:constrLst/>
+          <dgm:ruleLst/>
+        </dgm:layoutNode>
+      </dgm:forEach>
+    </dgm:forEach>
+  </dgm:layoutNode>
+  <dgm:extLst>
+    <a:ext uri="{68A01E43-0DF5-4B5B-8FA6-DAF915123BFB}">
+      <dgm1612:lstStyle xmlns:dgm1612="http://schemas.microsoft.com/office/drawing/2016/12/diagram">
+        <a:lvl1pPr>
+          <a:lnSpc>
+            <a:spcPct val="100000"/>
+          </a:lnSpc>
+        </a:lvl1pPr>
+        <a:lvl2pPr>
+          <a:lnSpc>
+            <a:spcPct val="100000"/>
+          </a:lnSpc>
+        </a:lvl2pPr>
+      </dgm1612:lstStyle>
+    </a:ext>
+  </dgm:extLst>
+</dgm:layoutDef>
+</file>
+
 <file path=ppt/diagrams/quickStyle1.xml><?xml version="1.0" encoding="utf-8"?>
 <dgm:styleDef xmlns:dgm="http://schemas.openxmlformats.org/drawingml/2006/diagram" xmlns:a="http://schemas.openxmlformats.org/drawingml/2006/main" uniqueId="urn:microsoft.com/office/officeart/2005/8/quickstyle/simple1">
   <dgm:title val=""/>
@@ -12226,6 +17363,2074 @@
 </file>
 
 <file path=ppt/diagrams/quickStyle4.xml><?xml version="1.0" encoding="utf-8"?>
+<dgm:styleDef xmlns:dgm="http://schemas.openxmlformats.org/drawingml/2006/diagram" xmlns:a="http://schemas.openxmlformats.org/drawingml/2006/main" uniqueId="urn:microsoft.com/office/officeart/2005/8/quickstyle/simple1">
+  <dgm:title val=""/>
+  <dgm:desc val=""/>
+  <dgm:catLst>
+    <dgm:cat type="simple" pri="10100"/>
+  </dgm:catLst>
+  <dgm:scene3d>
+    <a:camera prst="orthographicFront"/>
+    <a:lightRig rig="threePt" dir="t"/>
+  </dgm:scene3d>
+  <dgm:styleLbl name="node0">
+    <dgm:scene3d>
+      <a:camera prst="orthographicFront"/>
+      <a:lightRig rig="threePt" dir="t"/>
+    </dgm:scene3d>
+    <dgm:sp3d/>
+    <dgm:txPr/>
+    <dgm:style>
+      <a:lnRef idx="2">
+        <a:scrgbClr r="0" g="0" b="0"/>
+      </a:lnRef>
+      <a:fillRef idx="1">
+        <a:scrgbClr r="0" g="0" b="0"/>
+      </a:fillRef>
+      <a:effectRef idx="0">
+        <a:scrgbClr r="0" g="0" b="0"/>
+      </a:effectRef>
+      <a:fontRef idx="minor">
+        <a:schemeClr val="lt1"/>
+      </a:fontRef>
+    </dgm:style>
+  </dgm:styleLbl>
+  <dgm:styleLbl name="lnNode1">
+    <dgm:scene3d>
+      <a:camera prst="orthographicFront"/>
+      <a:lightRig rig="threePt" dir="t"/>
+    </dgm:scene3d>
+    <dgm:sp3d/>
+    <dgm:txPr/>
+    <dgm:style>
+      <a:lnRef idx="2">
+        <a:scrgbClr r="0" g="0" b="0"/>
+      </a:lnRef>
+      <a:fillRef idx="1">
+        <a:scrgbClr r="0" g="0" b="0"/>
+      </a:fillRef>
+      <a:effectRef idx="0">
+        <a:scrgbClr r="0" g="0" b="0"/>
+      </a:effectRef>
+      <a:fontRef idx="minor">
+        <a:schemeClr val="lt1"/>
+      </a:fontRef>
+    </dgm:style>
+  </dgm:styleLbl>
+  <dgm:styleLbl name="vennNode1">
+    <dgm:scene3d>
+      <a:camera prst="orthographicFront"/>
+      <a:lightRig rig="threePt" dir="t"/>
+    </dgm:scene3d>
+    <dgm:sp3d/>
+    <dgm:txPr/>
+    <dgm:style>
+      <a:lnRef idx="2">
+        <a:scrgbClr r="0" g="0" b="0"/>
+      </a:lnRef>
+      <a:fillRef idx="1">
+        <a:scrgbClr r="0" g="0" b="0"/>
+      </a:fillRef>
+      <a:effectRef idx="0">
+        <a:scrgbClr r="0" g="0" b="0"/>
+      </a:effectRef>
+      <a:fontRef idx="minor">
+        <a:schemeClr val="tx1"/>
+      </a:fontRef>
+    </dgm:style>
+  </dgm:styleLbl>
+  <dgm:styleLbl name="alignNode1">
+    <dgm:scene3d>
+      <a:camera prst="orthographicFront"/>
+      <a:lightRig rig="threePt" dir="t"/>
+    </dgm:scene3d>
+    <dgm:sp3d/>
+    <dgm:txPr/>
+    <dgm:style>
+      <a:lnRef idx="2">
+        <a:scrgbClr r="0" g="0" b="0"/>
+      </a:lnRef>
+      <a:fillRef idx="1">
+        <a:scrgbClr r="0" g="0" b="0"/>
+      </a:fillRef>
+      <a:effectRef idx="0">
+        <a:scrgbClr r="0" g="0" b="0"/>
+      </a:effectRef>
+      <a:fontRef idx="minor">
+        <a:schemeClr val="lt1"/>
+      </a:fontRef>
+    </dgm:style>
+  </dgm:styleLbl>
+  <dgm:styleLbl name="node1">
+    <dgm:scene3d>
+      <a:camera prst="orthographicFront"/>
+      <a:lightRig rig="threePt" dir="t"/>
+    </dgm:scene3d>
+    <dgm:sp3d/>
+    <dgm:txPr/>
+    <dgm:style>
+      <a:lnRef idx="2">
+        <a:scrgbClr r="0" g="0" b="0"/>
+      </a:lnRef>
+      <a:fillRef idx="1">
+        <a:scrgbClr r="0" g="0" b="0"/>
+      </a:fillRef>
+      <a:effectRef idx="0">
+        <a:scrgbClr r="0" g="0" b="0"/>
+      </a:effectRef>
+      <a:fontRef idx="minor">
+        <a:schemeClr val="lt1"/>
+      </a:fontRef>
+    </dgm:style>
+  </dgm:styleLbl>
+  <dgm:styleLbl name="node2">
+    <dgm:scene3d>
+      <a:camera prst="orthographicFront"/>
+      <a:lightRig rig="threePt" dir="t"/>
+    </dgm:scene3d>
+    <dgm:sp3d/>
+    <dgm:txPr/>
+    <dgm:style>
+      <a:lnRef idx="2">
+        <a:scrgbClr r="0" g="0" b="0"/>
+      </a:lnRef>
+      <a:fillRef idx="1">
+        <a:scrgbClr r="0" g="0" b="0"/>
+      </a:fillRef>
+      <a:effectRef idx="0">
+        <a:scrgbClr r="0" g="0" b="0"/>
+      </a:effectRef>
+      <a:fontRef idx="minor">
+        <a:schemeClr val="lt1"/>
+      </a:fontRef>
+    </dgm:style>
+  </dgm:styleLbl>
+  <dgm:styleLbl name="node3">
+    <dgm:scene3d>
+      <a:camera prst="orthographicFront"/>
+      <a:lightRig rig="threePt" dir="t"/>
+    </dgm:scene3d>
+    <dgm:sp3d/>
+    <dgm:txPr/>
+    <dgm:style>
+      <a:lnRef idx="2">
+        <a:scrgbClr r="0" g="0" b="0"/>
+      </a:lnRef>
+      <a:fillRef idx="1">
+        <a:scrgbClr r="0" g="0" b="0"/>
+      </a:fillRef>
+      <a:effectRef idx="0">
+        <a:scrgbClr r="0" g="0" b="0"/>
+      </a:effectRef>
+      <a:fontRef idx="minor">
+        <a:schemeClr val="lt1"/>
+      </a:fontRef>
+    </dgm:style>
+  </dgm:styleLbl>
+  <dgm:styleLbl name="node4">
+    <dgm:scene3d>
+      <a:camera prst="orthographicFront"/>
+      <a:lightRig rig="threePt" dir="t"/>
+    </dgm:scene3d>
+    <dgm:sp3d/>
+    <dgm:txPr/>
+    <dgm:style>
+      <a:lnRef idx="2">
+        <a:scrgbClr r="0" g="0" b="0"/>
+      </a:lnRef>
+      <a:fillRef idx="1">
+        <a:scrgbClr r="0" g="0" b="0"/>
+      </a:fillRef>
+      <a:effectRef idx="0">
+        <a:scrgbClr r="0" g="0" b="0"/>
+      </a:effectRef>
+      <a:fontRef idx="minor">
+        <a:schemeClr val="lt1"/>
+      </a:fontRef>
+    </dgm:style>
+  </dgm:styleLbl>
+  <dgm:styleLbl name="fgImgPlace1">
+    <dgm:scene3d>
+      <a:camera prst="orthographicFront"/>
+      <a:lightRig rig="threePt" dir="t"/>
+    </dgm:scene3d>
+    <dgm:sp3d/>
+    <dgm:txPr/>
+    <dgm:style>
+      <a:lnRef idx="2">
+        <a:scrgbClr r="0" g="0" b="0"/>
+      </a:lnRef>
+      <a:fillRef idx="1">
+        <a:scrgbClr r="0" g="0" b="0"/>
+      </a:fillRef>
+      <a:effectRef idx="0">
+        <a:scrgbClr r="0" g="0" b="0"/>
+      </a:effectRef>
+      <a:fontRef idx="minor"/>
+    </dgm:style>
+  </dgm:styleLbl>
+  <dgm:styleLbl name="alignImgPlace1">
+    <dgm:scene3d>
+      <a:camera prst="orthographicFront"/>
+      <a:lightRig rig="threePt" dir="t"/>
+    </dgm:scene3d>
+    <dgm:sp3d/>
+    <dgm:txPr/>
+    <dgm:style>
+      <a:lnRef idx="2">
+        <a:scrgbClr r="0" g="0" b="0"/>
+      </a:lnRef>
+      <a:fillRef idx="1">
+        <a:scrgbClr r="0" g="0" b="0"/>
+      </a:fillRef>
+      <a:effectRef idx="0">
+        <a:scrgbClr r="0" g="0" b="0"/>
+      </a:effectRef>
+      <a:fontRef idx="minor"/>
+    </dgm:style>
+  </dgm:styleLbl>
+  <dgm:styleLbl name="bgImgPlace1">
+    <dgm:scene3d>
+      <a:camera prst="orthographicFront"/>
+      <a:lightRig rig="threePt" dir="t"/>
+    </dgm:scene3d>
+    <dgm:sp3d/>
+    <dgm:txPr/>
+    <dgm:style>
+      <a:lnRef idx="2">
+        <a:scrgbClr r="0" g="0" b="0"/>
+      </a:lnRef>
+      <a:fillRef idx="1">
+        <a:scrgbClr r="0" g="0" b="0"/>
+      </a:fillRef>
+      <a:effectRef idx="0">
+        <a:scrgbClr r="0" g="0" b="0"/>
+      </a:effectRef>
+      <a:fontRef idx="minor"/>
+    </dgm:style>
+  </dgm:styleLbl>
+  <dgm:styleLbl name="sibTrans2D1">
+    <dgm:scene3d>
+      <a:camera prst="orthographicFront"/>
+      <a:lightRig rig="threePt" dir="t"/>
+    </dgm:scene3d>
+    <dgm:sp3d/>
+    <dgm:txPr/>
+    <dgm:style>
+      <a:lnRef idx="0">
+        <a:scrgbClr r="0" g="0" b="0"/>
+      </a:lnRef>
+      <a:fillRef idx="1">
+        <a:scrgbClr r="0" g="0" b="0"/>
+      </a:fillRef>
+      <a:effectRef idx="0">
+        <a:scrgbClr r="0" g="0" b="0"/>
+      </a:effectRef>
+      <a:fontRef idx="minor">
+        <a:schemeClr val="lt1"/>
+      </a:fontRef>
+    </dgm:style>
+  </dgm:styleLbl>
+  <dgm:styleLbl name="fgSibTrans2D1">
+    <dgm:scene3d>
+      <a:camera prst="orthographicFront"/>
+      <a:lightRig rig="threePt" dir="t"/>
+    </dgm:scene3d>
+    <dgm:sp3d/>
+    <dgm:txPr/>
+    <dgm:style>
+      <a:lnRef idx="0">
+        <a:scrgbClr r="0" g="0" b="0"/>
+      </a:lnRef>
+      <a:fillRef idx="1">
+        <a:scrgbClr r="0" g="0" b="0"/>
+      </a:fillRef>
+      <a:effectRef idx="0">
+        <a:scrgbClr r="0" g="0" b="0"/>
+      </a:effectRef>
+      <a:fontRef idx="minor">
+        <a:schemeClr val="lt1"/>
+      </a:fontRef>
+    </dgm:style>
+  </dgm:styleLbl>
+  <dgm:styleLbl name="bgSibTrans2D1">
+    <dgm:scene3d>
+      <a:camera prst="orthographicFront"/>
+      <a:lightRig rig="threePt" dir="t"/>
+    </dgm:scene3d>
+    <dgm:sp3d/>
+    <dgm:txPr/>
+    <dgm:style>
+      <a:lnRef idx="0">
+        <a:scrgbClr r="0" g="0" b="0"/>
+      </a:lnRef>
+      <a:fillRef idx="1">
+        <a:scrgbClr r="0" g="0" b="0"/>
+      </a:fillRef>
+      <a:effectRef idx="0">
+        <a:scrgbClr r="0" g="0" b="0"/>
+      </a:effectRef>
+      <a:fontRef idx="minor">
+        <a:schemeClr val="lt1"/>
+      </a:fontRef>
+    </dgm:style>
+  </dgm:styleLbl>
+  <dgm:styleLbl name="sibTrans1D1">
+    <dgm:scene3d>
+      <a:camera prst="orthographicFront"/>
+      <a:lightRig rig="threePt" dir="t"/>
+    </dgm:scene3d>
+    <dgm:sp3d/>
+    <dgm:txPr/>
+    <dgm:style>
+      <a:lnRef idx="1">
+        <a:scrgbClr r="0" g="0" b="0"/>
+      </a:lnRef>
+      <a:fillRef idx="0">
+        <a:scrgbClr r="0" g="0" b="0"/>
+      </a:fillRef>
+      <a:effectRef idx="0">
+        <a:scrgbClr r="0" g="0" b="0"/>
+      </a:effectRef>
+      <a:fontRef idx="minor"/>
+    </dgm:style>
+  </dgm:styleLbl>
+  <dgm:styleLbl name="callout">
+    <dgm:scene3d>
+      <a:camera prst="orthographicFront"/>
+      <a:lightRig rig="threePt" dir="t"/>
+    </dgm:scene3d>
+    <dgm:sp3d/>
+    <dgm:txPr/>
+    <dgm:style>
+      <a:lnRef idx="2">
+        <a:scrgbClr r="0" g="0" b="0"/>
+      </a:lnRef>
+      <a:fillRef idx="1">
+        <a:scrgbClr r="0" g="0" b="0"/>
+      </a:fillRef>
+      <a:effectRef idx="0">
+        <a:scrgbClr r="0" g="0" b="0"/>
+      </a:effectRef>
+      <a:fontRef idx="minor"/>
+    </dgm:style>
+  </dgm:styleLbl>
+  <dgm:styleLbl name="asst0">
+    <dgm:scene3d>
+      <a:camera prst="orthographicFront"/>
+      <a:lightRig rig="threePt" dir="t"/>
+    </dgm:scene3d>
+    <dgm:sp3d/>
+    <dgm:txPr/>
+    <dgm:style>
+      <a:lnRef idx="2">
+        <a:scrgbClr r="0" g="0" b="0"/>
+      </a:lnRef>
+      <a:fillRef idx="1">
+        <a:scrgbClr r="0" g="0" b="0"/>
+      </a:fillRef>
+      <a:effectRef idx="0">
+        <a:scrgbClr r="0" g="0" b="0"/>
+      </a:effectRef>
+      <a:fontRef idx="minor">
+        <a:schemeClr val="lt1"/>
+      </a:fontRef>
+    </dgm:style>
+  </dgm:styleLbl>
+  <dgm:styleLbl name="asst1">
+    <dgm:scene3d>
+      <a:camera prst="orthographicFront"/>
+      <a:lightRig rig="threePt" dir="t"/>
+    </dgm:scene3d>
+    <dgm:sp3d/>
+    <dgm:txPr/>
+    <dgm:style>
+      <a:lnRef idx="2">
+        <a:scrgbClr r="0" g="0" b="0"/>
+      </a:lnRef>
+      <a:fillRef idx="1">
+        <a:scrgbClr r="0" g="0" b="0"/>
+      </a:fillRef>
+      <a:effectRef idx="0">
+        <a:scrgbClr r="0" g="0" b="0"/>
+      </a:effectRef>
+      <a:fontRef idx="minor">
+        <a:schemeClr val="lt1"/>
+      </a:fontRef>
+    </dgm:style>
+  </dgm:styleLbl>
+  <dgm:styleLbl name="asst2">
+    <dgm:scene3d>
+      <a:camera prst="orthographicFront"/>
+      <a:lightRig rig="threePt" dir="t"/>
+    </dgm:scene3d>
+    <dgm:sp3d/>
+    <dgm:txPr/>
+    <dgm:style>
+      <a:lnRef idx="2">
+        <a:scrgbClr r="0" g="0" b="0"/>
+      </a:lnRef>
+      <a:fillRef idx="1">
+        <a:scrgbClr r="0" g="0" b="0"/>
+      </a:fillRef>
+      <a:effectRef idx="0">
+        <a:scrgbClr r="0" g="0" b="0"/>
+      </a:effectRef>
+      <a:fontRef idx="minor">
+        <a:schemeClr val="lt1"/>
+      </a:fontRef>
+    </dgm:style>
+  </dgm:styleLbl>
+  <dgm:styleLbl name="asst3">
+    <dgm:scene3d>
+      <a:camera prst="orthographicFront"/>
+      <a:lightRig rig="threePt" dir="t"/>
+    </dgm:scene3d>
+    <dgm:sp3d/>
+    <dgm:txPr/>
+    <dgm:style>
+      <a:lnRef idx="2">
+        <a:scrgbClr r="0" g="0" b="0"/>
+      </a:lnRef>
+      <a:fillRef idx="1">
+        <a:scrgbClr r="0" g="0" b="0"/>
+      </a:fillRef>
+      <a:effectRef idx="0">
+        <a:scrgbClr r="0" g="0" b="0"/>
+      </a:effectRef>
+      <a:fontRef idx="minor">
+        <a:schemeClr val="lt1"/>
+      </a:fontRef>
+    </dgm:style>
+  </dgm:styleLbl>
+  <dgm:styleLbl name="asst4">
+    <dgm:scene3d>
+      <a:camera prst="orthographicFront"/>
+      <a:lightRig rig="threePt" dir="t"/>
+    </dgm:scene3d>
+    <dgm:sp3d/>
+    <dgm:txPr/>
+    <dgm:style>
+      <a:lnRef idx="2">
+        <a:scrgbClr r="0" g="0" b="0"/>
+      </a:lnRef>
+      <a:fillRef idx="1">
+        <a:scrgbClr r="0" g="0" b="0"/>
+      </a:fillRef>
+      <a:effectRef idx="0">
+        <a:scrgbClr r="0" g="0" b="0"/>
+      </a:effectRef>
+      <a:fontRef idx="minor">
+        <a:schemeClr val="lt1"/>
+      </a:fontRef>
+    </dgm:style>
+  </dgm:styleLbl>
+  <dgm:styleLbl name="parChTrans2D1">
+    <dgm:scene3d>
+      <a:camera prst="orthographicFront"/>
+      <a:lightRig rig="threePt" dir="t"/>
+    </dgm:scene3d>
+    <dgm:sp3d/>
+    <dgm:txPr/>
+    <dgm:style>
+      <a:lnRef idx="2">
+        <a:scrgbClr r="0" g="0" b="0"/>
+      </a:lnRef>
+      <a:fillRef idx="1">
+        <a:scrgbClr r="0" g="0" b="0"/>
+      </a:fillRef>
+      <a:effectRef idx="0">
+        <a:scrgbClr r="0" g="0" b="0"/>
+      </a:effectRef>
+      <a:fontRef idx="minor">
+        <a:schemeClr val="lt1"/>
+      </a:fontRef>
+    </dgm:style>
+  </dgm:styleLbl>
+  <dgm:styleLbl name="parChTrans2D2">
+    <dgm:scene3d>
+      <a:camera prst="orthographicFront"/>
+      <a:lightRig rig="threePt" dir="t"/>
+    </dgm:scene3d>
+    <dgm:sp3d/>
+    <dgm:txPr/>
+    <dgm:style>
+      <a:lnRef idx="2">
+        <a:scrgbClr r="0" g="0" b="0"/>
+      </a:lnRef>
+      <a:fillRef idx="1">
+        <a:scrgbClr r="0" g="0" b="0"/>
+      </a:fillRef>
+      <a:effectRef idx="0">
+        <a:scrgbClr r="0" g="0" b="0"/>
+      </a:effectRef>
+      <a:fontRef idx="minor">
+        <a:schemeClr val="lt1"/>
+      </a:fontRef>
+    </dgm:style>
+  </dgm:styleLbl>
+  <dgm:styleLbl name="parChTrans2D3">
+    <dgm:scene3d>
+      <a:camera prst="orthographicFront"/>
+      <a:lightRig rig="threePt" dir="t"/>
+    </dgm:scene3d>
+    <dgm:sp3d/>
+    <dgm:txPr/>
+    <dgm:style>
+      <a:lnRef idx="2">
+        <a:scrgbClr r="0" g="0" b="0"/>
+      </a:lnRef>
+      <a:fillRef idx="1">
+        <a:scrgbClr r="0" g="0" b="0"/>
+      </a:fillRef>
+      <a:effectRef idx="0">
+        <a:scrgbClr r="0" g="0" b="0"/>
+      </a:effectRef>
+      <a:fontRef idx="minor">
+        <a:schemeClr val="lt1"/>
+      </a:fontRef>
+    </dgm:style>
+  </dgm:styleLbl>
+  <dgm:styleLbl name="parChTrans2D4">
+    <dgm:scene3d>
+      <a:camera prst="orthographicFront"/>
+      <a:lightRig rig="threePt" dir="t"/>
+    </dgm:scene3d>
+    <dgm:sp3d/>
+    <dgm:txPr/>
+    <dgm:style>
+      <a:lnRef idx="2">
+        <a:scrgbClr r="0" g="0" b="0"/>
+      </a:lnRef>
+      <a:fillRef idx="1">
+        <a:scrgbClr r="0" g="0" b="0"/>
+      </a:fillRef>
+      <a:effectRef idx="0">
+        <a:scrgbClr r="0" g="0" b="0"/>
+      </a:effectRef>
+      <a:fontRef idx="minor">
+        <a:schemeClr val="lt1"/>
+      </a:fontRef>
+    </dgm:style>
+  </dgm:styleLbl>
+  <dgm:styleLbl name="parChTrans1D1">
+    <dgm:scene3d>
+      <a:camera prst="orthographicFront"/>
+      <a:lightRig rig="threePt" dir="t"/>
+    </dgm:scene3d>
+    <dgm:sp3d/>
+    <dgm:txPr/>
+    <dgm:style>
+      <a:lnRef idx="2">
+        <a:scrgbClr r="0" g="0" b="0"/>
+      </a:lnRef>
+      <a:fillRef idx="0">
+        <a:scrgbClr r="0" g="0" b="0"/>
+      </a:fillRef>
+      <a:effectRef idx="0">
+        <a:scrgbClr r="0" g="0" b="0"/>
+      </a:effectRef>
+      <a:fontRef idx="minor"/>
+    </dgm:style>
+  </dgm:styleLbl>
+  <dgm:styleLbl name="parChTrans1D2">
+    <dgm:scene3d>
+      <a:camera prst="orthographicFront"/>
+      <a:lightRig rig="threePt" dir="t"/>
+    </dgm:scene3d>
+    <dgm:sp3d/>
+    <dgm:txPr/>
+    <dgm:style>
+      <a:lnRef idx="2">
+        <a:scrgbClr r="0" g="0" b="0"/>
+      </a:lnRef>
+      <a:fillRef idx="0">
+        <a:scrgbClr r="0" g="0" b="0"/>
+      </a:fillRef>
+      <a:effectRef idx="0">
+        <a:scrgbClr r="0" g="0" b="0"/>
+      </a:effectRef>
+      <a:fontRef idx="minor"/>
+    </dgm:style>
+  </dgm:styleLbl>
+  <dgm:styleLbl name="parChTrans1D3">
+    <dgm:scene3d>
+      <a:camera prst="orthographicFront"/>
+      <a:lightRig rig="threePt" dir="t"/>
+    </dgm:scene3d>
+    <dgm:sp3d/>
+    <dgm:txPr/>
+    <dgm:style>
+      <a:lnRef idx="2">
+        <a:scrgbClr r="0" g="0" b="0"/>
+      </a:lnRef>
+      <a:fillRef idx="0">
+        <a:scrgbClr r="0" g="0" b="0"/>
+      </a:fillRef>
+      <a:effectRef idx="0">
+        <a:scrgbClr r="0" g="0" b="0"/>
+      </a:effectRef>
+      <a:fontRef idx="minor"/>
+    </dgm:style>
+  </dgm:styleLbl>
+  <dgm:styleLbl name="parChTrans1D4">
+    <dgm:scene3d>
+      <a:camera prst="orthographicFront"/>
+      <a:lightRig rig="threePt" dir="t"/>
+    </dgm:scene3d>
+    <dgm:sp3d/>
+    <dgm:txPr/>
+    <dgm:style>
+      <a:lnRef idx="2">
+        <a:scrgbClr r="0" g="0" b="0"/>
+      </a:lnRef>
+      <a:fillRef idx="0">
+        <a:scrgbClr r="0" g="0" b="0"/>
+      </a:fillRef>
+      <a:effectRef idx="0">
+        <a:scrgbClr r="0" g="0" b="0"/>
+      </a:effectRef>
+      <a:fontRef idx="minor"/>
+    </dgm:style>
+  </dgm:styleLbl>
+  <dgm:styleLbl name="fgAcc1">
+    <dgm:scene3d>
+      <a:camera prst="orthographicFront"/>
+      <a:lightRig rig="threePt" dir="t"/>
+    </dgm:scene3d>
+    <dgm:sp3d/>
+    <dgm:txPr/>
+    <dgm:style>
+      <a:lnRef idx="2">
+        <a:scrgbClr r="0" g="0" b="0"/>
+      </a:lnRef>
+      <a:fillRef idx="1">
+        <a:scrgbClr r="0" g="0" b="0"/>
+      </a:fillRef>
+      <a:effectRef idx="0">
+        <a:scrgbClr r="0" g="0" b="0"/>
+      </a:effectRef>
+      <a:fontRef idx="minor"/>
+    </dgm:style>
+  </dgm:styleLbl>
+  <dgm:styleLbl name="conFgAcc1">
+    <dgm:scene3d>
+      <a:camera prst="orthographicFront"/>
+      <a:lightRig rig="threePt" dir="t"/>
+    </dgm:scene3d>
+    <dgm:sp3d/>
+    <dgm:txPr/>
+    <dgm:style>
+      <a:lnRef idx="2">
+        <a:scrgbClr r="0" g="0" b="0"/>
+      </a:lnRef>
+      <a:fillRef idx="1">
+        <a:scrgbClr r="0" g="0" b="0"/>
+      </a:fillRef>
+      <a:effectRef idx="0">
+        <a:scrgbClr r="0" g="0" b="0"/>
+      </a:effectRef>
+      <a:fontRef idx="minor"/>
+    </dgm:style>
+  </dgm:styleLbl>
+  <dgm:styleLbl name="alignAcc1">
+    <dgm:scene3d>
+      <a:camera prst="orthographicFront"/>
+      <a:lightRig rig="threePt" dir="t"/>
+    </dgm:scene3d>
+    <dgm:sp3d/>
+    <dgm:txPr/>
+    <dgm:style>
+      <a:lnRef idx="2">
+        <a:scrgbClr r="0" g="0" b="0"/>
+      </a:lnRef>
+      <a:fillRef idx="1">
+        <a:scrgbClr r="0" g="0" b="0"/>
+      </a:fillRef>
+      <a:effectRef idx="0">
+        <a:scrgbClr r="0" g="0" b="0"/>
+      </a:effectRef>
+      <a:fontRef idx="minor"/>
+    </dgm:style>
+  </dgm:styleLbl>
+  <dgm:styleLbl name="trAlignAcc1">
+    <dgm:scene3d>
+      <a:camera prst="orthographicFront"/>
+      <a:lightRig rig="threePt" dir="t"/>
+    </dgm:scene3d>
+    <dgm:sp3d/>
+    <dgm:txPr/>
+    <dgm:style>
+      <a:lnRef idx="1">
+        <a:scrgbClr r="0" g="0" b="0"/>
+      </a:lnRef>
+      <a:fillRef idx="1">
+        <a:scrgbClr r="0" g="0" b="0"/>
+      </a:fillRef>
+      <a:effectRef idx="0">
+        <a:scrgbClr r="0" g="0" b="0"/>
+      </a:effectRef>
+      <a:fontRef idx="minor"/>
+    </dgm:style>
+  </dgm:styleLbl>
+  <dgm:styleLbl name="bgAcc1">
+    <dgm:scene3d>
+      <a:camera prst="orthographicFront"/>
+      <a:lightRig rig="threePt" dir="t"/>
+    </dgm:scene3d>
+    <dgm:sp3d/>
+    <dgm:txPr/>
+    <dgm:style>
+      <a:lnRef idx="2">
+        <a:scrgbClr r="0" g="0" b="0"/>
+      </a:lnRef>
+      <a:fillRef idx="1">
+        <a:scrgbClr r="0" g="0" b="0"/>
+      </a:fillRef>
+      <a:effectRef idx="0">
+        <a:scrgbClr r="0" g="0" b="0"/>
+      </a:effectRef>
+      <a:fontRef idx="minor"/>
+    </dgm:style>
+  </dgm:styleLbl>
+  <dgm:styleLbl name="solidFgAcc1">
+    <dgm:scene3d>
+      <a:camera prst="orthographicFront"/>
+      <a:lightRig rig="threePt" dir="t"/>
+    </dgm:scene3d>
+    <dgm:sp3d/>
+    <dgm:txPr/>
+    <dgm:style>
+      <a:lnRef idx="2">
+        <a:scrgbClr r="0" g="0" b="0"/>
+      </a:lnRef>
+      <a:fillRef idx="1">
+        <a:scrgbClr r="0" g="0" b="0"/>
+      </a:fillRef>
+      <a:effectRef idx="0">
+        <a:scrgbClr r="0" g="0" b="0"/>
+      </a:effectRef>
+      <a:fontRef idx="minor"/>
+    </dgm:style>
+  </dgm:styleLbl>
+  <dgm:styleLbl name="solidAlignAcc1">
+    <dgm:scene3d>
+      <a:camera prst="orthographicFront"/>
+      <a:lightRig rig="threePt" dir="t"/>
+    </dgm:scene3d>
+    <dgm:sp3d/>
+    <dgm:txPr/>
+    <dgm:style>
+      <a:lnRef idx="2">
+        <a:scrgbClr r="0" g="0" b="0"/>
+      </a:lnRef>
+      <a:fillRef idx="1">
+        <a:scrgbClr r="0" g="0" b="0"/>
+      </a:fillRef>
+      <a:effectRef idx="0">
+        <a:scrgbClr r="0" g="0" b="0"/>
+      </a:effectRef>
+      <a:fontRef idx="minor"/>
+    </dgm:style>
+  </dgm:styleLbl>
+  <dgm:styleLbl name="solidBgAcc1">
+    <dgm:scene3d>
+      <a:camera prst="orthographicFront"/>
+      <a:lightRig rig="threePt" dir="t"/>
+    </dgm:scene3d>
+    <dgm:sp3d/>
+    <dgm:txPr/>
+    <dgm:style>
+      <a:lnRef idx="2">
+        <a:scrgbClr r="0" g="0" b="0"/>
+      </a:lnRef>
+      <a:fillRef idx="1">
+        <a:scrgbClr r="0" g="0" b="0"/>
+      </a:fillRef>
+      <a:effectRef idx="0">
+        <a:scrgbClr r="0" g="0" b="0"/>
+      </a:effectRef>
+      <a:fontRef idx="minor"/>
+    </dgm:style>
+  </dgm:styleLbl>
+  <dgm:styleLbl name="fgAccFollowNode1">
+    <dgm:scene3d>
+      <a:camera prst="orthographicFront"/>
+      <a:lightRig rig="threePt" dir="t"/>
+    </dgm:scene3d>
+    <dgm:sp3d/>
+    <dgm:txPr/>
+    <dgm:style>
+      <a:lnRef idx="2">
+        <a:scrgbClr r="0" g="0" b="0"/>
+      </a:lnRef>
+      <a:fillRef idx="1">
+        <a:scrgbClr r="0" g="0" b="0"/>
+      </a:fillRef>
+      <a:effectRef idx="0">
+        <a:scrgbClr r="0" g="0" b="0"/>
+      </a:effectRef>
+      <a:fontRef idx="minor"/>
+    </dgm:style>
+  </dgm:styleLbl>
+  <dgm:styleLbl name="alignAccFollowNode1">
+    <dgm:scene3d>
+      <a:camera prst="orthographicFront"/>
+      <a:lightRig rig="threePt" dir="t"/>
+    </dgm:scene3d>
+    <dgm:sp3d/>
+    <dgm:txPr/>
+    <dgm:style>
+      <a:lnRef idx="2">
+        <a:scrgbClr r="0" g="0" b="0"/>
+      </a:lnRef>
+      <a:fillRef idx="1">
+        <a:scrgbClr r="0" g="0" b="0"/>
+      </a:fillRef>
+      <a:effectRef idx="0">
+        <a:scrgbClr r="0" g="0" b="0"/>
+      </a:effectRef>
+      <a:fontRef idx="minor"/>
+    </dgm:style>
+  </dgm:styleLbl>
+  <dgm:styleLbl name="bgAccFollowNode1">
+    <dgm:scene3d>
+      <a:camera prst="orthographicFront"/>
+      <a:lightRig rig="threePt" dir="t"/>
+    </dgm:scene3d>
+    <dgm:sp3d/>
+    <dgm:txPr/>
+    <dgm:style>
+      <a:lnRef idx="2">
+        <a:scrgbClr r="0" g="0" b="0"/>
+      </a:lnRef>
+      <a:fillRef idx="1">
+        <a:scrgbClr r="0" g="0" b="0"/>
+      </a:fillRef>
+      <a:effectRef idx="0">
+        <a:scrgbClr r="0" g="0" b="0"/>
+      </a:effectRef>
+      <a:fontRef idx="minor"/>
+    </dgm:style>
+  </dgm:styleLbl>
+  <dgm:styleLbl name="fgAcc0">
+    <dgm:scene3d>
+      <a:camera prst="orthographicFront"/>
+      <a:lightRig rig="threePt" dir="t"/>
+    </dgm:scene3d>
+    <dgm:sp3d/>
+    <dgm:txPr/>
+    <dgm:style>
+      <a:lnRef idx="2">
+        <a:scrgbClr r="0" g="0" b="0"/>
+      </a:lnRef>
+      <a:fillRef idx="1">
+        <a:scrgbClr r="0" g="0" b="0"/>
+      </a:fillRef>
+      <a:effectRef idx="0">
+        <a:scrgbClr r="0" g="0" b="0"/>
+      </a:effectRef>
+      <a:fontRef idx="minor"/>
+    </dgm:style>
+  </dgm:styleLbl>
+  <dgm:styleLbl name="fgAcc2">
+    <dgm:scene3d>
+      <a:camera prst="orthographicFront"/>
+      <a:lightRig rig="threePt" dir="t"/>
+    </dgm:scene3d>
+    <dgm:sp3d/>
+    <dgm:txPr/>
+    <dgm:style>
+      <a:lnRef idx="2">
+        <a:scrgbClr r="0" g="0" b="0"/>
+      </a:lnRef>
+      <a:fillRef idx="1">
+        <a:scrgbClr r="0" g="0" b="0"/>
+      </a:fillRef>
+      <a:effectRef idx="0">
+        <a:scrgbClr r="0" g="0" b="0"/>
+      </a:effectRef>
+      <a:fontRef idx="minor"/>
+    </dgm:style>
+  </dgm:styleLbl>
+  <dgm:styleLbl name="fgAcc3">
+    <dgm:scene3d>
+      <a:camera prst="orthographicFront"/>
+      <a:lightRig rig="threePt" dir="t"/>
+    </dgm:scene3d>
+    <dgm:sp3d/>
+    <dgm:txPr/>
+    <dgm:style>
+      <a:lnRef idx="2">
+        <a:scrgbClr r="0" g="0" b="0"/>
+      </a:lnRef>
+      <a:fillRef idx="1">
+        <a:scrgbClr r="0" g="0" b="0"/>
+      </a:fillRef>
+      <a:effectRef idx="0">
+        <a:scrgbClr r="0" g="0" b="0"/>
+      </a:effectRef>
+      <a:fontRef idx="minor"/>
+    </dgm:style>
+  </dgm:styleLbl>
+  <dgm:styleLbl name="fgAcc4">
+    <dgm:scene3d>
+      <a:camera prst="orthographicFront"/>
+      <a:lightRig rig="threePt" dir="t"/>
+    </dgm:scene3d>
+    <dgm:sp3d/>
+    <dgm:txPr/>
+    <dgm:style>
+      <a:lnRef idx="2">
+        <a:scrgbClr r="0" g="0" b="0"/>
+      </a:lnRef>
+      <a:fillRef idx="1">
+        <a:scrgbClr r="0" g="0" b="0"/>
+      </a:fillRef>
+      <a:effectRef idx="0">
+        <a:scrgbClr r="0" g="0" b="0"/>
+      </a:effectRef>
+      <a:fontRef idx="minor"/>
+    </dgm:style>
+  </dgm:styleLbl>
+  <dgm:styleLbl name="bgShp">
+    <dgm:scene3d>
+      <a:camera prst="orthographicFront"/>
+      <a:lightRig rig="threePt" dir="t"/>
+    </dgm:scene3d>
+    <dgm:sp3d/>
+    <dgm:txPr/>
+    <dgm:style>
+      <a:lnRef idx="0">
+        <a:scrgbClr r="0" g="0" b="0"/>
+      </a:lnRef>
+      <a:fillRef idx="1">
+        <a:scrgbClr r="0" g="0" b="0"/>
+      </a:fillRef>
+      <a:effectRef idx="0">
+        <a:scrgbClr r="0" g="0" b="0"/>
+      </a:effectRef>
+      <a:fontRef idx="minor"/>
+    </dgm:style>
+  </dgm:styleLbl>
+  <dgm:styleLbl name="dkBgShp">
+    <dgm:scene3d>
+      <a:camera prst="orthographicFront"/>
+      <a:lightRig rig="threePt" dir="t"/>
+    </dgm:scene3d>
+    <dgm:sp3d/>
+    <dgm:txPr/>
+    <dgm:style>
+      <a:lnRef idx="0">
+        <a:scrgbClr r="0" g="0" b="0"/>
+      </a:lnRef>
+      <a:fillRef idx="1">
+        <a:scrgbClr r="0" g="0" b="0"/>
+      </a:fillRef>
+      <a:effectRef idx="0">
+        <a:scrgbClr r="0" g="0" b="0"/>
+      </a:effectRef>
+      <a:fontRef idx="minor"/>
+    </dgm:style>
+  </dgm:styleLbl>
+  <dgm:styleLbl name="trBgShp">
+    <dgm:scene3d>
+      <a:camera prst="orthographicFront"/>
+      <a:lightRig rig="threePt" dir="t"/>
+    </dgm:scene3d>
+    <dgm:sp3d/>
+    <dgm:txPr/>
+    <dgm:style>
+      <a:lnRef idx="0">
+        <a:scrgbClr r="0" g="0" b="0"/>
+      </a:lnRef>
+      <a:fillRef idx="1">
+        <a:scrgbClr r="0" g="0" b="0"/>
+      </a:fillRef>
+      <a:effectRef idx="0">
+        <a:scrgbClr r="0" g="0" b="0"/>
+      </a:effectRef>
+      <a:fontRef idx="minor"/>
+    </dgm:style>
+  </dgm:styleLbl>
+  <dgm:styleLbl name="fgShp">
+    <dgm:scene3d>
+      <a:camera prst="orthographicFront"/>
+      <a:lightRig rig="threePt" dir="t"/>
+    </dgm:scene3d>
+    <dgm:sp3d/>
+    <dgm:txPr/>
+    <dgm:style>
+      <a:lnRef idx="2">
+        <a:scrgbClr r="0" g="0" b="0"/>
+      </a:lnRef>
+      <a:fillRef idx="1">
+        <a:scrgbClr r="0" g="0" b="0"/>
+      </a:fillRef>
+      <a:effectRef idx="0">
+        <a:scrgbClr r="0" g="0" b="0"/>
+      </a:effectRef>
+      <a:fontRef idx="minor"/>
+    </dgm:style>
+  </dgm:styleLbl>
+  <dgm:styleLbl name="revTx">
+    <dgm:scene3d>
+      <a:camera prst="orthographicFront"/>
+      <a:lightRig rig="threePt" dir="t"/>
+    </dgm:scene3d>
+    <dgm:sp3d/>
+    <dgm:txPr/>
+    <dgm:style>
+      <a:lnRef idx="0">
+        <a:scrgbClr r="0" g="0" b="0"/>
+      </a:lnRef>
+      <a:fillRef idx="0">
+        <a:scrgbClr r="0" g="0" b="0"/>
+      </a:fillRef>
+      <a:effectRef idx="0">
+        <a:scrgbClr r="0" g="0" b="0"/>
+      </a:effectRef>
+      <a:fontRef idx="minor"/>
+    </dgm:style>
+  </dgm:styleLbl>
+</dgm:styleDef>
+</file>
+
+<file path=ppt/diagrams/quickStyle5.xml><?xml version="1.0" encoding="utf-8"?>
+<dgm:styleDef xmlns:dgm="http://schemas.openxmlformats.org/drawingml/2006/diagram" xmlns:a="http://schemas.openxmlformats.org/drawingml/2006/main" uniqueId="urn:microsoft.com/office/officeart/2005/8/quickstyle/simple1">
+  <dgm:title val=""/>
+  <dgm:desc val=""/>
+  <dgm:catLst>
+    <dgm:cat type="simple" pri="10100"/>
+  </dgm:catLst>
+  <dgm:scene3d>
+    <a:camera prst="orthographicFront"/>
+    <a:lightRig rig="threePt" dir="t"/>
+  </dgm:scene3d>
+  <dgm:styleLbl name="node0">
+    <dgm:scene3d>
+      <a:camera prst="orthographicFront"/>
+      <a:lightRig rig="threePt" dir="t"/>
+    </dgm:scene3d>
+    <dgm:sp3d/>
+    <dgm:txPr/>
+    <dgm:style>
+      <a:lnRef idx="2">
+        <a:scrgbClr r="0" g="0" b="0"/>
+      </a:lnRef>
+      <a:fillRef idx="1">
+        <a:scrgbClr r="0" g="0" b="0"/>
+      </a:fillRef>
+      <a:effectRef idx="0">
+        <a:scrgbClr r="0" g="0" b="0"/>
+      </a:effectRef>
+      <a:fontRef idx="minor">
+        <a:schemeClr val="lt1"/>
+      </a:fontRef>
+    </dgm:style>
+  </dgm:styleLbl>
+  <dgm:styleLbl name="lnNode1">
+    <dgm:scene3d>
+      <a:camera prst="orthographicFront"/>
+      <a:lightRig rig="threePt" dir="t"/>
+    </dgm:scene3d>
+    <dgm:sp3d/>
+    <dgm:txPr/>
+    <dgm:style>
+      <a:lnRef idx="2">
+        <a:scrgbClr r="0" g="0" b="0"/>
+      </a:lnRef>
+      <a:fillRef idx="1">
+        <a:scrgbClr r="0" g="0" b="0"/>
+      </a:fillRef>
+      <a:effectRef idx="0">
+        <a:scrgbClr r="0" g="0" b="0"/>
+      </a:effectRef>
+      <a:fontRef idx="minor">
+        <a:schemeClr val="lt1"/>
+      </a:fontRef>
+    </dgm:style>
+  </dgm:styleLbl>
+  <dgm:styleLbl name="vennNode1">
+    <dgm:scene3d>
+      <a:camera prst="orthographicFront"/>
+      <a:lightRig rig="threePt" dir="t"/>
+    </dgm:scene3d>
+    <dgm:sp3d/>
+    <dgm:txPr/>
+    <dgm:style>
+      <a:lnRef idx="2">
+        <a:scrgbClr r="0" g="0" b="0"/>
+      </a:lnRef>
+      <a:fillRef idx="1">
+        <a:scrgbClr r="0" g="0" b="0"/>
+      </a:fillRef>
+      <a:effectRef idx="0">
+        <a:scrgbClr r="0" g="0" b="0"/>
+      </a:effectRef>
+      <a:fontRef idx="minor">
+        <a:schemeClr val="tx1"/>
+      </a:fontRef>
+    </dgm:style>
+  </dgm:styleLbl>
+  <dgm:styleLbl name="alignNode1">
+    <dgm:scene3d>
+      <a:camera prst="orthographicFront"/>
+      <a:lightRig rig="threePt" dir="t"/>
+    </dgm:scene3d>
+    <dgm:sp3d/>
+    <dgm:txPr/>
+    <dgm:style>
+      <a:lnRef idx="2">
+        <a:scrgbClr r="0" g="0" b="0"/>
+      </a:lnRef>
+      <a:fillRef idx="1">
+        <a:scrgbClr r="0" g="0" b="0"/>
+      </a:fillRef>
+      <a:effectRef idx="0">
+        <a:scrgbClr r="0" g="0" b="0"/>
+      </a:effectRef>
+      <a:fontRef idx="minor">
+        <a:schemeClr val="lt1"/>
+      </a:fontRef>
+    </dgm:style>
+  </dgm:styleLbl>
+  <dgm:styleLbl name="node1">
+    <dgm:scene3d>
+      <a:camera prst="orthographicFront"/>
+      <a:lightRig rig="threePt" dir="t"/>
+    </dgm:scene3d>
+    <dgm:sp3d/>
+    <dgm:txPr/>
+    <dgm:style>
+      <a:lnRef idx="2">
+        <a:scrgbClr r="0" g="0" b="0"/>
+      </a:lnRef>
+      <a:fillRef idx="1">
+        <a:scrgbClr r="0" g="0" b="0"/>
+      </a:fillRef>
+      <a:effectRef idx="0">
+        <a:scrgbClr r="0" g="0" b="0"/>
+      </a:effectRef>
+      <a:fontRef idx="minor">
+        <a:schemeClr val="lt1"/>
+      </a:fontRef>
+    </dgm:style>
+  </dgm:styleLbl>
+  <dgm:styleLbl name="node2">
+    <dgm:scene3d>
+      <a:camera prst="orthographicFront"/>
+      <a:lightRig rig="threePt" dir="t"/>
+    </dgm:scene3d>
+    <dgm:sp3d/>
+    <dgm:txPr/>
+    <dgm:style>
+      <a:lnRef idx="2">
+        <a:scrgbClr r="0" g="0" b="0"/>
+      </a:lnRef>
+      <a:fillRef idx="1">
+        <a:scrgbClr r="0" g="0" b="0"/>
+      </a:fillRef>
+      <a:effectRef idx="0">
+        <a:scrgbClr r="0" g="0" b="0"/>
+      </a:effectRef>
+      <a:fontRef idx="minor">
+        <a:schemeClr val="lt1"/>
+      </a:fontRef>
+    </dgm:style>
+  </dgm:styleLbl>
+  <dgm:styleLbl name="node3">
+    <dgm:scene3d>
+      <a:camera prst="orthographicFront"/>
+      <a:lightRig rig="threePt" dir="t"/>
+    </dgm:scene3d>
+    <dgm:sp3d/>
+    <dgm:txPr/>
+    <dgm:style>
+      <a:lnRef idx="2">
+        <a:scrgbClr r="0" g="0" b="0"/>
+      </a:lnRef>
+      <a:fillRef idx="1">
+        <a:scrgbClr r="0" g="0" b="0"/>
+      </a:fillRef>
+      <a:effectRef idx="0">
+        <a:scrgbClr r="0" g="0" b="0"/>
+      </a:effectRef>
+      <a:fontRef idx="minor">
+        <a:schemeClr val="lt1"/>
+      </a:fontRef>
+    </dgm:style>
+  </dgm:styleLbl>
+  <dgm:styleLbl name="node4">
+    <dgm:scene3d>
+      <a:camera prst="orthographicFront"/>
+      <a:lightRig rig="threePt" dir="t"/>
+    </dgm:scene3d>
+    <dgm:sp3d/>
+    <dgm:txPr/>
+    <dgm:style>
+      <a:lnRef idx="2">
+        <a:scrgbClr r="0" g="0" b="0"/>
+      </a:lnRef>
+      <a:fillRef idx="1">
+        <a:scrgbClr r="0" g="0" b="0"/>
+      </a:fillRef>
+      <a:effectRef idx="0">
+        <a:scrgbClr r="0" g="0" b="0"/>
+      </a:effectRef>
+      <a:fontRef idx="minor">
+        <a:schemeClr val="lt1"/>
+      </a:fontRef>
+    </dgm:style>
+  </dgm:styleLbl>
+  <dgm:styleLbl name="fgImgPlace1">
+    <dgm:scene3d>
+      <a:camera prst="orthographicFront"/>
+      <a:lightRig rig="threePt" dir="t"/>
+    </dgm:scene3d>
+    <dgm:sp3d/>
+    <dgm:txPr/>
+    <dgm:style>
+      <a:lnRef idx="2">
+        <a:scrgbClr r="0" g="0" b="0"/>
+      </a:lnRef>
+      <a:fillRef idx="1">
+        <a:scrgbClr r="0" g="0" b="0"/>
+      </a:fillRef>
+      <a:effectRef idx="0">
+        <a:scrgbClr r="0" g="0" b="0"/>
+      </a:effectRef>
+      <a:fontRef idx="minor"/>
+    </dgm:style>
+  </dgm:styleLbl>
+  <dgm:styleLbl name="alignImgPlace1">
+    <dgm:scene3d>
+      <a:camera prst="orthographicFront"/>
+      <a:lightRig rig="threePt" dir="t"/>
+    </dgm:scene3d>
+    <dgm:sp3d/>
+    <dgm:txPr/>
+    <dgm:style>
+      <a:lnRef idx="2">
+        <a:scrgbClr r="0" g="0" b="0"/>
+      </a:lnRef>
+      <a:fillRef idx="1">
+        <a:scrgbClr r="0" g="0" b="0"/>
+      </a:fillRef>
+      <a:effectRef idx="0">
+        <a:scrgbClr r="0" g="0" b="0"/>
+      </a:effectRef>
+      <a:fontRef idx="minor"/>
+    </dgm:style>
+  </dgm:styleLbl>
+  <dgm:styleLbl name="bgImgPlace1">
+    <dgm:scene3d>
+      <a:camera prst="orthographicFront"/>
+      <a:lightRig rig="threePt" dir="t"/>
+    </dgm:scene3d>
+    <dgm:sp3d/>
+    <dgm:txPr/>
+    <dgm:style>
+      <a:lnRef idx="2">
+        <a:scrgbClr r="0" g="0" b="0"/>
+      </a:lnRef>
+      <a:fillRef idx="1">
+        <a:scrgbClr r="0" g="0" b="0"/>
+      </a:fillRef>
+      <a:effectRef idx="0">
+        <a:scrgbClr r="0" g="0" b="0"/>
+      </a:effectRef>
+      <a:fontRef idx="minor"/>
+    </dgm:style>
+  </dgm:styleLbl>
+  <dgm:styleLbl name="sibTrans2D1">
+    <dgm:scene3d>
+      <a:camera prst="orthographicFront"/>
+      <a:lightRig rig="threePt" dir="t"/>
+    </dgm:scene3d>
+    <dgm:sp3d/>
+    <dgm:txPr/>
+    <dgm:style>
+      <a:lnRef idx="0">
+        <a:scrgbClr r="0" g="0" b="0"/>
+      </a:lnRef>
+      <a:fillRef idx="1">
+        <a:scrgbClr r="0" g="0" b="0"/>
+      </a:fillRef>
+      <a:effectRef idx="0">
+        <a:scrgbClr r="0" g="0" b="0"/>
+      </a:effectRef>
+      <a:fontRef idx="minor">
+        <a:schemeClr val="lt1"/>
+      </a:fontRef>
+    </dgm:style>
+  </dgm:styleLbl>
+  <dgm:styleLbl name="fgSibTrans2D1">
+    <dgm:scene3d>
+      <a:camera prst="orthographicFront"/>
+      <a:lightRig rig="threePt" dir="t"/>
+    </dgm:scene3d>
+    <dgm:sp3d/>
+    <dgm:txPr/>
+    <dgm:style>
+      <a:lnRef idx="0">
+        <a:scrgbClr r="0" g="0" b="0"/>
+      </a:lnRef>
+      <a:fillRef idx="1">
+        <a:scrgbClr r="0" g="0" b="0"/>
+      </a:fillRef>
+      <a:effectRef idx="0">
+        <a:scrgbClr r="0" g="0" b="0"/>
+      </a:effectRef>
+      <a:fontRef idx="minor">
+        <a:schemeClr val="lt1"/>
+      </a:fontRef>
+    </dgm:style>
+  </dgm:styleLbl>
+  <dgm:styleLbl name="bgSibTrans2D1">
+    <dgm:scene3d>
+      <a:camera prst="orthographicFront"/>
+      <a:lightRig rig="threePt" dir="t"/>
+    </dgm:scene3d>
+    <dgm:sp3d/>
+    <dgm:txPr/>
+    <dgm:style>
+      <a:lnRef idx="0">
+        <a:scrgbClr r="0" g="0" b="0"/>
+      </a:lnRef>
+      <a:fillRef idx="1">
+        <a:scrgbClr r="0" g="0" b="0"/>
+      </a:fillRef>
+      <a:effectRef idx="0">
+        <a:scrgbClr r="0" g="0" b="0"/>
+      </a:effectRef>
+      <a:fontRef idx="minor">
+        <a:schemeClr val="lt1"/>
+      </a:fontRef>
+    </dgm:style>
+  </dgm:styleLbl>
+  <dgm:styleLbl name="sibTrans1D1">
+    <dgm:scene3d>
+      <a:camera prst="orthographicFront"/>
+      <a:lightRig rig="threePt" dir="t"/>
+    </dgm:scene3d>
+    <dgm:sp3d/>
+    <dgm:txPr/>
+    <dgm:style>
+      <a:lnRef idx="1">
+        <a:scrgbClr r="0" g="0" b="0"/>
+      </a:lnRef>
+      <a:fillRef idx="0">
+        <a:scrgbClr r="0" g="0" b="0"/>
+      </a:fillRef>
+      <a:effectRef idx="0">
+        <a:scrgbClr r="0" g="0" b="0"/>
+      </a:effectRef>
+      <a:fontRef idx="minor"/>
+    </dgm:style>
+  </dgm:styleLbl>
+  <dgm:styleLbl name="callout">
+    <dgm:scene3d>
+      <a:camera prst="orthographicFront"/>
+      <a:lightRig rig="threePt" dir="t"/>
+    </dgm:scene3d>
+    <dgm:sp3d/>
+    <dgm:txPr/>
+    <dgm:style>
+      <a:lnRef idx="2">
+        <a:scrgbClr r="0" g="0" b="0"/>
+      </a:lnRef>
+      <a:fillRef idx="1">
+        <a:scrgbClr r="0" g="0" b="0"/>
+      </a:fillRef>
+      <a:effectRef idx="0">
+        <a:scrgbClr r="0" g="0" b="0"/>
+      </a:effectRef>
+      <a:fontRef idx="minor"/>
+    </dgm:style>
+  </dgm:styleLbl>
+  <dgm:styleLbl name="asst0">
+    <dgm:scene3d>
+      <a:camera prst="orthographicFront"/>
+      <a:lightRig rig="threePt" dir="t"/>
+    </dgm:scene3d>
+    <dgm:sp3d/>
+    <dgm:txPr/>
+    <dgm:style>
+      <a:lnRef idx="2">
+        <a:scrgbClr r="0" g="0" b="0"/>
+      </a:lnRef>
+      <a:fillRef idx="1">
+        <a:scrgbClr r="0" g="0" b="0"/>
+      </a:fillRef>
+      <a:effectRef idx="0">
+        <a:scrgbClr r="0" g="0" b="0"/>
+      </a:effectRef>
+      <a:fontRef idx="minor">
+        <a:schemeClr val="lt1"/>
+      </a:fontRef>
+    </dgm:style>
+  </dgm:styleLbl>
+  <dgm:styleLbl name="asst1">
+    <dgm:scene3d>
+      <a:camera prst="orthographicFront"/>
+      <a:lightRig rig="threePt" dir="t"/>
+    </dgm:scene3d>
+    <dgm:sp3d/>
+    <dgm:txPr/>
+    <dgm:style>
+      <a:lnRef idx="2">
+        <a:scrgbClr r="0" g="0" b="0"/>
+      </a:lnRef>
+      <a:fillRef idx="1">
+        <a:scrgbClr r="0" g="0" b="0"/>
+      </a:fillRef>
+      <a:effectRef idx="0">
+        <a:scrgbClr r="0" g="0" b="0"/>
+      </a:effectRef>
+      <a:fontRef idx="minor">
+        <a:schemeClr val="lt1"/>
+      </a:fontRef>
+    </dgm:style>
+  </dgm:styleLbl>
+  <dgm:styleLbl name="asst2">
+    <dgm:scene3d>
+      <a:camera prst="orthographicFront"/>
+      <a:lightRig rig="threePt" dir="t"/>
+    </dgm:scene3d>
+    <dgm:sp3d/>
+    <dgm:txPr/>
+    <dgm:style>
+      <a:lnRef idx="2">
+        <a:scrgbClr r="0" g="0" b="0"/>
+      </a:lnRef>
+      <a:fillRef idx="1">
+        <a:scrgbClr r="0" g="0" b="0"/>
+      </a:fillRef>
+      <a:effectRef idx="0">
+        <a:scrgbClr r="0" g="0" b="0"/>
+      </a:effectRef>
+      <a:fontRef idx="minor">
+        <a:schemeClr val="lt1"/>
+      </a:fontRef>
+    </dgm:style>
+  </dgm:styleLbl>
+  <dgm:styleLbl name="asst3">
+    <dgm:scene3d>
+      <a:camera prst="orthographicFront"/>
+      <a:lightRig rig="threePt" dir="t"/>
+    </dgm:scene3d>
+    <dgm:sp3d/>
+    <dgm:txPr/>
+    <dgm:style>
+      <a:lnRef idx="2">
+        <a:scrgbClr r="0" g="0" b="0"/>
+      </a:lnRef>
+      <a:fillRef idx="1">
+        <a:scrgbClr r="0" g="0" b="0"/>
+      </a:fillRef>
+      <a:effectRef idx="0">
+        <a:scrgbClr r="0" g="0" b="0"/>
+      </a:effectRef>
+      <a:fontRef idx="minor">
+        <a:schemeClr val="lt1"/>
+      </a:fontRef>
+    </dgm:style>
+  </dgm:styleLbl>
+  <dgm:styleLbl name="asst4">
+    <dgm:scene3d>
+      <a:camera prst="orthographicFront"/>
+      <a:lightRig rig="threePt" dir="t"/>
+    </dgm:scene3d>
+    <dgm:sp3d/>
+    <dgm:txPr/>
+    <dgm:style>
+      <a:lnRef idx="2">
+        <a:scrgbClr r="0" g="0" b="0"/>
+      </a:lnRef>
+      <a:fillRef idx="1">
+        <a:scrgbClr r="0" g="0" b="0"/>
+      </a:fillRef>
+      <a:effectRef idx="0">
+        <a:scrgbClr r="0" g="0" b="0"/>
+      </a:effectRef>
+      <a:fontRef idx="minor">
+        <a:schemeClr val="lt1"/>
+      </a:fontRef>
+    </dgm:style>
+  </dgm:styleLbl>
+  <dgm:styleLbl name="parChTrans2D1">
+    <dgm:scene3d>
+      <a:camera prst="orthographicFront"/>
+      <a:lightRig rig="threePt" dir="t"/>
+    </dgm:scene3d>
+    <dgm:sp3d/>
+    <dgm:txPr/>
+    <dgm:style>
+      <a:lnRef idx="2">
+        <a:scrgbClr r="0" g="0" b="0"/>
+      </a:lnRef>
+      <a:fillRef idx="1">
+        <a:scrgbClr r="0" g="0" b="0"/>
+      </a:fillRef>
+      <a:effectRef idx="0">
+        <a:scrgbClr r="0" g="0" b="0"/>
+      </a:effectRef>
+      <a:fontRef idx="minor">
+        <a:schemeClr val="lt1"/>
+      </a:fontRef>
+    </dgm:style>
+  </dgm:styleLbl>
+  <dgm:styleLbl name="parChTrans2D2">
+    <dgm:scene3d>
+      <a:camera prst="orthographicFront"/>
+      <a:lightRig rig="threePt" dir="t"/>
+    </dgm:scene3d>
+    <dgm:sp3d/>
+    <dgm:txPr/>
+    <dgm:style>
+      <a:lnRef idx="2">
+        <a:scrgbClr r="0" g="0" b="0"/>
+      </a:lnRef>
+      <a:fillRef idx="1">
+        <a:scrgbClr r="0" g="0" b="0"/>
+      </a:fillRef>
+      <a:effectRef idx="0">
+        <a:scrgbClr r="0" g="0" b="0"/>
+      </a:effectRef>
+      <a:fontRef idx="minor">
+        <a:schemeClr val="lt1"/>
+      </a:fontRef>
+    </dgm:style>
+  </dgm:styleLbl>
+  <dgm:styleLbl name="parChTrans2D3">
+    <dgm:scene3d>
+      <a:camera prst="orthographicFront"/>
+      <a:lightRig rig="threePt" dir="t"/>
+    </dgm:scene3d>
+    <dgm:sp3d/>
+    <dgm:txPr/>
+    <dgm:style>
+      <a:lnRef idx="2">
+        <a:scrgbClr r="0" g="0" b="0"/>
+      </a:lnRef>
+      <a:fillRef idx="1">
+        <a:scrgbClr r="0" g="0" b="0"/>
+      </a:fillRef>
+      <a:effectRef idx="0">
+        <a:scrgbClr r="0" g="0" b="0"/>
+      </a:effectRef>
+      <a:fontRef idx="minor">
+        <a:schemeClr val="lt1"/>
+      </a:fontRef>
+    </dgm:style>
+  </dgm:styleLbl>
+  <dgm:styleLbl name="parChTrans2D4">
+    <dgm:scene3d>
+      <a:camera prst="orthographicFront"/>
+      <a:lightRig rig="threePt" dir="t"/>
+    </dgm:scene3d>
+    <dgm:sp3d/>
+    <dgm:txPr/>
+    <dgm:style>
+      <a:lnRef idx="2">
+        <a:scrgbClr r="0" g="0" b="0"/>
+      </a:lnRef>
+      <a:fillRef idx="1">
+        <a:scrgbClr r="0" g="0" b="0"/>
+      </a:fillRef>
+      <a:effectRef idx="0">
+        <a:scrgbClr r="0" g="0" b="0"/>
+      </a:effectRef>
+      <a:fontRef idx="minor">
+        <a:schemeClr val="lt1"/>
+      </a:fontRef>
+    </dgm:style>
+  </dgm:styleLbl>
+  <dgm:styleLbl name="parChTrans1D1">
+    <dgm:scene3d>
+      <a:camera prst="orthographicFront"/>
+      <a:lightRig rig="threePt" dir="t"/>
+    </dgm:scene3d>
+    <dgm:sp3d/>
+    <dgm:txPr/>
+    <dgm:style>
+      <a:lnRef idx="2">
+        <a:scrgbClr r="0" g="0" b="0"/>
+      </a:lnRef>
+      <a:fillRef idx="0">
+        <a:scrgbClr r="0" g="0" b="0"/>
+      </a:fillRef>
+      <a:effectRef idx="0">
+        <a:scrgbClr r="0" g="0" b="0"/>
+      </a:effectRef>
+      <a:fontRef idx="minor"/>
+    </dgm:style>
+  </dgm:styleLbl>
+  <dgm:styleLbl name="parChTrans1D2">
+    <dgm:scene3d>
+      <a:camera prst="orthographicFront"/>
+      <a:lightRig rig="threePt" dir="t"/>
+    </dgm:scene3d>
+    <dgm:sp3d/>
+    <dgm:txPr/>
+    <dgm:style>
+      <a:lnRef idx="2">
+        <a:scrgbClr r="0" g="0" b="0"/>
+      </a:lnRef>
+      <a:fillRef idx="0">
+        <a:scrgbClr r="0" g="0" b="0"/>
+      </a:fillRef>
+      <a:effectRef idx="0">
+        <a:scrgbClr r="0" g="0" b="0"/>
+      </a:effectRef>
+      <a:fontRef idx="minor"/>
+    </dgm:style>
+  </dgm:styleLbl>
+  <dgm:styleLbl name="parChTrans1D3">
+    <dgm:scene3d>
+      <a:camera prst="orthographicFront"/>
+      <a:lightRig rig="threePt" dir="t"/>
+    </dgm:scene3d>
+    <dgm:sp3d/>
+    <dgm:txPr/>
+    <dgm:style>
+      <a:lnRef idx="2">
+        <a:scrgbClr r="0" g="0" b="0"/>
+      </a:lnRef>
+      <a:fillRef idx="0">
+        <a:scrgbClr r="0" g="0" b="0"/>
+      </a:fillRef>
+      <a:effectRef idx="0">
+        <a:scrgbClr r="0" g="0" b="0"/>
+      </a:effectRef>
+      <a:fontRef idx="minor"/>
+    </dgm:style>
+  </dgm:styleLbl>
+  <dgm:styleLbl name="parChTrans1D4">
+    <dgm:scene3d>
+      <a:camera prst="orthographicFront"/>
+      <a:lightRig rig="threePt" dir="t"/>
+    </dgm:scene3d>
+    <dgm:sp3d/>
+    <dgm:txPr/>
+    <dgm:style>
+      <a:lnRef idx="2">
+        <a:scrgbClr r="0" g="0" b="0"/>
+      </a:lnRef>
+      <a:fillRef idx="0">
+        <a:scrgbClr r="0" g="0" b="0"/>
+      </a:fillRef>
+      <a:effectRef idx="0">
+        <a:scrgbClr r="0" g="0" b="0"/>
+      </a:effectRef>
+      <a:fontRef idx="minor"/>
+    </dgm:style>
+  </dgm:styleLbl>
+  <dgm:styleLbl name="fgAcc1">
+    <dgm:scene3d>
+      <a:camera prst="orthographicFront"/>
+      <a:lightRig rig="threePt" dir="t"/>
+    </dgm:scene3d>
+    <dgm:sp3d/>
+    <dgm:txPr/>
+    <dgm:style>
+      <a:lnRef idx="2">
+        <a:scrgbClr r="0" g="0" b="0"/>
+      </a:lnRef>
+      <a:fillRef idx="1">
+        <a:scrgbClr r="0" g="0" b="0"/>
+      </a:fillRef>
+      <a:effectRef idx="0">
+        <a:scrgbClr r="0" g="0" b="0"/>
+      </a:effectRef>
+      <a:fontRef idx="minor"/>
+    </dgm:style>
+  </dgm:styleLbl>
+  <dgm:styleLbl name="conFgAcc1">
+    <dgm:scene3d>
+      <a:camera prst="orthographicFront"/>
+      <a:lightRig rig="threePt" dir="t"/>
+    </dgm:scene3d>
+    <dgm:sp3d/>
+    <dgm:txPr/>
+    <dgm:style>
+      <a:lnRef idx="2">
+        <a:scrgbClr r="0" g="0" b="0"/>
+      </a:lnRef>
+      <a:fillRef idx="1">
+        <a:scrgbClr r="0" g="0" b="0"/>
+      </a:fillRef>
+      <a:effectRef idx="0">
+        <a:scrgbClr r="0" g="0" b="0"/>
+      </a:effectRef>
+      <a:fontRef idx="minor"/>
+    </dgm:style>
+  </dgm:styleLbl>
+  <dgm:styleLbl name="alignAcc1">
+    <dgm:scene3d>
+      <a:camera prst="orthographicFront"/>
+      <a:lightRig rig="threePt" dir="t"/>
+    </dgm:scene3d>
+    <dgm:sp3d/>
+    <dgm:txPr/>
+    <dgm:style>
+      <a:lnRef idx="2">
+        <a:scrgbClr r="0" g="0" b="0"/>
+      </a:lnRef>
+      <a:fillRef idx="1">
+        <a:scrgbClr r="0" g="0" b="0"/>
+      </a:fillRef>
+      <a:effectRef idx="0">
+        <a:scrgbClr r="0" g="0" b="0"/>
+      </a:effectRef>
+      <a:fontRef idx="minor"/>
+    </dgm:style>
+  </dgm:styleLbl>
+  <dgm:styleLbl name="trAlignAcc1">
+    <dgm:scene3d>
+      <a:camera prst="orthographicFront"/>
+      <a:lightRig rig="threePt" dir="t"/>
+    </dgm:scene3d>
+    <dgm:sp3d/>
+    <dgm:txPr/>
+    <dgm:style>
+      <a:lnRef idx="1">
+        <a:scrgbClr r="0" g="0" b="0"/>
+      </a:lnRef>
+      <a:fillRef idx="1">
+        <a:scrgbClr r="0" g="0" b="0"/>
+      </a:fillRef>
+      <a:effectRef idx="0">
+        <a:scrgbClr r="0" g="0" b="0"/>
+      </a:effectRef>
+      <a:fontRef idx="minor"/>
+    </dgm:style>
+  </dgm:styleLbl>
+  <dgm:styleLbl name="bgAcc1">
+    <dgm:scene3d>
+      <a:camera prst="orthographicFront"/>
+      <a:lightRig rig="threePt" dir="t"/>
+    </dgm:scene3d>
+    <dgm:sp3d/>
+    <dgm:txPr/>
+    <dgm:style>
+      <a:lnRef idx="2">
+        <a:scrgbClr r="0" g="0" b="0"/>
+      </a:lnRef>
+      <a:fillRef idx="1">
+        <a:scrgbClr r="0" g="0" b="0"/>
+      </a:fillRef>
+      <a:effectRef idx="0">
+        <a:scrgbClr r="0" g="0" b="0"/>
+      </a:effectRef>
+      <a:fontRef idx="minor"/>
+    </dgm:style>
+  </dgm:styleLbl>
+  <dgm:styleLbl name="solidFgAcc1">
+    <dgm:scene3d>
+      <a:camera prst="orthographicFront"/>
+      <a:lightRig rig="threePt" dir="t"/>
+    </dgm:scene3d>
+    <dgm:sp3d/>
+    <dgm:txPr/>
+    <dgm:style>
+      <a:lnRef idx="2">
+        <a:scrgbClr r="0" g="0" b="0"/>
+      </a:lnRef>
+      <a:fillRef idx="1">
+        <a:scrgbClr r="0" g="0" b="0"/>
+      </a:fillRef>
+      <a:effectRef idx="0">
+        <a:scrgbClr r="0" g="0" b="0"/>
+      </a:effectRef>
+      <a:fontRef idx="minor"/>
+    </dgm:style>
+  </dgm:styleLbl>
+  <dgm:styleLbl name="solidAlignAcc1">
+    <dgm:scene3d>
+      <a:camera prst="orthographicFront"/>
+      <a:lightRig rig="threePt" dir="t"/>
+    </dgm:scene3d>
+    <dgm:sp3d/>
+    <dgm:txPr/>
+    <dgm:style>
+      <a:lnRef idx="2">
+        <a:scrgbClr r="0" g="0" b="0"/>
+      </a:lnRef>
+      <a:fillRef idx="1">
+        <a:scrgbClr r="0" g="0" b="0"/>
+      </a:fillRef>
+      <a:effectRef idx="0">
+        <a:scrgbClr r="0" g="0" b="0"/>
+      </a:effectRef>
+      <a:fontRef idx="minor"/>
+    </dgm:style>
+  </dgm:styleLbl>
+  <dgm:styleLbl name="solidBgAcc1">
+    <dgm:scene3d>
+      <a:camera prst="orthographicFront"/>
+      <a:lightRig rig="threePt" dir="t"/>
+    </dgm:scene3d>
+    <dgm:sp3d/>
+    <dgm:txPr/>
+    <dgm:style>
+      <a:lnRef idx="2">
+        <a:scrgbClr r="0" g="0" b="0"/>
+      </a:lnRef>
+      <a:fillRef idx="1">
+        <a:scrgbClr r="0" g="0" b="0"/>
+      </a:fillRef>
+      <a:effectRef idx="0">
+        <a:scrgbClr r="0" g="0" b="0"/>
+      </a:effectRef>
+      <a:fontRef idx="minor"/>
+    </dgm:style>
+  </dgm:styleLbl>
+  <dgm:styleLbl name="fgAccFollowNode1">
+    <dgm:scene3d>
+      <a:camera prst="orthographicFront"/>
+      <a:lightRig rig="threePt" dir="t"/>
+    </dgm:scene3d>
+    <dgm:sp3d/>
+    <dgm:txPr/>
+    <dgm:style>
+      <a:lnRef idx="2">
+        <a:scrgbClr r="0" g="0" b="0"/>
+      </a:lnRef>
+      <a:fillRef idx="1">
+        <a:scrgbClr r="0" g="0" b="0"/>
+      </a:fillRef>
+      <a:effectRef idx="0">
+        <a:scrgbClr r="0" g="0" b="0"/>
+      </a:effectRef>
+      <a:fontRef idx="minor"/>
+    </dgm:style>
+  </dgm:styleLbl>
+  <dgm:styleLbl name="alignAccFollowNode1">
+    <dgm:scene3d>
+      <a:camera prst="orthographicFront"/>
+      <a:lightRig rig="threePt" dir="t"/>
+    </dgm:scene3d>
+    <dgm:sp3d/>
+    <dgm:txPr/>
+    <dgm:style>
+      <a:lnRef idx="2">
+        <a:scrgbClr r="0" g="0" b="0"/>
+      </a:lnRef>
+      <a:fillRef idx="1">
+        <a:scrgbClr r="0" g="0" b="0"/>
+      </a:fillRef>
+      <a:effectRef idx="0">
+        <a:scrgbClr r="0" g="0" b="0"/>
+      </a:effectRef>
+      <a:fontRef idx="minor"/>
+    </dgm:style>
+  </dgm:styleLbl>
+  <dgm:styleLbl name="bgAccFollowNode1">
+    <dgm:scene3d>
+      <a:camera prst="orthographicFront"/>
+      <a:lightRig rig="threePt" dir="t"/>
+    </dgm:scene3d>
+    <dgm:sp3d/>
+    <dgm:txPr/>
+    <dgm:style>
+      <a:lnRef idx="2">
+        <a:scrgbClr r="0" g="0" b="0"/>
+      </a:lnRef>
+      <a:fillRef idx="1">
+        <a:scrgbClr r="0" g="0" b="0"/>
+      </a:fillRef>
+      <a:effectRef idx="0">
+        <a:scrgbClr r="0" g="0" b="0"/>
+      </a:effectRef>
+      <a:fontRef idx="minor"/>
+    </dgm:style>
+  </dgm:styleLbl>
+  <dgm:styleLbl name="fgAcc0">
+    <dgm:scene3d>
+      <a:camera prst="orthographicFront"/>
+      <a:lightRig rig="threePt" dir="t"/>
+    </dgm:scene3d>
+    <dgm:sp3d/>
+    <dgm:txPr/>
+    <dgm:style>
+      <a:lnRef idx="2">
+        <a:scrgbClr r="0" g="0" b="0"/>
+      </a:lnRef>
+      <a:fillRef idx="1">
+        <a:scrgbClr r="0" g="0" b="0"/>
+      </a:fillRef>
+      <a:effectRef idx="0">
+        <a:scrgbClr r="0" g="0" b="0"/>
+      </a:effectRef>
+      <a:fontRef idx="minor"/>
+    </dgm:style>
+  </dgm:styleLbl>
+  <dgm:styleLbl name="fgAcc2">
+    <dgm:scene3d>
+      <a:camera prst="orthographicFront"/>
+      <a:lightRig rig="threePt" dir="t"/>
+    </dgm:scene3d>
+    <dgm:sp3d/>
+    <dgm:txPr/>
+    <dgm:style>
+      <a:lnRef idx="2">
+        <a:scrgbClr r="0" g="0" b="0"/>
+      </a:lnRef>
+      <a:fillRef idx="1">
+        <a:scrgbClr r="0" g="0" b="0"/>
+      </a:fillRef>
+      <a:effectRef idx="0">
+        <a:scrgbClr r="0" g="0" b="0"/>
+      </a:effectRef>
+      <a:fontRef idx="minor"/>
+    </dgm:style>
+  </dgm:styleLbl>
+  <dgm:styleLbl name="fgAcc3">
+    <dgm:scene3d>
+      <a:camera prst="orthographicFront"/>
+      <a:lightRig rig="threePt" dir="t"/>
+    </dgm:scene3d>
+    <dgm:sp3d/>
+    <dgm:txPr/>
+    <dgm:style>
+      <a:lnRef idx="2">
+        <a:scrgbClr r="0" g="0" b="0"/>
+      </a:lnRef>
+      <a:fillRef idx="1">
+        <a:scrgbClr r="0" g="0" b="0"/>
+      </a:fillRef>
+      <a:effectRef idx="0">
+        <a:scrgbClr r="0" g="0" b="0"/>
+      </a:effectRef>
+      <a:fontRef idx="minor"/>
+    </dgm:style>
+  </dgm:styleLbl>
+  <dgm:styleLbl name="fgAcc4">
+    <dgm:scene3d>
+      <a:camera prst="orthographicFront"/>
+      <a:lightRig rig="threePt" dir="t"/>
+    </dgm:scene3d>
+    <dgm:sp3d/>
+    <dgm:txPr/>
+    <dgm:style>
+      <a:lnRef idx="2">
+        <a:scrgbClr r="0" g="0" b="0"/>
+      </a:lnRef>
+      <a:fillRef idx="1">
+        <a:scrgbClr r="0" g="0" b="0"/>
+      </a:fillRef>
+      <a:effectRef idx="0">
+        <a:scrgbClr r="0" g="0" b="0"/>
+      </a:effectRef>
+      <a:fontRef idx="minor"/>
+    </dgm:style>
+  </dgm:styleLbl>
+  <dgm:styleLbl name="bgShp">
+    <dgm:scene3d>
+      <a:camera prst="orthographicFront"/>
+      <a:lightRig rig="threePt" dir="t"/>
+    </dgm:scene3d>
+    <dgm:sp3d/>
+    <dgm:txPr/>
+    <dgm:style>
+      <a:lnRef idx="0">
+        <a:scrgbClr r="0" g="0" b="0"/>
+      </a:lnRef>
+      <a:fillRef idx="1">
+        <a:scrgbClr r="0" g="0" b="0"/>
+      </a:fillRef>
+      <a:effectRef idx="0">
+        <a:scrgbClr r="0" g="0" b="0"/>
+      </a:effectRef>
+      <a:fontRef idx="minor"/>
+    </dgm:style>
+  </dgm:styleLbl>
+  <dgm:styleLbl name="dkBgShp">
+    <dgm:scene3d>
+      <a:camera prst="orthographicFront"/>
+      <a:lightRig rig="threePt" dir="t"/>
+    </dgm:scene3d>
+    <dgm:sp3d/>
+    <dgm:txPr/>
+    <dgm:style>
+      <a:lnRef idx="0">
+        <a:scrgbClr r="0" g="0" b="0"/>
+      </a:lnRef>
+      <a:fillRef idx="1">
+        <a:scrgbClr r="0" g="0" b="0"/>
+      </a:fillRef>
+      <a:effectRef idx="0">
+        <a:scrgbClr r="0" g="0" b="0"/>
+      </a:effectRef>
+      <a:fontRef idx="minor"/>
+    </dgm:style>
+  </dgm:styleLbl>
+  <dgm:styleLbl name="trBgShp">
+    <dgm:scene3d>
+      <a:camera prst="orthographicFront"/>
+      <a:lightRig rig="threePt" dir="t"/>
+    </dgm:scene3d>
+    <dgm:sp3d/>
+    <dgm:txPr/>
+    <dgm:style>
+      <a:lnRef idx="0">
+        <a:scrgbClr r="0" g="0" b="0"/>
+      </a:lnRef>
+      <a:fillRef idx="1">
+        <a:scrgbClr r="0" g="0" b="0"/>
+      </a:fillRef>
+      <a:effectRef idx="0">
+        <a:scrgbClr r="0" g="0" b="0"/>
+      </a:effectRef>
+      <a:fontRef idx="minor"/>
+    </dgm:style>
+  </dgm:styleLbl>
+  <dgm:styleLbl name="fgShp">
+    <dgm:scene3d>
+      <a:camera prst="orthographicFront"/>
+      <a:lightRig rig="threePt" dir="t"/>
+    </dgm:scene3d>
+    <dgm:sp3d/>
+    <dgm:txPr/>
+    <dgm:style>
+      <a:lnRef idx="2">
+        <a:scrgbClr r="0" g="0" b="0"/>
+      </a:lnRef>
+      <a:fillRef idx="1">
+        <a:scrgbClr r="0" g="0" b="0"/>
+      </a:fillRef>
+      <a:effectRef idx="0">
+        <a:scrgbClr r="0" g="0" b="0"/>
+      </a:effectRef>
+      <a:fontRef idx="minor"/>
+    </dgm:style>
+  </dgm:styleLbl>
+  <dgm:styleLbl name="revTx">
+    <dgm:scene3d>
+      <a:camera prst="orthographicFront"/>
+      <a:lightRig rig="threePt" dir="t"/>
+    </dgm:scene3d>
+    <dgm:sp3d/>
+    <dgm:txPr/>
+    <dgm:style>
+      <a:lnRef idx="0">
+        <a:scrgbClr r="0" g="0" b="0"/>
+      </a:lnRef>
+      <a:fillRef idx="0">
+        <a:scrgbClr r="0" g="0" b="0"/>
+      </a:fillRef>
+      <a:effectRef idx="0">
+        <a:scrgbClr r="0" g="0" b="0"/>
+      </a:effectRef>
+      <a:fontRef idx="minor"/>
+    </dgm:style>
+  </dgm:styleLbl>
+</dgm:styleDef>
+</file>
+
+<file path=ppt/diagrams/quickStyle6.xml><?xml version="1.0" encoding="utf-8"?>
 <dgm:styleDef xmlns:dgm="http://schemas.openxmlformats.org/drawingml/2006/diagram" xmlns:a="http://schemas.openxmlformats.org/drawingml/2006/main" uniqueId="urn:microsoft.com/office/officeart/2005/8/quickstyle/simple1">
   <dgm:title val=""/>
   <dgm:desc val=""/>
@@ -17144,7 +24349,7 @@
         </p:nvSpPr>
         <p:spPr>
           <a:xfrm>
-            <a:off x="1562562" y="4605966"/>
+            <a:off x="1562562" y="3036962"/>
             <a:ext cx="9078628" cy="564620"/>
           </a:xfrm>
         </p:spPr>
@@ -17155,12 +24360,29 @@
           <a:lstStyle/>
           <a:p>
             <a:r>
-              <a:rPr lang="en-GB" sz="1100" dirty="0">
+              <a:rPr lang="en-GB" sz="2000" dirty="0">
                 <a:solidFill>
                   <a:srgbClr val="FFFFFF"/>
                 </a:solidFill>
               </a:rPr>
-              <a:t>Advanced Web Development</a:t>
+              <a:t>An Advanced </a:t>
+            </a:r>
+            <a:r>
+              <a:rPr lang="en-GB" sz="2000" dirty="0">
+                <a:solidFill>
+                  <a:srgbClr val="FFFFFF"/>
+                </a:solidFill>
+                <a:latin typeface="+mj-lt"/>
+              </a:rPr>
+              <a:t>Web</a:t>
+            </a:r>
+            <a:r>
+              <a:rPr lang="en-GB" sz="2000" dirty="0">
+                <a:solidFill>
+                  <a:srgbClr val="FFFFFF"/>
+                </a:solidFill>
+              </a:rPr>
+              <a:t> Development Project</a:t>
             </a:r>
           </a:p>
         </p:txBody>
@@ -18892,6 +26114,416 @@
       </p:grpSpPr>
       <p:sp useBgFill="1">
         <p:nvSpPr>
+          <p:cNvPr id="94" name="Rectangle 93">
+            <a:extLst>
+              <a:ext uri="{FF2B5EF4-FFF2-40B4-BE49-F238E27FC236}">
+                <a16:creationId xmlns:a16="http://schemas.microsoft.com/office/drawing/2014/main" id="{BACC6370-2D7E-4714-9D71-7542949D7D5D}"/>
+              </a:ext>
+              <a:ext uri="{C183D7F6-B498-43B3-948B-1728B52AA6E4}">
+                <adec:decorative xmlns:adec="http://schemas.microsoft.com/office/drawing/2017/decorative" val="1"/>
+              </a:ext>
+            </a:extLst>
+          </p:cNvPr>
+          <p:cNvSpPr>
+            <a:spLocks noGrp="1" noRot="1" noChangeAspect="1" noMove="1" noResize="1" noEditPoints="1" noAdjustHandles="1" noChangeArrowheads="1" noChangeShapeType="1" noTextEdit="1"/>
+          </p:cNvSpPr>
+          <p:nvPr>
+            <p:extLst>
+              <p:ext uri="{386F3935-93C4-4BCD-93E2-E3B085C9AB24}">
+                <p16:designElem xmlns:p16="http://schemas.microsoft.com/office/powerpoint/2015/main" val="1"/>
+              </p:ext>
+            </p:extLst>
+          </p:nvPr>
+        </p:nvSpPr>
+        <p:spPr>
+          <a:xfrm>
+            <a:off x="0" y="0"/>
+            <a:ext cx="12192000" cy="6858000"/>
+          </a:xfrm>
+          <a:prstGeom prst="rect">
+            <a:avLst/>
+          </a:prstGeom>
+          <a:ln w="12700" cap="flat" cmpd="sng" algn="ctr">
+            <a:noFill/>
+            <a:prstDash val="solid"/>
+            <a:miter lim="800000"/>
+          </a:ln>
+          <a:effectLst/>
+          <a:extLst>
+            <a:ext uri="{91240B29-F687-4F45-9708-019B960494DF}">
+              <a14:hiddenLine xmlns:a14="http://schemas.microsoft.com/office/drawing/2010/main" w="12700" cap="flat" cmpd="sng" algn="ctr">
+                <a:solidFill>
+                  <a:schemeClr val="accent1">
+                    <a:shade val="50000"/>
+                  </a:schemeClr>
+                </a:solidFill>
+                <a:prstDash val="solid"/>
+                <a:miter lim="800000"/>
+              </a14:hiddenLine>
+            </a:ext>
+          </a:extLst>
+        </p:spPr>
+        <p:style>
+          <a:lnRef idx="2">
+            <a:schemeClr val="accent1">
+              <a:shade val="50000"/>
+            </a:schemeClr>
+          </a:lnRef>
+          <a:fillRef idx="1">
+            <a:schemeClr val="accent1"/>
+          </a:fillRef>
+          <a:effectRef idx="0">
+            <a:schemeClr val="accent1"/>
+          </a:effectRef>
+          <a:fontRef idx="minor">
+            <a:schemeClr val="lt1"/>
+          </a:fontRef>
+        </p:style>
+        <p:txBody>
+          <a:bodyPr rtlCol="0" anchor="ctr"/>
+          <a:lstStyle/>
+          <a:p>
+            <a:pPr algn="ctr"/>
+            <a:endParaRPr lang="en-US"/>
+          </a:p>
+        </p:txBody>
+      </p:sp>
+      <p:sp>
+        <p:nvSpPr>
+          <p:cNvPr id="95" name="Rectangle 94">
+            <a:extLst>
+              <a:ext uri="{FF2B5EF4-FFF2-40B4-BE49-F238E27FC236}">
+                <a16:creationId xmlns:a16="http://schemas.microsoft.com/office/drawing/2014/main" id="{F68B3F68-107C-434F-AA38-110D5EA91B85}"/>
+              </a:ext>
+              <a:ext uri="{C183D7F6-B498-43B3-948B-1728B52AA6E4}">
+                <adec:decorative xmlns:adec="http://schemas.microsoft.com/office/drawing/2017/decorative" val="1"/>
+              </a:ext>
+            </a:extLst>
+          </p:cNvPr>
+          <p:cNvSpPr>
+            <a:spLocks noGrp="1" noRot="1" noChangeAspect="1" noMove="1" noResize="1" noEditPoints="1" noAdjustHandles="1" noChangeArrowheads="1" noChangeShapeType="1" noTextEdit="1"/>
+          </p:cNvSpPr>
+          <p:nvPr>
+            <p:extLst>
+              <p:ext uri="{386F3935-93C4-4BCD-93E2-E3B085C9AB24}">
+                <p16:designElem xmlns:p16="http://schemas.microsoft.com/office/powerpoint/2015/main" val="1"/>
+              </p:ext>
+            </p:extLst>
+          </p:nvPr>
+        </p:nvSpPr>
+        <p:spPr>
+          <a:xfrm flipH="1">
+            <a:off x="2" y="0"/>
+            <a:ext cx="12191998" cy="1575955"/>
+          </a:xfrm>
+          <a:prstGeom prst="rect">
+            <a:avLst/>
+          </a:prstGeom>
+          <a:gradFill>
+            <a:gsLst>
+              <a:gs pos="0">
+                <a:srgbClr val="000000">
+                  <a:alpha val="96000"/>
+                </a:srgbClr>
+              </a:gs>
+              <a:gs pos="100000">
+                <a:schemeClr val="accent1">
+                  <a:lumMod val="75000"/>
+                </a:schemeClr>
+              </a:gs>
+            </a:gsLst>
+            <a:lin ang="8400000" scaled="0"/>
+          </a:gradFill>
+          <a:ln>
+            <a:noFill/>
+          </a:ln>
+        </p:spPr>
+        <p:style>
+          <a:lnRef idx="2">
+            <a:schemeClr val="accent1">
+              <a:shade val="50000"/>
+            </a:schemeClr>
+          </a:lnRef>
+          <a:fillRef idx="1">
+            <a:schemeClr val="accent1"/>
+          </a:fillRef>
+          <a:effectRef idx="0">
+            <a:schemeClr val="accent1"/>
+          </a:effectRef>
+          <a:fontRef idx="minor">
+            <a:schemeClr val="lt1"/>
+          </a:fontRef>
+        </p:style>
+        <p:txBody>
+          <a:bodyPr rtlCol="0" anchor="ctr"/>
+          <a:lstStyle/>
+          <a:p>
+            <a:pPr algn="ctr"/>
+            <a:endParaRPr lang="en-US"/>
+          </a:p>
+        </p:txBody>
+      </p:sp>
+      <p:sp>
+        <p:nvSpPr>
+          <p:cNvPr id="96" name="Rectangle 95">
+            <a:extLst>
+              <a:ext uri="{FF2B5EF4-FFF2-40B4-BE49-F238E27FC236}">
+                <a16:creationId xmlns:a16="http://schemas.microsoft.com/office/drawing/2014/main" id="{AAD0DBB9-1A4B-4391-81D4-CB19F9AB918A}"/>
+              </a:ext>
+              <a:ext uri="{C183D7F6-B498-43B3-948B-1728B52AA6E4}">
+                <adec:decorative xmlns:adec="http://schemas.microsoft.com/office/drawing/2017/decorative" val="1"/>
+              </a:ext>
+            </a:extLst>
+          </p:cNvPr>
+          <p:cNvSpPr>
+            <a:spLocks noGrp="1" noRot="1" noChangeAspect="1" noMove="1" noResize="1" noEditPoints="1" noAdjustHandles="1" noChangeArrowheads="1" noChangeShapeType="1" noTextEdit="1"/>
+          </p:cNvSpPr>
+          <p:nvPr>
+            <p:extLst>
+              <p:ext uri="{386F3935-93C4-4BCD-93E2-E3B085C9AB24}">
+                <p16:designElem xmlns:p16="http://schemas.microsoft.com/office/powerpoint/2015/main" val="1"/>
+              </p:ext>
+            </p:extLst>
+          </p:nvPr>
+        </p:nvSpPr>
+        <p:spPr>
+          <a:xfrm rot="10800000" flipH="1">
+            <a:off x="8128857" y="0"/>
+            <a:ext cx="4063143" cy="1576412"/>
+          </a:xfrm>
+          <a:prstGeom prst="rect">
+            <a:avLst/>
+          </a:prstGeom>
+          <a:gradFill>
+            <a:gsLst>
+              <a:gs pos="19000">
+                <a:schemeClr val="accent1">
+                  <a:lumMod val="50000"/>
+                  <a:alpha val="68000"/>
+                </a:schemeClr>
+              </a:gs>
+              <a:gs pos="100000">
+                <a:schemeClr val="accent1">
+                  <a:alpha val="79000"/>
+                </a:schemeClr>
+              </a:gs>
+            </a:gsLst>
+            <a:lin ang="19200000" scaled="0"/>
+          </a:gradFill>
+          <a:ln>
+            <a:noFill/>
+          </a:ln>
+        </p:spPr>
+        <p:style>
+          <a:lnRef idx="2">
+            <a:schemeClr val="accent1">
+              <a:shade val="50000"/>
+            </a:schemeClr>
+          </a:lnRef>
+          <a:fillRef idx="1">
+            <a:schemeClr val="accent1"/>
+          </a:fillRef>
+          <a:effectRef idx="0">
+            <a:schemeClr val="accent1"/>
+          </a:effectRef>
+          <a:fontRef idx="minor">
+            <a:schemeClr val="lt1"/>
+          </a:fontRef>
+        </p:style>
+        <p:txBody>
+          <a:bodyPr rtlCol="0" anchor="ctr"/>
+          <a:lstStyle/>
+          <a:p>
+            <a:pPr algn="ctr"/>
+            <a:endParaRPr lang="en-US"/>
+          </a:p>
+        </p:txBody>
+      </p:sp>
+      <p:sp>
+        <p:nvSpPr>
+          <p:cNvPr id="97" name="Rectangle 96">
+            <a:extLst>
+              <a:ext uri="{FF2B5EF4-FFF2-40B4-BE49-F238E27FC236}">
+                <a16:creationId xmlns:a16="http://schemas.microsoft.com/office/drawing/2014/main" id="{063BBA22-50EA-4C4D-BE05-F1CE4E63AA56}"/>
+              </a:ext>
+              <a:ext uri="{C183D7F6-B498-43B3-948B-1728B52AA6E4}">
+                <adec:decorative xmlns:adec="http://schemas.microsoft.com/office/drawing/2017/decorative" val="1"/>
+              </a:ext>
+            </a:extLst>
+          </p:cNvPr>
+          <p:cNvSpPr>
+            <a:spLocks noGrp="1" noRot="1" noChangeAspect="1" noMove="1" noResize="1" noEditPoints="1" noAdjustHandles="1" noChangeArrowheads="1" noChangeShapeType="1" noTextEdit="1"/>
+          </p:cNvSpPr>
+          <p:nvPr>
+            <p:extLst>
+              <p:ext uri="{386F3935-93C4-4BCD-93E2-E3B085C9AB24}">
+                <p16:designElem xmlns:p16="http://schemas.microsoft.com/office/powerpoint/2015/main" val="1"/>
+              </p:ext>
+            </p:extLst>
+          </p:nvPr>
+        </p:nvSpPr>
+        <p:spPr>
+          <a:xfrm rot="5400000">
+            <a:off x="5307777" y="-5307778"/>
+            <a:ext cx="1576446" cy="12192002"/>
+          </a:xfrm>
+          <a:prstGeom prst="rect">
+            <a:avLst/>
+          </a:prstGeom>
+          <a:gradFill>
+            <a:gsLst>
+              <a:gs pos="23000">
+                <a:schemeClr val="accent1">
+                  <a:alpha val="0"/>
+                </a:schemeClr>
+              </a:gs>
+              <a:gs pos="99000">
+                <a:srgbClr val="000000">
+                  <a:alpha val="74000"/>
+                </a:srgbClr>
+              </a:gs>
+            </a:gsLst>
+            <a:lin ang="20400000" scaled="0"/>
+          </a:gradFill>
+          <a:ln>
+            <a:noFill/>
+          </a:ln>
+        </p:spPr>
+        <p:style>
+          <a:lnRef idx="2">
+            <a:schemeClr val="accent1">
+              <a:shade val="50000"/>
+            </a:schemeClr>
+          </a:lnRef>
+          <a:fillRef idx="1">
+            <a:schemeClr val="accent1"/>
+          </a:fillRef>
+          <a:effectRef idx="0">
+            <a:schemeClr val="accent1"/>
+          </a:effectRef>
+          <a:fontRef idx="minor">
+            <a:schemeClr val="lt1"/>
+          </a:fontRef>
+        </p:style>
+        <p:txBody>
+          <a:bodyPr rtlCol="0" anchor="ctr"/>
+          <a:lstStyle/>
+          <a:p>
+            <a:pPr algn="ctr"/>
+            <a:endParaRPr lang="en-US"/>
+          </a:p>
+        </p:txBody>
+      </p:sp>
+      <p:sp>
+        <p:nvSpPr>
+          <p:cNvPr id="2" name="Title 1">
+            <a:extLst>
+              <a:ext uri="{FF2B5EF4-FFF2-40B4-BE49-F238E27FC236}">
+                <a16:creationId xmlns:a16="http://schemas.microsoft.com/office/drawing/2014/main" id="{31B5268D-21FD-E9E1-D8BC-7904C5DF4E36}"/>
+              </a:ext>
+            </a:extLst>
+          </p:cNvPr>
+          <p:cNvSpPr>
+            <a:spLocks noGrp="1"/>
+          </p:cNvSpPr>
+          <p:nvPr>
+            <p:ph type="title"/>
+          </p:nvPr>
+        </p:nvSpPr>
+        <p:spPr>
+          <a:xfrm>
+            <a:off x="1371597" y="348865"/>
+            <a:ext cx="10044023" cy="877729"/>
+          </a:xfrm>
+        </p:spPr>
+        <p:txBody>
+          <a:bodyPr anchor="ctr">
+            <a:normAutofit/>
+          </a:bodyPr>
+          <a:lstStyle/>
+          <a:p>
+            <a:r>
+              <a:rPr lang="en-GB" sz="4000">
+                <a:solidFill>
+                  <a:srgbClr val="FFFFFF"/>
+                </a:solidFill>
+              </a:rPr>
+              <a:t>Competition? Mark Reduction?</a:t>
+            </a:r>
+          </a:p>
+        </p:txBody>
+      </p:sp>
+      <p:graphicFrame>
+        <p:nvGraphicFramePr>
+          <p:cNvPr id="49" name="Content Placeholder 2">
+            <a:extLst>
+              <a:ext uri="{FF2B5EF4-FFF2-40B4-BE49-F238E27FC236}">
+                <a16:creationId xmlns:a16="http://schemas.microsoft.com/office/drawing/2014/main" id="{B417BB46-5C3E-8862-E4FE-F19B6F7E2640}"/>
+              </a:ext>
+            </a:extLst>
+          </p:cNvPr>
+          <p:cNvGraphicFramePr>
+            <a:graphicFrameLocks noGrp="1"/>
+          </p:cNvGraphicFramePr>
+          <p:nvPr>
+            <p:ph idx="1"/>
+            <p:extLst>
+              <p:ext uri="{D42A27DB-BD31-4B8C-83A1-F6EECF244321}">
+                <p14:modId xmlns:p14="http://schemas.microsoft.com/office/powerpoint/2010/main" val="486499268"/>
+              </p:ext>
+            </p:extLst>
+          </p:nvPr>
+        </p:nvGraphicFramePr>
+        <p:xfrm>
+          <a:off x="644056" y="2112579"/>
+          <a:ext cx="10927829" cy="4192805"/>
+        </p:xfrm>
+        <a:graphic>
+          <a:graphicData uri="http://schemas.openxmlformats.org/drawingml/2006/diagram">
+            <dgm:relIds xmlns:dgm="http://schemas.openxmlformats.org/drawingml/2006/diagram" xmlns:r="http://schemas.openxmlformats.org/officeDocument/2006/relationships" r:dm="rId2" r:lo="rId3" r:qs="rId4" r:cs="rId5"/>
+          </a:graphicData>
+        </a:graphic>
+      </p:graphicFrame>
+    </p:spTree>
+    <p:extLst>
+      <p:ext uri="{BB962C8B-B14F-4D97-AF65-F5344CB8AC3E}">
+        <p14:creationId xmlns:p14="http://schemas.microsoft.com/office/powerpoint/2010/main" val="2137639342"/>
+      </p:ext>
+    </p:extLst>
+  </p:cSld>
+  <p:clrMapOvr>
+    <a:masterClrMapping/>
+  </p:clrMapOvr>
+</p:sld>
+</file>
+
+<file path=ppt/slides/slide6.xml><?xml version="1.0" encoding="utf-8"?>
+<p:sld xmlns:a="http://schemas.openxmlformats.org/drawingml/2006/main" xmlns:r="http://schemas.openxmlformats.org/officeDocument/2006/relationships" xmlns:p="http://schemas.openxmlformats.org/presentationml/2006/main">
+  <p:cSld>
+    <p:bg>
+      <p:bgPr>
+        <a:solidFill>
+          <a:schemeClr val="bg1"/>
+        </a:solidFill>
+        <a:effectLst/>
+      </p:bgPr>
+    </p:bg>
+    <p:spTree>
+      <p:nvGrpSpPr>
+        <p:cNvPr id="1" name=""/>
+        <p:cNvGrpSpPr/>
+        <p:nvPr/>
+      </p:nvGrpSpPr>
+      <p:grpSpPr>
+        <a:xfrm>
+          <a:off x="0" y="0"/>
+          <a:ext cx="0" cy="0"/>
+          <a:chOff x="0" y="0"/>
+          <a:chExt cx="0" cy="0"/>
+        </a:xfrm>
+      </p:grpSpPr>
+      <p:sp useBgFill="1">
+        <p:nvSpPr>
           <p:cNvPr id="17" name="Rectangle 16">
             <a:extLst>
               <a:ext uri="{FF2B5EF4-FFF2-40B4-BE49-F238E27FC236}">
@@ -19275,7 +26907,7 @@
 </p:sld>
 </file>
 
-<file path=ppt/slides/slide6.xml><?xml version="1.0" encoding="utf-8"?>
+<file path=ppt/slides/slide7.xml><?xml version="1.0" encoding="utf-8"?>
 <p:sld xmlns:a="http://schemas.openxmlformats.org/drawingml/2006/main" xmlns:r="http://schemas.openxmlformats.org/officeDocument/2006/relationships" xmlns:p="http://schemas.openxmlformats.org/presentationml/2006/main">
   <p:cSld>
     <p:bg>
@@ -19288,7 +26920,13 @@
     </p:bg>
     <p:spTree>
       <p:nvGrpSpPr>
-        <p:cNvPr id="1" name=""/>
+        <p:cNvPr id="1" name="">
+          <a:extLst>
+            <a:ext uri="{FF2B5EF4-FFF2-40B4-BE49-F238E27FC236}">
+              <a16:creationId xmlns:a16="http://schemas.microsoft.com/office/drawing/2014/main" id="{8A3718C9-7918-BA46-F0C0-66B7FE0C77E4}"/>
+            </a:ext>
+          </a:extLst>
+        </p:cNvPr>
         <p:cNvGrpSpPr/>
         <p:nvPr/>
       </p:nvGrpSpPr>
@@ -19302,10 +26940,10 @@
       </p:grpSpPr>
       <p:sp useBgFill="1">
         <p:nvSpPr>
-          <p:cNvPr id="10" name="Rectangle 9">
+          <p:cNvPr id="17" name="Rectangle 16">
             <a:extLst>
               <a:ext uri="{FF2B5EF4-FFF2-40B4-BE49-F238E27FC236}">
-                <a16:creationId xmlns:a16="http://schemas.microsoft.com/office/drawing/2014/main" id="{A8384FB5-9ADC-4DDC-881B-597D56F5B15D}"/>
+                <a16:creationId xmlns:a16="http://schemas.microsoft.com/office/drawing/2014/main" id="{B7C278F2-C56E-3AA0-2138-3955EB3C0C7A}"/>
               </a:ext>
               <a:ext uri="{C183D7F6-B498-43B3-948B-1728B52AA6E4}">
                 <adec:decorative xmlns:adec="http://schemas.microsoft.com/office/drawing/2017/decorative" val="1"/>
@@ -19378,10 +27016,10 @@
       </p:sp>
       <p:sp>
         <p:nvSpPr>
-          <p:cNvPr id="12" name="Rectangle 11">
+          <p:cNvPr id="18" name="Rectangle 17">
             <a:extLst>
               <a:ext uri="{FF2B5EF4-FFF2-40B4-BE49-F238E27FC236}">
-                <a16:creationId xmlns:a16="http://schemas.microsoft.com/office/drawing/2014/main" id="{1199E1B1-A8C0-4FE8-A5A8-1CB41D69F857}"/>
+                <a16:creationId xmlns:a16="http://schemas.microsoft.com/office/drawing/2014/main" id="{979DF065-586D-0B42-6680-629FB87A5C0F}"/>
               </a:ext>
               <a:ext uri="{C183D7F6-B498-43B3-948B-1728B52AA6E4}">
                 <adec:decorative xmlns:adec="http://schemas.microsoft.com/office/drawing/2017/decorative" val="1"/>
@@ -19400,7 +27038,7 @@
           </p:nvPr>
         </p:nvSpPr>
         <p:spPr>
-          <a:xfrm rot="10800000" flipH="1">
+          <a:xfrm flipH="1">
             <a:off x="2" y="0"/>
             <a:ext cx="12191998" cy="1575955"/>
           </a:xfrm>
@@ -19417,83 +27055,6 @@
               <a:gs pos="100000">
                 <a:schemeClr val="accent1">
                   <a:lumMod val="75000"/>
-                </a:schemeClr>
-              </a:gs>
-            </a:gsLst>
-            <a:lin ang="6000000" scaled="0"/>
-          </a:gradFill>
-          <a:ln>
-            <a:noFill/>
-          </a:ln>
-        </p:spPr>
-        <p:style>
-          <a:lnRef idx="2">
-            <a:schemeClr val="accent1">
-              <a:shade val="50000"/>
-            </a:schemeClr>
-          </a:lnRef>
-          <a:fillRef idx="1">
-            <a:schemeClr val="accent1"/>
-          </a:fillRef>
-          <a:effectRef idx="0">
-            <a:schemeClr val="accent1"/>
-          </a:effectRef>
-          <a:fontRef idx="minor">
-            <a:schemeClr val="lt1"/>
-          </a:fontRef>
-        </p:style>
-        <p:txBody>
-          <a:bodyPr rtlCol="0" anchor="ctr"/>
-          <a:lstStyle/>
-          <a:p>
-            <a:pPr algn="ctr"/>
-            <a:endParaRPr lang="en-US"/>
-          </a:p>
-        </p:txBody>
-      </p:sp>
-      <p:sp>
-        <p:nvSpPr>
-          <p:cNvPr id="14" name="Rectangle 13">
-            <a:extLst>
-              <a:ext uri="{FF2B5EF4-FFF2-40B4-BE49-F238E27FC236}">
-                <a16:creationId xmlns:a16="http://schemas.microsoft.com/office/drawing/2014/main" id="{84A8DE83-DE75-4B41-9DB4-A7EC0B0DEC0B}"/>
-              </a:ext>
-              <a:ext uri="{C183D7F6-B498-43B3-948B-1728B52AA6E4}">
-                <adec:decorative xmlns:adec="http://schemas.microsoft.com/office/drawing/2017/decorative" val="1"/>
-              </a:ext>
-            </a:extLst>
-          </p:cNvPr>
-          <p:cNvSpPr>
-            <a:spLocks noGrp="1" noRot="1" noChangeAspect="1" noMove="1" noResize="1" noEditPoints="1" noAdjustHandles="1" noChangeArrowheads="1" noChangeShapeType="1" noTextEdit="1"/>
-          </p:cNvSpPr>
-          <p:nvPr>
-            <p:extLst>
-              <p:ext uri="{386F3935-93C4-4BCD-93E2-E3B085C9AB24}">
-                <p16:designElem xmlns:p16="http://schemas.microsoft.com/office/powerpoint/2015/main" val="1"/>
-              </p:ext>
-            </p:extLst>
-          </p:nvPr>
-        </p:nvSpPr>
-        <p:spPr>
-          <a:xfrm>
-            <a:off x="0" y="0"/>
-            <a:ext cx="8128856" cy="1575461"/>
-          </a:xfrm>
-          <a:prstGeom prst="rect">
-            <a:avLst/>
-          </a:prstGeom>
-          <a:gradFill>
-            <a:gsLst>
-              <a:gs pos="0">
-                <a:schemeClr val="accent1">
-                  <a:alpha val="41000"/>
-                </a:schemeClr>
-              </a:gs>
-              <a:gs pos="74000">
-                <a:schemeClr val="accent1">
-                  <a:lumMod val="60000"/>
-                  <a:lumOff val="40000"/>
-                  <a:alpha val="0"/>
                 </a:schemeClr>
               </a:gs>
             </a:gsLst>
@@ -19530,10 +27091,10 @@
       </p:sp>
       <p:sp>
         <p:nvSpPr>
-          <p:cNvPr id="16" name="Rectangle 15">
+          <p:cNvPr id="19" name="Rectangle 18">
             <a:extLst>
               <a:ext uri="{FF2B5EF4-FFF2-40B4-BE49-F238E27FC236}">
-                <a16:creationId xmlns:a16="http://schemas.microsoft.com/office/drawing/2014/main" id="{A7009A0A-BEF5-4EAC-AF15-E4F9F002E239}"/>
+                <a16:creationId xmlns:a16="http://schemas.microsoft.com/office/drawing/2014/main" id="{56317772-C383-C0C4-E347-6691D775C4CC}"/>
               </a:ext>
               <a:ext uri="{C183D7F6-B498-43B3-948B-1728B52AA6E4}">
                 <adec:decorative xmlns:adec="http://schemas.microsoft.com/office/drawing/2017/decorative" val="1"/>
@@ -19552,27 +27113,28 @@
           </p:nvPr>
         </p:nvSpPr>
         <p:spPr>
-          <a:xfrm flipH="1">
-            <a:off x="-3" y="-1"/>
-            <a:ext cx="12192002" cy="1574311"/>
+          <a:xfrm rot="10800000" flipH="1">
+            <a:off x="8128857" y="0"/>
+            <a:ext cx="4063143" cy="1576412"/>
           </a:xfrm>
           <a:prstGeom prst="rect">
             <a:avLst/>
           </a:prstGeom>
           <a:gradFill>
             <a:gsLst>
-              <a:gs pos="0">
-                <a:srgbClr val="000000">
-                  <a:alpha val="63000"/>
-                </a:srgbClr>
+              <a:gs pos="19000">
+                <a:schemeClr val="accent1">
+                  <a:lumMod val="50000"/>
+                  <a:alpha val="68000"/>
+                </a:schemeClr>
               </a:gs>
-              <a:gs pos="78000">
+              <a:gs pos="100000">
                 <a:schemeClr val="accent1">
-                  <a:alpha val="15000"/>
+                  <a:alpha val="79000"/>
                 </a:schemeClr>
               </a:gs>
             </a:gsLst>
-            <a:lin ang="15600000" scaled="0"/>
+            <a:lin ang="19200000" scaled="0"/>
           </a:gradFill>
           <a:ln>
             <a:noFill/>
@@ -19605,10 +27167,85 @@
       </p:sp>
       <p:sp>
         <p:nvSpPr>
+          <p:cNvPr id="20" name="Rectangle 19">
+            <a:extLst>
+              <a:ext uri="{FF2B5EF4-FFF2-40B4-BE49-F238E27FC236}">
+                <a16:creationId xmlns:a16="http://schemas.microsoft.com/office/drawing/2014/main" id="{F781FED7-5984-44C3-E5FA-3FAF520D4C64}"/>
+              </a:ext>
+              <a:ext uri="{C183D7F6-B498-43B3-948B-1728B52AA6E4}">
+                <adec:decorative xmlns:adec="http://schemas.microsoft.com/office/drawing/2017/decorative" val="1"/>
+              </a:ext>
+            </a:extLst>
+          </p:cNvPr>
+          <p:cNvSpPr>
+            <a:spLocks noGrp="1" noRot="1" noChangeAspect="1" noMove="1" noResize="1" noEditPoints="1" noAdjustHandles="1" noChangeArrowheads="1" noChangeShapeType="1" noTextEdit="1"/>
+          </p:cNvSpPr>
+          <p:nvPr>
+            <p:extLst>
+              <p:ext uri="{386F3935-93C4-4BCD-93E2-E3B085C9AB24}">
+                <p16:designElem xmlns:p16="http://schemas.microsoft.com/office/powerpoint/2015/main" val="1"/>
+              </p:ext>
+            </p:extLst>
+          </p:nvPr>
+        </p:nvSpPr>
+        <p:spPr>
+          <a:xfrm rot="5400000">
+            <a:off x="5307777" y="-5307778"/>
+            <a:ext cx="1576446" cy="12192002"/>
+          </a:xfrm>
+          <a:prstGeom prst="rect">
+            <a:avLst/>
+          </a:prstGeom>
+          <a:gradFill>
+            <a:gsLst>
+              <a:gs pos="23000">
+                <a:schemeClr val="accent1">
+                  <a:alpha val="0"/>
+                </a:schemeClr>
+              </a:gs>
+              <a:gs pos="99000">
+                <a:srgbClr val="000000">
+                  <a:alpha val="74000"/>
+                </a:srgbClr>
+              </a:gs>
+            </a:gsLst>
+            <a:lin ang="20400000" scaled="0"/>
+          </a:gradFill>
+          <a:ln>
+            <a:noFill/>
+          </a:ln>
+        </p:spPr>
+        <p:style>
+          <a:lnRef idx="2">
+            <a:schemeClr val="accent1">
+              <a:shade val="50000"/>
+            </a:schemeClr>
+          </a:lnRef>
+          <a:fillRef idx="1">
+            <a:schemeClr val="accent1"/>
+          </a:fillRef>
+          <a:effectRef idx="0">
+            <a:schemeClr val="accent1"/>
+          </a:effectRef>
+          <a:fontRef idx="minor">
+            <a:schemeClr val="lt1"/>
+          </a:fontRef>
+        </p:style>
+        <p:txBody>
+          <a:bodyPr rtlCol="0" anchor="ctr"/>
+          <a:lstStyle/>
+          <a:p>
+            <a:pPr algn="ctr"/>
+            <a:endParaRPr lang="en-US" dirty="0"/>
+          </a:p>
+        </p:txBody>
+      </p:sp>
+      <p:sp>
+        <p:nvSpPr>
           <p:cNvPr id="2" name="Title 1">
             <a:extLst>
               <a:ext uri="{FF2B5EF4-FFF2-40B4-BE49-F238E27FC236}">
-                <a16:creationId xmlns:a16="http://schemas.microsoft.com/office/drawing/2014/main" id="{84D6195C-313B-5E2F-298D-099FA66EE081}"/>
+                <a16:creationId xmlns:a16="http://schemas.microsoft.com/office/drawing/2014/main" id="{1A174BC6-19AF-B194-107A-F4E215432A56}"/>
               </a:ext>
             </a:extLst>
           </p:cNvPr>
@@ -19621,24 +27258,21 @@
         </p:nvSpPr>
         <p:spPr>
           <a:xfrm>
-            <a:off x="699713" y="248038"/>
-            <a:ext cx="7063721" cy="1159200"/>
+            <a:off x="1371597" y="348865"/>
+            <a:ext cx="10044023" cy="877729"/>
           </a:xfrm>
         </p:spPr>
         <p:txBody>
-          <a:bodyPr vert="horz" lIns="91440" tIns="45720" rIns="91440" bIns="45720" rtlCol="0" anchor="ctr">
+          <a:bodyPr anchor="ctr">
             <a:normAutofit/>
           </a:bodyPr>
           <a:lstStyle/>
           <a:p>
             <a:r>
-              <a:rPr lang="en-US" sz="4000" kern="1200">
+              <a:rPr lang="en-GB" sz="4000" dirty="0">
                 <a:solidFill>
                   <a:srgbClr val="FFFFFF"/>
                 </a:solidFill>
-                <a:latin typeface="+mj-lt"/>
-                <a:ea typeface="+mj-ea"/>
-                <a:cs typeface="+mj-cs"/>
               </a:rPr>
               <a:t>Demonstration</a:t>
             </a:r>
@@ -19651,7 +27285,7 @@
             <a:hlinkClick r:id="" action="ppaction://media"/>
             <a:extLst>
               <a:ext uri="{FF2B5EF4-FFF2-40B4-BE49-F238E27FC236}">
-                <a16:creationId xmlns:a16="http://schemas.microsoft.com/office/drawing/2014/main" id="{F3B8AD1F-04B6-68DC-7B34-7A2542BFAFCF}"/>
+                <a16:creationId xmlns:a16="http://schemas.microsoft.com/office/drawing/2014/main" id="{88C9AB58-0E90-E269-3E5E-836199402735}"/>
               </a:ext>
             </a:extLst>
           </p:cNvPr>
@@ -19676,18 +27310,15 @@
         </p:blipFill>
         <p:spPr>
           <a:xfrm>
-            <a:off x="1598867" y="1966293"/>
-            <a:ext cx="8994264" cy="4452160"/>
+            <a:off x="1689100" y="1825625"/>
+            <a:ext cx="8812213" cy="4351338"/>
           </a:xfrm>
-          <a:prstGeom prst="rect">
-            <a:avLst/>
-          </a:prstGeom>
         </p:spPr>
       </p:pic>
     </p:spTree>
     <p:extLst>
       <p:ext uri="{BB962C8B-B14F-4D97-AF65-F5344CB8AC3E}">
-        <p14:creationId xmlns:p14="http://schemas.microsoft.com/office/powerpoint/2010/main" val="3912217511"/>
+        <p14:creationId xmlns:p14="http://schemas.microsoft.com/office/powerpoint/2010/main" val="877043814"/>
       </p:ext>
     </p:extLst>
   </p:cSld>
@@ -19832,7 +27463,7 @@
 </p:sld>
 </file>
 
-<file path=ppt/slides/slide7.xml><?xml version="1.0" encoding="utf-8"?>
+<file path=ppt/slides/slide8.xml><?xml version="1.0" encoding="utf-8"?>
 <p:sld xmlns:a="http://schemas.openxmlformats.org/drawingml/2006/main" xmlns:r="http://schemas.openxmlformats.org/officeDocument/2006/relationships" xmlns:p="http://schemas.openxmlformats.org/presentationml/2006/main">
   <p:cSld>
     <p:bg>
@@ -19859,10 +27490,10 @@
       </p:grpSpPr>
       <p:sp useBgFill="1">
         <p:nvSpPr>
-          <p:cNvPr id="20" name="Rectangle 19">
+          <p:cNvPr id="74" name="Rectangle 73">
             <a:extLst>
               <a:ext uri="{FF2B5EF4-FFF2-40B4-BE49-F238E27FC236}">
-                <a16:creationId xmlns:a16="http://schemas.microsoft.com/office/drawing/2014/main" id="{1B15ED52-F352-441B-82BF-E0EA34836D08}"/>
+                <a16:creationId xmlns:a16="http://schemas.microsoft.com/office/drawing/2014/main" id="{BACC6370-2D7E-4714-9D71-7542949D7D5D}"/>
               </a:ext>
               <a:ext uri="{C183D7F6-B498-43B3-948B-1728B52AA6E4}">
                 <adec:decorative xmlns:adec="http://schemas.microsoft.com/office/drawing/2017/decorative" val="1"/>
@@ -19935,10 +27566,10 @@
       </p:sp>
       <p:sp>
         <p:nvSpPr>
-          <p:cNvPr id="21" name="Rectangle 20">
+          <p:cNvPr id="76" name="Rectangle 75">
             <a:extLst>
               <a:ext uri="{FF2B5EF4-FFF2-40B4-BE49-F238E27FC236}">
-                <a16:creationId xmlns:a16="http://schemas.microsoft.com/office/drawing/2014/main" id="{3B2E3793-BFE6-45A2-9B7B-E18844431C99}"/>
+                <a16:creationId xmlns:a16="http://schemas.microsoft.com/office/drawing/2014/main" id="{F68B3F68-107C-434F-AA38-110D5EA91B85}"/>
               </a:ext>
               <a:ext uri="{C183D7F6-B498-43B3-948B-1728B52AA6E4}">
                 <adec:decorative xmlns:adec="http://schemas.microsoft.com/office/drawing/2017/decorative" val="1"/>
@@ -19958,8 +27589,8 @@
         </p:nvSpPr>
         <p:spPr>
           <a:xfrm flipH="1">
-            <a:off x="-1" y="-1"/>
-            <a:ext cx="12191998" cy="1590742"/>
+            <a:off x="2" y="0"/>
+            <a:ext cx="12191998" cy="1575955"/>
           </a:xfrm>
           <a:prstGeom prst="rect">
             <a:avLst/>
@@ -19967,7 +27598,9 @@
           <a:gradFill>
             <a:gsLst>
               <a:gs pos="0">
-                <a:srgbClr val="000000"/>
+                <a:srgbClr val="000000">
+                  <a:alpha val="96000"/>
+                </a:srgbClr>
               </a:gs>
               <a:gs pos="100000">
                 <a:schemeClr val="accent1">
@@ -20008,10 +27641,10 @@
       </p:sp>
       <p:sp>
         <p:nvSpPr>
-          <p:cNvPr id="22" name="Rectangle 21">
+          <p:cNvPr id="78" name="Rectangle 77">
             <a:extLst>
               <a:ext uri="{FF2B5EF4-FFF2-40B4-BE49-F238E27FC236}">
-                <a16:creationId xmlns:a16="http://schemas.microsoft.com/office/drawing/2014/main" id="{BC4C4868-CB8F-4AF9-9CDB-8108F2C19B67}"/>
+                <a16:creationId xmlns:a16="http://schemas.microsoft.com/office/drawing/2014/main" id="{AAD0DBB9-1A4B-4391-81D4-CB19F9AB918A}"/>
               </a:ext>
               <a:ext uri="{C183D7F6-B498-43B3-948B-1728B52AA6E4}">
                 <adec:decorative xmlns:adec="http://schemas.microsoft.com/office/drawing/2017/decorative" val="1"/>
@@ -20031,27 +27664,27 @@
         </p:nvSpPr>
         <p:spPr>
           <a:xfrm rot="10800000" flipH="1">
-            <a:off x="-3" y="0"/>
-            <a:ext cx="8115306" cy="1590742"/>
+            <a:off x="8128857" y="0"/>
+            <a:ext cx="4063143" cy="1576412"/>
           </a:xfrm>
           <a:prstGeom prst="rect">
             <a:avLst/>
           </a:prstGeom>
           <a:gradFill>
             <a:gsLst>
-              <a:gs pos="20000">
+              <a:gs pos="19000">
                 <a:schemeClr val="accent1">
-                  <a:alpha val="0"/>
+                  <a:lumMod val="50000"/>
+                  <a:alpha val="68000"/>
                 </a:schemeClr>
               </a:gs>
               <a:gs pos="100000">
                 <a:schemeClr val="accent1">
-                  <a:lumMod val="50000"/>
-                  <a:alpha val="55000"/>
+                  <a:alpha val="79000"/>
                 </a:schemeClr>
               </a:gs>
             </a:gsLst>
-            <a:lin ang="13800000" scaled="0"/>
+            <a:lin ang="19200000" scaled="0"/>
           </a:gradFill>
           <a:ln>
             <a:noFill/>
@@ -20084,10 +27717,10 @@
       </p:sp>
       <p:sp>
         <p:nvSpPr>
-          <p:cNvPr id="23" name="Rectangle 22">
+          <p:cNvPr id="80" name="Rectangle 79">
             <a:extLst>
               <a:ext uri="{FF2B5EF4-FFF2-40B4-BE49-F238E27FC236}">
-                <a16:creationId xmlns:a16="http://schemas.microsoft.com/office/drawing/2014/main" id="{375E0459-6403-40CD-989D-56A4407CA12E}"/>
+                <a16:creationId xmlns:a16="http://schemas.microsoft.com/office/drawing/2014/main" id="{063BBA22-50EA-4C4D-BE05-F1CE4E63AA56}"/>
               </a:ext>
               <a:ext uri="{C183D7F6-B498-43B3-948B-1728B52AA6E4}">
                 <adec:decorative xmlns:adec="http://schemas.microsoft.com/office/drawing/2017/decorative" val="1"/>
@@ -20106,27 +27739,27 @@
           </p:nvPr>
         </p:nvSpPr>
         <p:spPr>
-          <a:xfrm flipH="1">
-            <a:off x="8115299" y="-1"/>
-            <a:ext cx="4076698" cy="1590742"/>
+          <a:xfrm rot="5400000">
+            <a:off x="5307777" y="-5307778"/>
+            <a:ext cx="1576446" cy="12192002"/>
           </a:xfrm>
           <a:prstGeom prst="rect">
             <a:avLst/>
           </a:prstGeom>
           <a:gradFill>
             <a:gsLst>
-              <a:gs pos="0">
+              <a:gs pos="23000">
                 <a:schemeClr val="accent1">
-                  <a:alpha val="66000"/>
+                  <a:alpha val="0"/>
                 </a:schemeClr>
               </a:gs>
-              <a:gs pos="100000">
+              <a:gs pos="99000">
                 <a:srgbClr val="000000">
-                  <a:alpha val="30000"/>
+                  <a:alpha val="74000"/>
                 </a:srgbClr>
               </a:gs>
             </a:gsLst>
-            <a:lin ang="13200000" scaled="0"/>
+            <a:lin ang="20400000" scaled="0"/>
           </a:gradFill>
           <a:ln>
             <a:noFill/>
@@ -20153,83 +27786,7 @@
           <a:lstStyle/>
           <a:p>
             <a:pPr algn="ctr"/>
-            <a:endParaRPr lang="en-US"/>
-          </a:p>
-        </p:txBody>
-      </p:sp>
-      <p:sp>
-        <p:nvSpPr>
-          <p:cNvPr id="24" name="Rectangle 23">
-            <a:extLst>
-              <a:ext uri="{FF2B5EF4-FFF2-40B4-BE49-F238E27FC236}">
-                <a16:creationId xmlns:a16="http://schemas.microsoft.com/office/drawing/2014/main" id="{53E5B1A8-3AC9-4BD1-9BBC-78CA94F2D1BA}"/>
-              </a:ext>
-              <a:ext uri="{C183D7F6-B498-43B3-948B-1728B52AA6E4}">
-                <adec:decorative xmlns:adec="http://schemas.microsoft.com/office/drawing/2017/decorative" val="1"/>
-              </a:ext>
-            </a:extLst>
-          </p:cNvPr>
-          <p:cNvSpPr>
-            <a:spLocks noGrp="1" noRot="1" noChangeAspect="1" noMove="1" noResize="1" noEditPoints="1" noAdjustHandles="1" noChangeArrowheads="1" noChangeShapeType="1" noTextEdit="1"/>
-          </p:cNvSpPr>
-          <p:nvPr>
-            <p:extLst>
-              <p:ext uri="{386F3935-93C4-4BCD-93E2-E3B085C9AB24}">
-                <p16:designElem xmlns:p16="http://schemas.microsoft.com/office/powerpoint/2015/main" val="1"/>
-              </p:ext>
-            </p:extLst>
-          </p:nvPr>
-        </p:nvSpPr>
-        <p:spPr>
-          <a:xfrm>
-            <a:off x="459350" y="-1"/>
-            <a:ext cx="11732646" cy="1597433"/>
-          </a:xfrm>
-          <a:prstGeom prst="rect">
-            <a:avLst/>
-          </a:prstGeom>
-          <a:gradFill>
-            <a:gsLst>
-              <a:gs pos="50000">
-                <a:srgbClr val="000000">
-                  <a:alpha val="0"/>
-                </a:srgbClr>
-              </a:gs>
-              <a:gs pos="99000">
-                <a:schemeClr val="accent1">
-                  <a:lumMod val="50000"/>
-                  <a:alpha val="52000"/>
-                </a:schemeClr>
-              </a:gs>
-            </a:gsLst>
-            <a:lin ang="16800000" scaled="0"/>
-          </a:gradFill>
-          <a:ln>
-            <a:noFill/>
-          </a:ln>
-        </p:spPr>
-        <p:style>
-          <a:lnRef idx="2">
-            <a:schemeClr val="accent1">
-              <a:shade val="50000"/>
-            </a:schemeClr>
-          </a:lnRef>
-          <a:fillRef idx="1">
-            <a:schemeClr val="accent1"/>
-          </a:fillRef>
-          <a:effectRef idx="0">
-            <a:schemeClr val="accent1"/>
-          </a:effectRef>
-          <a:fontRef idx="minor">
-            <a:schemeClr val="lt1"/>
-          </a:fontRef>
-        </p:style>
-        <p:txBody>
-          <a:bodyPr rtlCol="0" anchor="ctr"/>
-          <a:lstStyle/>
-          <a:p>
-            <a:pPr algn="ctr"/>
-            <a:endParaRPr lang="en-US"/>
+            <a:endParaRPr lang="en-US" dirty="0"/>
           </a:p>
         </p:txBody>
       </p:sp>
@@ -20251,12 +27808,12 @@
         </p:nvSpPr>
         <p:spPr>
           <a:xfrm>
-            <a:off x="1371599" y="294538"/>
-            <a:ext cx="9895951" cy="1033669"/>
+            <a:off x="1371597" y="348865"/>
+            <a:ext cx="10044023" cy="877729"/>
           </a:xfrm>
         </p:spPr>
         <p:txBody>
-          <a:bodyPr>
+          <a:bodyPr anchor="ctr">
             <a:normAutofit/>
           </a:bodyPr>
           <a:lstStyle/>
@@ -20267,43 +27824,47 @@
                   <a:srgbClr val="FFFFFF"/>
                 </a:solidFill>
               </a:rPr>
-              <a:t>Conclusion</a:t>
+              <a:t>Summary</a:t>
             </a:r>
+            <a:endParaRPr lang="en-GB" sz="4000" dirty="0">
+              <a:solidFill>
+                <a:srgbClr val="FFFFFF"/>
+              </a:solidFill>
+            </a:endParaRPr>
           </a:p>
         </p:txBody>
       </p:sp>
-      <p:sp>
-        <p:nvSpPr>
-          <p:cNvPr id="3" name="Content Placeholder 2">
+      <p:graphicFrame>
+        <p:nvGraphicFramePr>
+          <p:cNvPr id="43" name="Content Placeholder 2">
             <a:extLst>
               <a:ext uri="{FF2B5EF4-FFF2-40B4-BE49-F238E27FC236}">
-                <a16:creationId xmlns:a16="http://schemas.microsoft.com/office/drawing/2014/main" id="{42203801-6E7B-4593-E848-3C3CEC94E15F}"/>
+                <a16:creationId xmlns:a16="http://schemas.microsoft.com/office/drawing/2014/main" id="{65DF463B-BC73-324A-179E-7D5D70D334BB}"/>
               </a:ext>
             </a:extLst>
           </p:cNvPr>
-          <p:cNvSpPr>
-            <a:spLocks noGrp="1"/>
-          </p:cNvSpPr>
+          <p:cNvGraphicFramePr>
+            <a:graphicFrameLocks noGrp="1"/>
+          </p:cNvGraphicFramePr>
           <p:nvPr>
             <p:ph idx="1"/>
+            <p:extLst>
+              <p:ext uri="{D42A27DB-BD31-4B8C-83A1-F6EECF244321}">
+                <p14:modId xmlns:p14="http://schemas.microsoft.com/office/powerpoint/2010/main" val="3260409533"/>
+              </p:ext>
+            </p:extLst>
           </p:nvPr>
-        </p:nvSpPr>
-        <p:spPr>
-          <a:xfrm>
-            <a:off x="1371599" y="2318197"/>
-            <a:ext cx="9724031" cy="3683358"/>
-          </a:xfrm>
-        </p:spPr>
-        <p:txBody>
-          <a:bodyPr anchor="ctr">
-            <a:normAutofit/>
-          </a:bodyPr>
-          <a:lstStyle/>
-          <a:p>
-            <a:endParaRPr lang="en-GB" sz="2000"/>
-          </a:p>
-        </p:txBody>
-      </p:sp>
+        </p:nvGraphicFramePr>
+        <p:xfrm>
+          <a:off x="644056" y="2112579"/>
+          <a:ext cx="10927829" cy="4192805"/>
+        </p:xfrm>
+        <a:graphic>
+          <a:graphicData uri="http://schemas.openxmlformats.org/drawingml/2006/diagram">
+            <dgm:relIds xmlns:dgm="http://schemas.openxmlformats.org/drawingml/2006/diagram" xmlns:r="http://schemas.openxmlformats.org/officeDocument/2006/relationships" r:dm="rId2" r:lo="rId3" r:qs="rId4" r:cs="rId5"/>
+          </a:graphicData>
+        </a:graphic>
+      </p:graphicFrame>
     </p:spTree>
     <p:extLst>
       <p:ext uri="{BB962C8B-B14F-4D97-AF65-F5344CB8AC3E}">

--- a/documents/Danyal Shah Interim Presentation.pptx
+++ b/documents/Danyal Shah Interim Presentation.pptx
@@ -5654,10 +5654,10 @@
         <a:lstStyle/>
         <a:p>
           <a:r>
-            <a:rPr lang="en-GB"/>
+            <a:rPr lang="en-GB" dirty="0"/>
             <a:t>Students are very likely to distract themselves during revision</a:t>
           </a:r>
-          <a:endParaRPr lang="en-US"/>
+          <a:endParaRPr lang="en-US" dirty="0"/>
         </a:p>
       </dgm:t>
     </dgm:pt>
@@ -7541,10 +7541,10 @@
             </a:lnSpc>
           </a:pPr>
           <a:r>
-            <a:rPr lang="en-GB"/>
-            <a:t>Next: Questions, Marks &amp; Admin Profiles</a:t>
+            <a:rPr lang="en-GB" dirty="0"/>
+            <a:t>Next: Questions for topics - Applying marks to profiles</a:t>
           </a:r>
-          <a:endParaRPr lang="en-US"/>
+          <a:endParaRPr lang="en-US" dirty="0"/>
         </a:p>
       </dgm:t>
     </dgm:pt>
@@ -7625,10 +7625,10 @@
             </a:lnSpc>
           </a:pPr>
           <a:r>
-            <a:rPr lang="en-GB"/>
+            <a:rPr lang="en-GB" dirty="0"/>
             <a:t>And have them come back again in the future to continue revision.</a:t>
           </a:r>
-          <a:endParaRPr lang="en-US"/>
+          <a:endParaRPr lang="en-US" dirty="0"/>
         </a:p>
       </dgm:t>
     </dgm:pt>
@@ -8387,10 +8387,10 @@
             <a:buNone/>
           </a:pPr>
           <a:r>
-            <a:rPr lang="en-GB" sz="2100" kern="1200"/>
+            <a:rPr lang="en-GB" sz="2100" kern="1200" dirty="0"/>
             <a:t>Students are very likely to distract themselves during revision</a:t>
           </a:r>
-          <a:endParaRPr lang="en-US" sz="2100" kern="1200"/>
+          <a:endParaRPr lang="en-US" sz="2100" kern="1200" dirty="0"/>
         </a:p>
       </dsp:txBody>
       <dsp:txXfrm>
@@ -11632,10 +11632,10 @@
             <a:buNone/>
           </a:pPr>
           <a:r>
-            <a:rPr lang="en-GB" sz="2200" kern="1200"/>
-            <a:t>Next: Questions, Marks &amp; Admin Profiles</a:t>
+            <a:rPr lang="en-GB" sz="2200" kern="1200" dirty="0"/>
+            <a:t>Next: Questions for topics - Applying marks to profiles</a:t>
           </a:r>
-          <a:endParaRPr lang="en-US" sz="2200" kern="1200"/>
+          <a:endParaRPr lang="en-US" sz="2200" kern="1200" dirty="0"/>
         </a:p>
       </dsp:txBody>
       <dsp:txXfrm>
@@ -11854,10 +11854,10 @@
             <a:buNone/>
           </a:pPr>
           <a:r>
-            <a:rPr lang="en-GB" sz="1800" kern="1200"/>
+            <a:rPr lang="en-GB" sz="1800" kern="1200" dirty="0"/>
             <a:t>And have them come back again in the future to continue revision.</a:t>
           </a:r>
-          <a:endParaRPr lang="en-US" sz="1800" kern="1200"/>
+          <a:endParaRPr lang="en-US" sz="1800" kern="1200" dirty="0"/>
         </a:p>
       </dsp:txBody>
       <dsp:txXfrm>
@@ -20613,7 +20613,7 @@
           <a:p>
             <a:fld id="{30BE7D09-1260-4638-99DF-38FAFE54D6CF}" type="datetimeFigureOut">
               <a:rPr lang="en-GB" smtClean="0"/>
-              <a:t>04/12/2024</a:t>
+              <a:t>07/12/2024</a:t>
             </a:fld>
             <a:endParaRPr lang="en-GB"/>
           </a:p>
@@ -20813,7 +20813,7 @@
           <a:p>
             <a:fld id="{30BE7D09-1260-4638-99DF-38FAFE54D6CF}" type="datetimeFigureOut">
               <a:rPr lang="en-GB" smtClean="0"/>
-              <a:t>04/12/2024</a:t>
+              <a:t>07/12/2024</a:t>
             </a:fld>
             <a:endParaRPr lang="en-GB"/>
           </a:p>
@@ -21023,7 +21023,7 @@
           <a:p>
             <a:fld id="{30BE7D09-1260-4638-99DF-38FAFE54D6CF}" type="datetimeFigureOut">
               <a:rPr lang="en-GB" smtClean="0"/>
-              <a:t>04/12/2024</a:t>
+              <a:t>07/12/2024</a:t>
             </a:fld>
             <a:endParaRPr lang="en-GB"/>
           </a:p>
@@ -21223,7 +21223,7 @@
           <a:p>
             <a:fld id="{30BE7D09-1260-4638-99DF-38FAFE54D6CF}" type="datetimeFigureOut">
               <a:rPr lang="en-GB" smtClean="0"/>
-              <a:t>04/12/2024</a:t>
+              <a:t>07/12/2024</a:t>
             </a:fld>
             <a:endParaRPr lang="en-GB"/>
           </a:p>
@@ -21499,7 +21499,7 @@
           <a:p>
             <a:fld id="{30BE7D09-1260-4638-99DF-38FAFE54D6CF}" type="datetimeFigureOut">
               <a:rPr lang="en-GB" smtClean="0"/>
-              <a:t>04/12/2024</a:t>
+              <a:t>07/12/2024</a:t>
             </a:fld>
             <a:endParaRPr lang="en-GB"/>
           </a:p>
@@ -21767,7 +21767,7 @@
           <a:p>
             <a:fld id="{30BE7D09-1260-4638-99DF-38FAFE54D6CF}" type="datetimeFigureOut">
               <a:rPr lang="en-GB" smtClean="0"/>
-              <a:t>04/12/2024</a:t>
+              <a:t>07/12/2024</a:t>
             </a:fld>
             <a:endParaRPr lang="en-GB"/>
           </a:p>
@@ -22182,7 +22182,7 @@
           <a:p>
             <a:fld id="{30BE7D09-1260-4638-99DF-38FAFE54D6CF}" type="datetimeFigureOut">
               <a:rPr lang="en-GB" smtClean="0"/>
-              <a:t>04/12/2024</a:t>
+              <a:t>07/12/2024</a:t>
             </a:fld>
             <a:endParaRPr lang="en-GB"/>
           </a:p>
@@ -22324,7 +22324,7 @@
           <a:p>
             <a:fld id="{30BE7D09-1260-4638-99DF-38FAFE54D6CF}" type="datetimeFigureOut">
               <a:rPr lang="en-GB" smtClean="0"/>
-              <a:t>04/12/2024</a:t>
+              <a:t>07/12/2024</a:t>
             </a:fld>
             <a:endParaRPr lang="en-GB"/>
           </a:p>
@@ -22437,7 +22437,7 @@
           <a:p>
             <a:fld id="{30BE7D09-1260-4638-99DF-38FAFE54D6CF}" type="datetimeFigureOut">
               <a:rPr lang="en-GB" smtClean="0"/>
-              <a:t>04/12/2024</a:t>
+              <a:t>07/12/2024</a:t>
             </a:fld>
             <a:endParaRPr lang="en-GB"/>
           </a:p>
@@ -22750,7 +22750,7 @@
           <a:p>
             <a:fld id="{30BE7D09-1260-4638-99DF-38FAFE54D6CF}" type="datetimeFigureOut">
               <a:rPr lang="en-GB" smtClean="0"/>
-              <a:t>04/12/2024</a:t>
+              <a:t>07/12/2024</a:t>
             </a:fld>
             <a:endParaRPr lang="en-GB"/>
           </a:p>
@@ -23039,7 +23039,7 @@
           <a:p>
             <a:fld id="{30BE7D09-1260-4638-99DF-38FAFE54D6CF}" type="datetimeFigureOut">
               <a:rPr lang="en-GB" smtClean="0"/>
-              <a:t>04/12/2024</a:t>
+              <a:t>07/12/2024</a:t>
             </a:fld>
             <a:endParaRPr lang="en-GB"/>
           </a:p>
@@ -23282,7 +23282,7 @@
           <a:p>
             <a:fld id="{30BE7D09-1260-4638-99DF-38FAFE54D6CF}" type="datetimeFigureOut">
               <a:rPr lang="en-GB" smtClean="0"/>
-              <a:t>04/12/2024</a:t>
+              <a:t>07/12/2024</a:t>
             </a:fld>
             <a:endParaRPr lang="en-GB"/>
           </a:p>
@@ -24652,208 +24652,6 @@
   <p:clrMapOvr>
     <a:masterClrMapping/>
   </p:clrMapOvr>
-  <p:timing>
-    <p:tnLst>
-      <p:par>
-        <p:cTn id="1" dur="indefinite" restart="never" nodeType="tmRoot">
-          <p:childTnLst>
-            <p:seq concurrent="1" nextAc="seek">
-              <p:cTn id="2" dur="indefinite" nodeType="mainSeq">
-                <p:childTnLst>
-                  <p:par>
-                    <p:cTn id="3" fill="hold">
-                      <p:stCondLst>
-                        <p:cond delay="indefinite"/>
-                      </p:stCondLst>
-                      <p:childTnLst>
-                        <p:par>
-                          <p:cTn id="4" fill="hold">
-                            <p:stCondLst>
-                              <p:cond delay="0"/>
-                            </p:stCondLst>
-                            <p:childTnLst>
-                              <p:par>
-                                <p:cTn id="5" presetID="10" presetClass="entr" presetSubtype="0" fill="hold" grpId="0" nodeType="clickEffect">
-                                  <p:stCondLst>
-                                    <p:cond delay="0"/>
-                                  </p:stCondLst>
-                                  <p:childTnLst>
-                                    <p:set>
-                                      <p:cBhvr>
-                                        <p:cTn id="6" dur="1" fill="hold">
-                                          <p:stCondLst>
-                                            <p:cond delay="0"/>
-                                          </p:stCondLst>
-                                        </p:cTn>
-                                        <p:tgtEl>
-                                          <p:spTgt spid="2"/>
-                                        </p:tgtEl>
-                                        <p:attrNameLst>
-                                          <p:attrName>style.visibility</p:attrName>
-                                        </p:attrNameLst>
-                                      </p:cBhvr>
-                                      <p:to>
-                                        <p:strVal val="visible"/>
-                                      </p:to>
-                                    </p:set>
-                                    <p:animEffect transition="in" filter="fade">
-                                      <p:cBhvr>
-                                        <p:cTn id="7" dur="500"/>
-                                        <p:tgtEl>
-                                          <p:spTgt spid="2"/>
-                                        </p:tgtEl>
-                                      </p:cBhvr>
-                                    </p:animEffect>
-                                  </p:childTnLst>
-                                </p:cTn>
-                              </p:par>
-                            </p:childTnLst>
-                          </p:cTn>
-                        </p:par>
-                      </p:childTnLst>
-                    </p:cTn>
-                  </p:par>
-                  <p:par>
-                    <p:cTn id="8" fill="hold">
-                      <p:stCondLst>
-                        <p:cond delay="indefinite"/>
-                      </p:stCondLst>
-                      <p:childTnLst>
-                        <p:par>
-                          <p:cTn id="9" fill="hold">
-                            <p:stCondLst>
-                              <p:cond delay="0"/>
-                            </p:stCondLst>
-                            <p:childTnLst>
-                              <p:par>
-                                <p:cTn id="10" presetID="10" presetClass="entr" presetSubtype="0" fill="hold" grpId="0" nodeType="clickEffect">
-                                  <p:stCondLst>
-                                    <p:cond delay="0"/>
-                                  </p:stCondLst>
-                                  <p:childTnLst>
-                                    <p:set>
-                                      <p:cBhvr>
-                                        <p:cTn id="11" dur="1" fill="hold">
-                                          <p:stCondLst>
-                                            <p:cond delay="0"/>
-                                          </p:stCondLst>
-                                        </p:cTn>
-                                        <p:tgtEl>
-                                          <p:spTgt spid="3">
-                                            <p:txEl>
-                                              <p:pRg st="0" end="0"/>
-                                            </p:txEl>
-                                          </p:spTgt>
-                                        </p:tgtEl>
-                                        <p:attrNameLst>
-                                          <p:attrName>style.visibility</p:attrName>
-                                        </p:attrNameLst>
-                                      </p:cBhvr>
-                                      <p:to>
-                                        <p:strVal val="visible"/>
-                                      </p:to>
-                                    </p:set>
-                                    <p:animEffect transition="in" filter="fade">
-                                      <p:cBhvr>
-                                        <p:cTn id="12" dur="500"/>
-                                        <p:tgtEl>
-                                          <p:spTgt spid="3">
-                                            <p:txEl>
-                                              <p:pRg st="0" end="0"/>
-                                            </p:txEl>
-                                          </p:spTgt>
-                                        </p:tgtEl>
-                                      </p:cBhvr>
-                                    </p:animEffect>
-                                  </p:childTnLst>
-                                </p:cTn>
-                              </p:par>
-                            </p:childTnLst>
-                          </p:cTn>
-                        </p:par>
-                      </p:childTnLst>
-                    </p:cTn>
-                  </p:par>
-                  <p:par>
-                    <p:cTn id="13" fill="hold">
-                      <p:stCondLst>
-                        <p:cond delay="indefinite"/>
-                      </p:stCondLst>
-                      <p:childTnLst>
-                        <p:par>
-                          <p:cTn id="14" fill="hold">
-                            <p:stCondLst>
-                              <p:cond delay="0"/>
-                            </p:stCondLst>
-                            <p:childTnLst>
-                              <p:par>
-                                <p:cTn id="15" presetID="10" presetClass="entr" presetSubtype="0" fill="hold" grpId="0" nodeType="clickEffect">
-                                  <p:stCondLst>
-                                    <p:cond delay="0"/>
-                                  </p:stCondLst>
-                                  <p:childTnLst>
-                                    <p:set>
-                                      <p:cBhvr>
-                                        <p:cTn id="16" dur="1" fill="hold">
-                                          <p:stCondLst>
-                                            <p:cond delay="0"/>
-                                          </p:stCondLst>
-                                        </p:cTn>
-                                        <p:tgtEl>
-                                          <p:spTgt spid="4"/>
-                                        </p:tgtEl>
-                                        <p:attrNameLst>
-                                          <p:attrName>style.visibility</p:attrName>
-                                        </p:attrNameLst>
-                                      </p:cBhvr>
-                                      <p:to>
-                                        <p:strVal val="visible"/>
-                                      </p:to>
-                                    </p:set>
-                                    <p:animEffect transition="in" filter="fade">
-                                      <p:cBhvr>
-                                        <p:cTn id="17" dur="500"/>
-                                        <p:tgtEl>
-                                          <p:spTgt spid="4"/>
-                                        </p:tgtEl>
-                                      </p:cBhvr>
-                                    </p:animEffect>
-                                  </p:childTnLst>
-                                </p:cTn>
-                              </p:par>
-                            </p:childTnLst>
-                          </p:cTn>
-                        </p:par>
-                      </p:childTnLst>
-                    </p:cTn>
-                  </p:par>
-                </p:childTnLst>
-              </p:cTn>
-              <p:prevCondLst>
-                <p:cond evt="onPrev" delay="0">
-                  <p:tgtEl>
-                    <p:sldTgt/>
-                  </p:tgtEl>
-                </p:cond>
-              </p:prevCondLst>
-              <p:nextCondLst>
-                <p:cond evt="onNext" delay="0">
-                  <p:tgtEl>
-                    <p:sldTgt/>
-                  </p:tgtEl>
-                </p:cond>
-              </p:nextCondLst>
-            </p:seq>
-          </p:childTnLst>
-        </p:cTn>
-      </p:par>
-    </p:tnLst>
-    <p:bldLst>
-      <p:bldP spid="2" grpId="0"/>
-      <p:bldP spid="3" grpId="0" build="p"/>
-      <p:bldP spid="4" grpId="0"/>
-    </p:bldLst>
-  </p:timing>
 </p:sld>
 </file>
 
@@ -25264,6 +25062,628 @@
   <p:clrMapOvr>
     <a:masterClrMapping/>
   </p:clrMapOvr>
+  <p:transition spd="slow">
+    <p:push dir="u"/>
+  </p:transition>
+  <p:timing>
+    <p:tnLst>
+      <p:par>
+        <p:cTn id="1" dur="indefinite" restart="never" nodeType="tmRoot">
+          <p:childTnLst>
+            <p:seq concurrent="1" nextAc="seek">
+              <p:cTn id="2" dur="indefinite" nodeType="mainSeq">
+                <p:childTnLst>
+                  <p:par>
+                    <p:cTn id="3" fill="hold">
+                      <p:stCondLst>
+                        <p:cond delay="indefinite"/>
+                      </p:stCondLst>
+                      <p:childTnLst>
+                        <p:par>
+                          <p:cTn id="4" fill="hold">
+                            <p:stCondLst>
+                              <p:cond delay="0"/>
+                            </p:stCondLst>
+                            <p:childTnLst>
+                              <p:par>
+                                <p:cTn id="5" presetID="2" presetClass="entr" presetSubtype="4" fill="hold" grpId="0" nodeType="clickEffect">
+                                  <p:stCondLst>
+                                    <p:cond delay="0"/>
+                                  </p:stCondLst>
+                                  <p:childTnLst>
+                                    <p:set>
+                                      <p:cBhvr>
+                                        <p:cTn id="6" dur="1" fill="hold">
+                                          <p:stCondLst>
+                                            <p:cond delay="0"/>
+                                          </p:stCondLst>
+                                        </p:cTn>
+                                        <p:tgtEl>
+                                          <p:spTgt spid="5">
+                                            <p:graphicEl>
+                                              <a:dgm id="{5F87BCB7-E7E3-4D64-9B9E-2923FF664D4C}"/>
+                                            </p:graphicEl>
+                                          </p:spTgt>
+                                        </p:tgtEl>
+                                        <p:attrNameLst>
+                                          <p:attrName>style.visibility</p:attrName>
+                                        </p:attrNameLst>
+                                      </p:cBhvr>
+                                      <p:to>
+                                        <p:strVal val="visible"/>
+                                      </p:to>
+                                    </p:set>
+                                    <p:anim calcmode="lin" valueType="num">
+                                      <p:cBhvr additive="base">
+                                        <p:cTn id="7" dur="500" fill="hold"/>
+                                        <p:tgtEl>
+                                          <p:spTgt spid="5">
+                                            <p:graphicEl>
+                                              <a:dgm id="{5F87BCB7-E7E3-4D64-9B9E-2923FF664D4C}"/>
+                                            </p:graphicEl>
+                                          </p:spTgt>
+                                        </p:tgtEl>
+                                        <p:attrNameLst>
+                                          <p:attrName>ppt_x</p:attrName>
+                                        </p:attrNameLst>
+                                      </p:cBhvr>
+                                      <p:tavLst>
+                                        <p:tav tm="0">
+                                          <p:val>
+                                            <p:strVal val="#ppt_x"/>
+                                          </p:val>
+                                        </p:tav>
+                                        <p:tav tm="100000">
+                                          <p:val>
+                                            <p:strVal val="#ppt_x"/>
+                                          </p:val>
+                                        </p:tav>
+                                      </p:tavLst>
+                                    </p:anim>
+                                    <p:anim calcmode="lin" valueType="num">
+                                      <p:cBhvr additive="base">
+                                        <p:cTn id="8" dur="500" fill="hold"/>
+                                        <p:tgtEl>
+                                          <p:spTgt spid="5">
+                                            <p:graphicEl>
+                                              <a:dgm id="{5F87BCB7-E7E3-4D64-9B9E-2923FF664D4C}"/>
+                                            </p:graphicEl>
+                                          </p:spTgt>
+                                        </p:tgtEl>
+                                        <p:attrNameLst>
+                                          <p:attrName>ppt_y</p:attrName>
+                                        </p:attrNameLst>
+                                      </p:cBhvr>
+                                      <p:tavLst>
+                                        <p:tav tm="0">
+                                          <p:val>
+                                            <p:strVal val="1+#ppt_h/2"/>
+                                          </p:val>
+                                        </p:tav>
+                                        <p:tav tm="100000">
+                                          <p:val>
+                                            <p:strVal val="#ppt_y"/>
+                                          </p:val>
+                                        </p:tav>
+                                      </p:tavLst>
+                                    </p:anim>
+                                  </p:childTnLst>
+                                </p:cTn>
+                              </p:par>
+                              <p:par>
+                                <p:cTn id="9" presetID="2" presetClass="entr" presetSubtype="4" fill="hold" grpId="0" nodeType="withEffect">
+                                  <p:stCondLst>
+                                    <p:cond delay="0"/>
+                                  </p:stCondLst>
+                                  <p:childTnLst>
+                                    <p:set>
+                                      <p:cBhvr>
+                                        <p:cTn id="10" dur="1" fill="hold">
+                                          <p:stCondLst>
+                                            <p:cond delay="0"/>
+                                          </p:stCondLst>
+                                        </p:cTn>
+                                        <p:tgtEl>
+                                          <p:spTgt spid="5">
+                                            <p:graphicEl>
+                                              <a:dgm id="{75FDBC34-98CC-4E1C-A088-5BA305182935}"/>
+                                            </p:graphicEl>
+                                          </p:spTgt>
+                                        </p:tgtEl>
+                                        <p:attrNameLst>
+                                          <p:attrName>style.visibility</p:attrName>
+                                        </p:attrNameLst>
+                                      </p:cBhvr>
+                                      <p:to>
+                                        <p:strVal val="visible"/>
+                                      </p:to>
+                                    </p:set>
+                                    <p:anim calcmode="lin" valueType="num">
+                                      <p:cBhvr additive="base">
+                                        <p:cTn id="11" dur="500" fill="hold"/>
+                                        <p:tgtEl>
+                                          <p:spTgt spid="5">
+                                            <p:graphicEl>
+                                              <a:dgm id="{75FDBC34-98CC-4E1C-A088-5BA305182935}"/>
+                                            </p:graphicEl>
+                                          </p:spTgt>
+                                        </p:tgtEl>
+                                        <p:attrNameLst>
+                                          <p:attrName>ppt_x</p:attrName>
+                                        </p:attrNameLst>
+                                      </p:cBhvr>
+                                      <p:tavLst>
+                                        <p:tav tm="0">
+                                          <p:val>
+                                            <p:strVal val="#ppt_x"/>
+                                          </p:val>
+                                        </p:tav>
+                                        <p:tav tm="100000">
+                                          <p:val>
+                                            <p:strVal val="#ppt_x"/>
+                                          </p:val>
+                                        </p:tav>
+                                      </p:tavLst>
+                                    </p:anim>
+                                    <p:anim calcmode="lin" valueType="num">
+                                      <p:cBhvr additive="base">
+                                        <p:cTn id="12" dur="500" fill="hold"/>
+                                        <p:tgtEl>
+                                          <p:spTgt spid="5">
+                                            <p:graphicEl>
+                                              <a:dgm id="{75FDBC34-98CC-4E1C-A088-5BA305182935}"/>
+                                            </p:graphicEl>
+                                          </p:spTgt>
+                                        </p:tgtEl>
+                                        <p:attrNameLst>
+                                          <p:attrName>ppt_y</p:attrName>
+                                        </p:attrNameLst>
+                                      </p:cBhvr>
+                                      <p:tavLst>
+                                        <p:tav tm="0">
+                                          <p:val>
+                                            <p:strVal val="1+#ppt_h/2"/>
+                                          </p:val>
+                                        </p:tav>
+                                        <p:tav tm="100000">
+                                          <p:val>
+                                            <p:strVal val="#ppt_y"/>
+                                          </p:val>
+                                        </p:tav>
+                                      </p:tavLst>
+                                    </p:anim>
+                                  </p:childTnLst>
+                                </p:cTn>
+                              </p:par>
+                            </p:childTnLst>
+                          </p:cTn>
+                        </p:par>
+                      </p:childTnLst>
+                    </p:cTn>
+                  </p:par>
+                  <p:par>
+                    <p:cTn id="13" fill="hold">
+                      <p:stCondLst>
+                        <p:cond delay="indefinite"/>
+                      </p:stCondLst>
+                      <p:childTnLst>
+                        <p:par>
+                          <p:cTn id="14" fill="hold">
+                            <p:stCondLst>
+                              <p:cond delay="0"/>
+                            </p:stCondLst>
+                            <p:childTnLst>
+                              <p:par>
+                                <p:cTn id="15" presetID="2" presetClass="entr" presetSubtype="4" fill="hold" grpId="0" nodeType="clickEffect">
+                                  <p:stCondLst>
+                                    <p:cond delay="0"/>
+                                  </p:stCondLst>
+                                  <p:childTnLst>
+                                    <p:set>
+                                      <p:cBhvr>
+                                        <p:cTn id="16" dur="1" fill="hold">
+                                          <p:stCondLst>
+                                            <p:cond delay="0"/>
+                                          </p:stCondLst>
+                                        </p:cTn>
+                                        <p:tgtEl>
+                                          <p:spTgt spid="5">
+                                            <p:graphicEl>
+                                              <a:dgm id="{7E119BE0-00ED-46E4-813C-9082E5632432}"/>
+                                            </p:graphicEl>
+                                          </p:spTgt>
+                                        </p:tgtEl>
+                                        <p:attrNameLst>
+                                          <p:attrName>style.visibility</p:attrName>
+                                        </p:attrNameLst>
+                                      </p:cBhvr>
+                                      <p:to>
+                                        <p:strVal val="visible"/>
+                                      </p:to>
+                                    </p:set>
+                                    <p:anim calcmode="lin" valueType="num">
+                                      <p:cBhvr additive="base">
+                                        <p:cTn id="17" dur="500" fill="hold"/>
+                                        <p:tgtEl>
+                                          <p:spTgt spid="5">
+                                            <p:graphicEl>
+                                              <a:dgm id="{7E119BE0-00ED-46E4-813C-9082E5632432}"/>
+                                            </p:graphicEl>
+                                          </p:spTgt>
+                                        </p:tgtEl>
+                                        <p:attrNameLst>
+                                          <p:attrName>ppt_x</p:attrName>
+                                        </p:attrNameLst>
+                                      </p:cBhvr>
+                                      <p:tavLst>
+                                        <p:tav tm="0">
+                                          <p:val>
+                                            <p:strVal val="#ppt_x"/>
+                                          </p:val>
+                                        </p:tav>
+                                        <p:tav tm="100000">
+                                          <p:val>
+                                            <p:strVal val="#ppt_x"/>
+                                          </p:val>
+                                        </p:tav>
+                                      </p:tavLst>
+                                    </p:anim>
+                                    <p:anim calcmode="lin" valueType="num">
+                                      <p:cBhvr additive="base">
+                                        <p:cTn id="18" dur="500" fill="hold"/>
+                                        <p:tgtEl>
+                                          <p:spTgt spid="5">
+                                            <p:graphicEl>
+                                              <a:dgm id="{7E119BE0-00ED-46E4-813C-9082E5632432}"/>
+                                            </p:graphicEl>
+                                          </p:spTgt>
+                                        </p:tgtEl>
+                                        <p:attrNameLst>
+                                          <p:attrName>ppt_y</p:attrName>
+                                        </p:attrNameLst>
+                                      </p:cBhvr>
+                                      <p:tavLst>
+                                        <p:tav tm="0">
+                                          <p:val>
+                                            <p:strVal val="1+#ppt_h/2"/>
+                                          </p:val>
+                                        </p:tav>
+                                        <p:tav tm="100000">
+                                          <p:val>
+                                            <p:strVal val="#ppt_y"/>
+                                          </p:val>
+                                        </p:tav>
+                                      </p:tavLst>
+                                    </p:anim>
+                                  </p:childTnLst>
+                                </p:cTn>
+                              </p:par>
+                            </p:childTnLst>
+                          </p:cTn>
+                        </p:par>
+                      </p:childTnLst>
+                    </p:cTn>
+                  </p:par>
+                  <p:par>
+                    <p:cTn id="19" fill="hold">
+                      <p:stCondLst>
+                        <p:cond delay="indefinite"/>
+                      </p:stCondLst>
+                      <p:childTnLst>
+                        <p:par>
+                          <p:cTn id="20" fill="hold">
+                            <p:stCondLst>
+                              <p:cond delay="0"/>
+                            </p:stCondLst>
+                            <p:childTnLst>
+                              <p:par>
+                                <p:cTn id="21" presetID="2" presetClass="entr" presetSubtype="4" fill="hold" grpId="0" nodeType="clickEffect">
+                                  <p:stCondLst>
+                                    <p:cond delay="0"/>
+                                  </p:stCondLst>
+                                  <p:childTnLst>
+                                    <p:set>
+                                      <p:cBhvr>
+                                        <p:cTn id="22" dur="1" fill="hold">
+                                          <p:stCondLst>
+                                            <p:cond delay="0"/>
+                                          </p:stCondLst>
+                                        </p:cTn>
+                                        <p:tgtEl>
+                                          <p:spTgt spid="5">
+                                            <p:graphicEl>
+                                              <a:dgm id="{E59FB9B9-8371-4C73-82BA-323CD2879C61}"/>
+                                            </p:graphicEl>
+                                          </p:spTgt>
+                                        </p:tgtEl>
+                                        <p:attrNameLst>
+                                          <p:attrName>style.visibility</p:attrName>
+                                        </p:attrNameLst>
+                                      </p:cBhvr>
+                                      <p:to>
+                                        <p:strVal val="visible"/>
+                                      </p:to>
+                                    </p:set>
+                                    <p:anim calcmode="lin" valueType="num">
+                                      <p:cBhvr additive="base">
+                                        <p:cTn id="23" dur="500" fill="hold"/>
+                                        <p:tgtEl>
+                                          <p:spTgt spid="5">
+                                            <p:graphicEl>
+                                              <a:dgm id="{E59FB9B9-8371-4C73-82BA-323CD2879C61}"/>
+                                            </p:graphicEl>
+                                          </p:spTgt>
+                                        </p:tgtEl>
+                                        <p:attrNameLst>
+                                          <p:attrName>ppt_x</p:attrName>
+                                        </p:attrNameLst>
+                                      </p:cBhvr>
+                                      <p:tavLst>
+                                        <p:tav tm="0">
+                                          <p:val>
+                                            <p:strVal val="#ppt_x"/>
+                                          </p:val>
+                                        </p:tav>
+                                        <p:tav tm="100000">
+                                          <p:val>
+                                            <p:strVal val="#ppt_x"/>
+                                          </p:val>
+                                        </p:tav>
+                                      </p:tavLst>
+                                    </p:anim>
+                                    <p:anim calcmode="lin" valueType="num">
+                                      <p:cBhvr additive="base">
+                                        <p:cTn id="24" dur="500" fill="hold"/>
+                                        <p:tgtEl>
+                                          <p:spTgt spid="5">
+                                            <p:graphicEl>
+                                              <a:dgm id="{E59FB9B9-8371-4C73-82BA-323CD2879C61}"/>
+                                            </p:graphicEl>
+                                          </p:spTgt>
+                                        </p:tgtEl>
+                                        <p:attrNameLst>
+                                          <p:attrName>ppt_y</p:attrName>
+                                        </p:attrNameLst>
+                                      </p:cBhvr>
+                                      <p:tavLst>
+                                        <p:tav tm="0">
+                                          <p:val>
+                                            <p:strVal val="1+#ppt_h/2"/>
+                                          </p:val>
+                                        </p:tav>
+                                        <p:tav tm="100000">
+                                          <p:val>
+                                            <p:strVal val="#ppt_y"/>
+                                          </p:val>
+                                        </p:tav>
+                                      </p:tavLst>
+                                    </p:anim>
+                                  </p:childTnLst>
+                                </p:cTn>
+                              </p:par>
+                              <p:par>
+                                <p:cTn id="25" presetID="2" presetClass="entr" presetSubtype="4" fill="hold" grpId="0" nodeType="withEffect">
+                                  <p:stCondLst>
+                                    <p:cond delay="0"/>
+                                  </p:stCondLst>
+                                  <p:childTnLst>
+                                    <p:set>
+                                      <p:cBhvr>
+                                        <p:cTn id="26" dur="1" fill="hold">
+                                          <p:stCondLst>
+                                            <p:cond delay="0"/>
+                                          </p:stCondLst>
+                                        </p:cTn>
+                                        <p:tgtEl>
+                                          <p:spTgt spid="5">
+                                            <p:graphicEl>
+                                              <a:dgm id="{A5A53E02-844A-4382-8DE6-AB869FD4F4FE}"/>
+                                            </p:graphicEl>
+                                          </p:spTgt>
+                                        </p:tgtEl>
+                                        <p:attrNameLst>
+                                          <p:attrName>style.visibility</p:attrName>
+                                        </p:attrNameLst>
+                                      </p:cBhvr>
+                                      <p:to>
+                                        <p:strVal val="visible"/>
+                                      </p:to>
+                                    </p:set>
+                                    <p:anim calcmode="lin" valueType="num">
+                                      <p:cBhvr additive="base">
+                                        <p:cTn id="27" dur="500" fill="hold"/>
+                                        <p:tgtEl>
+                                          <p:spTgt spid="5">
+                                            <p:graphicEl>
+                                              <a:dgm id="{A5A53E02-844A-4382-8DE6-AB869FD4F4FE}"/>
+                                            </p:graphicEl>
+                                          </p:spTgt>
+                                        </p:tgtEl>
+                                        <p:attrNameLst>
+                                          <p:attrName>ppt_x</p:attrName>
+                                        </p:attrNameLst>
+                                      </p:cBhvr>
+                                      <p:tavLst>
+                                        <p:tav tm="0">
+                                          <p:val>
+                                            <p:strVal val="#ppt_x"/>
+                                          </p:val>
+                                        </p:tav>
+                                        <p:tav tm="100000">
+                                          <p:val>
+                                            <p:strVal val="#ppt_x"/>
+                                          </p:val>
+                                        </p:tav>
+                                      </p:tavLst>
+                                    </p:anim>
+                                    <p:anim calcmode="lin" valueType="num">
+                                      <p:cBhvr additive="base">
+                                        <p:cTn id="28" dur="500" fill="hold"/>
+                                        <p:tgtEl>
+                                          <p:spTgt spid="5">
+                                            <p:graphicEl>
+                                              <a:dgm id="{A5A53E02-844A-4382-8DE6-AB869FD4F4FE}"/>
+                                            </p:graphicEl>
+                                          </p:spTgt>
+                                        </p:tgtEl>
+                                        <p:attrNameLst>
+                                          <p:attrName>ppt_y</p:attrName>
+                                        </p:attrNameLst>
+                                      </p:cBhvr>
+                                      <p:tavLst>
+                                        <p:tav tm="0">
+                                          <p:val>
+                                            <p:strVal val="1+#ppt_h/2"/>
+                                          </p:val>
+                                        </p:tav>
+                                        <p:tav tm="100000">
+                                          <p:val>
+                                            <p:strVal val="#ppt_y"/>
+                                          </p:val>
+                                        </p:tav>
+                                      </p:tavLst>
+                                    </p:anim>
+                                  </p:childTnLst>
+                                </p:cTn>
+                              </p:par>
+                            </p:childTnLst>
+                          </p:cTn>
+                        </p:par>
+                      </p:childTnLst>
+                    </p:cTn>
+                  </p:par>
+                  <p:par>
+                    <p:cTn id="29" fill="hold">
+                      <p:stCondLst>
+                        <p:cond delay="indefinite"/>
+                      </p:stCondLst>
+                      <p:childTnLst>
+                        <p:par>
+                          <p:cTn id="30" fill="hold">
+                            <p:stCondLst>
+                              <p:cond delay="0"/>
+                            </p:stCondLst>
+                            <p:childTnLst>
+                              <p:par>
+                                <p:cTn id="31" presetID="2" presetClass="entr" presetSubtype="4" fill="hold" grpId="0" nodeType="clickEffect">
+                                  <p:stCondLst>
+                                    <p:cond delay="0"/>
+                                  </p:stCondLst>
+                                  <p:childTnLst>
+                                    <p:set>
+                                      <p:cBhvr>
+                                        <p:cTn id="32" dur="1" fill="hold">
+                                          <p:stCondLst>
+                                            <p:cond delay="0"/>
+                                          </p:stCondLst>
+                                        </p:cTn>
+                                        <p:tgtEl>
+                                          <p:spTgt spid="5">
+                                            <p:graphicEl>
+                                              <a:dgm id="{9CB32483-B33A-4E87-AEDF-55A4FDC414F6}"/>
+                                            </p:graphicEl>
+                                          </p:spTgt>
+                                        </p:tgtEl>
+                                        <p:attrNameLst>
+                                          <p:attrName>style.visibility</p:attrName>
+                                        </p:attrNameLst>
+                                      </p:cBhvr>
+                                      <p:to>
+                                        <p:strVal val="visible"/>
+                                      </p:to>
+                                    </p:set>
+                                    <p:anim calcmode="lin" valueType="num">
+                                      <p:cBhvr additive="base">
+                                        <p:cTn id="33" dur="500" fill="hold"/>
+                                        <p:tgtEl>
+                                          <p:spTgt spid="5">
+                                            <p:graphicEl>
+                                              <a:dgm id="{9CB32483-B33A-4E87-AEDF-55A4FDC414F6}"/>
+                                            </p:graphicEl>
+                                          </p:spTgt>
+                                        </p:tgtEl>
+                                        <p:attrNameLst>
+                                          <p:attrName>ppt_x</p:attrName>
+                                        </p:attrNameLst>
+                                      </p:cBhvr>
+                                      <p:tavLst>
+                                        <p:tav tm="0">
+                                          <p:val>
+                                            <p:strVal val="#ppt_x"/>
+                                          </p:val>
+                                        </p:tav>
+                                        <p:tav tm="100000">
+                                          <p:val>
+                                            <p:strVal val="#ppt_x"/>
+                                          </p:val>
+                                        </p:tav>
+                                      </p:tavLst>
+                                    </p:anim>
+                                    <p:anim calcmode="lin" valueType="num">
+                                      <p:cBhvr additive="base">
+                                        <p:cTn id="34" dur="500" fill="hold"/>
+                                        <p:tgtEl>
+                                          <p:spTgt spid="5">
+                                            <p:graphicEl>
+                                              <a:dgm id="{9CB32483-B33A-4E87-AEDF-55A4FDC414F6}"/>
+                                            </p:graphicEl>
+                                          </p:spTgt>
+                                        </p:tgtEl>
+                                        <p:attrNameLst>
+                                          <p:attrName>ppt_y</p:attrName>
+                                        </p:attrNameLst>
+                                      </p:cBhvr>
+                                      <p:tavLst>
+                                        <p:tav tm="0">
+                                          <p:val>
+                                            <p:strVal val="1+#ppt_h/2"/>
+                                          </p:val>
+                                        </p:tav>
+                                        <p:tav tm="100000">
+                                          <p:val>
+                                            <p:strVal val="#ppt_y"/>
+                                          </p:val>
+                                        </p:tav>
+                                      </p:tavLst>
+                                    </p:anim>
+                                  </p:childTnLst>
+                                </p:cTn>
+                              </p:par>
+                            </p:childTnLst>
+                          </p:cTn>
+                        </p:par>
+                      </p:childTnLst>
+                    </p:cTn>
+                  </p:par>
+                </p:childTnLst>
+              </p:cTn>
+              <p:prevCondLst>
+                <p:cond evt="onPrev" delay="0">
+                  <p:tgtEl>
+                    <p:sldTgt/>
+                  </p:tgtEl>
+                </p:cond>
+              </p:prevCondLst>
+              <p:nextCondLst>
+                <p:cond evt="onNext" delay="0">
+                  <p:tgtEl>
+                    <p:sldTgt/>
+                  </p:tgtEl>
+                </p:cond>
+              </p:nextCondLst>
+            </p:seq>
+          </p:childTnLst>
+        </p:cTn>
+      </p:par>
+    </p:tnLst>
+    <p:bldLst>
+      <p:bldGraphic spid="5" grpId="0">
+        <p:bldSub>
+          <a:bldDgm bld="one"/>
+        </p:bldSub>
+      </p:bldGraphic>
+    </p:bldLst>
+  </p:timing>
 </p:sld>
 </file>
 
@@ -25674,6 +26094,1282 @@
   <p:clrMapOvr>
     <a:masterClrMapping/>
   </p:clrMapOvr>
+  <p:transition spd="slow">
+    <p:push dir="u"/>
+  </p:transition>
+  <p:timing>
+    <p:tnLst>
+      <p:par>
+        <p:cTn id="1" dur="indefinite" restart="never" nodeType="tmRoot">
+          <p:childTnLst>
+            <p:seq concurrent="1" nextAc="seek">
+              <p:cTn id="2" dur="indefinite" nodeType="mainSeq">
+                <p:childTnLst>
+                  <p:par>
+                    <p:cTn id="3" fill="hold">
+                      <p:stCondLst>
+                        <p:cond delay="indefinite"/>
+                      </p:stCondLst>
+                      <p:childTnLst>
+                        <p:par>
+                          <p:cTn id="4" fill="hold">
+                            <p:stCondLst>
+                              <p:cond delay="0"/>
+                            </p:stCondLst>
+                            <p:childTnLst>
+                              <p:par>
+                                <p:cTn id="5" presetID="47" presetClass="entr" presetSubtype="0" fill="hold" grpId="0" nodeType="clickEffect">
+                                  <p:stCondLst>
+                                    <p:cond delay="0"/>
+                                  </p:stCondLst>
+                                  <p:childTnLst>
+                                    <p:set>
+                                      <p:cBhvr>
+                                        <p:cTn id="6" dur="1" fill="hold">
+                                          <p:stCondLst>
+                                            <p:cond delay="0"/>
+                                          </p:stCondLst>
+                                        </p:cTn>
+                                        <p:tgtEl>
+                                          <p:spTgt spid="21">
+                                            <p:graphicEl>
+                                              <a:dgm id="{EA9BD1AF-B094-40CB-A256-212FCF471D2E}"/>
+                                            </p:graphicEl>
+                                          </p:spTgt>
+                                        </p:tgtEl>
+                                        <p:attrNameLst>
+                                          <p:attrName>style.visibility</p:attrName>
+                                        </p:attrNameLst>
+                                      </p:cBhvr>
+                                      <p:to>
+                                        <p:strVal val="visible"/>
+                                      </p:to>
+                                    </p:set>
+                                    <p:animEffect transition="in" filter="fade">
+                                      <p:cBhvr>
+                                        <p:cTn id="7" dur="1000"/>
+                                        <p:tgtEl>
+                                          <p:spTgt spid="21">
+                                            <p:graphicEl>
+                                              <a:dgm id="{EA9BD1AF-B094-40CB-A256-212FCF471D2E}"/>
+                                            </p:graphicEl>
+                                          </p:spTgt>
+                                        </p:tgtEl>
+                                      </p:cBhvr>
+                                    </p:animEffect>
+                                    <p:anim calcmode="lin" valueType="num">
+                                      <p:cBhvr>
+                                        <p:cTn id="8" dur="1000" fill="hold"/>
+                                        <p:tgtEl>
+                                          <p:spTgt spid="21">
+                                            <p:graphicEl>
+                                              <a:dgm id="{EA9BD1AF-B094-40CB-A256-212FCF471D2E}"/>
+                                            </p:graphicEl>
+                                          </p:spTgt>
+                                        </p:tgtEl>
+                                        <p:attrNameLst>
+                                          <p:attrName>ppt_x</p:attrName>
+                                        </p:attrNameLst>
+                                      </p:cBhvr>
+                                      <p:tavLst>
+                                        <p:tav tm="0">
+                                          <p:val>
+                                            <p:strVal val="#ppt_x"/>
+                                          </p:val>
+                                        </p:tav>
+                                        <p:tav tm="100000">
+                                          <p:val>
+                                            <p:strVal val="#ppt_x"/>
+                                          </p:val>
+                                        </p:tav>
+                                      </p:tavLst>
+                                    </p:anim>
+                                    <p:anim calcmode="lin" valueType="num">
+                                      <p:cBhvr>
+                                        <p:cTn id="9" dur="1000" fill="hold"/>
+                                        <p:tgtEl>
+                                          <p:spTgt spid="21">
+                                            <p:graphicEl>
+                                              <a:dgm id="{EA9BD1AF-B094-40CB-A256-212FCF471D2E}"/>
+                                            </p:graphicEl>
+                                          </p:spTgt>
+                                        </p:tgtEl>
+                                        <p:attrNameLst>
+                                          <p:attrName>ppt_y</p:attrName>
+                                        </p:attrNameLst>
+                                      </p:cBhvr>
+                                      <p:tavLst>
+                                        <p:tav tm="0">
+                                          <p:val>
+                                            <p:strVal val="#ppt_y-.1"/>
+                                          </p:val>
+                                        </p:tav>
+                                        <p:tav tm="100000">
+                                          <p:val>
+                                            <p:strVal val="#ppt_y"/>
+                                          </p:val>
+                                        </p:tav>
+                                      </p:tavLst>
+                                    </p:anim>
+                                  </p:childTnLst>
+                                </p:cTn>
+                              </p:par>
+                              <p:par>
+                                <p:cTn id="10" presetID="47" presetClass="entr" presetSubtype="0" fill="hold" grpId="0" nodeType="withEffect">
+                                  <p:stCondLst>
+                                    <p:cond delay="0"/>
+                                  </p:stCondLst>
+                                  <p:childTnLst>
+                                    <p:set>
+                                      <p:cBhvr>
+                                        <p:cTn id="11" dur="1" fill="hold">
+                                          <p:stCondLst>
+                                            <p:cond delay="0"/>
+                                          </p:stCondLst>
+                                        </p:cTn>
+                                        <p:tgtEl>
+                                          <p:spTgt spid="21">
+                                            <p:graphicEl>
+                                              <a:dgm id="{58B66CF1-AE87-47F8-BB70-926EAA63D425}"/>
+                                            </p:graphicEl>
+                                          </p:spTgt>
+                                        </p:tgtEl>
+                                        <p:attrNameLst>
+                                          <p:attrName>style.visibility</p:attrName>
+                                        </p:attrNameLst>
+                                      </p:cBhvr>
+                                      <p:to>
+                                        <p:strVal val="visible"/>
+                                      </p:to>
+                                    </p:set>
+                                    <p:animEffect transition="in" filter="fade">
+                                      <p:cBhvr>
+                                        <p:cTn id="12" dur="1000"/>
+                                        <p:tgtEl>
+                                          <p:spTgt spid="21">
+                                            <p:graphicEl>
+                                              <a:dgm id="{58B66CF1-AE87-47F8-BB70-926EAA63D425}"/>
+                                            </p:graphicEl>
+                                          </p:spTgt>
+                                        </p:tgtEl>
+                                      </p:cBhvr>
+                                    </p:animEffect>
+                                    <p:anim calcmode="lin" valueType="num">
+                                      <p:cBhvr>
+                                        <p:cTn id="13" dur="1000" fill="hold"/>
+                                        <p:tgtEl>
+                                          <p:spTgt spid="21">
+                                            <p:graphicEl>
+                                              <a:dgm id="{58B66CF1-AE87-47F8-BB70-926EAA63D425}"/>
+                                            </p:graphicEl>
+                                          </p:spTgt>
+                                        </p:tgtEl>
+                                        <p:attrNameLst>
+                                          <p:attrName>ppt_x</p:attrName>
+                                        </p:attrNameLst>
+                                      </p:cBhvr>
+                                      <p:tavLst>
+                                        <p:tav tm="0">
+                                          <p:val>
+                                            <p:strVal val="#ppt_x"/>
+                                          </p:val>
+                                        </p:tav>
+                                        <p:tav tm="100000">
+                                          <p:val>
+                                            <p:strVal val="#ppt_x"/>
+                                          </p:val>
+                                        </p:tav>
+                                      </p:tavLst>
+                                    </p:anim>
+                                    <p:anim calcmode="lin" valueType="num">
+                                      <p:cBhvr>
+                                        <p:cTn id="14" dur="1000" fill="hold"/>
+                                        <p:tgtEl>
+                                          <p:spTgt spid="21">
+                                            <p:graphicEl>
+                                              <a:dgm id="{58B66CF1-AE87-47F8-BB70-926EAA63D425}"/>
+                                            </p:graphicEl>
+                                          </p:spTgt>
+                                        </p:tgtEl>
+                                        <p:attrNameLst>
+                                          <p:attrName>ppt_y</p:attrName>
+                                        </p:attrNameLst>
+                                      </p:cBhvr>
+                                      <p:tavLst>
+                                        <p:tav tm="0">
+                                          <p:val>
+                                            <p:strVal val="#ppt_y-.1"/>
+                                          </p:val>
+                                        </p:tav>
+                                        <p:tav tm="100000">
+                                          <p:val>
+                                            <p:strVal val="#ppt_y"/>
+                                          </p:val>
+                                        </p:tav>
+                                      </p:tavLst>
+                                    </p:anim>
+                                  </p:childTnLst>
+                                </p:cTn>
+                              </p:par>
+                            </p:childTnLst>
+                          </p:cTn>
+                        </p:par>
+                      </p:childTnLst>
+                    </p:cTn>
+                  </p:par>
+                  <p:par>
+                    <p:cTn id="15" fill="hold">
+                      <p:stCondLst>
+                        <p:cond delay="indefinite"/>
+                      </p:stCondLst>
+                      <p:childTnLst>
+                        <p:par>
+                          <p:cTn id="16" fill="hold">
+                            <p:stCondLst>
+                              <p:cond delay="0"/>
+                            </p:stCondLst>
+                            <p:childTnLst>
+                              <p:par>
+                                <p:cTn id="17" presetID="47" presetClass="entr" presetSubtype="0" fill="hold" grpId="0" nodeType="clickEffect">
+                                  <p:stCondLst>
+                                    <p:cond delay="0"/>
+                                  </p:stCondLst>
+                                  <p:childTnLst>
+                                    <p:set>
+                                      <p:cBhvr>
+                                        <p:cTn id="18" dur="1" fill="hold">
+                                          <p:stCondLst>
+                                            <p:cond delay="0"/>
+                                          </p:stCondLst>
+                                        </p:cTn>
+                                        <p:tgtEl>
+                                          <p:spTgt spid="21">
+                                            <p:graphicEl>
+                                              <a:dgm id="{28E99E86-DB17-495B-83BC-81434D1C3599}"/>
+                                            </p:graphicEl>
+                                          </p:spTgt>
+                                        </p:tgtEl>
+                                        <p:attrNameLst>
+                                          <p:attrName>style.visibility</p:attrName>
+                                        </p:attrNameLst>
+                                      </p:cBhvr>
+                                      <p:to>
+                                        <p:strVal val="visible"/>
+                                      </p:to>
+                                    </p:set>
+                                    <p:animEffect transition="in" filter="fade">
+                                      <p:cBhvr>
+                                        <p:cTn id="19" dur="1000"/>
+                                        <p:tgtEl>
+                                          <p:spTgt spid="21">
+                                            <p:graphicEl>
+                                              <a:dgm id="{28E99E86-DB17-495B-83BC-81434D1C3599}"/>
+                                            </p:graphicEl>
+                                          </p:spTgt>
+                                        </p:tgtEl>
+                                      </p:cBhvr>
+                                    </p:animEffect>
+                                    <p:anim calcmode="lin" valueType="num">
+                                      <p:cBhvr>
+                                        <p:cTn id="20" dur="1000" fill="hold"/>
+                                        <p:tgtEl>
+                                          <p:spTgt spid="21">
+                                            <p:graphicEl>
+                                              <a:dgm id="{28E99E86-DB17-495B-83BC-81434D1C3599}"/>
+                                            </p:graphicEl>
+                                          </p:spTgt>
+                                        </p:tgtEl>
+                                        <p:attrNameLst>
+                                          <p:attrName>ppt_x</p:attrName>
+                                        </p:attrNameLst>
+                                      </p:cBhvr>
+                                      <p:tavLst>
+                                        <p:tav tm="0">
+                                          <p:val>
+                                            <p:strVal val="#ppt_x"/>
+                                          </p:val>
+                                        </p:tav>
+                                        <p:tav tm="100000">
+                                          <p:val>
+                                            <p:strVal val="#ppt_x"/>
+                                          </p:val>
+                                        </p:tav>
+                                      </p:tavLst>
+                                    </p:anim>
+                                    <p:anim calcmode="lin" valueType="num">
+                                      <p:cBhvr>
+                                        <p:cTn id="21" dur="1000" fill="hold"/>
+                                        <p:tgtEl>
+                                          <p:spTgt spid="21">
+                                            <p:graphicEl>
+                                              <a:dgm id="{28E99E86-DB17-495B-83BC-81434D1C3599}"/>
+                                            </p:graphicEl>
+                                          </p:spTgt>
+                                        </p:tgtEl>
+                                        <p:attrNameLst>
+                                          <p:attrName>ppt_y</p:attrName>
+                                        </p:attrNameLst>
+                                      </p:cBhvr>
+                                      <p:tavLst>
+                                        <p:tav tm="0">
+                                          <p:val>
+                                            <p:strVal val="#ppt_y-.1"/>
+                                          </p:val>
+                                        </p:tav>
+                                        <p:tav tm="100000">
+                                          <p:val>
+                                            <p:strVal val="#ppt_y"/>
+                                          </p:val>
+                                        </p:tav>
+                                      </p:tavLst>
+                                    </p:anim>
+                                  </p:childTnLst>
+                                </p:cTn>
+                              </p:par>
+                              <p:par>
+                                <p:cTn id="22" presetID="47" presetClass="entr" presetSubtype="0" fill="hold" grpId="0" nodeType="withEffect">
+                                  <p:stCondLst>
+                                    <p:cond delay="0"/>
+                                  </p:stCondLst>
+                                  <p:childTnLst>
+                                    <p:set>
+                                      <p:cBhvr>
+                                        <p:cTn id="23" dur="1" fill="hold">
+                                          <p:stCondLst>
+                                            <p:cond delay="0"/>
+                                          </p:stCondLst>
+                                        </p:cTn>
+                                        <p:tgtEl>
+                                          <p:spTgt spid="21">
+                                            <p:graphicEl>
+                                              <a:dgm id="{2CE8BB85-B0DE-41EC-9ECC-16E6E5A24B03}"/>
+                                            </p:graphicEl>
+                                          </p:spTgt>
+                                        </p:tgtEl>
+                                        <p:attrNameLst>
+                                          <p:attrName>style.visibility</p:attrName>
+                                        </p:attrNameLst>
+                                      </p:cBhvr>
+                                      <p:to>
+                                        <p:strVal val="visible"/>
+                                      </p:to>
+                                    </p:set>
+                                    <p:animEffect transition="in" filter="fade">
+                                      <p:cBhvr>
+                                        <p:cTn id="24" dur="1000"/>
+                                        <p:tgtEl>
+                                          <p:spTgt spid="21">
+                                            <p:graphicEl>
+                                              <a:dgm id="{2CE8BB85-B0DE-41EC-9ECC-16E6E5A24B03}"/>
+                                            </p:graphicEl>
+                                          </p:spTgt>
+                                        </p:tgtEl>
+                                      </p:cBhvr>
+                                    </p:animEffect>
+                                    <p:anim calcmode="lin" valueType="num">
+                                      <p:cBhvr>
+                                        <p:cTn id="25" dur="1000" fill="hold"/>
+                                        <p:tgtEl>
+                                          <p:spTgt spid="21">
+                                            <p:graphicEl>
+                                              <a:dgm id="{2CE8BB85-B0DE-41EC-9ECC-16E6E5A24B03}"/>
+                                            </p:graphicEl>
+                                          </p:spTgt>
+                                        </p:tgtEl>
+                                        <p:attrNameLst>
+                                          <p:attrName>ppt_x</p:attrName>
+                                        </p:attrNameLst>
+                                      </p:cBhvr>
+                                      <p:tavLst>
+                                        <p:tav tm="0">
+                                          <p:val>
+                                            <p:strVal val="#ppt_x"/>
+                                          </p:val>
+                                        </p:tav>
+                                        <p:tav tm="100000">
+                                          <p:val>
+                                            <p:strVal val="#ppt_x"/>
+                                          </p:val>
+                                        </p:tav>
+                                      </p:tavLst>
+                                    </p:anim>
+                                    <p:anim calcmode="lin" valueType="num">
+                                      <p:cBhvr>
+                                        <p:cTn id="26" dur="1000" fill="hold"/>
+                                        <p:tgtEl>
+                                          <p:spTgt spid="21">
+                                            <p:graphicEl>
+                                              <a:dgm id="{2CE8BB85-B0DE-41EC-9ECC-16E6E5A24B03}"/>
+                                            </p:graphicEl>
+                                          </p:spTgt>
+                                        </p:tgtEl>
+                                        <p:attrNameLst>
+                                          <p:attrName>ppt_y</p:attrName>
+                                        </p:attrNameLst>
+                                      </p:cBhvr>
+                                      <p:tavLst>
+                                        <p:tav tm="0">
+                                          <p:val>
+                                            <p:strVal val="#ppt_y-.1"/>
+                                          </p:val>
+                                        </p:tav>
+                                        <p:tav tm="100000">
+                                          <p:val>
+                                            <p:strVal val="#ppt_y"/>
+                                          </p:val>
+                                        </p:tav>
+                                      </p:tavLst>
+                                    </p:anim>
+                                  </p:childTnLst>
+                                </p:cTn>
+                              </p:par>
+                              <p:par>
+                                <p:cTn id="27" presetID="47" presetClass="entr" presetSubtype="0" fill="hold" grpId="0" nodeType="withEffect">
+                                  <p:stCondLst>
+                                    <p:cond delay="0"/>
+                                  </p:stCondLst>
+                                  <p:childTnLst>
+                                    <p:set>
+                                      <p:cBhvr>
+                                        <p:cTn id="28" dur="1" fill="hold">
+                                          <p:stCondLst>
+                                            <p:cond delay="0"/>
+                                          </p:stCondLst>
+                                        </p:cTn>
+                                        <p:tgtEl>
+                                          <p:spTgt spid="21">
+                                            <p:graphicEl>
+                                              <a:dgm id="{71ACD07E-5C5C-4127-82E6-825FD6C048C1}"/>
+                                            </p:graphicEl>
+                                          </p:spTgt>
+                                        </p:tgtEl>
+                                        <p:attrNameLst>
+                                          <p:attrName>style.visibility</p:attrName>
+                                        </p:attrNameLst>
+                                      </p:cBhvr>
+                                      <p:to>
+                                        <p:strVal val="visible"/>
+                                      </p:to>
+                                    </p:set>
+                                    <p:animEffect transition="in" filter="fade">
+                                      <p:cBhvr>
+                                        <p:cTn id="29" dur="1000"/>
+                                        <p:tgtEl>
+                                          <p:spTgt spid="21">
+                                            <p:graphicEl>
+                                              <a:dgm id="{71ACD07E-5C5C-4127-82E6-825FD6C048C1}"/>
+                                            </p:graphicEl>
+                                          </p:spTgt>
+                                        </p:tgtEl>
+                                      </p:cBhvr>
+                                    </p:animEffect>
+                                    <p:anim calcmode="lin" valueType="num">
+                                      <p:cBhvr>
+                                        <p:cTn id="30" dur="1000" fill="hold"/>
+                                        <p:tgtEl>
+                                          <p:spTgt spid="21">
+                                            <p:graphicEl>
+                                              <a:dgm id="{71ACD07E-5C5C-4127-82E6-825FD6C048C1}"/>
+                                            </p:graphicEl>
+                                          </p:spTgt>
+                                        </p:tgtEl>
+                                        <p:attrNameLst>
+                                          <p:attrName>ppt_x</p:attrName>
+                                        </p:attrNameLst>
+                                      </p:cBhvr>
+                                      <p:tavLst>
+                                        <p:tav tm="0">
+                                          <p:val>
+                                            <p:strVal val="#ppt_x"/>
+                                          </p:val>
+                                        </p:tav>
+                                        <p:tav tm="100000">
+                                          <p:val>
+                                            <p:strVal val="#ppt_x"/>
+                                          </p:val>
+                                        </p:tav>
+                                      </p:tavLst>
+                                    </p:anim>
+                                    <p:anim calcmode="lin" valueType="num">
+                                      <p:cBhvr>
+                                        <p:cTn id="31" dur="1000" fill="hold"/>
+                                        <p:tgtEl>
+                                          <p:spTgt spid="21">
+                                            <p:graphicEl>
+                                              <a:dgm id="{71ACD07E-5C5C-4127-82E6-825FD6C048C1}"/>
+                                            </p:graphicEl>
+                                          </p:spTgt>
+                                        </p:tgtEl>
+                                        <p:attrNameLst>
+                                          <p:attrName>ppt_y</p:attrName>
+                                        </p:attrNameLst>
+                                      </p:cBhvr>
+                                      <p:tavLst>
+                                        <p:tav tm="0">
+                                          <p:val>
+                                            <p:strVal val="#ppt_y-.1"/>
+                                          </p:val>
+                                        </p:tav>
+                                        <p:tav tm="100000">
+                                          <p:val>
+                                            <p:strVal val="#ppt_y"/>
+                                          </p:val>
+                                        </p:tav>
+                                      </p:tavLst>
+                                    </p:anim>
+                                  </p:childTnLst>
+                                </p:cTn>
+                              </p:par>
+                            </p:childTnLst>
+                          </p:cTn>
+                        </p:par>
+                      </p:childTnLst>
+                    </p:cTn>
+                  </p:par>
+                  <p:par>
+                    <p:cTn id="32" fill="hold">
+                      <p:stCondLst>
+                        <p:cond delay="indefinite"/>
+                      </p:stCondLst>
+                      <p:childTnLst>
+                        <p:par>
+                          <p:cTn id="33" fill="hold">
+                            <p:stCondLst>
+                              <p:cond delay="0"/>
+                            </p:stCondLst>
+                            <p:childTnLst>
+                              <p:par>
+                                <p:cTn id="34" presetID="47" presetClass="entr" presetSubtype="0" fill="hold" grpId="0" nodeType="clickEffect">
+                                  <p:stCondLst>
+                                    <p:cond delay="0"/>
+                                  </p:stCondLst>
+                                  <p:childTnLst>
+                                    <p:set>
+                                      <p:cBhvr>
+                                        <p:cTn id="35" dur="1" fill="hold">
+                                          <p:stCondLst>
+                                            <p:cond delay="0"/>
+                                          </p:stCondLst>
+                                        </p:cTn>
+                                        <p:tgtEl>
+                                          <p:spTgt spid="21">
+                                            <p:graphicEl>
+                                              <a:dgm id="{8C98C6A0-47E1-40AD-A3E7-9B666AB0C5F5}"/>
+                                            </p:graphicEl>
+                                          </p:spTgt>
+                                        </p:tgtEl>
+                                        <p:attrNameLst>
+                                          <p:attrName>style.visibility</p:attrName>
+                                        </p:attrNameLst>
+                                      </p:cBhvr>
+                                      <p:to>
+                                        <p:strVal val="visible"/>
+                                      </p:to>
+                                    </p:set>
+                                    <p:animEffect transition="in" filter="fade">
+                                      <p:cBhvr>
+                                        <p:cTn id="36" dur="1000"/>
+                                        <p:tgtEl>
+                                          <p:spTgt spid="21">
+                                            <p:graphicEl>
+                                              <a:dgm id="{8C98C6A0-47E1-40AD-A3E7-9B666AB0C5F5}"/>
+                                            </p:graphicEl>
+                                          </p:spTgt>
+                                        </p:tgtEl>
+                                      </p:cBhvr>
+                                    </p:animEffect>
+                                    <p:anim calcmode="lin" valueType="num">
+                                      <p:cBhvr>
+                                        <p:cTn id="37" dur="1000" fill="hold"/>
+                                        <p:tgtEl>
+                                          <p:spTgt spid="21">
+                                            <p:graphicEl>
+                                              <a:dgm id="{8C98C6A0-47E1-40AD-A3E7-9B666AB0C5F5}"/>
+                                            </p:graphicEl>
+                                          </p:spTgt>
+                                        </p:tgtEl>
+                                        <p:attrNameLst>
+                                          <p:attrName>ppt_x</p:attrName>
+                                        </p:attrNameLst>
+                                      </p:cBhvr>
+                                      <p:tavLst>
+                                        <p:tav tm="0">
+                                          <p:val>
+                                            <p:strVal val="#ppt_x"/>
+                                          </p:val>
+                                        </p:tav>
+                                        <p:tav tm="100000">
+                                          <p:val>
+                                            <p:strVal val="#ppt_x"/>
+                                          </p:val>
+                                        </p:tav>
+                                      </p:tavLst>
+                                    </p:anim>
+                                    <p:anim calcmode="lin" valueType="num">
+                                      <p:cBhvr>
+                                        <p:cTn id="38" dur="1000" fill="hold"/>
+                                        <p:tgtEl>
+                                          <p:spTgt spid="21">
+                                            <p:graphicEl>
+                                              <a:dgm id="{8C98C6A0-47E1-40AD-A3E7-9B666AB0C5F5}"/>
+                                            </p:graphicEl>
+                                          </p:spTgt>
+                                        </p:tgtEl>
+                                        <p:attrNameLst>
+                                          <p:attrName>ppt_y</p:attrName>
+                                        </p:attrNameLst>
+                                      </p:cBhvr>
+                                      <p:tavLst>
+                                        <p:tav tm="0">
+                                          <p:val>
+                                            <p:strVal val="#ppt_y-.1"/>
+                                          </p:val>
+                                        </p:tav>
+                                        <p:tav tm="100000">
+                                          <p:val>
+                                            <p:strVal val="#ppt_y"/>
+                                          </p:val>
+                                        </p:tav>
+                                      </p:tavLst>
+                                    </p:anim>
+                                  </p:childTnLst>
+                                </p:cTn>
+                              </p:par>
+                              <p:par>
+                                <p:cTn id="39" presetID="47" presetClass="entr" presetSubtype="0" fill="hold" grpId="0" nodeType="withEffect">
+                                  <p:stCondLst>
+                                    <p:cond delay="0"/>
+                                  </p:stCondLst>
+                                  <p:childTnLst>
+                                    <p:set>
+                                      <p:cBhvr>
+                                        <p:cTn id="40" dur="1" fill="hold">
+                                          <p:stCondLst>
+                                            <p:cond delay="0"/>
+                                          </p:stCondLst>
+                                        </p:cTn>
+                                        <p:tgtEl>
+                                          <p:spTgt spid="21">
+                                            <p:graphicEl>
+                                              <a:dgm id="{8FB8042C-C191-4F7B-9AFF-769D17D7DCB3}"/>
+                                            </p:graphicEl>
+                                          </p:spTgt>
+                                        </p:tgtEl>
+                                        <p:attrNameLst>
+                                          <p:attrName>style.visibility</p:attrName>
+                                        </p:attrNameLst>
+                                      </p:cBhvr>
+                                      <p:to>
+                                        <p:strVal val="visible"/>
+                                      </p:to>
+                                    </p:set>
+                                    <p:animEffect transition="in" filter="fade">
+                                      <p:cBhvr>
+                                        <p:cTn id="41" dur="1000"/>
+                                        <p:tgtEl>
+                                          <p:spTgt spid="21">
+                                            <p:graphicEl>
+                                              <a:dgm id="{8FB8042C-C191-4F7B-9AFF-769D17D7DCB3}"/>
+                                            </p:graphicEl>
+                                          </p:spTgt>
+                                        </p:tgtEl>
+                                      </p:cBhvr>
+                                    </p:animEffect>
+                                    <p:anim calcmode="lin" valueType="num">
+                                      <p:cBhvr>
+                                        <p:cTn id="42" dur="1000" fill="hold"/>
+                                        <p:tgtEl>
+                                          <p:spTgt spid="21">
+                                            <p:graphicEl>
+                                              <a:dgm id="{8FB8042C-C191-4F7B-9AFF-769D17D7DCB3}"/>
+                                            </p:graphicEl>
+                                          </p:spTgt>
+                                        </p:tgtEl>
+                                        <p:attrNameLst>
+                                          <p:attrName>ppt_x</p:attrName>
+                                        </p:attrNameLst>
+                                      </p:cBhvr>
+                                      <p:tavLst>
+                                        <p:tav tm="0">
+                                          <p:val>
+                                            <p:strVal val="#ppt_x"/>
+                                          </p:val>
+                                        </p:tav>
+                                        <p:tav tm="100000">
+                                          <p:val>
+                                            <p:strVal val="#ppt_x"/>
+                                          </p:val>
+                                        </p:tav>
+                                      </p:tavLst>
+                                    </p:anim>
+                                    <p:anim calcmode="lin" valueType="num">
+                                      <p:cBhvr>
+                                        <p:cTn id="43" dur="1000" fill="hold"/>
+                                        <p:tgtEl>
+                                          <p:spTgt spid="21">
+                                            <p:graphicEl>
+                                              <a:dgm id="{8FB8042C-C191-4F7B-9AFF-769D17D7DCB3}"/>
+                                            </p:graphicEl>
+                                          </p:spTgt>
+                                        </p:tgtEl>
+                                        <p:attrNameLst>
+                                          <p:attrName>ppt_y</p:attrName>
+                                        </p:attrNameLst>
+                                      </p:cBhvr>
+                                      <p:tavLst>
+                                        <p:tav tm="0">
+                                          <p:val>
+                                            <p:strVal val="#ppt_y-.1"/>
+                                          </p:val>
+                                        </p:tav>
+                                        <p:tav tm="100000">
+                                          <p:val>
+                                            <p:strVal val="#ppt_y"/>
+                                          </p:val>
+                                        </p:tav>
+                                      </p:tavLst>
+                                    </p:anim>
+                                  </p:childTnLst>
+                                </p:cTn>
+                              </p:par>
+                              <p:par>
+                                <p:cTn id="44" presetID="47" presetClass="entr" presetSubtype="0" fill="hold" grpId="0" nodeType="withEffect">
+                                  <p:stCondLst>
+                                    <p:cond delay="0"/>
+                                  </p:stCondLst>
+                                  <p:childTnLst>
+                                    <p:set>
+                                      <p:cBhvr>
+                                        <p:cTn id="45" dur="1" fill="hold">
+                                          <p:stCondLst>
+                                            <p:cond delay="0"/>
+                                          </p:stCondLst>
+                                        </p:cTn>
+                                        <p:tgtEl>
+                                          <p:spTgt spid="21">
+                                            <p:graphicEl>
+                                              <a:dgm id="{CC955205-0AFE-4FFA-9761-717C3A20BA31}"/>
+                                            </p:graphicEl>
+                                          </p:spTgt>
+                                        </p:tgtEl>
+                                        <p:attrNameLst>
+                                          <p:attrName>style.visibility</p:attrName>
+                                        </p:attrNameLst>
+                                      </p:cBhvr>
+                                      <p:to>
+                                        <p:strVal val="visible"/>
+                                      </p:to>
+                                    </p:set>
+                                    <p:animEffect transition="in" filter="fade">
+                                      <p:cBhvr>
+                                        <p:cTn id="46" dur="1000"/>
+                                        <p:tgtEl>
+                                          <p:spTgt spid="21">
+                                            <p:graphicEl>
+                                              <a:dgm id="{CC955205-0AFE-4FFA-9761-717C3A20BA31}"/>
+                                            </p:graphicEl>
+                                          </p:spTgt>
+                                        </p:tgtEl>
+                                      </p:cBhvr>
+                                    </p:animEffect>
+                                    <p:anim calcmode="lin" valueType="num">
+                                      <p:cBhvr>
+                                        <p:cTn id="47" dur="1000" fill="hold"/>
+                                        <p:tgtEl>
+                                          <p:spTgt spid="21">
+                                            <p:graphicEl>
+                                              <a:dgm id="{CC955205-0AFE-4FFA-9761-717C3A20BA31}"/>
+                                            </p:graphicEl>
+                                          </p:spTgt>
+                                        </p:tgtEl>
+                                        <p:attrNameLst>
+                                          <p:attrName>ppt_x</p:attrName>
+                                        </p:attrNameLst>
+                                      </p:cBhvr>
+                                      <p:tavLst>
+                                        <p:tav tm="0">
+                                          <p:val>
+                                            <p:strVal val="#ppt_x"/>
+                                          </p:val>
+                                        </p:tav>
+                                        <p:tav tm="100000">
+                                          <p:val>
+                                            <p:strVal val="#ppt_x"/>
+                                          </p:val>
+                                        </p:tav>
+                                      </p:tavLst>
+                                    </p:anim>
+                                    <p:anim calcmode="lin" valueType="num">
+                                      <p:cBhvr>
+                                        <p:cTn id="48" dur="1000" fill="hold"/>
+                                        <p:tgtEl>
+                                          <p:spTgt spid="21">
+                                            <p:graphicEl>
+                                              <a:dgm id="{CC955205-0AFE-4FFA-9761-717C3A20BA31}"/>
+                                            </p:graphicEl>
+                                          </p:spTgt>
+                                        </p:tgtEl>
+                                        <p:attrNameLst>
+                                          <p:attrName>ppt_y</p:attrName>
+                                        </p:attrNameLst>
+                                      </p:cBhvr>
+                                      <p:tavLst>
+                                        <p:tav tm="0">
+                                          <p:val>
+                                            <p:strVal val="#ppt_y-.1"/>
+                                          </p:val>
+                                        </p:tav>
+                                        <p:tav tm="100000">
+                                          <p:val>
+                                            <p:strVal val="#ppt_y"/>
+                                          </p:val>
+                                        </p:tav>
+                                      </p:tavLst>
+                                    </p:anim>
+                                  </p:childTnLst>
+                                </p:cTn>
+                              </p:par>
+                            </p:childTnLst>
+                          </p:cTn>
+                        </p:par>
+                      </p:childTnLst>
+                    </p:cTn>
+                  </p:par>
+                  <p:par>
+                    <p:cTn id="49" fill="hold">
+                      <p:stCondLst>
+                        <p:cond delay="indefinite"/>
+                      </p:stCondLst>
+                      <p:childTnLst>
+                        <p:par>
+                          <p:cTn id="50" fill="hold">
+                            <p:stCondLst>
+                              <p:cond delay="0"/>
+                            </p:stCondLst>
+                            <p:childTnLst>
+                              <p:par>
+                                <p:cTn id="51" presetID="47" presetClass="entr" presetSubtype="0" fill="hold" grpId="0" nodeType="clickEffect">
+                                  <p:stCondLst>
+                                    <p:cond delay="0"/>
+                                  </p:stCondLst>
+                                  <p:childTnLst>
+                                    <p:set>
+                                      <p:cBhvr>
+                                        <p:cTn id="52" dur="1" fill="hold">
+                                          <p:stCondLst>
+                                            <p:cond delay="0"/>
+                                          </p:stCondLst>
+                                        </p:cTn>
+                                        <p:tgtEl>
+                                          <p:spTgt spid="21">
+                                            <p:graphicEl>
+                                              <a:dgm id="{BD8B359F-68C6-4C65-B5BE-ECA982C2DC8C}"/>
+                                            </p:graphicEl>
+                                          </p:spTgt>
+                                        </p:tgtEl>
+                                        <p:attrNameLst>
+                                          <p:attrName>style.visibility</p:attrName>
+                                        </p:attrNameLst>
+                                      </p:cBhvr>
+                                      <p:to>
+                                        <p:strVal val="visible"/>
+                                      </p:to>
+                                    </p:set>
+                                    <p:animEffect transition="in" filter="fade">
+                                      <p:cBhvr>
+                                        <p:cTn id="53" dur="1000"/>
+                                        <p:tgtEl>
+                                          <p:spTgt spid="21">
+                                            <p:graphicEl>
+                                              <a:dgm id="{BD8B359F-68C6-4C65-B5BE-ECA982C2DC8C}"/>
+                                            </p:graphicEl>
+                                          </p:spTgt>
+                                        </p:tgtEl>
+                                      </p:cBhvr>
+                                    </p:animEffect>
+                                    <p:anim calcmode="lin" valueType="num">
+                                      <p:cBhvr>
+                                        <p:cTn id="54" dur="1000" fill="hold"/>
+                                        <p:tgtEl>
+                                          <p:spTgt spid="21">
+                                            <p:graphicEl>
+                                              <a:dgm id="{BD8B359F-68C6-4C65-B5BE-ECA982C2DC8C}"/>
+                                            </p:graphicEl>
+                                          </p:spTgt>
+                                        </p:tgtEl>
+                                        <p:attrNameLst>
+                                          <p:attrName>ppt_x</p:attrName>
+                                        </p:attrNameLst>
+                                      </p:cBhvr>
+                                      <p:tavLst>
+                                        <p:tav tm="0">
+                                          <p:val>
+                                            <p:strVal val="#ppt_x"/>
+                                          </p:val>
+                                        </p:tav>
+                                        <p:tav tm="100000">
+                                          <p:val>
+                                            <p:strVal val="#ppt_x"/>
+                                          </p:val>
+                                        </p:tav>
+                                      </p:tavLst>
+                                    </p:anim>
+                                    <p:anim calcmode="lin" valueType="num">
+                                      <p:cBhvr>
+                                        <p:cTn id="55" dur="1000" fill="hold"/>
+                                        <p:tgtEl>
+                                          <p:spTgt spid="21">
+                                            <p:graphicEl>
+                                              <a:dgm id="{BD8B359F-68C6-4C65-B5BE-ECA982C2DC8C}"/>
+                                            </p:graphicEl>
+                                          </p:spTgt>
+                                        </p:tgtEl>
+                                        <p:attrNameLst>
+                                          <p:attrName>ppt_y</p:attrName>
+                                        </p:attrNameLst>
+                                      </p:cBhvr>
+                                      <p:tavLst>
+                                        <p:tav tm="0">
+                                          <p:val>
+                                            <p:strVal val="#ppt_y-.1"/>
+                                          </p:val>
+                                        </p:tav>
+                                        <p:tav tm="100000">
+                                          <p:val>
+                                            <p:strVal val="#ppt_y"/>
+                                          </p:val>
+                                        </p:tav>
+                                      </p:tavLst>
+                                    </p:anim>
+                                  </p:childTnLst>
+                                </p:cTn>
+                              </p:par>
+                              <p:par>
+                                <p:cTn id="56" presetID="47" presetClass="entr" presetSubtype="0" fill="hold" grpId="0" nodeType="withEffect">
+                                  <p:stCondLst>
+                                    <p:cond delay="0"/>
+                                  </p:stCondLst>
+                                  <p:childTnLst>
+                                    <p:set>
+                                      <p:cBhvr>
+                                        <p:cTn id="57" dur="1" fill="hold">
+                                          <p:stCondLst>
+                                            <p:cond delay="0"/>
+                                          </p:stCondLst>
+                                        </p:cTn>
+                                        <p:tgtEl>
+                                          <p:spTgt spid="21">
+                                            <p:graphicEl>
+                                              <a:dgm id="{7D9D54FF-E0CF-44D6-B567-B9A1C0D66C84}"/>
+                                            </p:graphicEl>
+                                          </p:spTgt>
+                                        </p:tgtEl>
+                                        <p:attrNameLst>
+                                          <p:attrName>style.visibility</p:attrName>
+                                        </p:attrNameLst>
+                                      </p:cBhvr>
+                                      <p:to>
+                                        <p:strVal val="visible"/>
+                                      </p:to>
+                                    </p:set>
+                                    <p:animEffect transition="in" filter="fade">
+                                      <p:cBhvr>
+                                        <p:cTn id="58" dur="1000"/>
+                                        <p:tgtEl>
+                                          <p:spTgt spid="21">
+                                            <p:graphicEl>
+                                              <a:dgm id="{7D9D54FF-E0CF-44D6-B567-B9A1C0D66C84}"/>
+                                            </p:graphicEl>
+                                          </p:spTgt>
+                                        </p:tgtEl>
+                                      </p:cBhvr>
+                                    </p:animEffect>
+                                    <p:anim calcmode="lin" valueType="num">
+                                      <p:cBhvr>
+                                        <p:cTn id="59" dur="1000" fill="hold"/>
+                                        <p:tgtEl>
+                                          <p:spTgt spid="21">
+                                            <p:graphicEl>
+                                              <a:dgm id="{7D9D54FF-E0CF-44D6-B567-B9A1C0D66C84}"/>
+                                            </p:graphicEl>
+                                          </p:spTgt>
+                                        </p:tgtEl>
+                                        <p:attrNameLst>
+                                          <p:attrName>ppt_x</p:attrName>
+                                        </p:attrNameLst>
+                                      </p:cBhvr>
+                                      <p:tavLst>
+                                        <p:tav tm="0">
+                                          <p:val>
+                                            <p:strVal val="#ppt_x"/>
+                                          </p:val>
+                                        </p:tav>
+                                        <p:tav tm="100000">
+                                          <p:val>
+                                            <p:strVal val="#ppt_x"/>
+                                          </p:val>
+                                        </p:tav>
+                                      </p:tavLst>
+                                    </p:anim>
+                                    <p:anim calcmode="lin" valueType="num">
+                                      <p:cBhvr>
+                                        <p:cTn id="60" dur="1000" fill="hold"/>
+                                        <p:tgtEl>
+                                          <p:spTgt spid="21">
+                                            <p:graphicEl>
+                                              <a:dgm id="{7D9D54FF-E0CF-44D6-B567-B9A1C0D66C84}"/>
+                                            </p:graphicEl>
+                                          </p:spTgt>
+                                        </p:tgtEl>
+                                        <p:attrNameLst>
+                                          <p:attrName>ppt_y</p:attrName>
+                                        </p:attrNameLst>
+                                      </p:cBhvr>
+                                      <p:tavLst>
+                                        <p:tav tm="0">
+                                          <p:val>
+                                            <p:strVal val="#ppt_y-.1"/>
+                                          </p:val>
+                                        </p:tav>
+                                        <p:tav tm="100000">
+                                          <p:val>
+                                            <p:strVal val="#ppt_y"/>
+                                          </p:val>
+                                        </p:tav>
+                                      </p:tavLst>
+                                    </p:anim>
+                                  </p:childTnLst>
+                                </p:cTn>
+                              </p:par>
+                              <p:par>
+                                <p:cTn id="61" presetID="47" presetClass="entr" presetSubtype="0" fill="hold" grpId="0" nodeType="withEffect">
+                                  <p:stCondLst>
+                                    <p:cond delay="0"/>
+                                  </p:stCondLst>
+                                  <p:childTnLst>
+                                    <p:set>
+                                      <p:cBhvr>
+                                        <p:cTn id="62" dur="1" fill="hold">
+                                          <p:stCondLst>
+                                            <p:cond delay="0"/>
+                                          </p:stCondLst>
+                                        </p:cTn>
+                                        <p:tgtEl>
+                                          <p:spTgt spid="21">
+                                            <p:graphicEl>
+                                              <a:dgm id="{01E12256-1EBE-432E-865F-E9D10861CF0B}"/>
+                                            </p:graphicEl>
+                                          </p:spTgt>
+                                        </p:tgtEl>
+                                        <p:attrNameLst>
+                                          <p:attrName>style.visibility</p:attrName>
+                                        </p:attrNameLst>
+                                      </p:cBhvr>
+                                      <p:to>
+                                        <p:strVal val="visible"/>
+                                      </p:to>
+                                    </p:set>
+                                    <p:animEffect transition="in" filter="fade">
+                                      <p:cBhvr>
+                                        <p:cTn id="63" dur="1000"/>
+                                        <p:tgtEl>
+                                          <p:spTgt spid="21">
+                                            <p:graphicEl>
+                                              <a:dgm id="{01E12256-1EBE-432E-865F-E9D10861CF0B}"/>
+                                            </p:graphicEl>
+                                          </p:spTgt>
+                                        </p:tgtEl>
+                                      </p:cBhvr>
+                                    </p:animEffect>
+                                    <p:anim calcmode="lin" valueType="num">
+                                      <p:cBhvr>
+                                        <p:cTn id="64" dur="1000" fill="hold"/>
+                                        <p:tgtEl>
+                                          <p:spTgt spid="21">
+                                            <p:graphicEl>
+                                              <a:dgm id="{01E12256-1EBE-432E-865F-E9D10861CF0B}"/>
+                                            </p:graphicEl>
+                                          </p:spTgt>
+                                        </p:tgtEl>
+                                        <p:attrNameLst>
+                                          <p:attrName>ppt_x</p:attrName>
+                                        </p:attrNameLst>
+                                      </p:cBhvr>
+                                      <p:tavLst>
+                                        <p:tav tm="0">
+                                          <p:val>
+                                            <p:strVal val="#ppt_x"/>
+                                          </p:val>
+                                        </p:tav>
+                                        <p:tav tm="100000">
+                                          <p:val>
+                                            <p:strVal val="#ppt_x"/>
+                                          </p:val>
+                                        </p:tav>
+                                      </p:tavLst>
+                                    </p:anim>
+                                    <p:anim calcmode="lin" valueType="num">
+                                      <p:cBhvr>
+                                        <p:cTn id="65" dur="1000" fill="hold"/>
+                                        <p:tgtEl>
+                                          <p:spTgt spid="21">
+                                            <p:graphicEl>
+                                              <a:dgm id="{01E12256-1EBE-432E-865F-E9D10861CF0B}"/>
+                                            </p:graphicEl>
+                                          </p:spTgt>
+                                        </p:tgtEl>
+                                        <p:attrNameLst>
+                                          <p:attrName>ppt_y</p:attrName>
+                                        </p:attrNameLst>
+                                      </p:cBhvr>
+                                      <p:tavLst>
+                                        <p:tav tm="0">
+                                          <p:val>
+                                            <p:strVal val="#ppt_y-.1"/>
+                                          </p:val>
+                                        </p:tav>
+                                        <p:tav tm="100000">
+                                          <p:val>
+                                            <p:strVal val="#ppt_y"/>
+                                          </p:val>
+                                        </p:tav>
+                                      </p:tavLst>
+                                    </p:anim>
+                                  </p:childTnLst>
+                                </p:cTn>
+                              </p:par>
+                              <p:par>
+                                <p:cTn id="66" presetID="47" presetClass="entr" presetSubtype="0" fill="hold" grpId="0" nodeType="withEffect">
+                                  <p:stCondLst>
+                                    <p:cond delay="0"/>
+                                  </p:stCondLst>
+                                  <p:childTnLst>
+                                    <p:set>
+                                      <p:cBhvr>
+                                        <p:cTn id="67" dur="1" fill="hold">
+                                          <p:stCondLst>
+                                            <p:cond delay="0"/>
+                                          </p:stCondLst>
+                                        </p:cTn>
+                                        <p:tgtEl>
+                                          <p:spTgt spid="21">
+                                            <p:graphicEl>
+                                              <a:dgm id="{276A1B7E-4B93-4531-A3D8-F0CF495C9684}"/>
+                                            </p:graphicEl>
+                                          </p:spTgt>
+                                        </p:tgtEl>
+                                        <p:attrNameLst>
+                                          <p:attrName>style.visibility</p:attrName>
+                                        </p:attrNameLst>
+                                      </p:cBhvr>
+                                      <p:to>
+                                        <p:strVal val="visible"/>
+                                      </p:to>
+                                    </p:set>
+                                    <p:animEffect transition="in" filter="fade">
+                                      <p:cBhvr>
+                                        <p:cTn id="68" dur="1000"/>
+                                        <p:tgtEl>
+                                          <p:spTgt spid="21">
+                                            <p:graphicEl>
+                                              <a:dgm id="{276A1B7E-4B93-4531-A3D8-F0CF495C9684}"/>
+                                            </p:graphicEl>
+                                          </p:spTgt>
+                                        </p:tgtEl>
+                                      </p:cBhvr>
+                                    </p:animEffect>
+                                    <p:anim calcmode="lin" valueType="num">
+                                      <p:cBhvr>
+                                        <p:cTn id="69" dur="1000" fill="hold"/>
+                                        <p:tgtEl>
+                                          <p:spTgt spid="21">
+                                            <p:graphicEl>
+                                              <a:dgm id="{276A1B7E-4B93-4531-A3D8-F0CF495C9684}"/>
+                                            </p:graphicEl>
+                                          </p:spTgt>
+                                        </p:tgtEl>
+                                        <p:attrNameLst>
+                                          <p:attrName>ppt_x</p:attrName>
+                                        </p:attrNameLst>
+                                      </p:cBhvr>
+                                      <p:tavLst>
+                                        <p:tav tm="0">
+                                          <p:val>
+                                            <p:strVal val="#ppt_x"/>
+                                          </p:val>
+                                        </p:tav>
+                                        <p:tav tm="100000">
+                                          <p:val>
+                                            <p:strVal val="#ppt_x"/>
+                                          </p:val>
+                                        </p:tav>
+                                      </p:tavLst>
+                                    </p:anim>
+                                    <p:anim calcmode="lin" valueType="num">
+                                      <p:cBhvr>
+                                        <p:cTn id="70" dur="1000" fill="hold"/>
+                                        <p:tgtEl>
+                                          <p:spTgt spid="21">
+                                            <p:graphicEl>
+                                              <a:dgm id="{276A1B7E-4B93-4531-A3D8-F0CF495C9684}"/>
+                                            </p:graphicEl>
+                                          </p:spTgt>
+                                        </p:tgtEl>
+                                        <p:attrNameLst>
+                                          <p:attrName>ppt_y</p:attrName>
+                                        </p:attrNameLst>
+                                      </p:cBhvr>
+                                      <p:tavLst>
+                                        <p:tav tm="0">
+                                          <p:val>
+                                            <p:strVal val="#ppt_y-.1"/>
+                                          </p:val>
+                                        </p:tav>
+                                        <p:tav tm="100000">
+                                          <p:val>
+                                            <p:strVal val="#ppt_y"/>
+                                          </p:val>
+                                        </p:tav>
+                                      </p:tavLst>
+                                    </p:anim>
+                                  </p:childTnLst>
+                                </p:cTn>
+                              </p:par>
+                            </p:childTnLst>
+                          </p:cTn>
+                        </p:par>
+                      </p:childTnLst>
+                    </p:cTn>
+                  </p:par>
+                </p:childTnLst>
+              </p:cTn>
+              <p:prevCondLst>
+                <p:cond evt="onPrev" delay="0">
+                  <p:tgtEl>
+                    <p:sldTgt/>
+                  </p:tgtEl>
+                </p:cond>
+              </p:prevCondLst>
+              <p:nextCondLst>
+                <p:cond evt="onNext" delay="0">
+                  <p:tgtEl>
+                    <p:sldTgt/>
+                  </p:tgtEl>
+                </p:cond>
+              </p:nextCondLst>
+            </p:seq>
+          </p:childTnLst>
+        </p:cTn>
+      </p:par>
+    </p:tnLst>
+    <p:bldLst>
+      <p:bldGraphic spid="21" grpId="0">
+        <p:bldSub>
+          <a:bldDgm bld="one"/>
+        </p:bldSub>
+      </p:bldGraphic>
+    </p:bldLst>
+  </p:timing>
 </p:sld>
 </file>
 
@@ -26084,6 +27780,627 @@
   <p:clrMapOvr>
     <a:masterClrMapping/>
   </p:clrMapOvr>
+  <p:transition spd="slow">
+    <p:push dir="u"/>
+  </p:transition>
+  <p:timing>
+    <p:tnLst>
+      <p:par>
+        <p:cTn id="1" dur="indefinite" restart="never" nodeType="tmRoot">
+          <p:childTnLst>
+            <p:seq concurrent="1" nextAc="seek">
+              <p:cTn id="2" dur="indefinite" nodeType="mainSeq">
+                <p:childTnLst>
+                  <p:par>
+                    <p:cTn id="3" fill="hold">
+                      <p:stCondLst>
+                        <p:cond delay="indefinite"/>
+                      </p:stCondLst>
+                      <p:childTnLst>
+                        <p:par>
+                          <p:cTn id="4" fill="hold">
+                            <p:stCondLst>
+                              <p:cond delay="0"/>
+                            </p:stCondLst>
+                            <p:childTnLst>
+                              <p:par>
+                                <p:cTn id="5" presetID="14" presetClass="entr" presetSubtype="10" fill="hold" grpId="0" nodeType="clickEffect">
+                                  <p:stCondLst>
+                                    <p:cond delay="0"/>
+                                  </p:stCondLst>
+                                  <p:childTnLst>
+                                    <p:set>
+                                      <p:cBhvr>
+                                        <p:cTn id="6" dur="1" fill="hold">
+                                          <p:stCondLst>
+                                            <p:cond delay="0"/>
+                                          </p:stCondLst>
+                                        </p:cTn>
+                                        <p:tgtEl>
+                                          <p:spTgt spid="16">
+                                            <p:graphicEl>
+                                              <a:dgm id="{35855222-CD4C-41FC-B400-80F9FFABC9E0}"/>
+                                            </p:graphicEl>
+                                          </p:spTgt>
+                                        </p:tgtEl>
+                                        <p:attrNameLst>
+                                          <p:attrName>style.visibility</p:attrName>
+                                        </p:attrNameLst>
+                                      </p:cBhvr>
+                                      <p:to>
+                                        <p:strVal val="visible"/>
+                                      </p:to>
+                                    </p:set>
+                                    <p:animEffect transition="in" filter="randombar(horizontal)">
+                                      <p:cBhvr>
+                                        <p:cTn id="7" dur="500"/>
+                                        <p:tgtEl>
+                                          <p:spTgt spid="16">
+                                            <p:graphicEl>
+                                              <a:dgm id="{35855222-CD4C-41FC-B400-80F9FFABC9E0}"/>
+                                            </p:graphicEl>
+                                          </p:spTgt>
+                                        </p:tgtEl>
+                                      </p:cBhvr>
+                                    </p:animEffect>
+                                  </p:childTnLst>
+                                </p:cTn>
+                              </p:par>
+                            </p:childTnLst>
+                          </p:cTn>
+                        </p:par>
+                      </p:childTnLst>
+                    </p:cTn>
+                  </p:par>
+                  <p:par>
+                    <p:cTn id="8" fill="hold">
+                      <p:stCondLst>
+                        <p:cond delay="indefinite"/>
+                      </p:stCondLst>
+                      <p:childTnLst>
+                        <p:par>
+                          <p:cTn id="9" fill="hold">
+                            <p:stCondLst>
+                              <p:cond delay="0"/>
+                            </p:stCondLst>
+                            <p:childTnLst>
+                              <p:par>
+                                <p:cTn id="10" presetID="14" presetClass="entr" presetSubtype="10" fill="hold" grpId="0" nodeType="clickEffect">
+                                  <p:stCondLst>
+                                    <p:cond delay="0"/>
+                                  </p:stCondLst>
+                                  <p:childTnLst>
+                                    <p:set>
+                                      <p:cBhvr>
+                                        <p:cTn id="11" dur="1" fill="hold">
+                                          <p:stCondLst>
+                                            <p:cond delay="0"/>
+                                          </p:stCondLst>
+                                        </p:cTn>
+                                        <p:tgtEl>
+                                          <p:spTgt spid="16">
+                                            <p:graphicEl>
+                                              <a:dgm id="{349FBC65-CAE5-4F98-8441-6FAC90E1ECF3}"/>
+                                            </p:graphicEl>
+                                          </p:spTgt>
+                                        </p:tgtEl>
+                                        <p:attrNameLst>
+                                          <p:attrName>style.visibility</p:attrName>
+                                        </p:attrNameLst>
+                                      </p:cBhvr>
+                                      <p:to>
+                                        <p:strVal val="visible"/>
+                                      </p:to>
+                                    </p:set>
+                                    <p:animEffect transition="in" filter="randombar(horizontal)">
+                                      <p:cBhvr>
+                                        <p:cTn id="12" dur="500"/>
+                                        <p:tgtEl>
+                                          <p:spTgt spid="16">
+                                            <p:graphicEl>
+                                              <a:dgm id="{349FBC65-CAE5-4F98-8441-6FAC90E1ECF3}"/>
+                                            </p:graphicEl>
+                                          </p:spTgt>
+                                        </p:tgtEl>
+                                      </p:cBhvr>
+                                    </p:animEffect>
+                                  </p:childTnLst>
+                                </p:cTn>
+                              </p:par>
+                              <p:par>
+                                <p:cTn id="13" presetID="14" presetClass="entr" presetSubtype="10" fill="hold" grpId="0" nodeType="withEffect">
+                                  <p:stCondLst>
+                                    <p:cond delay="0"/>
+                                  </p:stCondLst>
+                                  <p:childTnLst>
+                                    <p:set>
+                                      <p:cBhvr>
+                                        <p:cTn id="14" dur="1" fill="hold">
+                                          <p:stCondLst>
+                                            <p:cond delay="0"/>
+                                          </p:stCondLst>
+                                        </p:cTn>
+                                        <p:tgtEl>
+                                          <p:spTgt spid="16">
+                                            <p:graphicEl>
+                                              <a:dgm id="{223BA566-E240-49D2-9474-51D733C5404C}"/>
+                                            </p:graphicEl>
+                                          </p:spTgt>
+                                        </p:tgtEl>
+                                        <p:attrNameLst>
+                                          <p:attrName>style.visibility</p:attrName>
+                                        </p:attrNameLst>
+                                      </p:cBhvr>
+                                      <p:to>
+                                        <p:strVal val="visible"/>
+                                      </p:to>
+                                    </p:set>
+                                    <p:animEffect transition="in" filter="randombar(horizontal)">
+                                      <p:cBhvr>
+                                        <p:cTn id="15" dur="500"/>
+                                        <p:tgtEl>
+                                          <p:spTgt spid="16">
+                                            <p:graphicEl>
+                                              <a:dgm id="{223BA566-E240-49D2-9474-51D733C5404C}"/>
+                                            </p:graphicEl>
+                                          </p:spTgt>
+                                        </p:tgtEl>
+                                      </p:cBhvr>
+                                    </p:animEffect>
+                                  </p:childTnLst>
+                                </p:cTn>
+                              </p:par>
+                            </p:childTnLst>
+                          </p:cTn>
+                        </p:par>
+                      </p:childTnLst>
+                    </p:cTn>
+                  </p:par>
+                  <p:par>
+                    <p:cTn id="16" fill="hold">
+                      <p:stCondLst>
+                        <p:cond delay="indefinite"/>
+                      </p:stCondLst>
+                      <p:childTnLst>
+                        <p:par>
+                          <p:cTn id="17" fill="hold">
+                            <p:stCondLst>
+                              <p:cond delay="0"/>
+                            </p:stCondLst>
+                            <p:childTnLst>
+                              <p:par>
+                                <p:cTn id="18" presetID="14" presetClass="entr" presetSubtype="10" fill="hold" grpId="0" nodeType="clickEffect">
+                                  <p:stCondLst>
+                                    <p:cond delay="0"/>
+                                  </p:stCondLst>
+                                  <p:childTnLst>
+                                    <p:set>
+                                      <p:cBhvr>
+                                        <p:cTn id="19" dur="1" fill="hold">
+                                          <p:stCondLst>
+                                            <p:cond delay="0"/>
+                                          </p:stCondLst>
+                                        </p:cTn>
+                                        <p:tgtEl>
+                                          <p:spTgt spid="16">
+                                            <p:graphicEl>
+                                              <a:dgm id="{0B589F49-9194-42D1-A889-2055BD0D9D59}"/>
+                                            </p:graphicEl>
+                                          </p:spTgt>
+                                        </p:tgtEl>
+                                        <p:attrNameLst>
+                                          <p:attrName>style.visibility</p:attrName>
+                                        </p:attrNameLst>
+                                      </p:cBhvr>
+                                      <p:to>
+                                        <p:strVal val="visible"/>
+                                      </p:to>
+                                    </p:set>
+                                    <p:animEffect transition="in" filter="randombar(horizontal)">
+                                      <p:cBhvr>
+                                        <p:cTn id="20" dur="500"/>
+                                        <p:tgtEl>
+                                          <p:spTgt spid="16">
+                                            <p:graphicEl>
+                                              <a:dgm id="{0B589F49-9194-42D1-A889-2055BD0D9D59}"/>
+                                            </p:graphicEl>
+                                          </p:spTgt>
+                                        </p:tgtEl>
+                                      </p:cBhvr>
+                                    </p:animEffect>
+                                  </p:childTnLst>
+                                </p:cTn>
+                              </p:par>
+                              <p:par>
+                                <p:cTn id="21" presetID="14" presetClass="entr" presetSubtype="10" fill="hold" grpId="0" nodeType="withEffect">
+                                  <p:stCondLst>
+                                    <p:cond delay="0"/>
+                                  </p:stCondLst>
+                                  <p:childTnLst>
+                                    <p:set>
+                                      <p:cBhvr>
+                                        <p:cTn id="22" dur="1" fill="hold">
+                                          <p:stCondLst>
+                                            <p:cond delay="0"/>
+                                          </p:stCondLst>
+                                        </p:cTn>
+                                        <p:tgtEl>
+                                          <p:spTgt spid="16">
+                                            <p:graphicEl>
+                                              <a:dgm id="{9E670913-2E6F-4397-AF37-16C7CB95D205}"/>
+                                            </p:graphicEl>
+                                          </p:spTgt>
+                                        </p:tgtEl>
+                                        <p:attrNameLst>
+                                          <p:attrName>style.visibility</p:attrName>
+                                        </p:attrNameLst>
+                                      </p:cBhvr>
+                                      <p:to>
+                                        <p:strVal val="visible"/>
+                                      </p:to>
+                                    </p:set>
+                                    <p:animEffect transition="in" filter="randombar(horizontal)">
+                                      <p:cBhvr>
+                                        <p:cTn id="23" dur="500"/>
+                                        <p:tgtEl>
+                                          <p:spTgt spid="16">
+                                            <p:graphicEl>
+                                              <a:dgm id="{9E670913-2E6F-4397-AF37-16C7CB95D205}"/>
+                                            </p:graphicEl>
+                                          </p:spTgt>
+                                        </p:tgtEl>
+                                      </p:cBhvr>
+                                    </p:animEffect>
+                                  </p:childTnLst>
+                                </p:cTn>
+                              </p:par>
+                            </p:childTnLst>
+                          </p:cTn>
+                        </p:par>
+                      </p:childTnLst>
+                    </p:cTn>
+                  </p:par>
+                  <p:par>
+                    <p:cTn id="24" fill="hold">
+                      <p:stCondLst>
+                        <p:cond delay="indefinite"/>
+                      </p:stCondLst>
+                      <p:childTnLst>
+                        <p:par>
+                          <p:cTn id="25" fill="hold">
+                            <p:stCondLst>
+                              <p:cond delay="0"/>
+                            </p:stCondLst>
+                            <p:childTnLst>
+                              <p:par>
+                                <p:cTn id="26" presetID="14" presetClass="entr" presetSubtype="10" fill="hold" grpId="0" nodeType="clickEffect">
+                                  <p:stCondLst>
+                                    <p:cond delay="0"/>
+                                  </p:stCondLst>
+                                  <p:childTnLst>
+                                    <p:set>
+                                      <p:cBhvr>
+                                        <p:cTn id="27" dur="1" fill="hold">
+                                          <p:stCondLst>
+                                            <p:cond delay="0"/>
+                                          </p:stCondLst>
+                                        </p:cTn>
+                                        <p:tgtEl>
+                                          <p:spTgt spid="16">
+                                            <p:graphicEl>
+                                              <a:dgm id="{B0129B57-ED99-4470-A72F-1F1ADE71680D}"/>
+                                            </p:graphicEl>
+                                          </p:spTgt>
+                                        </p:tgtEl>
+                                        <p:attrNameLst>
+                                          <p:attrName>style.visibility</p:attrName>
+                                        </p:attrNameLst>
+                                      </p:cBhvr>
+                                      <p:to>
+                                        <p:strVal val="visible"/>
+                                      </p:to>
+                                    </p:set>
+                                    <p:animEffect transition="in" filter="randombar(horizontal)">
+                                      <p:cBhvr>
+                                        <p:cTn id="28" dur="500"/>
+                                        <p:tgtEl>
+                                          <p:spTgt spid="16">
+                                            <p:graphicEl>
+                                              <a:dgm id="{B0129B57-ED99-4470-A72F-1F1ADE71680D}"/>
+                                            </p:graphicEl>
+                                          </p:spTgt>
+                                        </p:tgtEl>
+                                      </p:cBhvr>
+                                    </p:animEffect>
+                                  </p:childTnLst>
+                                </p:cTn>
+                              </p:par>
+                              <p:par>
+                                <p:cTn id="29" presetID="14" presetClass="entr" presetSubtype="10" fill="hold" grpId="0" nodeType="withEffect">
+                                  <p:stCondLst>
+                                    <p:cond delay="0"/>
+                                  </p:stCondLst>
+                                  <p:childTnLst>
+                                    <p:set>
+                                      <p:cBhvr>
+                                        <p:cTn id="30" dur="1" fill="hold">
+                                          <p:stCondLst>
+                                            <p:cond delay="0"/>
+                                          </p:stCondLst>
+                                        </p:cTn>
+                                        <p:tgtEl>
+                                          <p:spTgt spid="16">
+                                            <p:graphicEl>
+                                              <a:dgm id="{FD4CC602-95FF-4A0F-AF04-9376AB8AA0C7}"/>
+                                            </p:graphicEl>
+                                          </p:spTgt>
+                                        </p:tgtEl>
+                                        <p:attrNameLst>
+                                          <p:attrName>style.visibility</p:attrName>
+                                        </p:attrNameLst>
+                                      </p:cBhvr>
+                                      <p:to>
+                                        <p:strVal val="visible"/>
+                                      </p:to>
+                                    </p:set>
+                                    <p:animEffect transition="in" filter="randombar(horizontal)">
+                                      <p:cBhvr>
+                                        <p:cTn id="31" dur="500"/>
+                                        <p:tgtEl>
+                                          <p:spTgt spid="16">
+                                            <p:graphicEl>
+                                              <a:dgm id="{FD4CC602-95FF-4A0F-AF04-9376AB8AA0C7}"/>
+                                            </p:graphicEl>
+                                          </p:spTgt>
+                                        </p:tgtEl>
+                                      </p:cBhvr>
+                                    </p:animEffect>
+                                  </p:childTnLst>
+                                </p:cTn>
+                              </p:par>
+                            </p:childTnLst>
+                          </p:cTn>
+                        </p:par>
+                      </p:childTnLst>
+                    </p:cTn>
+                  </p:par>
+                  <p:par>
+                    <p:cTn id="32" fill="hold">
+                      <p:stCondLst>
+                        <p:cond delay="indefinite"/>
+                      </p:stCondLst>
+                      <p:childTnLst>
+                        <p:par>
+                          <p:cTn id="33" fill="hold">
+                            <p:stCondLst>
+                              <p:cond delay="0"/>
+                            </p:stCondLst>
+                            <p:childTnLst>
+                              <p:par>
+                                <p:cTn id="34" presetID="14" presetClass="entr" presetSubtype="10" fill="hold" grpId="0" nodeType="clickEffect">
+                                  <p:stCondLst>
+                                    <p:cond delay="0"/>
+                                  </p:stCondLst>
+                                  <p:childTnLst>
+                                    <p:set>
+                                      <p:cBhvr>
+                                        <p:cTn id="35" dur="1" fill="hold">
+                                          <p:stCondLst>
+                                            <p:cond delay="0"/>
+                                          </p:stCondLst>
+                                        </p:cTn>
+                                        <p:tgtEl>
+                                          <p:spTgt spid="16">
+                                            <p:graphicEl>
+                                              <a:dgm id="{8E36223D-222B-4CF8-A396-F5B5A5C7FD20}"/>
+                                            </p:graphicEl>
+                                          </p:spTgt>
+                                        </p:tgtEl>
+                                        <p:attrNameLst>
+                                          <p:attrName>style.visibility</p:attrName>
+                                        </p:attrNameLst>
+                                      </p:cBhvr>
+                                      <p:to>
+                                        <p:strVal val="visible"/>
+                                      </p:to>
+                                    </p:set>
+                                    <p:animEffect transition="in" filter="randombar(horizontal)">
+                                      <p:cBhvr>
+                                        <p:cTn id="36" dur="500"/>
+                                        <p:tgtEl>
+                                          <p:spTgt spid="16">
+                                            <p:graphicEl>
+                                              <a:dgm id="{8E36223D-222B-4CF8-A396-F5B5A5C7FD20}"/>
+                                            </p:graphicEl>
+                                          </p:spTgt>
+                                        </p:tgtEl>
+                                      </p:cBhvr>
+                                    </p:animEffect>
+                                  </p:childTnLst>
+                                </p:cTn>
+                              </p:par>
+                              <p:par>
+                                <p:cTn id="37" presetID="14" presetClass="entr" presetSubtype="10" fill="hold" grpId="0" nodeType="withEffect">
+                                  <p:stCondLst>
+                                    <p:cond delay="0"/>
+                                  </p:stCondLst>
+                                  <p:childTnLst>
+                                    <p:set>
+                                      <p:cBhvr>
+                                        <p:cTn id="38" dur="1" fill="hold">
+                                          <p:stCondLst>
+                                            <p:cond delay="0"/>
+                                          </p:stCondLst>
+                                        </p:cTn>
+                                        <p:tgtEl>
+                                          <p:spTgt spid="16">
+                                            <p:graphicEl>
+                                              <a:dgm id="{D245BA7A-7B39-4CA5-8D4E-077E14949AA7}"/>
+                                            </p:graphicEl>
+                                          </p:spTgt>
+                                        </p:tgtEl>
+                                        <p:attrNameLst>
+                                          <p:attrName>style.visibility</p:attrName>
+                                        </p:attrNameLst>
+                                      </p:cBhvr>
+                                      <p:to>
+                                        <p:strVal val="visible"/>
+                                      </p:to>
+                                    </p:set>
+                                    <p:animEffect transition="in" filter="randombar(horizontal)">
+                                      <p:cBhvr>
+                                        <p:cTn id="39" dur="500"/>
+                                        <p:tgtEl>
+                                          <p:spTgt spid="16">
+                                            <p:graphicEl>
+                                              <a:dgm id="{D245BA7A-7B39-4CA5-8D4E-077E14949AA7}"/>
+                                            </p:graphicEl>
+                                          </p:spTgt>
+                                        </p:tgtEl>
+                                      </p:cBhvr>
+                                    </p:animEffect>
+                                  </p:childTnLst>
+                                </p:cTn>
+                              </p:par>
+                            </p:childTnLst>
+                          </p:cTn>
+                        </p:par>
+                      </p:childTnLst>
+                    </p:cTn>
+                  </p:par>
+                  <p:par>
+                    <p:cTn id="40" fill="hold">
+                      <p:stCondLst>
+                        <p:cond delay="indefinite"/>
+                      </p:stCondLst>
+                      <p:childTnLst>
+                        <p:par>
+                          <p:cTn id="41" fill="hold">
+                            <p:stCondLst>
+                              <p:cond delay="0"/>
+                            </p:stCondLst>
+                            <p:childTnLst>
+                              <p:par>
+                                <p:cTn id="42" presetID="14" presetClass="entr" presetSubtype="10" fill="hold" grpId="0" nodeType="clickEffect">
+                                  <p:stCondLst>
+                                    <p:cond delay="0"/>
+                                  </p:stCondLst>
+                                  <p:childTnLst>
+                                    <p:set>
+                                      <p:cBhvr>
+                                        <p:cTn id="43" dur="1" fill="hold">
+                                          <p:stCondLst>
+                                            <p:cond delay="0"/>
+                                          </p:stCondLst>
+                                        </p:cTn>
+                                        <p:tgtEl>
+                                          <p:spTgt spid="16">
+                                            <p:graphicEl>
+                                              <a:dgm id="{22C31B1E-9ABF-46A6-B490-F8118A54BB8F}"/>
+                                            </p:graphicEl>
+                                          </p:spTgt>
+                                        </p:tgtEl>
+                                        <p:attrNameLst>
+                                          <p:attrName>style.visibility</p:attrName>
+                                        </p:attrNameLst>
+                                      </p:cBhvr>
+                                      <p:to>
+                                        <p:strVal val="visible"/>
+                                      </p:to>
+                                    </p:set>
+                                    <p:animEffect transition="in" filter="randombar(horizontal)">
+                                      <p:cBhvr>
+                                        <p:cTn id="44" dur="500"/>
+                                        <p:tgtEl>
+                                          <p:spTgt spid="16">
+                                            <p:graphicEl>
+                                              <a:dgm id="{22C31B1E-9ABF-46A6-B490-F8118A54BB8F}"/>
+                                            </p:graphicEl>
+                                          </p:spTgt>
+                                        </p:tgtEl>
+                                      </p:cBhvr>
+                                    </p:animEffect>
+                                  </p:childTnLst>
+                                </p:cTn>
+                              </p:par>
+                              <p:par>
+                                <p:cTn id="45" presetID="14" presetClass="entr" presetSubtype="10" fill="hold" grpId="0" nodeType="withEffect">
+                                  <p:stCondLst>
+                                    <p:cond delay="0"/>
+                                  </p:stCondLst>
+                                  <p:childTnLst>
+                                    <p:set>
+                                      <p:cBhvr>
+                                        <p:cTn id="46" dur="1" fill="hold">
+                                          <p:stCondLst>
+                                            <p:cond delay="0"/>
+                                          </p:stCondLst>
+                                        </p:cTn>
+                                        <p:tgtEl>
+                                          <p:spTgt spid="16">
+                                            <p:graphicEl>
+                                              <a:dgm id="{E00446B5-418B-4F4E-837E-AB444EAA77A9}"/>
+                                            </p:graphicEl>
+                                          </p:spTgt>
+                                        </p:tgtEl>
+                                        <p:attrNameLst>
+                                          <p:attrName>style.visibility</p:attrName>
+                                        </p:attrNameLst>
+                                      </p:cBhvr>
+                                      <p:to>
+                                        <p:strVal val="visible"/>
+                                      </p:to>
+                                    </p:set>
+                                    <p:animEffect transition="in" filter="randombar(horizontal)">
+                                      <p:cBhvr>
+                                        <p:cTn id="47" dur="500"/>
+                                        <p:tgtEl>
+                                          <p:spTgt spid="16">
+                                            <p:graphicEl>
+                                              <a:dgm id="{E00446B5-418B-4F4E-837E-AB444EAA77A9}"/>
+                                            </p:graphicEl>
+                                          </p:spTgt>
+                                        </p:tgtEl>
+                                      </p:cBhvr>
+                                    </p:animEffect>
+                                  </p:childTnLst>
+                                </p:cTn>
+                              </p:par>
+                            </p:childTnLst>
+                          </p:cTn>
+                        </p:par>
+                      </p:childTnLst>
+                    </p:cTn>
+                  </p:par>
+                </p:childTnLst>
+              </p:cTn>
+              <p:prevCondLst>
+                <p:cond evt="onPrev" delay="0">
+                  <p:tgtEl>
+                    <p:sldTgt/>
+                  </p:tgtEl>
+                </p:cond>
+              </p:prevCondLst>
+              <p:nextCondLst>
+                <p:cond evt="onNext" delay="0">
+                  <p:tgtEl>
+                    <p:sldTgt/>
+                  </p:tgtEl>
+                </p:cond>
+              </p:nextCondLst>
+            </p:seq>
+          </p:childTnLst>
+        </p:cTn>
+      </p:par>
+    </p:tnLst>
+    <p:bldLst>
+      <p:bldGraphic spid="16" grpId="0">
+        <p:bldSub>
+          <a:bldDgm bld="one"/>
+        </p:bldSub>
+      </p:bldGraphic>
+    </p:bldLst>
+  </p:timing>
 </p:sld>
 </file>
 
@@ -26494,6 +28811,525 @@
   <p:clrMapOvr>
     <a:masterClrMapping/>
   </p:clrMapOvr>
+  <p:transition spd="slow">
+    <p:push dir="u"/>
+  </p:transition>
+  <p:timing>
+    <p:tnLst>
+      <p:par>
+        <p:cTn id="1" dur="indefinite" restart="never" nodeType="tmRoot">
+          <p:childTnLst>
+            <p:seq concurrent="1" nextAc="seek">
+              <p:cTn id="2" dur="indefinite" nodeType="mainSeq">
+                <p:childTnLst>
+                  <p:par>
+                    <p:cTn id="3" fill="hold">
+                      <p:stCondLst>
+                        <p:cond delay="indefinite"/>
+                      </p:stCondLst>
+                      <p:childTnLst>
+                        <p:par>
+                          <p:cTn id="4" fill="hold">
+                            <p:stCondLst>
+                              <p:cond delay="0"/>
+                            </p:stCondLst>
+                            <p:childTnLst>
+                              <p:par>
+                                <p:cTn id="5" presetID="2" presetClass="entr" presetSubtype="4" fill="hold" grpId="0" nodeType="clickEffect">
+                                  <p:stCondLst>
+                                    <p:cond delay="0"/>
+                                  </p:stCondLst>
+                                  <p:childTnLst>
+                                    <p:set>
+                                      <p:cBhvr>
+                                        <p:cTn id="6" dur="1" fill="hold">
+                                          <p:stCondLst>
+                                            <p:cond delay="0"/>
+                                          </p:stCondLst>
+                                        </p:cTn>
+                                        <p:tgtEl>
+                                          <p:spTgt spid="49">
+                                            <p:graphicEl>
+                                              <a:dgm id="{26AF844E-CAFF-4913-BD11-636489651B91}"/>
+                                            </p:graphicEl>
+                                          </p:spTgt>
+                                        </p:tgtEl>
+                                        <p:attrNameLst>
+                                          <p:attrName>style.visibility</p:attrName>
+                                        </p:attrNameLst>
+                                      </p:cBhvr>
+                                      <p:to>
+                                        <p:strVal val="visible"/>
+                                      </p:to>
+                                    </p:set>
+                                    <p:anim calcmode="lin" valueType="num">
+                                      <p:cBhvr additive="base">
+                                        <p:cTn id="7" dur="500" fill="hold"/>
+                                        <p:tgtEl>
+                                          <p:spTgt spid="49">
+                                            <p:graphicEl>
+                                              <a:dgm id="{26AF844E-CAFF-4913-BD11-636489651B91}"/>
+                                            </p:graphicEl>
+                                          </p:spTgt>
+                                        </p:tgtEl>
+                                        <p:attrNameLst>
+                                          <p:attrName>ppt_x</p:attrName>
+                                        </p:attrNameLst>
+                                      </p:cBhvr>
+                                      <p:tavLst>
+                                        <p:tav tm="0">
+                                          <p:val>
+                                            <p:strVal val="#ppt_x"/>
+                                          </p:val>
+                                        </p:tav>
+                                        <p:tav tm="100000">
+                                          <p:val>
+                                            <p:strVal val="#ppt_x"/>
+                                          </p:val>
+                                        </p:tav>
+                                      </p:tavLst>
+                                    </p:anim>
+                                    <p:anim calcmode="lin" valueType="num">
+                                      <p:cBhvr additive="base">
+                                        <p:cTn id="8" dur="500" fill="hold"/>
+                                        <p:tgtEl>
+                                          <p:spTgt spid="49">
+                                            <p:graphicEl>
+                                              <a:dgm id="{26AF844E-CAFF-4913-BD11-636489651B91}"/>
+                                            </p:graphicEl>
+                                          </p:spTgt>
+                                        </p:tgtEl>
+                                        <p:attrNameLst>
+                                          <p:attrName>ppt_y</p:attrName>
+                                        </p:attrNameLst>
+                                      </p:cBhvr>
+                                      <p:tavLst>
+                                        <p:tav tm="0">
+                                          <p:val>
+                                            <p:strVal val="1+#ppt_h/2"/>
+                                          </p:val>
+                                        </p:tav>
+                                        <p:tav tm="100000">
+                                          <p:val>
+                                            <p:strVal val="#ppt_y"/>
+                                          </p:val>
+                                        </p:tav>
+                                      </p:tavLst>
+                                    </p:anim>
+                                  </p:childTnLst>
+                                </p:cTn>
+                              </p:par>
+                            </p:childTnLst>
+                          </p:cTn>
+                        </p:par>
+                      </p:childTnLst>
+                    </p:cTn>
+                  </p:par>
+                  <p:par>
+                    <p:cTn id="9" fill="hold">
+                      <p:stCondLst>
+                        <p:cond delay="indefinite"/>
+                      </p:stCondLst>
+                      <p:childTnLst>
+                        <p:par>
+                          <p:cTn id="10" fill="hold">
+                            <p:stCondLst>
+                              <p:cond delay="0"/>
+                            </p:stCondLst>
+                            <p:childTnLst>
+                              <p:par>
+                                <p:cTn id="11" presetID="2" presetClass="entr" presetSubtype="4" fill="hold" grpId="0" nodeType="clickEffect">
+                                  <p:stCondLst>
+                                    <p:cond delay="0"/>
+                                  </p:stCondLst>
+                                  <p:childTnLst>
+                                    <p:set>
+                                      <p:cBhvr>
+                                        <p:cTn id="12" dur="1" fill="hold">
+                                          <p:stCondLst>
+                                            <p:cond delay="0"/>
+                                          </p:stCondLst>
+                                        </p:cTn>
+                                        <p:tgtEl>
+                                          <p:spTgt spid="49">
+                                            <p:graphicEl>
+                                              <a:dgm id="{272E2289-B570-4380-969C-20F884F6C461}"/>
+                                            </p:graphicEl>
+                                          </p:spTgt>
+                                        </p:tgtEl>
+                                        <p:attrNameLst>
+                                          <p:attrName>style.visibility</p:attrName>
+                                        </p:attrNameLst>
+                                      </p:cBhvr>
+                                      <p:to>
+                                        <p:strVal val="visible"/>
+                                      </p:to>
+                                    </p:set>
+                                    <p:anim calcmode="lin" valueType="num">
+                                      <p:cBhvr additive="base">
+                                        <p:cTn id="13" dur="500" fill="hold"/>
+                                        <p:tgtEl>
+                                          <p:spTgt spid="49">
+                                            <p:graphicEl>
+                                              <a:dgm id="{272E2289-B570-4380-969C-20F884F6C461}"/>
+                                            </p:graphicEl>
+                                          </p:spTgt>
+                                        </p:tgtEl>
+                                        <p:attrNameLst>
+                                          <p:attrName>ppt_x</p:attrName>
+                                        </p:attrNameLst>
+                                      </p:cBhvr>
+                                      <p:tavLst>
+                                        <p:tav tm="0">
+                                          <p:val>
+                                            <p:strVal val="#ppt_x"/>
+                                          </p:val>
+                                        </p:tav>
+                                        <p:tav tm="100000">
+                                          <p:val>
+                                            <p:strVal val="#ppt_x"/>
+                                          </p:val>
+                                        </p:tav>
+                                      </p:tavLst>
+                                    </p:anim>
+                                    <p:anim calcmode="lin" valueType="num">
+                                      <p:cBhvr additive="base">
+                                        <p:cTn id="14" dur="500" fill="hold"/>
+                                        <p:tgtEl>
+                                          <p:spTgt spid="49">
+                                            <p:graphicEl>
+                                              <a:dgm id="{272E2289-B570-4380-969C-20F884F6C461}"/>
+                                            </p:graphicEl>
+                                          </p:spTgt>
+                                        </p:tgtEl>
+                                        <p:attrNameLst>
+                                          <p:attrName>ppt_y</p:attrName>
+                                        </p:attrNameLst>
+                                      </p:cBhvr>
+                                      <p:tavLst>
+                                        <p:tav tm="0">
+                                          <p:val>
+                                            <p:strVal val="1+#ppt_h/2"/>
+                                          </p:val>
+                                        </p:tav>
+                                        <p:tav tm="100000">
+                                          <p:val>
+                                            <p:strVal val="#ppt_y"/>
+                                          </p:val>
+                                        </p:tav>
+                                      </p:tavLst>
+                                    </p:anim>
+                                  </p:childTnLst>
+                                </p:cTn>
+                              </p:par>
+                              <p:par>
+                                <p:cTn id="15" presetID="2" presetClass="entr" presetSubtype="4" fill="hold" grpId="0" nodeType="withEffect">
+                                  <p:stCondLst>
+                                    <p:cond delay="0"/>
+                                  </p:stCondLst>
+                                  <p:childTnLst>
+                                    <p:set>
+                                      <p:cBhvr>
+                                        <p:cTn id="16" dur="1" fill="hold">
+                                          <p:stCondLst>
+                                            <p:cond delay="0"/>
+                                          </p:stCondLst>
+                                        </p:cTn>
+                                        <p:tgtEl>
+                                          <p:spTgt spid="49">
+                                            <p:graphicEl>
+                                              <a:dgm id="{2E70A53F-8E51-4521-BDC9-463C9E8BC83E}"/>
+                                            </p:graphicEl>
+                                          </p:spTgt>
+                                        </p:tgtEl>
+                                        <p:attrNameLst>
+                                          <p:attrName>style.visibility</p:attrName>
+                                        </p:attrNameLst>
+                                      </p:cBhvr>
+                                      <p:to>
+                                        <p:strVal val="visible"/>
+                                      </p:to>
+                                    </p:set>
+                                    <p:anim calcmode="lin" valueType="num">
+                                      <p:cBhvr additive="base">
+                                        <p:cTn id="17" dur="500" fill="hold"/>
+                                        <p:tgtEl>
+                                          <p:spTgt spid="49">
+                                            <p:graphicEl>
+                                              <a:dgm id="{2E70A53F-8E51-4521-BDC9-463C9E8BC83E}"/>
+                                            </p:graphicEl>
+                                          </p:spTgt>
+                                        </p:tgtEl>
+                                        <p:attrNameLst>
+                                          <p:attrName>ppt_x</p:attrName>
+                                        </p:attrNameLst>
+                                      </p:cBhvr>
+                                      <p:tavLst>
+                                        <p:tav tm="0">
+                                          <p:val>
+                                            <p:strVal val="#ppt_x"/>
+                                          </p:val>
+                                        </p:tav>
+                                        <p:tav tm="100000">
+                                          <p:val>
+                                            <p:strVal val="#ppt_x"/>
+                                          </p:val>
+                                        </p:tav>
+                                      </p:tavLst>
+                                    </p:anim>
+                                    <p:anim calcmode="lin" valueType="num">
+                                      <p:cBhvr additive="base">
+                                        <p:cTn id="18" dur="500" fill="hold"/>
+                                        <p:tgtEl>
+                                          <p:spTgt spid="49">
+                                            <p:graphicEl>
+                                              <a:dgm id="{2E70A53F-8E51-4521-BDC9-463C9E8BC83E}"/>
+                                            </p:graphicEl>
+                                          </p:spTgt>
+                                        </p:tgtEl>
+                                        <p:attrNameLst>
+                                          <p:attrName>ppt_y</p:attrName>
+                                        </p:attrNameLst>
+                                      </p:cBhvr>
+                                      <p:tavLst>
+                                        <p:tav tm="0">
+                                          <p:val>
+                                            <p:strVal val="1+#ppt_h/2"/>
+                                          </p:val>
+                                        </p:tav>
+                                        <p:tav tm="100000">
+                                          <p:val>
+                                            <p:strVal val="#ppt_y"/>
+                                          </p:val>
+                                        </p:tav>
+                                      </p:tavLst>
+                                    </p:anim>
+                                  </p:childTnLst>
+                                </p:cTn>
+                              </p:par>
+                            </p:childTnLst>
+                          </p:cTn>
+                        </p:par>
+                      </p:childTnLst>
+                    </p:cTn>
+                  </p:par>
+                  <p:par>
+                    <p:cTn id="19" fill="hold">
+                      <p:stCondLst>
+                        <p:cond delay="indefinite"/>
+                      </p:stCondLst>
+                      <p:childTnLst>
+                        <p:par>
+                          <p:cTn id="20" fill="hold">
+                            <p:stCondLst>
+                              <p:cond delay="0"/>
+                            </p:stCondLst>
+                            <p:childTnLst>
+                              <p:par>
+                                <p:cTn id="21" presetID="2" presetClass="entr" presetSubtype="4" fill="hold" grpId="0" nodeType="clickEffect">
+                                  <p:stCondLst>
+                                    <p:cond delay="0"/>
+                                  </p:stCondLst>
+                                  <p:childTnLst>
+                                    <p:set>
+                                      <p:cBhvr>
+                                        <p:cTn id="22" dur="1" fill="hold">
+                                          <p:stCondLst>
+                                            <p:cond delay="0"/>
+                                          </p:stCondLst>
+                                        </p:cTn>
+                                        <p:tgtEl>
+                                          <p:spTgt spid="49">
+                                            <p:graphicEl>
+                                              <a:dgm id="{ABB29D5E-F11F-484E-8ED5-19D5EC278A22}"/>
+                                            </p:graphicEl>
+                                          </p:spTgt>
+                                        </p:tgtEl>
+                                        <p:attrNameLst>
+                                          <p:attrName>style.visibility</p:attrName>
+                                        </p:attrNameLst>
+                                      </p:cBhvr>
+                                      <p:to>
+                                        <p:strVal val="visible"/>
+                                      </p:to>
+                                    </p:set>
+                                    <p:anim calcmode="lin" valueType="num">
+                                      <p:cBhvr additive="base">
+                                        <p:cTn id="23" dur="500" fill="hold"/>
+                                        <p:tgtEl>
+                                          <p:spTgt spid="49">
+                                            <p:graphicEl>
+                                              <a:dgm id="{ABB29D5E-F11F-484E-8ED5-19D5EC278A22}"/>
+                                            </p:graphicEl>
+                                          </p:spTgt>
+                                        </p:tgtEl>
+                                        <p:attrNameLst>
+                                          <p:attrName>ppt_x</p:attrName>
+                                        </p:attrNameLst>
+                                      </p:cBhvr>
+                                      <p:tavLst>
+                                        <p:tav tm="0">
+                                          <p:val>
+                                            <p:strVal val="#ppt_x"/>
+                                          </p:val>
+                                        </p:tav>
+                                        <p:tav tm="100000">
+                                          <p:val>
+                                            <p:strVal val="#ppt_x"/>
+                                          </p:val>
+                                        </p:tav>
+                                      </p:tavLst>
+                                    </p:anim>
+                                    <p:anim calcmode="lin" valueType="num">
+                                      <p:cBhvr additive="base">
+                                        <p:cTn id="24" dur="500" fill="hold"/>
+                                        <p:tgtEl>
+                                          <p:spTgt spid="49">
+                                            <p:graphicEl>
+                                              <a:dgm id="{ABB29D5E-F11F-484E-8ED5-19D5EC278A22}"/>
+                                            </p:graphicEl>
+                                          </p:spTgt>
+                                        </p:tgtEl>
+                                        <p:attrNameLst>
+                                          <p:attrName>ppt_y</p:attrName>
+                                        </p:attrNameLst>
+                                      </p:cBhvr>
+                                      <p:tavLst>
+                                        <p:tav tm="0">
+                                          <p:val>
+                                            <p:strVal val="1+#ppt_h/2"/>
+                                          </p:val>
+                                        </p:tav>
+                                        <p:tav tm="100000">
+                                          <p:val>
+                                            <p:strVal val="#ppt_y"/>
+                                          </p:val>
+                                        </p:tav>
+                                      </p:tavLst>
+                                    </p:anim>
+                                  </p:childTnLst>
+                                </p:cTn>
+                              </p:par>
+                              <p:par>
+                                <p:cTn id="25" presetID="2" presetClass="entr" presetSubtype="4" fill="hold" grpId="0" nodeType="withEffect">
+                                  <p:stCondLst>
+                                    <p:cond delay="0"/>
+                                  </p:stCondLst>
+                                  <p:childTnLst>
+                                    <p:set>
+                                      <p:cBhvr>
+                                        <p:cTn id="26" dur="1" fill="hold">
+                                          <p:stCondLst>
+                                            <p:cond delay="0"/>
+                                          </p:stCondLst>
+                                        </p:cTn>
+                                        <p:tgtEl>
+                                          <p:spTgt spid="49">
+                                            <p:graphicEl>
+                                              <a:dgm id="{1BCC9E10-8145-493F-9ECE-55E4447FA84E}"/>
+                                            </p:graphicEl>
+                                          </p:spTgt>
+                                        </p:tgtEl>
+                                        <p:attrNameLst>
+                                          <p:attrName>style.visibility</p:attrName>
+                                        </p:attrNameLst>
+                                      </p:cBhvr>
+                                      <p:to>
+                                        <p:strVal val="visible"/>
+                                      </p:to>
+                                    </p:set>
+                                    <p:anim calcmode="lin" valueType="num">
+                                      <p:cBhvr additive="base">
+                                        <p:cTn id="27" dur="500" fill="hold"/>
+                                        <p:tgtEl>
+                                          <p:spTgt spid="49">
+                                            <p:graphicEl>
+                                              <a:dgm id="{1BCC9E10-8145-493F-9ECE-55E4447FA84E}"/>
+                                            </p:graphicEl>
+                                          </p:spTgt>
+                                        </p:tgtEl>
+                                        <p:attrNameLst>
+                                          <p:attrName>ppt_x</p:attrName>
+                                        </p:attrNameLst>
+                                      </p:cBhvr>
+                                      <p:tavLst>
+                                        <p:tav tm="0">
+                                          <p:val>
+                                            <p:strVal val="#ppt_x"/>
+                                          </p:val>
+                                        </p:tav>
+                                        <p:tav tm="100000">
+                                          <p:val>
+                                            <p:strVal val="#ppt_x"/>
+                                          </p:val>
+                                        </p:tav>
+                                      </p:tavLst>
+                                    </p:anim>
+                                    <p:anim calcmode="lin" valueType="num">
+                                      <p:cBhvr additive="base">
+                                        <p:cTn id="28" dur="500" fill="hold"/>
+                                        <p:tgtEl>
+                                          <p:spTgt spid="49">
+                                            <p:graphicEl>
+                                              <a:dgm id="{1BCC9E10-8145-493F-9ECE-55E4447FA84E}"/>
+                                            </p:graphicEl>
+                                          </p:spTgt>
+                                        </p:tgtEl>
+                                        <p:attrNameLst>
+                                          <p:attrName>ppt_y</p:attrName>
+                                        </p:attrNameLst>
+                                      </p:cBhvr>
+                                      <p:tavLst>
+                                        <p:tav tm="0">
+                                          <p:val>
+                                            <p:strVal val="1+#ppt_h/2"/>
+                                          </p:val>
+                                        </p:tav>
+                                        <p:tav tm="100000">
+                                          <p:val>
+                                            <p:strVal val="#ppt_y"/>
+                                          </p:val>
+                                        </p:tav>
+                                      </p:tavLst>
+                                    </p:anim>
+                                  </p:childTnLst>
+                                </p:cTn>
+                              </p:par>
+                            </p:childTnLst>
+                          </p:cTn>
+                        </p:par>
+                      </p:childTnLst>
+                    </p:cTn>
+                  </p:par>
+                </p:childTnLst>
+              </p:cTn>
+              <p:prevCondLst>
+                <p:cond evt="onPrev" delay="0">
+                  <p:tgtEl>
+                    <p:sldTgt/>
+                  </p:tgtEl>
+                </p:cond>
+              </p:prevCondLst>
+              <p:nextCondLst>
+                <p:cond evt="onNext" delay="0">
+                  <p:tgtEl>
+                    <p:sldTgt/>
+                  </p:tgtEl>
+                </p:cond>
+              </p:nextCondLst>
+            </p:seq>
+          </p:childTnLst>
+        </p:cTn>
+      </p:par>
+    </p:tnLst>
+    <p:bldLst>
+      <p:bldGraphic spid="49" grpId="0">
+        <p:bldSub>
+          <a:bldDgm bld="one"/>
+        </p:bldSub>
+      </p:bldGraphic>
+    </p:bldLst>
+  </p:timing>
 </p:sld>
 </file>
 
@@ -26904,6 +29740,541 @@
   <p:clrMapOvr>
     <a:masterClrMapping/>
   </p:clrMapOvr>
+  <p:transition spd="slow">
+    <p:push dir="u"/>
+  </p:transition>
+  <p:timing>
+    <p:tnLst>
+      <p:par>
+        <p:cTn id="1" dur="indefinite" restart="never" nodeType="tmRoot">
+          <p:childTnLst>
+            <p:seq concurrent="1" nextAc="seek">
+              <p:cTn id="2" dur="indefinite" nodeType="mainSeq">
+                <p:childTnLst>
+                  <p:par>
+                    <p:cTn id="3" fill="hold">
+                      <p:stCondLst>
+                        <p:cond delay="indefinite"/>
+                      </p:stCondLst>
+                      <p:childTnLst>
+                        <p:par>
+                          <p:cTn id="4" fill="hold">
+                            <p:stCondLst>
+                              <p:cond delay="0"/>
+                            </p:stCondLst>
+                            <p:childTnLst>
+                              <p:par>
+                                <p:cTn id="5" presetID="22" presetClass="entr" presetSubtype="4" fill="hold" grpId="0" nodeType="clickEffect">
+                                  <p:stCondLst>
+                                    <p:cond delay="0"/>
+                                  </p:stCondLst>
+                                  <p:childTnLst>
+                                    <p:set>
+                                      <p:cBhvr>
+                                        <p:cTn id="6" dur="1" fill="hold">
+                                          <p:stCondLst>
+                                            <p:cond delay="0"/>
+                                          </p:stCondLst>
+                                        </p:cTn>
+                                        <p:tgtEl>
+                                          <p:spTgt spid="21">
+                                            <p:graphicEl>
+                                              <a:dgm id="{AFF60285-135C-40E8-9181-2069D937C815}"/>
+                                            </p:graphicEl>
+                                          </p:spTgt>
+                                        </p:tgtEl>
+                                        <p:attrNameLst>
+                                          <p:attrName>style.visibility</p:attrName>
+                                        </p:attrNameLst>
+                                      </p:cBhvr>
+                                      <p:to>
+                                        <p:strVal val="visible"/>
+                                      </p:to>
+                                    </p:set>
+                                    <p:animEffect transition="in" filter="wipe(down)">
+                                      <p:cBhvr>
+                                        <p:cTn id="7" dur="500"/>
+                                        <p:tgtEl>
+                                          <p:spTgt spid="21">
+                                            <p:graphicEl>
+                                              <a:dgm id="{AFF60285-135C-40E8-9181-2069D937C815}"/>
+                                            </p:graphicEl>
+                                          </p:spTgt>
+                                        </p:tgtEl>
+                                      </p:cBhvr>
+                                    </p:animEffect>
+                                  </p:childTnLst>
+                                </p:cTn>
+                              </p:par>
+                              <p:par>
+                                <p:cTn id="8" presetID="22" presetClass="entr" presetSubtype="4" fill="hold" grpId="0" nodeType="withEffect">
+                                  <p:stCondLst>
+                                    <p:cond delay="0"/>
+                                  </p:stCondLst>
+                                  <p:childTnLst>
+                                    <p:set>
+                                      <p:cBhvr>
+                                        <p:cTn id="9" dur="1" fill="hold">
+                                          <p:stCondLst>
+                                            <p:cond delay="0"/>
+                                          </p:stCondLst>
+                                        </p:cTn>
+                                        <p:tgtEl>
+                                          <p:spTgt spid="21">
+                                            <p:graphicEl>
+                                              <a:dgm id="{F69D806E-0012-4B13-A870-CAED2E1D8B9C}"/>
+                                            </p:graphicEl>
+                                          </p:spTgt>
+                                        </p:tgtEl>
+                                        <p:attrNameLst>
+                                          <p:attrName>style.visibility</p:attrName>
+                                        </p:attrNameLst>
+                                      </p:cBhvr>
+                                      <p:to>
+                                        <p:strVal val="visible"/>
+                                      </p:to>
+                                    </p:set>
+                                    <p:animEffect transition="in" filter="wipe(down)">
+                                      <p:cBhvr>
+                                        <p:cTn id="10" dur="500"/>
+                                        <p:tgtEl>
+                                          <p:spTgt spid="21">
+                                            <p:graphicEl>
+                                              <a:dgm id="{F69D806E-0012-4B13-A870-CAED2E1D8B9C}"/>
+                                            </p:graphicEl>
+                                          </p:spTgt>
+                                        </p:tgtEl>
+                                      </p:cBhvr>
+                                    </p:animEffect>
+                                  </p:childTnLst>
+                                </p:cTn>
+                              </p:par>
+                            </p:childTnLst>
+                          </p:cTn>
+                        </p:par>
+                      </p:childTnLst>
+                    </p:cTn>
+                  </p:par>
+                  <p:par>
+                    <p:cTn id="11" fill="hold">
+                      <p:stCondLst>
+                        <p:cond delay="indefinite"/>
+                      </p:stCondLst>
+                      <p:childTnLst>
+                        <p:par>
+                          <p:cTn id="12" fill="hold">
+                            <p:stCondLst>
+                              <p:cond delay="0"/>
+                            </p:stCondLst>
+                            <p:childTnLst>
+                              <p:par>
+                                <p:cTn id="13" presetID="22" presetClass="entr" presetSubtype="4" fill="hold" grpId="0" nodeType="clickEffect">
+                                  <p:stCondLst>
+                                    <p:cond delay="0"/>
+                                  </p:stCondLst>
+                                  <p:childTnLst>
+                                    <p:set>
+                                      <p:cBhvr>
+                                        <p:cTn id="14" dur="1" fill="hold">
+                                          <p:stCondLst>
+                                            <p:cond delay="0"/>
+                                          </p:stCondLst>
+                                        </p:cTn>
+                                        <p:tgtEl>
+                                          <p:spTgt spid="21">
+                                            <p:graphicEl>
+                                              <a:dgm id="{DF68B131-109F-4D5F-BBDC-14EE102A8D8E}"/>
+                                            </p:graphicEl>
+                                          </p:spTgt>
+                                        </p:tgtEl>
+                                        <p:attrNameLst>
+                                          <p:attrName>style.visibility</p:attrName>
+                                        </p:attrNameLst>
+                                      </p:cBhvr>
+                                      <p:to>
+                                        <p:strVal val="visible"/>
+                                      </p:to>
+                                    </p:set>
+                                    <p:animEffect transition="in" filter="wipe(down)">
+                                      <p:cBhvr>
+                                        <p:cTn id="15" dur="500"/>
+                                        <p:tgtEl>
+                                          <p:spTgt spid="21">
+                                            <p:graphicEl>
+                                              <a:dgm id="{DF68B131-109F-4D5F-BBDC-14EE102A8D8E}"/>
+                                            </p:graphicEl>
+                                          </p:spTgt>
+                                        </p:tgtEl>
+                                      </p:cBhvr>
+                                    </p:animEffect>
+                                  </p:childTnLst>
+                                </p:cTn>
+                              </p:par>
+                            </p:childTnLst>
+                          </p:cTn>
+                        </p:par>
+                      </p:childTnLst>
+                    </p:cTn>
+                  </p:par>
+                  <p:par>
+                    <p:cTn id="16" fill="hold">
+                      <p:stCondLst>
+                        <p:cond delay="indefinite"/>
+                      </p:stCondLst>
+                      <p:childTnLst>
+                        <p:par>
+                          <p:cTn id="17" fill="hold">
+                            <p:stCondLst>
+                              <p:cond delay="0"/>
+                            </p:stCondLst>
+                            <p:childTnLst>
+                              <p:par>
+                                <p:cTn id="18" presetID="22" presetClass="entr" presetSubtype="4" fill="hold" grpId="0" nodeType="clickEffect">
+                                  <p:stCondLst>
+                                    <p:cond delay="0"/>
+                                  </p:stCondLst>
+                                  <p:childTnLst>
+                                    <p:set>
+                                      <p:cBhvr>
+                                        <p:cTn id="19" dur="1" fill="hold">
+                                          <p:stCondLst>
+                                            <p:cond delay="0"/>
+                                          </p:stCondLst>
+                                        </p:cTn>
+                                        <p:tgtEl>
+                                          <p:spTgt spid="21">
+                                            <p:graphicEl>
+                                              <a:dgm id="{256EA126-F696-4D0A-8B0A-14D697455079}"/>
+                                            </p:graphicEl>
+                                          </p:spTgt>
+                                        </p:tgtEl>
+                                        <p:attrNameLst>
+                                          <p:attrName>style.visibility</p:attrName>
+                                        </p:attrNameLst>
+                                      </p:cBhvr>
+                                      <p:to>
+                                        <p:strVal val="visible"/>
+                                      </p:to>
+                                    </p:set>
+                                    <p:animEffect transition="in" filter="wipe(down)">
+                                      <p:cBhvr>
+                                        <p:cTn id="20" dur="500"/>
+                                        <p:tgtEl>
+                                          <p:spTgt spid="21">
+                                            <p:graphicEl>
+                                              <a:dgm id="{256EA126-F696-4D0A-8B0A-14D697455079}"/>
+                                            </p:graphicEl>
+                                          </p:spTgt>
+                                        </p:tgtEl>
+                                      </p:cBhvr>
+                                    </p:animEffect>
+                                  </p:childTnLst>
+                                </p:cTn>
+                              </p:par>
+                              <p:par>
+                                <p:cTn id="21" presetID="22" presetClass="entr" presetSubtype="4" fill="hold" grpId="0" nodeType="withEffect">
+                                  <p:stCondLst>
+                                    <p:cond delay="0"/>
+                                  </p:stCondLst>
+                                  <p:childTnLst>
+                                    <p:set>
+                                      <p:cBhvr>
+                                        <p:cTn id="22" dur="1" fill="hold">
+                                          <p:stCondLst>
+                                            <p:cond delay="0"/>
+                                          </p:stCondLst>
+                                        </p:cTn>
+                                        <p:tgtEl>
+                                          <p:spTgt spid="21">
+                                            <p:graphicEl>
+                                              <a:dgm id="{2448927D-6450-4B9D-A254-BE5F71E78291}"/>
+                                            </p:graphicEl>
+                                          </p:spTgt>
+                                        </p:tgtEl>
+                                        <p:attrNameLst>
+                                          <p:attrName>style.visibility</p:attrName>
+                                        </p:attrNameLst>
+                                      </p:cBhvr>
+                                      <p:to>
+                                        <p:strVal val="visible"/>
+                                      </p:to>
+                                    </p:set>
+                                    <p:animEffect transition="in" filter="wipe(down)">
+                                      <p:cBhvr>
+                                        <p:cTn id="23" dur="500"/>
+                                        <p:tgtEl>
+                                          <p:spTgt spid="21">
+                                            <p:graphicEl>
+                                              <a:dgm id="{2448927D-6450-4B9D-A254-BE5F71E78291}"/>
+                                            </p:graphicEl>
+                                          </p:spTgt>
+                                        </p:tgtEl>
+                                      </p:cBhvr>
+                                    </p:animEffect>
+                                  </p:childTnLst>
+                                </p:cTn>
+                              </p:par>
+                            </p:childTnLst>
+                          </p:cTn>
+                        </p:par>
+                      </p:childTnLst>
+                    </p:cTn>
+                  </p:par>
+                  <p:par>
+                    <p:cTn id="24" fill="hold">
+                      <p:stCondLst>
+                        <p:cond delay="indefinite"/>
+                      </p:stCondLst>
+                      <p:childTnLst>
+                        <p:par>
+                          <p:cTn id="25" fill="hold">
+                            <p:stCondLst>
+                              <p:cond delay="0"/>
+                            </p:stCondLst>
+                            <p:childTnLst>
+                              <p:par>
+                                <p:cTn id="26" presetID="22" presetClass="entr" presetSubtype="4" fill="hold" grpId="0" nodeType="clickEffect">
+                                  <p:stCondLst>
+                                    <p:cond delay="0"/>
+                                  </p:stCondLst>
+                                  <p:childTnLst>
+                                    <p:set>
+                                      <p:cBhvr>
+                                        <p:cTn id="27" dur="1" fill="hold">
+                                          <p:stCondLst>
+                                            <p:cond delay="0"/>
+                                          </p:stCondLst>
+                                        </p:cTn>
+                                        <p:tgtEl>
+                                          <p:spTgt spid="21">
+                                            <p:graphicEl>
+                                              <a:dgm id="{B5B3E72F-AAE0-4724-8EAB-F14255E07E0C}"/>
+                                            </p:graphicEl>
+                                          </p:spTgt>
+                                        </p:tgtEl>
+                                        <p:attrNameLst>
+                                          <p:attrName>style.visibility</p:attrName>
+                                        </p:attrNameLst>
+                                      </p:cBhvr>
+                                      <p:to>
+                                        <p:strVal val="visible"/>
+                                      </p:to>
+                                    </p:set>
+                                    <p:animEffect transition="in" filter="wipe(down)">
+                                      <p:cBhvr>
+                                        <p:cTn id="28" dur="500"/>
+                                        <p:tgtEl>
+                                          <p:spTgt spid="21">
+                                            <p:graphicEl>
+                                              <a:dgm id="{B5B3E72F-AAE0-4724-8EAB-F14255E07E0C}"/>
+                                            </p:graphicEl>
+                                          </p:spTgt>
+                                        </p:tgtEl>
+                                      </p:cBhvr>
+                                    </p:animEffect>
+                                  </p:childTnLst>
+                                </p:cTn>
+                              </p:par>
+                            </p:childTnLst>
+                          </p:cTn>
+                        </p:par>
+                      </p:childTnLst>
+                    </p:cTn>
+                  </p:par>
+                  <p:par>
+                    <p:cTn id="29" fill="hold">
+                      <p:stCondLst>
+                        <p:cond delay="indefinite"/>
+                      </p:stCondLst>
+                      <p:childTnLst>
+                        <p:par>
+                          <p:cTn id="30" fill="hold">
+                            <p:stCondLst>
+                              <p:cond delay="0"/>
+                            </p:stCondLst>
+                            <p:childTnLst>
+                              <p:par>
+                                <p:cTn id="31" presetID="22" presetClass="entr" presetSubtype="4" fill="hold" grpId="0" nodeType="clickEffect">
+                                  <p:stCondLst>
+                                    <p:cond delay="0"/>
+                                  </p:stCondLst>
+                                  <p:childTnLst>
+                                    <p:set>
+                                      <p:cBhvr>
+                                        <p:cTn id="32" dur="1" fill="hold">
+                                          <p:stCondLst>
+                                            <p:cond delay="0"/>
+                                          </p:stCondLst>
+                                        </p:cTn>
+                                        <p:tgtEl>
+                                          <p:spTgt spid="21">
+                                            <p:graphicEl>
+                                              <a:dgm id="{315ED730-1282-4AB3-92BF-505F021CACF3}"/>
+                                            </p:graphicEl>
+                                          </p:spTgt>
+                                        </p:tgtEl>
+                                        <p:attrNameLst>
+                                          <p:attrName>style.visibility</p:attrName>
+                                        </p:attrNameLst>
+                                      </p:cBhvr>
+                                      <p:to>
+                                        <p:strVal val="visible"/>
+                                      </p:to>
+                                    </p:set>
+                                    <p:animEffect transition="in" filter="wipe(down)">
+                                      <p:cBhvr>
+                                        <p:cTn id="33" dur="500"/>
+                                        <p:tgtEl>
+                                          <p:spTgt spid="21">
+                                            <p:graphicEl>
+                                              <a:dgm id="{315ED730-1282-4AB3-92BF-505F021CACF3}"/>
+                                            </p:graphicEl>
+                                          </p:spTgt>
+                                        </p:tgtEl>
+                                      </p:cBhvr>
+                                    </p:animEffect>
+                                  </p:childTnLst>
+                                </p:cTn>
+                              </p:par>
+                              <p:par>
+                                <p:cTn id="34" presetID="22" presetClass="entr" presetSubtype="4" fill="hold" grpId="0" nodeType="withEffect">
+                                  <p:stCondLst>
+                                    <p:cond delay="0"/>
+                                  </p:stCondLst>
+                                  <p:childTnLst>
+                                    <p:set>
+                                      <p:cBhvr>
+                                        <p:cTn id="35" dur="1" fill="hold">
+                                          <p:stCondLst>
+                                            <p:cond delay="0"/>
+                                          </p:stCondLst>
+                                        </p:cTn>
+                                        <p:tgtEl>
+                                          <p:spTgt spid="21">
+                                            <p:graphicEl>
+                                              <a:dgm id="{A8C3D147-6D2C-49E9-9933-512D7985414B}"/>
+                                            </p:graphicEl>
+                                          </p:spTgt>
+                                        </p:tgtEl>
+                                        <p:attrNameLst>
+                                          <p:attrName>style.visibility</p:attrName>
+                                        </p:attrNameLst>
+                                      </p:cBhvr>
+                                      <p:to>
+                                        <p:strVal val="visible"/>
+                                      </p:to>
+                                    </p:set>
+                                    <p:animEffect transition="in" filter="wipe(down)">
+                                      <p:cBhvr>
+                                        <p:cTn id="36" dur="500"/>
+                                        <p:tgtEl>
+                                          <p:spTgt spid="21">
+                                            <p:graphicEl>
+                                              <a:dgm id="{A8C3D147-6D2C-49E9-9933-512D7985414B}"/>
+                                            </p:graphicEl>
+                                          </p:spTgt>
+                                        </p:tgtEl>
+                                      </p:cBhvr>
+                                    </p:animEffect>
+                                  </p:childTnLst>
+                                </p:cTn>
+                              </p:par>
+                            </p:childTnLst>
+                          </p:cTn>
+                        </p:par>
+                      </p:childTnLst>
+                    </p:cTn>
+                  </p:par>
+                  <p:par>
+                    <p:cTn id="37" fill="hold">
+                      <p:stCondLst>
+                        <p:cond delay="indefinite"/>
+                      </p:stCondLst>
+                      <p:childTnLst>
+                        <p:par>
+                          <p:cTn id="38" fill="hold">
+                            <p:stCondLst>
+                              <p:cond delay="0"/>
+                            </p:stCondLst>
+                            <p:childTnLst>
+                              <p:par>
+                                <p:cTn id="39" presetID="22" presetClass="entr" presetSubtype="4" fill="hold" grpId="0" nodeType="clickEffect">
+                                  <p:stCondLst>
+                                    <p:cond delay="0"/>
+                                  </p:stCondLst>
+                                  <p:childTnLst>
+                                    <p:set>
+                                      <p:cBhvr>
+                                        <p:cTn id="40" dur="1" fill="hold">
+                                          <p:stCondLst>
+                                            <p:cond delay="0"/>
+                                          </p:stCondLst>
+                                        </p:cTn>
+                                        <p:tgtEl>
+                                          <p:spTgt spid="21">
+                                            <p:graphicEl>
+                                              <a:dgm id="{D8CCE8C3-8690-462D-91FB-D1C3B677BA16}"/>
+                                            </p:graphicEl>
+                                          </p:spTgt>
+                                        </p:tgtEl>
+                                        <p:attrNameLst>
+                                          <p:attrName>style.visibility</p:attrName>
+                                        </p:attrNameLst>
+                                      </p:cBhvr>
+                                      <p:to>
+                                        <p:strVal val="visible"/>
+                                      </p:to>
+                                    </p:set>
+                                    <p:animEffect transition="in" filter="wipe(down)">
+                                      <p:cBhvr>
+                                        <p:cTn id="41" dur="500"/>
+                                        <p:tgtEl>
+                                          <p:spTgt spid="21">
+                                            <p:graphicEl>
+                                              <a:dgm id="{D8CCE8C3-8690-462D-91FB-D1C3B677BA16}"/>
+                                            </p:graphicEl>
+                                          </p:spTgt>
+                                        </p:tgtEl>
+                                      </p:cBhvr>
+                                    </p:animEffect>
+                                  </p:childTnLst>
+                                </p:cTn>
+                              </p:par>
+                            </p:childTnLst>
+                          </p:cTn>
+                        </p:par>
+                      </p:childTnLst>
+                    </p:cTn>
+                  </p:par>
+                </p:childTnLst>
+              </p:cTn>
+              <p:prevCondLst>
+                <p:cond evt="onPrev" delay="0">
+                  <p:tgtEl>
+                    <p:sldTgt/>
+                  </p:tgtEl>
+                </p:cond>
+              </p:prevCondLst>
+              <p:nextCondLst>
+                <p:cond evt="onNext" delay="0">
+                  <p:tgtEl>
+                    <p:sldTgt/>
+                  </p:tgtEl>
+                </p:cond>
+              </p:nextCondLst>
+            </p:seq>
+          </p:childTnLst>
+        </p:cTn>
+      </p:par>
+    </p:tnLst>
+    <p:bldLst>
+      <p:bldGraphic spid="21" grpId="0">
+        <p:bldSub>
+          <a:bldDgm bld="one"/>
+        </p:bldSub>
+      </p:bldGraphic>
+    </p:bldLst>
+  </p:timing>
 </p:sld>
 </file>
 
@@ -27325,6 +30696,9 @@
   <p:clrMapOvr>
     <a:masterClrMapping/>
   </p:clrMapOvr>
+  <p:transition spd="slow">
+    <p:push dir="u"/>
+  </p:transition>
   <p:timing>
     <p:tnLst>
       <p:par>
@@ -27850,7 +31224,7 @@
             <p:ph idx="1"/>
             <p:extLst>
               <p:ext uri="{D42A27DB-BD31-4B8C-83A1-F6EECF244321}">
-                <p14:modId xmlns:p14="http://schemas.microsoft.com/office/powerpoint/2010/main" val="3260409533"/>
+                <p14:modId xmlns:p14="http://schemas.microsoft.com/office/powerpoint/2010/main" val="2838325247"/>
               </p:ext>
             </p:extLst>
           </p:nvPr>
@@ -27875,6 +31249,1241 @@
   <p:clrMapOvr>
     <a:masterClrMapping/>
   </p:clrMapOvr>
+  <p:transition spd="slow">
+    <p:push dir="u"/>
+  </p:transition>
+  <p:timing>
+    <p:tnLst>
+      <p:par>
+        <p:cTn id="1" dur="indefinite" restart="never" nodeType="tmRoot">
+          <p:childTnLst>
+            <p:seq concurrent="1" nextAc="seek">
+              <p:cTn id="2" dur="indefinite" nodeType="mainSeq">
+                <p:childTnLst>
+                  <p:par>
+                    <p:cTn id="3" fill="hold">
+                      <p:stCondLst>
+                        <p:cond delay="indefinite"/>
+                      </p:stCondLst>
+                      <p:childTnLst>
+                        <p:par>
+                          <p:cTn id="4" fill="hold">
+                            <p:stCondLst>
+                              <p:cond delay="0"/>
+                            </p:stCondLst>
+                            <p:childTnLst>
+                              <p:par>
+                                <p:cTn id="5" presetID="2" presetClass="entr" presetSubtype="4" fill="hold" grpId="0" nodeType="clickEffect">
+                                  <p:stCondLst>
+                                    <p:cond delay="0"/>
+                                  </p:stCondLst>
+                                  <p:childTnLst>
+                                    <p:set>
+                                      <p:cBhvr>
+                                        <p:cTn id="6" dur="1" fill="hold">
+                                          <p:stCondLst>
+                                            <p:cond delay="0"/>
+                                          </p:stCondLst>
+                                        </p:cTn>
+                                        <p:tgtEl>
+                                          <p:spTgt spid="43">
+                                            <p:graphicEl>
+                                              <a:dgm id="{12406314-6A1C-4592-BBE6-9B5EF13B9836}"/>
+                                            </p:graphicEl>
+                                          </p:spTgt>
+                                        </p:tgtEl>
+                                        <p:attrNameLst>
+                                          <p:attrName>style.visibility</p:attrName>
+                                        </p:attrNameLst>
+                                      </p:cBhvr>
+                                      <p:to>
+                                        <p:strVal val="visible"/>
+                                      </p:to>
+                                    </p:set>
+                                    <p:anim calcmode="lin" valueType="num">
+                                      <p:cBhvr additive="base">
+                                        <p:cTn id="7" dur="500" fill="hold"/>
+                                        <p:tgtEl>
+                                          <p:spTgt spid="43">
+                                            <p:graphicEl>
+                                              <a:dgm id="{12406314-6A1C-4592-BBE6-9B5EF13B9836}"/>
+                                            </p:graphicEl>
+                                          </p:spTgt>
+                                        </p:tgtEl>
+                                        <p:attrNameLst>
+                                          <p:attrName>ppt_x</p:attrName>
+                                        </p:attrNameLst>
+                                      </p:cBhvr>
+                                      <p:tavLst>
+                                        <p:tav tm="0">
+                                          <p:val>
+                                            <p:strVal val="#ppt_x"/>
+                                          </p:val>
+                                        </p:tav>
+                                        <p:tav tm="100000">
+                                          <p:val>
+                                            <p:strVal val="#ppt_x"/>
+                                          </p:val>
+                                        </p:tav>
+                                      </p:tavLst>
+                                    </p:anim>
+                                    <p:anim calcmode="lin" valueType="num">
+                                      <p:cBhvr additive="base">
+                                        <p:cTn id="8" dur="500" fill="hold"/>
+                                        <p:tgtEl>
+                                          <p:spTgt spid="43">
+                                            <p:graphicEl>
+                                              <a:dgm id="{12406314-6A1C-4592-BBE6-9B5EF13B9836}"/>
+                                            </p:graphicEl>
+                                          </p:spTgt>
+                                        </p:tgtEl>
+                                        <p:attrNameLst>
+                                          <p:attrName>ppt_y</p:attrName>
+                                        </p:attrNameLst>
+                                      </p:cBhvr>
+                                      <p:tavLst>
+                                        <p:tav tm="0">
+                                          <p:val>
+                                            <p:strVal val="1+#ppt_h/2"/>
+                                          </p:val>
+                                        </p:tav>
+                                        <p:tav tm="100000">
+                                          <p:val>
+                                            <p:strVal val="#ppt_y"/>
+                                          </p:val>
+                                        </p:tav>
+                                      </p:tavLst>
+                                    </p:anim>
+                                  </p:childTnLst>
+                                </p:cTn>
+                              </p:par>
+                              <p:par>
+                                <p:cTn id="9" presetID="2" presetClass="entr" presetSubtype="4" fill="hold" grpId="0" nodeType="withEffect">
+                                  <p:stCondLst>
+                                    <p:cond delay="0"/>
+                                  </p:stCondLst>
+                                  <p:childTnLst>
+                                    <p:set>
+                                      <p:cBhvr>
+                                        <p:cTn id="10" dur="1" fill="hold">
+                                          <p:stCondLst>
+                                            <p:cond delay="0"/>
+                                          </p:stCondLst>
+                                        </p:cTn>
+                                        <p:tgtEl>
+                                          <p:spTgt spid="43">
+                                            <p:graphicEl>
+                                              <a:dgm id="{FB9FD4CB-1F0A-4017-B7D5-D9CA30839E33}"/>
+                                            </p:graphicEl>
+                                          </p:spTgt>
+                                        </p:tgtEl>
+                                        <p:attrNameLst>
+                                          <p:attrName>style.visibility</p:attrName>
+                                        </p:attrNameLst>
+                                      </p:cBhvr>
+                                      <p:to>
+                                        <p:strVal val="visible"/>
+                                      </p:to>
+                                    </p:set>
+                                    <p:anim calcmode="lin" valueType="num">
+                                      <p:cBhvr additive="base">
+                                        <p:cTn id="11" dur="500" fill="hold"/>
+                                        <p:tgtEl>
+                                          <p:spTgt spid="43">
+                                            <p:graphicEl>
+                                              <a:dgm id="{FB9FD4CB-1F0A-4017-B7D5-D9CA30839E33}"/>
+                                            </p:graphicEl>
+                                          </p:spTgt>
+                                        </p:tgtEl>
+                                        <p:attrNameLst>
+                                          <p:attrName>ppt_x</p:attrName>
+                                        </p:attrNameLst>
+                                      </p:cBhvr>
+                                      <p:tavLst>
+                                        <p:tav tm="0">
+                                          <p:val>
+                                            <p:strVal val="#ppt_x"/>
+                                          </p:val>
+                                        </p:tav>
+                                        <p:tav tm="100000">
+                                          <p:val>
+                                            <p:strVal val="#ppt_x"/>
+                                          </p:val>
+                                        </p:tav>
+                                      </p:tavLst>
+                                    </p:anim>
+                                    <p:anim calcmode="lin" valueType="num">
+                                      <p:cBhvr additive="base">
+                                        <p:cTn id="12" dur="500" fill="hold"/>
+                                        <p:tgtEl>
+                                          <p:spTgt spid="43">
+                                            <p:graphicEl>
+                                              <a:dgm id="{FB9FD4CB-1F0A-4017-B7D5-D9CA30839E33}"/>
+                                            </p:graphicEl>
+                                          </p:spTgt>
+                                        </p:tgtEl>
+                                        <p:attrNameLst>
+                                          <p:attrName>ppt_y</p:attrName>
+                                        </p:attrNameLst>
+                                      </p:cBhvr>
+                                      <p:tavLst>
+                                        <p:tav tm="0">
+                                          <p:val>
+                                            <p:strVal val="1+#ppt_h/2"/>
+                                          </p:val>
+                                        </p:tav>
+                                        <p:tav tm="100000">
+                                          <p:val>
+                                            <p:strVal val="#ppt_y"/>
+                                          </p:val>
+                                        </p:tav>
+                                      </p:tavLst>
+                                    </p:anim>
+                                  </p:childTnLst>
+                                </p:cTn>
+                              </p:par>
+                              <p:par>
+                                <p:cTn id="13" presetID="2" presetClass="entr" presetSubtype="4" fill="hold" grpId="0" nodeType="withEffect">
+                                  <p:stCondLst>
+                                    <p:cond delay="0"/>
+                                  </p:stCondLst>
+                                  <p:childTnLst>
+                                    <p:set>
+                                      <p:cBhvr>
+                                        <p:cTn id="14" dur="1" fill="hold">
+                                          <p:stCondLst>
+                                            <p:cond delay="0"/>
+                                          </p:stCondLst>
+                                        </p:cTn>
+                                        <p:tgtEl>
+                                          <p:spTgt spid="43">
+                                            <p:graphicEl>
+                                              <a:dgm id="{3B41C4B9-F2FC-4206-BEA8-4B0F4217567F}"/>
+                                            </p:graphicEl>
+                                          </p:spTgt>
+                                        </p:tgtEl>
+                                        <p:attrNameLst>
+                                          <p:attrName>style.visibility</p:attrName>
+                                        </p:attrNameLst>
+                                      </p:cBhvr>
+                                      <p:to>
+                                        <p:strVal val="visible"/>
+                                      </p:to>
+                                    </p:set>
+                                    <p:anim calcmode="lin" valueType="num">
+                                      <p:cBhvr additive="base">
+                                        <p:cTn id="15" dur="500" fill="hold"/>
+                                        <p:tgtEl>
+                                          <p:spTgt spid="43">
+                                            <p:graphicEl>
+                                              <a:dgm id="{3B41C4B9-F2FC-4206-BEA8-4B0F4217567F}"/>
+                                            </p:graphicEl>
+                                          </p:spTgt>
+                                        </p:tgtEl>
+                                        <p:attrNameLst>
+                                          <p:attrName>ppt_x</p:attrName>
+                                        </p:attrNameLst>
+                                      </p:cBhvr>
+                                      <p:tavLst>
+                                        <p:tav tm="0">
+                                          <p:val>
+                                            <p:strVal val="#ppt_x"/>
+                                          </p:val>
+                                        </p:tav>
+                                        <p:tav tm="100000">
+                                          <p:val>
+                                            <p:strVal val="#ppt_x"/>
+                                          </p:val>
+                                        </p:tav>
+                                      </p:tavLst>
+                                    </p:anim>
+                                    <p:anim calcmode="lin" valueType="num">
+                                      <p:cBhvr additive="base">
+                                        <p:cTn id="16" dur="500" fill="hold"/>
+                                        <p:tgtEl>
+                                          <p:spTgt spid="43">
+                                            <p:graphicEl>
+                                              <a:dgm id="{3B41C4B9-F2FC-4206-BEA8-4B0F4217567F}"/>
+                                            </p:graphicEl>
+                                          </p:spTgt>
+                                        </p:tgtEl>
+                                        <p:attrNameLst>
+                                          <p:attrName>ppt_y</p:attrName>
+                                        </p:attrNameLst>
+                                      </p:cBhvr>
+                                      <p:tavLst>
+                                        <p:tav tm="0">
+                                          <p:val>
+                                            <p:strVal val="1+#ppt_h/2"/>
+                                          </p:val>
+                                        </p:tav>
+                                        <p:tav tm="100000">
+                                          <p:val>
+                                            <p:strVal val="#ppt_y"/>
+                                          </p:val>
+                                        </p:tav>
+                                      </p:tavLst>
+                                    </p:anim>
+                                  </p:childTnLst>
+                                </p:cTn>
+                              </p:par>
+                            </p:childTnLst>
+                          </p:cTn>
+                        </p:par>
+                      </p:childTnLst>
+                    </p:cTn>
+                  </p:par>
+                  <p:par>
+                    <p:cTn id="17" fill="hold">
+                      <p:stCondLst>
+                        <p:cond delay="indefinite"/>
+                      </p:stCondLst>
+                      <p:childTnLst>
+                        <p:par>
+                          <p:cTn id="18" fill="hold">
+                            <p:stCondLst>
+                              <p:cond delay="0"/>
+                            </p:stCondLst>
+                            <p:childTnLst>
+                              <p:par>
+                                <p:cTn id="19" presetID="2" presetClass="entr" presetSubtype="4" fill="hold" grpId="0" nodeType="clickEffect">
+                                  <p:stCondLst>
+                                    <p:cond delay="0"/>
+                                  </p:stCondLst>
+                                  <p:childTnLst>
+                                    <p:set>
+                                      <p:cBhvr>
+                                        <p:cTn id="20" dur="1" fill="hold">
+                                          <p:stCondLst>
+                                            <p:cond delay="0"/>
+                                          </p:stCondLst>
+                                        </p:cTn>
+                                        <p:tgtEl>
+                                          <p:spTgt spid="43">
+                                            <p:graphicEl>
+                                              <a:dgm id="{151DD790-E2C5-4679-AD57-1240164C7A5F}"/>
+                                            </p:graphicEl>
+                                          </p:spTgt>
+                                        </p:tgtEl>
+                                        <p:attrNameLst>
+                                          <p:attrName>style.visibility</p:attrName>
+                                        </p:attrNameLst>
+                                      </p:cBhvr>
+                                      <p:to>
+                                        <p:strVal val="visible"/>
+                                      </p:to>
+                                    </p:set>
+                                    <p:anim calcmode="lin" valueType="num">
+                                      <p:cBhvr additive="base">
+                                        <p:cTn id="21" dur="500" fill="hold"/>
+                                        <p:tgtEl>
+                                          <p:spTgt spid="43">
+                                            <p:graphicEl>
+                                              <a:dgm id="{151DD790-E2C5-4679-AD57-1240164C7A5F}"/>
+                                            </p:graphicEl>
+                                          </p:spTgt>
+                                        </p:tgtEl>
+                                        <p:attrNameLst>
+                                          <p:attrName>ppt_x</p:attrName>
+                                        </p:attrNameLst>
+                                      </p:cBhvr>
+                                      <p:tavLst>
+                                        <p:tav tm="0">
+                                          <p:val>
+                                            <p:strVal val="#ppt_x"/>
+                                          </p:val>
+                                        </p:tav>
+                                        <p:tav tm="100000">
+                                          <p:val>
+                                            <p:strVal val="#ppt_x"/>
+                                          </p:val>
+                                        </p:tav>
+                                      </p:tavLst>
+                                    </p:anim>
+                                    <p:anim calcmode="lin" valueType="num">
+                                      <p:cBhvr additive="base">
+                                        <p:cTn id="22" dur="500" fill="hold"/>
+                                        <p:tgtEl>
+                                          <p:spTgt spid="43">
+                                            <p:graphicEl>
+                                              <a:dgm id="{151DD790-E2C5-4679-AD57-1240164C7A5F}"/>
+                                            </p:graphicEl>
+                                          </p:spTgt>
+                                        </p:tgtEl>
+                                        <p:attrNameLst>
+                                          <p:attrName>ppt_y</p:attrName>
+                                        </p:attrNameLst>
+                                      </p:cBhvr>
+                                      <p:tavLst>
+                                        <p:tav tm="0">
+                                          <p:val>
+                                            <p:strVal val="1+#ppt_h/2"/>
+                                          </p:val>
+                                        </p:tav>
+                                        <p:tav tm="100000">
+                                          <p:val>
+                                            <p:strVal val="#ppt_y"/>
+                                          </p:val>
+                                        </p:tav>
+                                      </p:tavLst>
+                                    </p:anim>
+                                  </p:childTnLst>
+                                </p:cTn>
+                              </p:par>
+                              <p:par>
+                                <p:cTn id="23" presetID="2" presetClass="entr" presetSubtype="4" fill="hold" grpId="0" nodeType="withEffect">
+                                  <p:stCondLst>
+                                    <p:cond delay="0"/>
+                                  </p:stCondLst>
+                                  <p:childTnLst>
+                                    <p:set>
+                                      <p:cBhvr>
+                                        <p:cTn id="24" dur="1" fill="hold">
+                                          <p:stCondLst>
+                                            <p:cond delay="0"/>
+                                          </p:stCondLst>
+                                        </p:cTn>
+                                        <p:tgtEl>
+                                          <p:spTgt spid="43">
+                                            <p:graphicEl>
+                                              <a:dgm id="{3764279C-AC4C-480B-BC84-0536A52F688F}"/>
+                                            </p:graphicEl>
+                                          </p:spTgt>
+                                        </p:tgtEl>
+                                        <p:attrNameLst>
+                                          <p:attrName>style.visibility</p:attrName>
+                                        </p:attrNameLst>
+                                      </p:cBhvr>
+                                      <p:to>
+                                        <p:strVal val="visible"/>
+                                      </p:to>
+                                    </p:set>
+                                    <p:anim calcmode="lin" valueType="num">
+                                      <p:cBhvr additive="base">
+                                        <p:cTn id="25" dur="500" fill="hold"/>
+                                        <p:tgtEl>
+                                          <p:spTgt spid="43">
+                                            <p:graphicEl>
+                                              <a:dgm id="{3764279C-AC4C-480B-BC84-0536A52F688F}"/>
+                                            </p:graphicEl>
+                                          </p:spTgt>
+                                        </p:tgtEl>
+                                        <p:attrNameLst>
+                                          <p:attrName>ppt_x</p:attrName>
+                                        </p:attrNameLst>
+                                      </p:cBhvr>
+                                      <p:tavLst>
+                                        <p:tav tm="0">
+                                          <p:val>
+                                            <p:strVal val="#ppt_x"/>
+                                          </p:val>
+                                        </p:tav>
+                                        <p:tav tm="100000">
+                                          <p:val>
+                                            <p:strVal val="#ppt_x"/>
+                                          </p:val>
+                                        </p:tav>
+                                      </p:tavLst>
+                                    </p:anim>
+                                    <p:anim calcmode="lin" valueType="num">
+                                      <p:cBhvr additive="base">
+                                        <p:cTn id="26" dur="500" fill="hold"/>
+                                        <p:tgtEl>
+                                          <p:spTgt spid="43">
+                                            <p:graphicEl>
+                                              <a:dgm id="{3764279C-AC4C-480B-BC84-0536A52F688F}"/>
+                                            </p:graphicEl>
+                                          </p:spTgt>
+                                        </p:tgtEl>
+                                        <p:attrNameLst>
+                                          <p:attrName>ppt_y</p:attrName>
+                                        </p:attrNameLst>
+                                      </p:cBhvr>
+                                      <p:tavLst>
+                                        <p:tav tm="0">
+                                          <p:val>
+                                            <p:strVal val="1+#ppt_h/2"/>
+                                          </p:val>
+                                        </p:tav>
+                                        <p:tav tm="100000">
+                                          <p:val>
+                                            <p:strVal val="#ppt_y"/>
+                                          </p:val>
+                                        </p:tav>
+                                      </p:tavLst>
+                                    </p:anim>
+                                  </p:childTnLst>
+                                </p:cTn>
+                              </p:par>
+                              <p:par>
+                                <p:cTn id="27" presetID="2" presetClass="entr" presetSubtype="4" fill="hold" grpId="0" nodeType="withEffect">
+                                  <p:stCondLst>
+                                    <p:cond delay="0"/>
+                                  </p:stCondLst>
+                                  <p:childTnLst>
+                                    <p:set>
+                                      <p:cBhvr>
+                                        <p:cTn id="28" dur="1" fill="hold">
+                                          <p:stCondLst>
+                                            <p:cond delay="0"/>
+                                          </p:stCondLst>
+                                        </p:cTn>
+                                        <p:tgtEl>
+                                          <p:spTgt spid="43">
+                                            <p:graphicEl>
+                                              <a:dgm id="{86E17443-258F-45B9-9900-76F7AC7E4000}"/>
+                                            </p:graphicEl>
+                                          </p:spTgt>
+                                        </p:tgtEl>
+                                        <p:attrNameLst>
+                                          <p:attrName>style.visibility</p:attrName>
+                                        </p:attrNameLst>
+                                      </p:cBhvr>
+                                      <p:to>
+                                        <p:strVal val="visible"/>
+                                      </p:to>
+                                    </p:set>
+                                    <p:anim calcmode="lin" valueType="num">
+                                      <p:cBhvr additive="base">
+                                        <p:cTn id="29" dur="500" fill="hold"/>
+                                        <p:tgtEl>
+                                          <p:spTgt spid="43">
+                                            <p:graphicEl>
+                                              <a:dgm id="{86E17443-258F-45B9-9900-76F7AC7E4000}"/>
+                                            </p:graphicEl>
+                                          </p:spTgt>
+                                        </p:tgtEl>
+                                        <p:attrNameLst>
+                                          <p:attrName>ppt_x</p:attrName>
+                                        </p:attrNameLst>
+                                      </p:cBhvr>
+                                      <p:tavLst>
+                                        <p:tav tm="0">
+                                          <p:val>
+                                            <p:strVal val="#ppt_x"/>
+                                          </p:val>
+                                        </p:tav>
+                                        <p:tav tm="100000">
+                                          <p:val>
+                                            <p:strVal val="#ppt_x"/>
+                                          </p:val>
+                                        </p:tav>
+                                      </p:tavLst>
+                                    </p:anim>
+                                    <p:anim calcmode="lin" valueType="num">
+                                      <p:cBhvr additive="base">
+                                        <p:cTn id="30" dur="500" fill="hold"/>
+                                        <p:tgtEl>
+                                          <p:spTgt spid="43">
+                                            <p:graphicEl>
+                                              <a:dgm id="{86E17443-258F-45B9-9900-76F7AC7E4000}"/>
+                                            </p:graphicEl>
+                                          </p:spTgt>
+                                        </p:tgtEl>
+                                        <p:attrNameLst>
+                                          <p:attrName>ppt_y</p:attrName>
+                                        </p:attrNameLst>
+                                      </p:cBhvr>
+                                      <p:tavLst>
+                                        <p:tav tm="0">
+                                          <p:val>
+                                            <p:strVal val="1+#ppt_h/2"/>
+                                          </p:val>
+                                        </p:tav>
+                                        <p:tav tm="100000">
+                                          <p:val>
+                                            <p:strVal val="#ppt_y"/>
+                                          </p:val>
+                                        </p:tav>
+                                      </p:tavLst>
+                                    </p:anim>
+                                  </p:childTnLst>
+                                </p:cTn>
+                              </p:par>
+                            </p:childTnLst>
+                          </p:cTn>
+                        </p:par>
+                      </p:childTnLst>
+                    </p:cTn>
+                  </p:par>
+                  <p:par>
+                    <p:cTn id="31" fill="hold">
+                      <p:stCondLst>
+                        <p:cond delay="indefinite"/>
+                      </p:stCondLst>
+                      <p:childTnLst>
+                        <p:par>
+                          <p:cTn id="32" fill="hold">
+                            <p:stCondLst>
+                              <p:cond delay="0"/>
+                            </p:stCondLst>
+                            <p:childTnLst>
+                              <p:par>
+                                <p:cTn id="33" presetID="2" presetClass="entr" presetSubtype="4" fill="hold" grpId="0" nodeType="clickEffect">
+                                  <p:stCondLst>
+                                    <p:cond delay="0"/>
+                                  </p:stCondLst>
+                                  <p:childTnLst>
+                                    <p:set>
+                                      <p:cBhvr>
+                                        <p:cTn id="34" dur="1" fill="hold">
+                                          <p:stCondLst>
+                                            <p:cond delay="0"/>
+                                          </p:stCondLst>
+                                        </p:cTn>
+                                        <p:tgtEl>
+                                          <p:spTgt spid="43">
+                                            <p:graphicEl>
+                                              <a:dgm id="{3D6E5037-21E4-4930-8F4F-5184C03CC160}"/>
+                                            </p:graphicEl>
+                                          </p:spTgt>
+                                        </p:tgtEl>
+                                        <p:attrNameLst>
+                                          <p:attrName>style.visibility</p:attrName>
+                                        </p:attrNameLst>
+                                      </p:cBhvr>
+                                      <p:to>
+                                        <p:strVal val="visible"/>
+                                      </p:to>
+                                    </p:set>
+                                    <p:anim calcmode="lin" valueType="num">
+                                      <p:cBhvr additive="base">
+                                        <p:cTn id="35" dur="500" fill="hold"/>
+                                        <p:tgtEl>
+                                          <p:spTgt spid="43">
+                                            <p:graphicEl>
+                                              <a:dgm id="{3D6E5037-21E4-4930-8F4F-5184C03CC160}"/>
+                                            </p:graphicEl>
+                                          </p:spTgt>
+                                        </p:tgtEl>
+                                        <p:attrNameLst>
+                                          <p:attrName>ppt_x</p:attrName>
+                                        </p:attrNameLst>
+                                      </p:cBhvr>
+                                      <p:tavLst>
+                                        <p:tav tm="0">
+                                          <p:val>
+                                            <p:strVal val="#ppt_x"/>
+                                          </p:val>
+                                        </p:tav>
+                                        <p:tav tm="100000">
+                                          <p:val>
+                                            <p:strVal val="#ppt_x"/>
+                                          </p:val>
+                                        </p:tav>
+                                      </p:tavLst>
+                                    </p:anim>
+                                    <p:anim calcmode="lin" valueType="num">
+                                      <p:cBhvr additive="base">
+                                        <p:cTn id="36" dur="500" fill="hold"/>
+                                        <p:tgtEl>
+                                          <p:spTgt spid="43">
+                                            <p:graphicEl>
+                                              <a:dgm id="{3D6E5037-21E4-4930-8F4F-5184C03CC160}"/>
+                                            </p:graphicEl>
+                                          </p:spTgt>
+                                        </p:tgtEl>
+                                        <p:attrNameLst>
+                                          <p:attrName>ppt_y</p:attrName>
+                                        </p:attrNameLst>
+                                      </p:cBhvr>
+                                      <p:tavLst>
+                                        <p:tav tm="0">
+                                          <p:val>
+                                            <p:strVal val="1+#ppt_h/2"/>
+                                          </p:val>
+                                        </p:tav>
+                                        <p:tav tm="100000">
+                                          <p:val>
+                                            <p:strVal val="#ppt_y"/>
+                                          </p:val>
+                                        </p:tav>
+                                      </p:tavLst>
+                                    </p:anim>
+                                  </p:childTnLst>
+                                </p:cTn>
+                              </p:par>
+                              <p:par>
+                                <p:cTn id="37" presetID="2" presetClass="entr" presetSubtype="4" fill="hold" grpId="0" nodeType="withEffect">
+                                  <p:stCondLst>
+                                    <p:cond delay="0"/>
+                                  </p:stCondLst>
+                                  <p:childTnLst>
+                                    <p:set>
+                                      <p:cBhvr>
+                                        <p:cTn id="38" dur="1" fill="hold">
+                                          <p:stCondLst>
+                                            <p:cond delay="0"/>
+                                          </p:stCondLst>
+                                        </p:cTn>
+                                        <p:tgtEl>
+                                          <p:spTgt spid="43">
+                                            <p:graphicEl>
+                                              <a:dgm id="{D0E34142-7CF5-4082-ADD1-CA6AAA75BA0F}"/>
+                                            </p:graphicEl>
+                                          </p:spTgt>
+                                        </p:tgtEl>
+                                        <p:attrNameLst>
+                                          <p:attrName>style.visibility</p:attrName>
+                                        </p:attrNameLst>
+                                      </p:cBhvr>
+                                      <p:to>
+                                        <p:strVal val="visible"/>
+                                      </p:to>
+                                    </p:set>
+                                    <p:anim calcmode="lin" valueType="num">
+                                      <p:cBhvr additive="base">
+                                        <p:cTn id="39" dur="500" fill="hold"/>
+                                        <p:tgtEl>
+                                          <p:spTgt spid="43">
+                                            <p:graphicEl>
+                                              <a:dgm id="{D0E34142-7CF5-4082-ADD1-CA6AAA75BA0F}"/>
+                                            </p:graphicEl>
+                                          </p:spTgt>
+                                        </p:tgtEl>
+                                        <p:attrNameLst>
+                                          <p:attrName>ppt_x</p:attrName>
+                                        </p:attrNameLst>
+                                      </p:cBhvr>
+                                      <p:tavLst>
+                                        <p:tav tm="0">
+                                          <p:val>
+                                            <p:strVal val="#ppt_x"/>
+                                          </p:val>
+                                        </p:tav>
+                                        <p:tav tm="100000">
+                                          <p:val>
+                                            <p:strVal val="#ppt_x"/>
+                                          </p:val>
+                                        </p:tav>
+                                      </p:tavLst>
+                                    </p:anim>
+                                    <p:anim calcmode="lin" valueType="num">
+                                      <p:cBhvr additive="base">
+                                        <p:cTn id="40" dur="500" fill="hold"/>
+                                        <p:tgtEl>
+                                          <p:spTgt spid="43">
+                                            <p:graphicEl>
+                                              <a:dgm id="{D0E34142-7CF5-4082-ADD1-CA6AAA75BA0F}"/>
+                                            </p:graphicEl>
+                                          </p:spTgt>
+                                        </p:tgtEl>
+                                        <p:attrNameLst>
+                                          <p:attrName>ppt_y</p:attrName>
+                                        </p:attrNameLst>
+                                      </p:cBhvr>
+                                      <p:tavLst>
+                                        <p:tav tm="0">
+                                          <p:val>
+                                            <p:strVal val="1+#ppt_h/2"/>
+                                          </p:val>
+                                        </p:tav>
+                                        <p:tav tm="100000">
+                                          <p:val>
+                                            <p:strVal val="#ppt_y"/>
+                                          </p:val>
+                                        </p:tav>
+                                      </p:tavLst>
+                                    </p:anim>
+                                  </p:childTnLst>
+                                </p:cTn>
+                              </p:par>
+                              <p:par>
+                                <p:cTn id="41" presetID="2" presetClass="entr" presetSubtype="4" fill="hold" grpId="0" nodeType="withEffect">
+                                  <p:stCondLst>
+                                    <p:cond delay="0"/>
+                                  </p:stCondLst>
+                                  <p:childTnLst>
+                                    <p:set>
+                                      <p:cBhvr>
+                                        <p:cTn id="42" dur="1" fill="hold">
+                                          <p:stCondLst>
+                                            <p:cond delay="0"/>
+                                          </p:stCondLst>
+                                        </p:cTn>
+                                        <p:tgtEl>
+                                          <p:spTgt spid="43">
+                                            <p:graphicEl>
+                                              <a:dgm id="{A0330144-F7A4-42AC-85C6-65945FC6705B}"/>
+                                            </p:graphicEl>
+                                          </p:spTgt>
+                                        </p:tgtEl>
+                                        <p:attrNameLst>
+                                          <p:attrName>style.visibility</p:attrName>
+                                        </p:attrNameLst>
+                                      </p:cBhvr>
+                                      <p:to>
+                                        <p:strVal val="visible"/>
+                                      </p:to>
+                                    </p:set>
+                                    <p:anim calcmode="lin" valueType="num">
+                                      <p:cBhvr additive="base">
+                                        <p:cTn id="43" dur="500" fill="hold"/>
+                                        <p:tgtEl>
+                                          <p:spTgt spid="43">
+                                            <p:graphicEl>
+                                              <a:dgm id="{A0330144-F7A4-42AC-85C6-65945FC6705B}"/>
+                                            </p:graphicEl>
+                                          </p:spTgt>
+                                        </p:tgtEl>
+                                        <p:attrNameLst>
+                                          <p:attrName>ppt_x</p:attrName>
+                                        </p:attrNameLst>
+                                      </p:cBhvr>
+                                      <p:tavLst>
+                                        <p:tav tm="0">
+                                          <p:val>
+                                            <p:strVal val="#ppt_x"/>
+                                          </p:val>
+                                        </p:tav>
+                                        <p:tav tm="100000">
+                                          <p:val>
+                                            <p:strVal val="#ppt_x"/>
+                                          </p:val>
+                                        </p:tav>
+                                      </p:tavLst>
+                                    </p:anim>
+                                    <p:anim calcmode="lin" valueType="num">
+                                      <p:cBhvr additive="base">
+                                        <p:cTn id="44" dur="500" fill="hold"/>
+                                        <p:tgtEl>
+                                          <p:spTgt spid="43">
+                                            <p:graphicEl>
+                                              <a:dgm id="{A0330144-F7A4-42AC-85C6-65945FC6705B}"/>
+                                            </p:graphicEl>
+                                          </p:spTgt>
+                                        </p:tgtEl>
+                                        <p:attrNameLst>
+                                          <p:attrName>ppt_y</p:attrName>
+                                        </p:attrNameLst>
+                                      </p:cBhvr>
+                                      <p:tavLst>
+                                        <p:tav tm="0">
+                                          <p:val>
+                                            <p:strVal val="1+#ppt_h/2"/>
+                                          </p:val>
+                                        </p:tav>
+                                        <p:tav tm="100000">
+                                          <p:val>
+                                            <p:strVal val="#ppt_y"/>
+                                          </p:val>
+                                        </p:tav>
+                                      </p:tavLst>
+                                    </p:anim>
+                                  </p:childTnLst>
+                                </p:cTn>
+                              </p:par>
+                            </p:childTnLst>
+                          </p:cTn>
+                        </p:par>
+                      </p:childTnLst>
+                    </p:cTn>
+                  </p:par>
+                  <p:par>
+                    <p:cTn id="45" fill="hold">
+                      <p:stCondLst>
+                        <p:cond delay="indefinite"/>
+                      </p:stCondLst>
+                      <p:childTnLst>
+                        <p:par>
+                          <p:cTn id="46" fill="hold">
+                            <p:stCondLst>
+                              <p:cond delay="0"/>
+                            </p:stCondLst>
+                            <p:childTnLst>
+                              <p:par>
+                                <p:cTn id="47" presetID="2" presetClass="entr" presetSubtype="4" fill="hold" grpId="0" nodeType="clickEffect">
+                                  <p:stCondLst>
+                                    <p:cond delay="0"/>
+                                  </p:stCondLst>
+                                  <p:childTnLst>
+                                    <p:set>
+                                      <p:cBhvr>
+                                        <p:cTn id="48" dur="1" fill="hold">
+                                          <p:stCondLst>
+                                            <p:cond delay="0"/>
+                                          </p:stCondLst>
+                                        </p:cTn>
+                                        <p:tgtEl>
+                                          <p:spTgt spid="43">
+                                            <p:graphicEl>
+                                              <a:dgm id="{F88D0E89-F727-4F8D-A744-896D43D9C784}"/>
+                                            </p:graphicEl>
+                                          </p:spTgt>
+                                        </p:tgtEl>
+                                        <p:attrNameLst>
+                                          <p:attrName>style.visibility</p:attrName>
+                                        </p:attrNameLst>
+                                      </p:cBhvr>
+                                      <p:to>
+                                        <p:strVal val="visible"/>
+                                      </p:to>
+                                    </p:set>
+                                    <p:anim calcmode="lin" valueType="num">
+                                      <p:cBhvr additive="base">
+                                        <p:cTn id="49" dur="500" fill="hold"/>
+                                        <p:tgtEl>
+                                          <p:spTgt spid="43">
+                                            <p:graphicEl>
+                                              <a:dgm id="{F88D0E89-F727-4F8D-A744-896D43D9C784}"/>
+                                            </p:graphicEl>
+                                          </p:spTgt>
+                                        </p:tgtEl>
+                                        <p:attrNameLst>
+                                          <p:attrName>ppt_x</p:attrName>
+                                        </p:attrNameLst>
+                                      </p:cBhvr>
+                                      <p:tavLst>
+                                        <p:tav tm="0">
+                                          <p:val>
+                                            <p:strVal val="#ppt_x"/>
+                                          </p:val>
+                                        </p:tav>
+                                        <p:tav tm="100000">
+                                          <p:val>
+                                            <p:strVal val="#ppt_x"/>
+                                          </p:val>
+                                        </p:tav>
+                                      </p:tavLst>
+                                    </p:anim>
+                                    <p:anim calcmode="lin" valueType="num">
+                                      <p:cBhvr additive="base">
+                                        <p:cTn id="50" dur="500" fill="hold"/>
+                                        <p:tgtEl>
+                                          <p:spTgt spid="43">
+                                            <p:graphicEl>
+                                              <a:dgm id="{F88D0E89-F727-4F8D-A744-896D43D9C784}"/>
+                                            </p:graphicEl>
+                                          </p:spTgt>
+                                        </p:tgtEl>
+                                        <p:attrNameLst>
+                                          <p:attrName>ppt_y</p:attrName>
+                                        </p:attrNameLst>
+                                      </p:cBhvr>
+                                      <p:tavLst>
+                                        <p:tav tm="0">
+                                          <p:val>
+                                            <p:strVal val="1+#ppt_h/2"/>
+                                          </p:val>
+                                        </p:tav>
+                                        <p:tav tm="100000">
+                                          <p:val>
+                                            <p:strVal val="#ppt_y"/>
+                                          </p:val>
+                                        </p:tav>
+                                      </p:tavLst>
+                                    </p:anim>
+                                  </p:childTnLst>
+                                </p:cTn>
+                              </p:par>
+                              <p:par>
+                                <p:cTn id="51" presetID="2" presetClass="entr" presetSubtype="4" fill="hold" grpId="0" nodeType="withEffect">
+                                  <p:stCondLst>
+                                    <p:cond delay="0"/>
+                                  </p:stCondLst>
+                                  <p:childTnLst>
+                                    <p:set>
+                                      <p:cBhvr>
+                                        <p:cTn id="52" dur="1" fill="hold">
+                                          <p:stCondLst>
+                                            <p:cond delay="0"/>
+                                          </p:stCondLst>
+                                        </p:cTn>
+                                        <p:tgtEl>
+                                          <p:spTgt spid="43">
+                                            <p:graphicEl>
+                                              <a:dgm id="{AF2AFC48-64B0-4723-8344-95255A30FE6C}"/>
+                                            </p:graphicEl>
+                                          </p:spTgt>
+                                        </p:tgtEl>
+                                        <p:attrNameLst>
+                                          <p:attrName>style.visibility</p:attrName>
+                                        </p:attrNameLst>
+                                      </p:cBhvr>
+                                      <p:to>
+                                        <p:strVal val="visible"/>
+                                      </p:to>
+                                    </p:set>
+                                    <p:anim calcmode="lin" valueType="num">
+                                      <p:cBhvr additive="base">
+                                        <p:cTn id="53" dur="500" fill="hold"/>
+                                        <p:tgtEl>
+                                          <p:spTgt spid="43">
+                                            <p:graphicEl>
+                                              <a:dgm id="{AF2AFC48-64B0-4723-8344-95255A30FE6C}"/>
+                                            </p:graphicEl>
+                                          </p:spTgt>
+                                        </p:tgtEl>
+                                        <p:attrNameLst>
+                                          <p:attrName>ppt_x</p:attrName>
+                                        </p:attrNameLst>
+                                      </p:cBhvr>
+                                      <p:tavLst>
+                                        <p:tav tm="0">
+                                          <p:val>
+                                            <p:strVal val="#ppt_x"/>
+                                          </p:val>
+                                        </p:tav>
+                                        <p:tav tm="100000">
+                                          <p:val>
+                                            <p:strVal val="#ppt_x"/>
+                                          </p:val>
+                                        </p:tav>
+                                      </p:tavLst>
+                                    </p:anim>
+                                    <p:anim calcmode="lin" valueType="num">
+                                      <p:cBhvr additive="base">
+                                        <p:cTn id="54" dur="500" fill="hold"/>
+                                        <p:tgtEl>
+                                          <p:spTgt spid="43">
+                                            <p:graphicEl>
+                                              <a:dgm id="{AF2AFC48-64B0-4723-8344-95255A30FE6C}"/>
+                                            </p:graphicEl>
+                                          </p:spTgt>
+                                        </p:tgtEl>
+                                        <p:attrNameLst>
+                                          <p:attrName>ppt_y</p:attrName>
+                                        </p:attrNameLst>
+                                      </p:cBhvr>
+                                      <p:tavLst>
+                                        <p:tav tm="0">
+                                          <p:val>
+                                            <p:strVal val="1+#ppt_h/2"/>
+                                          </p:val>
+                                        </p:tav>
+                                        <p:tav tm="100000">
+                                          <p:val>
+                                            <p:strVal val="#ppt_y"/>
+                                          </p:val>
+                                        </p:tav>
+                                      </p:tavLst>
+                                    </p:anim>
+                                  </p:childTnLst>
+                                </p:cTn>
+                              </p:par>
+                              <p:par>
+                                <p:cTn id="55" presetID="2" presetClass="entr" presetSubtype="4" fill="hold" grpId="0" nodeType="withEffect">
+                                  <p:stCondLst>
+                                    <p:cond delay="0"/>
+                                  </p:stCondLst>
+                                  <p:childTnLst>
+                                    <p:set>
+                                      <p:cBhvr>
+                                        <p:cTn id="56" dur="1" fill="hold">
+                                          <p:stCondLst>
+                                            <p:cond delay="0"/>
+                                          </p:stCondLst>
+                                        </p:cTn>
+                                        <p:tgtEl>
+                                          <p:spTgt spid="43">
+                                            <p:graphicEl>
+                                              <a:dgm id="{D5BDD981-48AD-4005-81A9-AA85B86104A5}"/>
+                                            </p:graphicEl>
+                                          </p:spTgt>
+                                        </p:tgtEl>
+                                        <p:attrNameLst>
+                                          <p:attrName>style.visibility</p:attrName>
+                                        </p:attrNameLst>
+                                      </p:cBhvr>
+                                      <p:to>
+                                        <p:strVal val="visible"/>
+                                      </p:to>
+                                    </p:set>
+                                    <p:anim calcmode="lin" valueType="num">
+                                      <p:cBhvr additive="base">
+                                        <p:cTn id="57" dur="500" fill="hold"/>
+                                        <p:tgtEl>
+                                          <p:spTgt spid="43">
+                                            <p:graphicEl>
+                                              <a:dgm id="{D5BDD981-48AD-4005-81A9-AA85B86104A5}"/>
+                                            </p:graphicEl>
+                                          </p:spTgt>
+                                        </p:tgtEl>
+                                        <p:attrNameLst>
+                                          <p:attrName>ppt_x</p:attrName>
+                                        </p:attrNameLst>
+                                      </p:cBhvr>
+                                      <p:tavLst>
+                                        <p:tav tm="0">
+                                          <p:val>
+                                            <p:strVal val="#ppt_x"/>
+                                          </p:val>
+                                        </p:tav>
+                                        <p:tav tm="100000">
+                                          <p:val>
+                                            <p:strVal val="#ppt_x"/>
+                                          </p:val>
+                                        </p:tav>
+                                      </p:tavLst>
+                                    </p:anim>
+                                    <p:anim calcmode="lin" valueType="num">
+                                      <p:cBhvr additive="base">
+                                        <p:cTn id="58" dur="500" fill="hold"/>
+                                        <p:tgtEl>
+                                          <p:spTgt spid="43">
+                                            <p:graphicEl>
+                                              <a:dgm id="{D5BDD981-48AD-4005-81A9-AA85B86104A5}"/>
+                                            </p:graphicEl>
+                                          </p:spTgt>
+                                        </p:tgtEl>
+                                        <p:attrNameLst>
+                                          <p:attrName>ppt_y</p:attrName>
+                                        </p:attrNameLst>
+                                      </p:cBhvr>
+                                      <p:tavLst>
+                                        <p:tav tm="0">
+                                          <p:val>
+                                            <p:strVal val="1+#ppt_h/2"/>
+                                          </p:val>
+                                        </p:tav>
+                                        <p:tav tm="100000">
+                                          <p:val>
+                                            <p:strVal val="#ppt_y"/>
+                                          </p:val>
+                                        </p:tav>
+                                      </p:tavLst>
+                                    </p:anim>
+                                  </p:childTnLst>
+                                </p:cTn>
+                              </p:par>
+                            </p:childTnLst>
+                          </p:cTn>
+                        </p:par>
+                      </p:childTnLst>
+                    </p:cTn>
+                  </p:par>
+                  <p:par>
+                    <p:cTn id="59" fill="hold">
+                      <p:stCondLst>
+                        <p:cond delay="indefinite"/>
+                      </p:stCondLst>
+                      <p:childTnLst>
+                        <p:par>
+                          <p:cTn id="60" fill="hold">
+                            <p:stCondLst>
+                              <p:cond delay="0"/>
+                            </p:stCondLst>
+                            <p:childTnLst>
+                              <p:par>
+                                <p:cTn id="61" presetID="2" presetClass="entr" presetSubtype="4" fill="hold" grpId="0" nodeType="clickEffect">
+                                  <p:stCondLst>
+                                    <p:cond delay="0"/>
+                                  </p:stCondLst>
+                                  <p:childTnLst>
+                                    <p:set>
+                                      <p:cBhvr>
+                                        <p:cTn id="62" dur="1" fill="hold">
+                                          <p:stCondLst>
+                                            <p:cond delay="0"/>
+                                          </p:stCondLst>
+                                        </p:cTn>
+                                        <p:tgtEl>
+                                          <p:spTgt spid="43">
+                                            <p:graphicEl>
+                                              <a:dgm id="{658125E1-134A-443A-8DDD-02C955062748}"/>
+                                            </p:graphicEl>
+                                          </p:spTgt>
+                                        </p:tgtEl>
+                                        <p:attrNameLst>
+                                          <p:attrName>style.visibility</p:attrName>
+                                        </p:attrNameLst>
+                                      </p:cBhvr>
+                                      <p:to>
+                                        <p:strVal val="visible"/>
+                                      </p:to>
+                                    </p:set>
+                                    <p:anim calcmode="lin" valueType="num">
+                                      <p:cBhvr additive="base">
+                                        <p:cTn id="63" dur="500" fill="hold"/>
+                                        <p:tgtEl>
+                                          <p:spTgt spid="43">
+                                            <p:graphicEl>
+                                              <a:dgm id="{658125E1-134A-443A-8DDD-02C955062748}"/>
+                                            </p:graphicEl>
+                                          </p:spTgt>
+                                        </p:tgtEl>
+                                        <p:attrNameLst>
+                                          <p:attrName>ppt_x</p:attrName>
+                                        </p:attrNameLst>
+                                      </p:cBhvr>
+                                      <p:tavLst>
+                                        <p:tav tm="0">
+                                          <p:val>
+                                            <p:strVal val="#ppt_x"/>
+                                          </p:val>
+                                        </p:tav>
+                                        <p:tav tm="100000">
+                                          <p:val>
+                                            <p:strVal val="#ppt_x"/>
+                                          </p:val>
+                                        </p:tav>
+                                      </p:tavLst>
+                                    </p:anim>
+                                    <p:anim calcmode="lin" valueType="num">
+                                      <p:cBhvr additive="base">
+                                        <p:cTn id="64" dur="500" fill="hold"/>
+                                        <p:tgtEl>
+                                          <p:spTgt spid="43">
+                                            <p:graphicEl>
+                                              <a:dgm id="{658125E1-134A-443A-8DDD-02C955062748}"/>
+                                            </p:graphicEl>
+                                          </p:spTgt>
+                                        </p:tgtEl>
+                                        <p:attrNameLst>
+                                          <p:attrName>ppt_y</p:attrName>
+                                        </p:attrNameLst>
+                                      </p:cBhvr>
+                                      <p:tavLst>
+                                        <p:tav tm="0">
+                                          <p:val>
+                                            <p:strVal val="1+#ppt_h/2"/>
+                                          </p:val>
+                                        </p:tav>
+                                        <p:tav tm="100000">
+                                          <p:val>
+                                            <p:strVal val="#ppt_y"/>
+                                          </p:val>
+                                        </p:tav>
+                                      </p:tavLst>
+                                    </p:anim>
+                                  </p:childTnLst>
+                                </p:cTn>
+                              </p:par>
+                            </p:childTnLst>
+                          </p:cTn>
+                        </p:par>
+                      </p:childTnLst>
+                    </p:cTn>
+                  </p:par>
+                </p:childTnLst>
+              </p:cTn>
+              <p:prevCondLst>
+                <p:cond evt="onPrev" delay="0">
+                  <p:tgtEl>
+                    <p:sldTgt/>
+                  </p:tgtEl>
+                </p:cond>
+              </p:prevCondLst>
+              <p:nextCondLst>
+                <p:cond evt="onNext" delay="0">
+                  <p:tgtEl>
+                    <p:sldTgt/>
+                  </p:tgtEl>
+                </p:cond>
+              </p:nextCondLst>
+            </p:seq>
+          </p:childTnLst>
+        </p:cTn>
+      </p:par>
+    </p:tnLst>
+    <p:bldLst>
+      <p:bldGraphic spid="43" grpId="0">
+        <p:bldSub>
+          <a:bldDgm bld="one"/>
+        </p:bldSub>
+      </p:bldGraphic>
+    </p:bldLst>
+  </p:timing>
 </p:sld>
 </file>
 
